--- a/使用者SOP_投影版.pptx
+++ b/使用者SOP_投影版.pptx
@@ -23,7 +23,6 @@
     <p:sldId id="268" r:id="rId16"/>
     <p:sldId id="269" r:id="rId17"/>
     <p:sldId id="270" r:id="rId18"/>
-    <p:sldId id="271" r:id="rId19"/>
   </p:sldIdLst>
   <p:sldSz cx="12188825" cy="6858000"/>
   <p:notesSz cx="6858000" cy="12188825"/>
@@ -353,7 +352,7 @@
             <a:pPr indent="0" algn="r">
               <a:buNone/>
             </a:pPr>
-            <a:fld id="{E1A63957-3312-435C-8678-D4E56E7C6269}" type="slidenum">
+            <a:fld id="{FDE01776-F343-40CE-91D1-A9CC7C79493F}" type="slidenum">
               <a:rPr b="0" lang="en-US" sz="1400" spc="-1" strike="noStrike">
                 <a:solidFill>
                   <a:srgbClr val="000000"/>
@@ -396,7 +395,7 @@
       </p:grpSpPr>
       <p:sp>
         <p:nvSpPr>
-          <p:cNvPr id="259" name="PlaceHolder 1"/>
+          <p:cNvPr id="205" name="PlaceHolder 1"/>
           <p:cNvSpPr>
             <a:spLocks noGrp="1"/>
           </p:cNvSpPr>
@@ -419,7 +418,7 @@
       </p:sp>
       <p:sp>
         <p:nvSpPr>
-          <p:cNvPr id="260" name="PlaceHolder 2"/>
+          <p:cNvPr id="206" name="PlaceHolder 2"/>
           <p:cNvSpPr>
             <a:spLocks noGrp="1"/>
           </p:cNvSpPr>
@@ -459,7 +458,7 @@
       </p:sp>
       <p:sp>
         <p:nvSpPr>
-          <p:cNvPr id="261" name="PlaceHolder 3"/>
+          <p:cNvPr id="207" name="PlaceHolder 3"/>
           <p:cNvSpPr>
             <a:spLocks noGrp="1"/>
           </p:cNvSpPr>
@@ -506,7 +505,7 @@
               </a:lnSpc>
               <a:buNone/>
             </a:pPr>
-            <a:fld id="{75475F61-DDA7-4D20-95D7-1FC6D48D2E7C}" type="slidenum">
+            <a:fld id="{C86B26A2-FE75-4769-B831-6417CCED379F}" type="slidenum">
               <a:rPr b="0" lang="en-US" sz="1200" spc="-1" strike="noStrike">
                 <a:solidFill>
                   <a:schemeClr val="dk1"/>
@@ -549,7 +548,7 @@
       </p:grpSpPr>
       <p:sp>
         <p:nvSpPr>
-          <p:cNvPr id="286" name="PlaceHolder 1"/>
+          <p:cNvPr id="232" name="PlaceHolder 1"/>
           <p:cNvSpPr>
             <a:spLocks noGrp="1"/>
           </p:cNvSpPr>
@@ -572,7 +571,7 @@
       </p:sp>
       <p:sp>
         <p:nvSpPr>
-          <p:cNvPr id="287" name="PlaceHolder 2"/>
+          <p:cNvPr id="233" name="PlaceHolder 2"/>
           <p:cNvSpPr>
             <a:spLocks noGrp="1"/>
           </p:cNvSpPr>
@@ -612,7 +611,7 @@
       </p:sp>
       <p:sp>
         <p:nvSpPr>
-          <p:cNvPr id="288" name="PlaceHolder 3"/>
+          <p:cNvPr id="234" name="PlaceHolder 3"/>
           <p:cNvSpPr>
             <a:spLocks noGrp="1"/>
           </p:cNvSpPr>
@@ -659,7 +658,7 @@
               </a:lnSpc>
               <a:buNone/>
             </a:pPr>
-            <a:fld id="{24C64D0F-ABA9-40B2-9460-6C6D49D45A38}" type="slidenum">
+            <a:fld id="{0F8CBE1A-E451-4BCA-A5E7-16511BC42D2B}" type="slidenum">
               <a:rPr b="0" lang="en-US" sz="1200" spc="-1" strike="noStrike">
                 <a:solidFill>
                   <a:schemeClr val="dk1"/>
@@ -702,7 +701,7 @@
       </p:grpSpPr>
       <p:sp>
         <p:nvSpPr>
-          <p:cNvPr id="289" name="PlaceHolder 1"/>
+          <p:cNvPr id="235" name="PlaceHolder 1"/>
           <p:cNvSpPr>
             <a:spLocks noGrp="1"/>
           </p:cNvSpPr>
@@ -725,7 +724,7 @@
       </p:sp>
       <p:sp>
         <p:nvSpPr>
-          <p:cNvPr id="290" name="PlaceHolder 2"/>
+          <p:cNvPr id="236" name="PlaceHolder 2"/>
           <p:cNvSpPr>
             <a:spLocks noGrp="1"/>
           </p:cNvSpPr>
@@ -765,7 +764,7 @@
       </p:sp>
       <p:sp>
         <p:nvSpPr>
-          <p:cNvPr id="291" name="PlaceHolder 3"/>
+          <p:cNvPr id="237" name="PlaceHolder 3"/>
           <p:cNvSpPr>
             <a:spLocks noGrp="1"/>
           </p:cNvSpPr>
@@ -812,7 +811,7 @@
               </a:lnSpc>
               <a:buNone/>
             </a:pPr>
-            <a:fld id="{D5CEBE04-F58C-4F1C-8A94-2DB5A4530BEE}" type="slidenum">
+            <a:fld id="{DD60AAD0-773D-439F-9A01-9DA565550E39}" type="slidenum">
               <a:rPr b="0" lang="en-US" sz="1200" spc="-1" strike="noStrike">
                 <a:solidFill>
                   <a:schemeClr val="dk1"/>
@@ -855,7 +854,7 @@
       </p:grpSpPr>
       <p:sp>
         <p:nvSpPr>
-          <p:cNvPr id="292" name="PlaceHolder 1"/>
+          <p:cNvPr id="238" name="PlaceHolder 1"/>
           <p:cNvSpPr>
             <a:spLocks noGrp="1"/>
           </p:cNvSpPr>
@@ -878,7 +877,7 @@
       </p:sp>
       <p:sp>
         <p:nvSpPr>
-          <p:cNvPr id="293" name="PlaceHolder 2"/>
+          <p:cNvPr id="239" name="PlaceHolder 2"/>
           <p:cNvSpPr>
             <a:spLocks noGrp="1"/>
           </p:cNvSpPr>
@@ -918,7 +917,7 @@
       </p:sp>
       <p:sp>
         <p:nvSpPr>
-          <p:cNvPr id="294" name="PlaceHolder 3"/>
+          <p:cNvPr id="240" name="PlaceHolder 3"/>
           <p:cNvSpPr>
             <a:spLocks noGrp="1"/>
           </p:cNvSpPr>
@@ -965,7 +964,7 @@
               </a:lnSpc>
               <a:buNone/>
             </a:pPr>
-            <a:fld id="{DE918E30-AC5C-47B6-8080-F8CAC298F0A0}" type="slidenum">
+            <a:fld id="{14C07ED1-47DB-4B1F-A833-97E9E211E11B}" type="slidenum">
               <a:rPr b="0" lang="en-US" sz="1200" spc="-1" strike="noStrike">
                 <a:solidFill>
                   <a:schemeClr val="dk1"/>
@@ -1008,7 +1007,7 @@
       </p:grpSpPr>
       <p:sp>
         <p:nvSpPr>
-          <p:cNvPr id="295" name="PlaceHolder 1"/>
+          <p:cNvPr id="241" name="PlaceHolder 1"/>
           <p:cNvSpPr>
             <a:spLocks noGrp="1"/>
           </p:cNvSpPr>
@@ -1031,7 +1030,7 @@
       </p:sp>
       <p:sp>
         <p:nvSpPr>
-          <p:cNvPr id="296" name="PlaceHolder 2"/>
+          <p:cNvPr id="242" name="PlaceHolder 2"/>
           <p:cNvSpPr>
             <a:spLocks noGrp="1"/>
           </p:cNvSpPr>
@@ -1071,7 +1070,7 @@
       </p:sp>
       <p:sp>
         <p:nvSpPr>
-          <p:cNvPr id="297" name="PlaceHolder 3"/>
+          <p:cNvPr id="243" name="PlaceHolder 3"/>
           <p:cNvSpPr>
             <a:spLocks noGrp="1"/>
           </p:cNvSpPr>
@@ -1118,7 +1117,7 @@
               </a:lnSpc>
               <a:buNone/>
             </a:pPr>
-            <a:fld id="{5C905DDD-72EA-4096-BACD-326F2A5B292D}" type="slidenum">
+            <a:fld id="{1DACD9C9-D9C0-4FCC-B825-8DE1E9781AE5}" type="slidenum">
               <a:rPr b="0" lang="en-US" sz="1200" spc="-1" strike="noStrike">
                 <a:solidFill>
                   <a:schemeClr val="dk1"/>
@@ -1161,7 +1160,7 @@
       </p:grpSpPr>
       <p:sp>
         <p:nvSpPr>
-          <p:cNvPr id="298" name="PlaceHolder 1"/>
+          <p:cNvPr id="244" name="PlaceHolder 1"/>
           <p:cNvSpPr>
             <a:spLocks noGrp="1"/>
           </p:cNvSpPr>
@@ -1184,7 +1183,7 @@
       </p:sp>
       <p:sp>
         <p:nvSpPr>
-          <p:cNvPr id="299" name="PlaceHolder 2"/>
+          <p:cNvPr id="245" name="PlaceHolder 2"/>
           <p:cNvSpPr>
             <a:spLocks noGrp="1"/>
           </p:cNvSpPr>
@@ -1224,7 +1223,7 @@
       </p:sp>
       <p:sp>
         <p:nvSpPr>
-          <p:cNvPr id="300" name="PlaceHolder 3"/>
+          <p:cNvPr id="246" name="PlaceHolder 3"/>
           <p:cNvSpPr>
             <a:spLocks noGrp="1"/>
           </p:cNvSpPr>
@@ -1271,7 +1270,7 @@
               </a:lnSpc>
               <a:buNone/>
             </a:pPr>
-            <a:fld id="{BF775D9C-67BE-4AC9-B736-F3C042B2F51B}" type="slidenum">
+            <a:fld id="{99ADE383-73AD-4C1D-83C4-935BE5E12D28}" type="slidenum">
               <a:rPr b="0" lang="en-US" sz="1200" spc="-1" strike="noStrike">
                 <a:solidFill>
                   <a:schemeClr val="dk1"/>
@@ -1314,7 +1313,7 @@
       </p:grpSpPr>
       <p:sp>
         <p:nvSpPr>
-          <p:cNvPr id="301" name="PlaceHolder 1"/>
+          <p:cNvPr id="247" name="PlaceHolder 1"/>
           <p:cNvSpPr>
             <a:spLocks noGrp="1"/>
           </p:cNvSpPr>
@@ -1337,7 +1336,7 @@
       </p:sp>
       <p:sp>
         <p:nvSpPr>
-          <p:cNvPr id="302" name="PlaceHolder 2"/>
+          <p:cNvPr id="248" name="PlaceHolder 2"/>
           <p:cNvSpPr>
             <a:spLocks noGrp="1"/>
           </p:cNvSpPr>
@@ -1377,7 +1376,7 @@
       </p:sp>
       <p:sp>
         <p:nvSpPr>
-          <p:cNvPr id="303" name="PlaceHolder 3"/>
+          <p:cNvPr id="249" name="PlaceHolder 3"/>
           <p:cNvSpPr>
             <a:spLocks noGrp="1"/>
           </p:cNvSpPr>
@@ -1424,160 +1423,7 @@
               </a:lnSpc>
               <a:buNone/>
             </a:pPr>
-            <a:fld id="{68D5C9B4-D3A1-4118-853C-E0C8169E88CB}" type="slidenum">
-              <a:rPr b="0" lang="en-US" sz="1200" spc="-1" strike="noStrike">
-                <a:solidFill>
-                  <a:schemeClr val="dk1"/>
-                </a:solidFill>
-                <a:latin typeface="+mn-lt"/>
-                <a:ea typeface="+mn-ea"/>
-              </a:rPr>
-              <a:t>&lt;number&gt;</a:t>
-            </a:fld>
-            <a:endParaRPr b="0" lang="en-US" sz="1200" spc="-1" strike="noStrike">
-              <a:solidFill>
-                <a:srgbClr val="000000"/>
-              </a:solidFill>
-              <a:latin typeface="Times New Roman"/>
-            </a:endParaRPr>
-          </a:p>
-        </p:txBody>
-      </p:sp>
-    </p:spTree>
-  </p:cSld>
-</p:notes>
-</file>
-
-<file path=ppt/notesSlides/notesSlide16.xml><?xml version="1.0" encoding="utf-8"?>
-<p:notes xmlns:a="http://schemas.openxmlformats.org/drawingml/2006/main" xmlns:p="http://schemas.openxmlformats.org/presentationml/2006/main" xmlns:r="http://schemas.openxmlformats.org/officeDocument/2006/relationships" xmlns:p14="http://schemas.microsoft.com/office/powerpoint/2010/main" xmlns:p15="http://schemas.microsoft.com/office/powerpoint/2012/main" xmlns:mc="http://schemas.openxmlformats.org/markup-compatibility/2006">
-  <p:cSld>
-    <p:spTree>
-      <p:nvGrpSpPr>
-        <p:cNvPr id="1" name=""/>
-        <p:cNvGrpSpPr/>
-        <p:nvPr/>
-      </p:nvGrpSpPr>
-      <p:grpSpPr>
-        <a:xfrm>
-          <a:off x="0" y="0"/>
-          <a:ext cx="0" cy="0"/>
-          <a:chOff x="0" y="0"/>
-          <a:chExt cx="0" cy="0"/>
-        </a:xfrm>
-      </p:grpSpPr>
-      <p:sp>
-        <p:nvSpPr>
-          <p:cNvPr id="304" name="PlaceHolder 1"/>
-          <p:cNvSpPr>
-            <a:spLocks noGrp="1"/>
-          </p:cNvSpPr>
-          <p:nvPr>
-            <p:ph type="sldImg"/>
-          </p:nvPr>
-        </p:nvSpPr>
-        <p:spPr>
-          <a:xfrm>
-            <a:off x="685800" y="1143000"/>
-            <a:ext cx="5486040" cy="3085920"/>
-          </a:xfrm>
-          <a:prstGeom prst="rect">
-            <a:avLst/>
-          </a:prstGeom>
-          <a:ln w="0">
-            <a:noFill/>
-          </a:ln>
-        </p:spPr>
-      </p:sp>
-      <p:sp>
-        <p:nvSpPr>
-          <p:cNvPr id="305" name="PlaceHolder 2"/>
-          <p:cNvSpPr>
-            <a:spLocks noGrp="1"/>
-          </p:cNvSpPr>
-          <p:nvPr>
-            <p:ph type="body"/>
-          </p:nvPr>
-        </p:nvSpPr>
-        <p:spPr>
-          <a:xfrm>
-            <a:off x="685800" y="4400640"/>
-            <a:ext cx="5486040" cy="3600000"/>
-          </a:xfrm>
-          <a:prstGeom prst="rect">
-            <a:avLst/>
-          </a:prstGeom>
-          <a:noFill/>
-          <a:ln w="0">
-            <a:noFill/>
-          </a:ln>
-        </p:spPr>
-        <p:txBody>
-          <a:bodyPr lIns="91440" rIns="91440" tIns="45720" bIns="45720" anchor="t">
-            <a:noAutofit/>
-          </a:bodyPr>
-          <a:p>
-            <a:pPr marL="216000" indent="-216000">
-              <a:buNone/>
-            </a:pPr>
-            <a:endParaRPr b="0" lang="en-US" sz="1800" spc="-1" strike="noStrike">
-              <a:solidFill>
-                <a:srgbClr val="000000"/>
-              </a:solidFill>
-              <a:latin typeface="Arial"/>
-            </a:endParaRPr>
-          </a:p>
-        </p:txBody>
-      </p:sp>
-      <p:sp>
-        <p:nvSpPr>
-          <p:cNvPr id="306" name="PlaceHolder 3"/>
-          <p:cNvSpPr>
-            <a:spLocks noGrp="1"/>
-          </p:cNvSpPr>
-          <p:nvPr>
-            <p:ph type="sldNum" idx="19"/>
-          </p:nvPr>
-        </p:nvSpPr>
-        <p:spPr>
-          <a:xfrm>
-            <a:off x="3884760" y="8685360"/>
-            <a:ext cx="2971440" cy="458280"/>
-          </a:xfrm>
-          <a:prstGeom prst="rect">
-            <a:avLst/>
-          </a:prstGeom>
-          <a:noFill/>
-          <a:ln w="0">
-            <a:noFill/>
-          </a:ln>
-        </p:spPr>
-        <p:txBody>
-          <a:bodyPr lIns="91440" rIns="91440" tIns="45720" bIns="45720" anchor="b">
-            <a:noAutofit/>
-          </a:bodyPr>
-          <a:lstStyle>
-            <a:lvl1pPr indent="0" algn="r" defTabSz="914400">
-              <a:lnSpc>
-                <a:spcPct val="100000"/>
-              </a:lnSpc>
-              <a:buNone/>
-              <a:defRPr b="0" lang="en-US" sz="1200" spc="-1" strike="noStrike">
-                <a:solidFill>
-                  <a:schemeClr val="dk1"/>
-                </a:solidFill>
-                <a:latin typeface="+mn-lt"/>
-                <a:ea typeface="+mn-ea"/>
-              </a:defRPr>
-            </a:lvl1pPr>
-          </a:lstStyle>
-          <a:p>
-            <a:pPr indent="0" algn="r" defTabSz="914400">
-              <a:lnSpc>
-                <a:spcPct val="100000"/>
-              </a:lnSpc>
-              <a:buNone/>
-            </a:pPr>
-            <a:fld id="{31422477-E487-476D-B55E-73C47635C0D5}" type="slidenum">
+            <a:fld id="{A68DFA02-6EC1-4330-B78F-52B31B4E43E6}" type="slidenum">
               <a:rPr b="0" lang="en-US" sz="1200" spc="-1" strike="noStrike">
                 <a:solidFill>
                   <a:schemeClr val="dk1"/>
@@ -1620,7 +1466,7 @@
       </p:grpSpPr>
       <p:sp>
         <p:nvSpPr>
-          <p:cNvPr id="262" name="PlaceHolder 1"/>
+          <p:cNvPr id="208" name="PlaceHolder 1"/>
           <p:cNvSpPr>
             <a:spLocks noGrp="1"/>
           </p:cNvSpPr>
@@ -1643,7 +1489,7 @@
       </p:sp>
       <p:sp>
         <p:nvSpPr>
-          <p:cNvPr id="263" name="PlaceHolder 2"/>
+          <p:cNvPr id="209" name="PlaceHolder 2"/>
           <p:cNvSpPr>
             <a:spLocks noGrp="1"/>
           </p:cNvSpPr>
@@ -1683,7 +1529,7 @@
       </p:sp>
       <p:sp>
         <p:nvSpPr>
-          <p:cNvPr id="264" name="PlaceHolder 3"/>
+          <p:cNvPr id="210" name="PlaceHolder 3"/>
           <p:cNvSpPr>
             <a:spLocks noGrp="1"/>
           </p:cNvSpPr>
@@ -1730,7 +1576,7 @@
               </a:lnSpc>
               <a:buNone/>
             </a:pPr>
-            <a:fld id="{228CC79C-5C12-4D33-82F1-E2F23757083A}" type="slidenum">
+            <a:fld id="{841186E4-49AD-46D1-8864-AF0F93AEFDA9}" type="slidenum">
               <a:rPr b="0" lang="en-US" sz="1200" spc="-1" strike="noStrike">
                 <a:solidFill>
                   <a:schemeClr val="dk1"/>
@@ -1773,7 +1619,7 @@
       </p:grpSpPr>
       <p:sp>
         <p:nvSpPr>
-          <p:cNvPr id="265" name="PlaceHolder 1"/>
+          <p:cNvPr id="211" name="PlaceHolder 1"/>
           <p:cNvSpPr>
             <a:spLocks noGrp="1"/>
           </p:cNvSpPr>
@@ -1796,7 +1642,7 @@
       </p:sp>
       <p:sp>
         <p:nvSpPr>
-          <p:cNvPr id="266" name="PlaceHolder 2"/>
+          <p:cNvPr id="212" name="PlaceHolder 2"/>
           <p:cNvSpPr>
             <a:spLocks noGrp="1"/>
           </p:cNvSpPr>
@@ -1836,7 +1682,7 @@
       </p:sp>
       <p:sp>
         <p:nvSpPr>
-          <p:cNvPr id="267" name="PlaceHolder 3"/>
+          <p:cNvPr id="213" name="PlaceHolder 3"/>
           <p:cNvSpPr>
             <a:spLocks noGrp="1"/>
           </p:cNvSpPr>
@@ -1883,7 +1729,7 @@
               </a:lnSpc>
               <a:buNone/>
             </a:pPr>
-            <a:fld id="{249F0F13-F2D5-4B6C-9B39-D0F9E0B4484B}" type="slidenum">
+            <a:fld id="{0E1DAAF1-E01F-431A-B5FB-24CF6FD14DDB}" type="slidenum">
               <a:rPr b="0" lang="en-US" sz="1200" spc="-1" strike="noStrike">
                 <a:solidFill>
                   <a:schemeClr val="dk1"/>
@@ -1926,7 +1772,7 @@
       </p:grpSpPr>
       <p:sp>
         <p:nvSpPr>
-          <p:cNvPr id="268" name="PlaceHolder 1"/>
+          <p:cNvPr id="214" name="PlaceHolder 1"/>
           <p:cNvSpPr>
             <a:spLocks noGrp="1"/>
           </p:cNvSpPr>
@@ -1949,7 +1795,7 @@
       </p:sp>
       <p:sp>
         <p:nvSpPr>
-          <p:cNvPr id="269" name="PlaceHolder 2"/>
+          <p:cNvPr id="215" name="PlaceHolder 2"/>
           <p:cNvSpPr>
             <a:spLocks noGrp="1"/>
           </p:cNvSpPr>
@@ -1989,7 +1835,7 @@
       </p:sp>
       <p:sp>
         <p:nvSpPr>
-          <p:cNvPr id="270" name="PlaceHolder 3"/>
+          <p:cNvPr id="216" name="PlaceHolder 3"/>
           <p:cNvSpPr>
             <a:spLocks noGrp="1"/>
           </p:cNvSpPr>
@@ -2036,7 +1882,7 @@
               </a:lnSpc>
               <a:buNone/>
             </a:pPr>
-            <a:fld id="{172C14B2-E87B-4100-91A1-08DFF0A05EC9}" type="slidenum">
+            <a:fld id="{E133882E-3EEF-4CC8-8D61-19A0F66E3C5B}" type="slidenum">
               <a:rPr b="0" lang="en-US" sz="1200" spc="-1" strike="noStrike">
                 <a:solidFill>
                   <a:schemeClr val="dk1"/>
@@ -2079,7 +1925,7 @@
       </p:grpSpPr>
       <p:sp>
         <p:nvSpPr>
-          <p:cNvPr id="271" name="PlaceHolder 1"/>
+          <p:cNvPr id="217" name="PlaceHolder 1"/>
           <p:cNvSpPr>
             <a:spLocks noGrp="1"/>
           </p:cNvSpPr>
@@ -2102,7 +1948,7 @@
       </p:sp>
       <p:sp>
         <p:nvSpPr>
-          <p:cNvPr id="272" name="PlaceHolder 2"/>
+          <p:cNvPr id="218" name="PlaceHolder 2"/>
           <p:cNvSpPr>
             <a:spLocks noGrp="1"/>
           </p:cNvSpPr>
@@ -2142,7 +1988,7 @@
       </p:sp>
       <p:sp>
         <p:nvSpPr>
-          <p:cNvPr id="273" name="PlaceHolder 3"/>
+          <p:cNvPr id="219" name="PlaceHolder 3"/>
           <p:cNvSpPr>
             <a:spLocks noGrp="1"/>
           </p:cNvSpPr>
@@ -2189,7 +2035,7 @@
               </a:lnSpc>
               <a:buNone/>
             </a:pPr>
-            <a:fld id="{4478149A-290D-42A9-AFF4-F81D5D8BD8F2}" type="slidenum">
+            <a:fld id="{1259E2FC-B269-455F-A9C3-F6FBC635D99F}" type="slidenum">
               <a:rPr b="0" lang="en-US" sz="1200" spc="-1" strike="noStrike">
                 <a:solidFill>
                   <a:schemeClr val="dk1"/>
@@ -2232,7 +2078,7 @@
       </p:grpSpPr>
       <p:sp>
         <p:nvSpPr>
-          <p:cNvPr id="274" name="PlaceHolder 1"/>
+          <p:cNvPr id="220" name="PlaceHolder 1"/>
           <p:cNvSpPr>
             <a:spLocks noGrp="1"/>
           </p:cNvSpPr>
@@ -2255,7 +2101,7 @@
       </p:sp>
       <p:sp>
         <p:nvSpPr>
-          <p:cNvPr id="275" name="PlaceHolder 2"/>
+          <p:cNvPr id="221" name="PlaceHolder 2"/>
           <p:cNvSpPr>
             <a:spLocks noGrp="1"/>
           </p:cNvSpPr>
@@ -2295,7 +2141,7 @@
       </p:sp>
       <p:sp>
         <p:nvSpPr>
-          <p:cNvPr id="276" name="PlaceHolder 3"/>
+          <p:cNvPr id="222" name="PlaceHolder 3"/>
           <p:cNvSpPr>
             <a:spLocks noGrp="1"/>
           </p:cNvSpPr>
@@ -2342,7 +2188,7 @@
               </a:lnSpc>
               <a:buNone/>
             </a:pPr>
-            <a:fld id="{521A384F-447E-4392-BB73-5D5DEBCC0EB4}" type="slidenum">
+            <a:fld id="{9F586E2F-D73C-428D-A8BD-C1D8EFE0D586}" type="slidenum">
               <a:rPr b="0" lang="en-US" sz="1200" spc="-1" strike="noStrike">
                 <a:solidFill>
                   <a:schemeClr val="dk1"/>
@@ -2385,7 +2231,7 @@
       </p:grpSpPr>
       <p:sp>
         <p:nvSpPr>
-          <p:cNvPr id="277" name="PlaceHolder 1"/>
+          <p:cNvPr id="223" name="PlaceHolder 1"/>
           <p:cNvSpPr>
             <a:spLocks noGrp="1"/>
           </p:cNvSpPr>
@@ -2408,7 +2254,7 @@
       </p:sp>
       <p:sp>
         <p:nvSpPr>
-          <p:cNvPr id="278" name="PlaceHolder 2"/>
+          <p:cNvPr id="224" name="PlaceHolder 2"/>
           <p:cNvSpPr>
             <a:spLocks noGrp="1"/>
           </p:cNvSpPr>
@@ -2448,7 +2294,7 @@
       </p:sp>
       <p:sp>
         <p:nvSpPr>
-          <p:cNvPr id="279" name="PlaceHolder 3"/>
+          <p:cNvPr id="225" name="PlaceHolder 3"/>
           <p:cNvSpPr>
             <a:spLocks noGrp="1"/>
           </p:cNvSpPr>
@@ -2495,7 +2341,7 @@
               </a:lnSpc>
               <a:buNone/>
             </a:pPr>
-            <a:fld id="{7D76D2FA-B34B-4CD3-9046-B1B5BB4131E3}" type="slidenum">
+            <a:fld id="{692DDA58-075A-4F79-A5AC-62840CFAADDA}" type="slidenum">
               <a:rPr b="0" lang="en-US" sz="1200" spc="-1" strike="noStrike">
                 <a:solidFill>
                   <a:schemeClr val="dk1"/>
@@ -2538,7 +2384,7 @@
       </p:grpSpPr>
       <p:sp>
         <p:nvSpPr>
-          <p:cNvPr id="280" name="PlaceHolder 1"/>
+          <p:cNvPr id="226" name="PlaceHolder 1"/>
           <p:cNvSpPr>
             <a:spLocks noGrp="1"/>
           </p:cNvSpPr>
@@ -2561,7 +2407,7 @@
       </p:sp>
       <p:sp>
         <p:nvSpPr>
-          <p:cNvPr id="281" name="PlaceHolder 2"/>
+          <p:cNvPr id="227" name="PlaceHolder 2"/>
           <p:cNvSpPr>
             <a:spLocks noGrp="1"/>
           </p:cNvSpPr>
@@ -2601,7 +2447,7 @@
       </p:sp>
       <p:sp>
         <p:nvSpPr>
-          <p:cNvPr id="282" name="PlaceHolder 3"/>
+          <p:cNvPr id="228" name="PlaceHolder 3"/>
           <p:cNvSpPr>
             <a:spLocks noGrp="1"/>
           </p:cNvSpPr>
@@ -2648,7 +2494,7 @@
               </a:lnSpc>
               <a:buNone/>
             </a:pPr>
-            <a:fld id="{9144D0E2-DEC8-448F-B3D5-CEEC91DAD8EA}" type="slidenum">
+            <a:fld id="{2C172F28-960B-4673-B5A3-BE19E37D2380}" type="slidenum">
               <a:rPr b="0" lang="en-US" sz="1200" spc="-1" strike="noStrike">
                 <a:solidFill>
                   <a:schemeClr val="dk1"/>
@@ -2691,7 +2537,7 @@
       </p:grpSpPr>
       <p:sp>
         <p:nvSpPr>
-          <p:cNvPr id="283" name="PlaceHolder 1"/>
+          <p:cNvPr id="229" name="PlaceHolder 1"/>
           <p:cNvSpPr>
             <a:spLocks noGrp="1"/>
           </p:cNvSpPr>
@@ -2714,7 +2560,7 @@
       </p:sp>
       <p:sp>
         <p:nvSpPr>
-          <p:cNvPr id="284" name="PlaceHolder 2"/>
+          <p:cNvPr id="230" name="PlaceHolder 2"/>
           <p:cNvSpPr>
             <a:spLocks noGrp="1"/>
           </p:cNvSpPr>
@@ -2754,7 +2600,7 @@
       </p:sp>
       <p:sp>
         <p:nvSpPr>
-          <p:cNvPr id="285" name="PlaceHolder 3"/>
+          <p:cNvPr id="231" name="PlaceHolder 3"/>
           <p:cNvSpPr>
             <a:spLocks noGrp="1"/>
           </p:cNvSpPr>
@@ -2801,7 +2647,7 @@
               </a:lnSpc>
               <a:buNone/>
             </a:pPr>
-            <a:fld id="{F950B3ED-5E2D-4231-A6AD-FC69E9C7874C}" type="slidenum">
+            <a:fld id="{5D71B4F1-62CD-48E6-88E6-2E1EEBEC10DF}" type="slidenum">
               <a:rPr b="0" lang="en-US" sz="1200" spc="-1" strike="noStrike">
                 <a:solidFill>
                   <a:schemeClr val="dk1"/>
@@ -3486,7 +3332,7 @@
                 <a:latin typeface="Microsoft JhengHei"/>
                 <a:ea typeface="Microsoft JhengHei"/>
               </a:rPr>
-              <a:t>聊天 ・ 文件問答 ・ 會議包 ・ 安全結束，三分鐘上手</a:t>
+              <a:t>聊天 ・ 文件問答 ・ 翻譯 ・ 安全結束，三分鐘上手</a:t>
             </a:r>
             <a:endParaRPr b="0" lang="en-US" sz="1700" spc="-1" strike="noStrike">
               <a:solidFill>
@@ -3593,7 +3439,7 @@
       </p:grpSpPr>
       <p:sp>
         <p:nvSpPr>
-          <p:cNvPr id="151" name="Shape 0"/>
+          <p:cNvPr id="140" name="Shape 0"/>
           <p:cNvSpPr/>
           <p:nvPr/>
         </p:nvSpPr>
@@ -3634,7 +3480,7 @@
       </p:sp>
       <p:sp>
         <p:nvSpPr>
-          <p:cNvPr id="152" name="Shape 1"/>
+          <p:cNvPr id="141" name="Shape 1"/>
           <p:cNvSpPr/>
           <p:nvPr/>
         </p:nvSpPr>
@@ -3675,7 +3521,7 @@
       </p:sp>
       <p:sp>
         <p:nvSpPr>
-          <p:cNvPr id="153" name="Text 2"/>
+          <p:cNvPr id="142" name="Text 2"/>
           <p:cNvSpPr/>
           <p:nvPr/>
         </p:nvSpPr>
@@ -3719,7 +3565,7 @@
                 <a:latin typeface="Microsoft JhengHei"/>
                 <a:ea typeface="Microsoft JhengHei"/>
               </a:rPr>
-              <a:t>文件會議包</a:t>
+              <a:t>工具箱：翻譯</a:t>
             </a:r>
             <a:endParaRPr b="0" lang="en-US" sz="2800" spc="-1" strike="noStrike">
               <a:solidFill>
@@ -3732,81 +3578,14 @@
       </p:sp>
       <p:sp>
         <p:nvSpPr>
-          <p:cNvPr id="154" name="Text 3"/>
-          <p:cNvSpPr/>
-          <p:nvPr/>
-        </p:nvSpPr>
-        <p:spPr>
-          <a:xfrm>
-            <a:off x="868680" y="1188720"/>
-            <a:ext cx="10634040" cy="456840"/>
-          </a:xfrm>
-          <a:prstGeom prst="rect">
-            <a:avLst/>
-          </a:prstGeom>
-          <a:noFill/>
-          <a:ln w="0">
-            <a:noFill/>
-          </a:ln>
-        </p:spPr>
-        <p:style>
-          <a:lnRef idx="0"/>
-          <a:fillRef idx="0"/>
-          <a:effectRef idx="0"/>
-          <a:fontRef idx="minor"/>
-        </p:style>
-        <p:txBody>
-          <a:bodyPr lIns="0" rIns="0" tIns="0" bIns="0" anchor="ctr">
-            <a:noAutofit/>
-          </a:bodyPr>
-          <a:p>
-            <a:pPr defTabSz="914400">
-              <a:lnSpc>
-                <a:spcPct val="100000"/>
-              </a:lnSpc>
-              <a:tabLst>
-                <a:tab algn="l" pos="0"/>
-              </a:tabLst>
-            </a:pPr>
-            <a:r>
-              <a:rPr b="1" lang="zh-CN" sz="1900" spc="-1" strike="noStrike">
-                <a:solidFill>
-                  <a:srgbClr val="5b4fe8"/>
-                </a:solidFill>
-                <a:latin typeface="Microsoft JhengHei"/>
-                <a:ea typeface="Microsoft JhengHei"/>
-              </a:rPr>
-              <a:t>一鍵把文件變成可交付的會議 </a:t>
-            </a:r>
-            <a:r>
-              <a:rPr b="1" lang="en-US" sz="1900" spc="-1" strike="noStrike">
-                <a:solidFill>
-                  <a:srgbClr val="5b4fe8"/>
-                </a:solidFill>
-                <a:latin typeface="Microsoft JhengHei"/>
-                <a:ea typeface="Microsoft JhengHei"/>
-              </a:rPr>
-              <a:t>Markdown</a:t>
-            </a:r>
-            <a:endParaRPr b="0" lang="en-US" sz="1900" spc="-1" strike="noStrike">
-              <a:solidFill>
-                <a:srgbClr val="000000"/>
-              </a:solidFill>
-              <a:latin typeface="Arial"/>
-            </a:endParaRPr>
-          </a:p>
-        </p:txBody>
-      </p:sp>
-      <p:sp>
-        <p:nvSpPr>
-          <p:cNvPr id="155" name="Shape 4"/>
-          <p:cNvSpPr/>
-          <p:nvPr/>
-        </p:nvSpPr>
-        <p:spPr>
-          <a:xfrm>
-            <a:off x="868680" y="1874520"/>
-            <a:ext cx="1992960" cy="914040"/>
+          <p:cNvPr id="143" name="Shape 3"/>
+          <p:cNvSpPr/>
+          <p:nvPr/>
+        </p:nvSpPr>
+        <p:spPr>
+          <a:xfrm>
+            <a:off x="868680" y="1325880"/>
+            <a:ext cx="10515240" cy="2285640"/>
           </a:xfrm>
           <a:prstGeom prst="rect">
             <a:avLst/>
@@ -3843,14 +3622,55 @@
       </p:sp>
       <p:sp>
         <p:nvSpPr>
-          <p:cNvPr id="156" name="Text 5"/>
-          <p:cNvSpPr/>
-          <p:nvPr/>
-        </p:nvSpPr>
-        <p:spPr>
-          <a:xfrm>
-            <a:off x="923400" y="1974960"/>
-            <a:ext cx="1883160" cy="365400"/>
+          <p:cNvPr id="144" name="Shape 4"/>
+          <p:cNvSpPr/>
+          <p:nvPr/>
+        </p:nvSpPr>
+        <p:spPr>
+          <a:xfrm>
+            <a:off x="868680" y="1325880"/>
+            <a:ext cx="68400" cy="2285640"/>
+          </a:xfrm>
+          <a:prstGeom prst="rect">
+            <a:avLst/>
+          </a:prstGeom>
+          <a:solidFill>
+            <a:srgbClr val="5b4fe8"/>
+          </a:solidFill>
+          <a:ln w="0">
+            <a:noFill/>
+          </a:ln>
+        </p:spPr>
+        <p:style>
+          <a:lnRef idx="0"/>
+          <a:fillRef idx="0"/>
+          <a:effectRef idx="0"/>
+          <a:fontRef idx="minor"/>
+        </p:style>
+        <p:txBody>
+          <a:bodyPr lIns="90000" rIns="90000" tIns="45000" bIns="45000" anchor="t">
+            <a:noAutofit/>
+          </a:bodyPr>
+          <a:p>
+            <a:endParaRPr b="0" lang="en-US" sz="1800" spc="-1" strike="noStrike">
+              <a:solidFill>
+                <a:srgbClr val="ffffff"/>
+              </a:solidFill>
+              <a:latin typeface="Arial"/>
+            </a:endParaRPr>
+          </a:p>
+        </p:txBody>
+      </p:sp>
+      <p:sp>
+        <p:nvSpPr>
+          <p:cNvPr id="145" name="Text 5"/>
+          <p:cNvSpPr/>
+          <p:nvPr/>
+        </p:nvSpPr>
+        <p:spPr>
+          <a:xfrm>
+            <a:off x="1124640" y="1472040"/>
+            <a:ext cx="10058040" cy="365400"/>
           </a:xfrm>
           <a:prstGeom prst="rect">
             <a:avLst/>
@@ -3871,7 +3691,7 @@
             <a:noAutofit/>
           </a:bodyPr>
           <a:p>
-            <a:pPr algn="ctr" defTabSz="914400">
+            <a:pPr defTabSz="914400">
               <a:lnSpc>
                 <a:spcPct val="100000"/>
               </a:lnSpc>
@@ -3880,34 +3700,34 @@
               </a:tabLst>
             </a:pPr>
             <a:r>
-              <a:rPr b="1" lang="en-US" sz="1100" spc="-1" strike="noStrike">
+              <a:rPr b="1" lang="zh-CN" sz="1800" spc="-1" strike="noStrike">
                 <a:solidFill>
                   <a:srgbClr val="5b4fe8"/>
                 </a:solidFill>
-                <a:latin typeface="Consolas"/>
-                <a:ea typeface="Consolas"/>
-              </a:rPr>
-              <a:t>retrieve_evidence</a:t>
-            </a:r>
-            <a:endParaRPr b="0" lang="en-US" sz="1100" spc="-1" strike="noStrike">
-              <a:solidFill>
-                <a:srgbClr val="000000"/>
-              </a:solidFill>
-              <a:latin typeface="Arial"/>
-            </a:endParaRPr>
-          </a:p>
-        </p:txBody>
-      </p:sp>
-      <p:sp>
-        <p:nvSpPr>
-          <p:cNvPr id="157" name="Text 6"/>
-          <p:cNvSpPr/>
-          <p:nvPr/>
-        </p:nvSpPr>
-        <p:spPr>
-          <a:xfrm>
-            <a:off x="923400" y="2340720"/>
-            <a:ext cx="1883160" cy="365400"/>
+                <a:latin typeface="Microsoft JhengHei"/>
+                <a:ea typeface="Microsoft JhengHei"/>
+              </a:rPr>
+              <a:t>翻譯工具（語意處理）</a:t>
+            </a:r>
+            <a:endParaRPr b="0" lang="en-US" sz="1800" spc="-1" strike="noStrike">
+              <a:solidFill>
+                <a:srgbClr val="000000"/>
+              </a:solidFill>
+              <a:latin typeface="Arial"/>
+            </a:endParaRPr>
+          </a:p>
+        </p:txBody>
+      </p:sp>
+      <p:sp>
+        <p:nvSpPr>
+          <p:cNvPr id="146" name="Text 6"/>
+          <p:cNvSpPr/>
+          <p:nvPr/>
+        </p:nvSpPr>
+        <p:spPr>
+          <a:xfrm>
+            <a:off x="1124640" y="1892880"/>
+            <a:ext cx="10058040" cy="1572480"/>
           </a:xfrm>
           <a:prstGeom prst="rect">
             <a:avLst/>
@@ -3924,104 +3744,105 @@
           <a:fontRef idx="minor"/>
         </p:style>
         <p:txBody>
-          <a:bodyPr lIns="0" rIns="0" tIns="0" bIns="0" anchor="ctr">
-            <a:noAutofit/>
-          </a:bodyPr>
-          <a:p>
-            <a:pPr algn="ctr" defTabSz="914400">
-              <a:lnSpc>
-                <a:spcPct val="100000"/>
-              </a:lnSpc>
-              <a:tabLst>
-                <a:tab algn="l" pos="0"/>
-              </a:tabLst>
-            </a:pPr>
-            <a:r>
-              <a:rPr b="0" lang="zh-CN" sz="1400" spc="-1" strike="noStrike">
+          <a:bodyPr lIns="0" rIns="0" tIns="0" bIns="0" anchor="t">
+            <a:noAutofit/>
+          </a:bodyPr>
+          <a:p>
+            <a:pPr marL="343080" indent="-343080" defTabSz="914400">
+              <a:lnSpc>
+                <a:spcPct val="122000"/>
+              </a:lnSpc>
+              <a:buClr>
+                <a:srgbClr val="1e1f35"/>
+              </a:buClr>
+              <a:buFont typeface="Symbol" charset="2"/>
+              <a:buChar char=""/>
+            </a:pPr>
+            <a:r>
+              <a:rPr b="0" lang="zh-CN" sz="1500" spc="-1" strike="noStrike">
                 <a:solidFill>
                   <a:srgbClr val="1e1f35"/>
                 </a:solidFill>
                 <a:latin typeface="Microsoft JhengHei"/>
                 <a:ea typeface="Microsoft JhengHei"/>
               </a:rPr>
-              <a:t>找出證據</a:t>
-            </a:r>
-            <a:endParaRPr b="0" lang="en-US" sz="1400" spc="-1" strike="noStrike">
-              <a:solidFill>
-                <a:srgbClr val="000000"/>
-              </a:solidFill>
-              <a:latin typeface="Arial"/>
-            </a:endParaRPr>
-          </a:p>
-        </p:txBody>
-      </p:sp>
-      <p:sp>
-        <p:nvSpPr>
-          <p:cNvPr id="158" name="Text 7"/>
-          <p:cNvSpPr/>
-          <p:nvPr/>
-        </p:nvSpPr>
-        <p:spPr>
-          <a:xfrm>
-            <a:off x="2862000" y="1874520"/>
-            <a:ext cx="219240" cy="914040"/>
-          </a:xfrm>
-          <a:prstGeom prst="rect">
-            <a:avLst/>
-          </a:prstGeom>
-          <a:noFill/>
-          <a:ln w="0">
-            <a:noFill/>
-          </a:ln>
-        </p:spPr>
-        <p:style>
-          <a:lnRef idx="0"/>
-          <a:fillRef idx="0"/>
-          <a:effectRef idx="0"/>
-          <a:fontRef idx="minor"/>
-        </p:style>
-        <p:txBody>
-          <a:bodyPr lIns="0" rIns="0" tIns="0" bIns="0" anchor="ctr">
-            <a:noAutofit/>
-          </a:bodyPr>
-          <a:p>
-            <a:pPr algn="ctr" defTabSz="914400">
-              <a:lnSpc>
-                <a:spcPct val="100000"/>
-              </a:lnSpc>
-              <a:tabLst>
-                <a:tab algn="l" pos="0"/>
-              </a:tabLst>
-            </a:pPr>
-            <a:r>
-              <a:rPr b="1" lang="en-US" sz="2000" spc="-1" strike="noStrike">
-                <a:solidFill>
-                  <a:srgbClr val="8e86f5"/>
-                </a:solidFill>
-                <a:latin typeface="Microsoft JhengHei"/>
-                <a:ea typeface="Microsoft JhengHei"/>
-              </a:rPr>
-              <a:t>›</a:t>
-            </a:r>
-            <a:endParaRPr b="0" lang="en-US" sz="2000" spc="-1" strike="noStrike">
-              <a:solidFill>
-                <a:srgbClr val="000000"/>
-              </a:solidFill>
-              <a:latin typeface="Arial"/>
-            </a:endParaRPr>
-          </a:p>
-        </p:txBody>
-      </p:sp>
-      <p:sp>
-        <p:nvSpPr>
-          <p:cNvPr id="159" name="Shape 8"/>
-          <p:cNvSpPr/>
-          <p:nvPr/>
-        </p:nvSpPr>
-        <p:spPr>
-          <a:xfrm>
-            <a:off x="3081600" y="1874520"/>
-            <a:ext cx="1992960" cy="914040"/>
+              <a:t>來源可自動偵測或指定</a:t>
+            </a:r>
+            <a:endParaRPr b="0" lang="en-US" sz="1500" spc="-1" strike="noStrike">
+              <a:solidFill>
+                <a:srgbClr val="000000"/>
+              </a:solidFill>
+              <a:latin typeface="Arial"/>
+            </a:endParaRPr>
+          </a:p>
+          <a:p>
+            <a:pPr marL="343080" indent="-343080" defTabSz="914400">
+              <a:lnSpc>
+                <a:spcPct val="122000"/>
+              </a:lnSpc>
+              <a:buClr>
+                <a:srgbClr val="1e1f35"/>
+              </a:buClr>
+              <a:buFont typeface="Symbol" charset="2"/>
+              <a:buChar char=""/>
+            </a:pPr>
+            <a:r>
+              <a:rPr b="0" lang="zh-CN" sz="1500" spc="-1" strike="noStrike">
+                <a:solidFill>
+                  <a:srgbClr val="1e1f35"/>
+                </a:solidFill>
+                <a:latin typeface="Microsoft JhengHei"/>
+                <a:ea typeface="Microsoft JhengHei"/>
+              </a:rPr>
+              <a:t>英／繁中／簡中，可用 ⇄ 互換</a:t>
+            </a:r>
+            <a:endParaRPr b="0" lang="en-US" sz="1500" spc="-1" strike="noStrike">
+              <a:solidFill>
+                <a:srgbClr val="000000"/>
+              </a:solidFill>
+              <a:latin typeface="Arial"/>
+            </a:endParaRPr>
+          </a:p>
+          <a:p>
+            <a:pPr marL="343080" indent="-343080" defTabSz="914400">
+              <a:lnSpc>
+                <a:spcPct val="122000"/>
+              </a:lnSpc>
+              <a:buClr>
+                <a:srgbClr val="1e1f35"/>
+              </a:buClr>
+              <a:buFont typeface="Symbol" charset="2"/>
+              <a:buChar char=""/>
+            </a:pPr>
+            <a:r>
+              <a:rPr b="0" lang="zh-CN" sz="1500" spc="-1" strike="noStrike">
+                <a:solidFill>
+                  <a:srgbClr val="1e1f35"/>
+                </a:solidFill>
+                <a:latin typeface="Microsoft JhengHei"/>
+                <a:ea typeface="Microsoft JhengHei"/>
+              </a:rPr>
+              <a:t>一般／技術／商務／中英對照</a:t>
+            </a:r>
+            <a:endParaRPr b="0" lang="en-US" sz="1500" spc="-1" strike="noStrike">
+              <a:solidFill>
+                <a:srgbClr val="000000"/>
+              </a:solidFill>
+              <a:latin typeface="Arial"/>
+            </a:endParaRPr>
+          </a:p>
+        </p:txBody>
+      </p:sp>
+      <p:sp>
+        <p:nvSpPr>
+          <p:cNvPr id="147" name="Shape 7"/>
+          <p:cNvSpPr/>
+          <p:nvPr/>
+        </p:nvSpPr>
+        <p:spPr>
+          <a:xfrm>
+            <a:off x="868680" y="3840480"/>
+            <a:ext cx="10515240" cy="1691280"/>
           </a:xfrm>
           <a:prstGeom prst="rect">
             <a:avLst/>
@@ -4058,14 +3879,55 @@
       </p:sp>
       <p:sp>
         <p:nvSpPr>
-          <p:cNvPr id="160" name="Text 9"/>
-          <p:cNvSpPr/>
-          <p:nvPr/>
-        </p:nvSpPr>
-        <p:spPr>
-          <a:xfrm>
-            <a:off x="3136320" y="1974960"/>
-            <a:ext cx="1883160" cy="365400"/>
+          <p:cNvPr id="148" name="Shape 8"/>
+          <p:cNvSpPr/>
+          <p:nvPr/>
+        </p:nvSpPr>
+        <p:spPr>
+          <a:xfrm>
+            <a:off x="868680" y="3840480"/>
+            <a:ext cx="68400" cy="1691280"/>
+          </a:xfrm>
+          <a:prstGeom prst="rect">
+            <a:avLst/>
+          </a:prstGeom>
+          <a:solidFill>
+            <a:srgbClr val="5b4fe8"/>
+          </a:solidFill>
+          <a:ln w="0">
+            <a:noFill/>
+          </a:ln>
+        </p:spPr>
+        <p:style>
+          <a:lnRef idx="0"/>
+          <a:fillRef idx="0"/>
+          <a:effectRef idx="0"/>
+          <a:fontRef idx="minor"/>
+        </p:style>
+        <p:txBody>
+          <a:bodyPr lIns="90000" rIns="90000" tIns="45000" bIns="45000" anchor="t">
+            <a:noAutofit/>
+          </a:bodyPr>
+          <a:p>
+            <a:endParaRPr b="0" lang="en-US" sz="1800" spc="-1" strike="noStrike">
+              <a:solidFill>
+                <a:srgbClr val="ffffff"/>
+              </a:solidFill>
+              <a:latin typeface="Arial"/>
+            </a:endParaRPr>
+          </a:p>
+        </p:txBody>
+      </p:sp>
+      <p:sp>
+        <p:nvSpPr>
+          <p:cNvPr id="149" name="Text 9"/>
+          <p:cNvSpPr/>
+          <p:nvPr/>
+        </p:nvSpPr>
+        <p:spPr>
+          <a:xfrm>
+            <a:off x="1124640" y="3986640"/>
+            <a:ext cx="10058040" cy="365400"/>
           </a:xfrm>
           <a:prstGeom prst="rect">
             <a:avLst/>
@@ -4086,7 +3948,7 @@
             <a:noAutofit/>
           </a:bodyPr>
           <a:p>
-            <a:pPr algn="ctr" defTabSz="914400">
+            <a:pPr defTabSz="914400">
               <a:lnSpc>
                 <a:spcPct val="100000"/>
               </a:lnSpc>
@@ -4095,173 +3957,15 @@
               </a:tabLst>
             </a:pPr>
             <a:r>
-              <a:rPr b="1" lang="en-US" sz="1100" spc="-1" strike="noStrike">
+              <a:rPr b="1" lang="zh-CN" sz="1800" spc="-1" strike="noStrike">
                 <a:solidFill>
                   <a:srgbClr val="5b4fe8"/>
                 </a:solidFill>
-                <a:latin typeface="Consolas"/>
-                <a:ea typeface="Consolas"/>
-              </a:rPr>
-              <a:t>summarize</a:t>
-            </a:r>
-            <a:endParaRPr b="0" lang="en-US" sz="1100" spc="-1" strike="noStrike">
-              <a:solidFill>
-                <a:srgbClr val="000000"/>
-              </a:solidFill>
-              <a:latin typeface="Arial"/>
-            </a:endParaRPr>
-          </a:p>
-        </p:txBody>
-      </p:sp>
-      <p:sp>
-        <p:nvSpPr>
-          <p:cNvPr id="161" name="Text 10"/>
-          <p:cNvSpPr/>
-          <p:nvPr/>
-        </p:nvSpPr>
-        <p:spPr>
-          <a:xfrm>
-            <a:off x="3136320" y="2340720"/>
-            <a:ext cx="1883160" cy="365400"/>
-          </a:xfrm>
-          <a:prstGeom prst="rect">
-            <a:avLst/>
-          </a:prstGeom>
-          <a:noFill/>
-          <a:ln w="0">
-            <a:noFill/>
-          </a:ln>
-        </p:spPr>
-        <p:style>
-          <a:lnRef idx="0"/>
-          <a:fillRef idx="0"/>
-          <a:effectRef idx="0"/>
-          <a:fontRef idx="minor"/>
-        </p:style>
-        <p:txBody>
-          <a:bodyPr lIns="0" rIns="0" tIns="0" bIns="0" anchor="ctr">
-            <a:noAutofit/>
-          </a:bodyPr>
-          <a:p>
-            <a:pPr algn="ctr" defTabSz="914400">
-              <a:lnSpc>
-                <a:spcPct val="100000"/>
-              </a:lnSpc>
-              <a:tabLst>
-                <a:tab algn="l" pos="0"/>
-              </a:tabLst>
-            </a:pPr>
-            <a:r>
-              <a:rPr b="0" lang="zh-CN" sz="1400" spc="-1" strike="noStrike">
-                <a:solidFill>
-                  <a:srgbClr val="1e1f35"/>
-                </a:solidFill>
-                <a:latin typeface="Microsoft JhengHei"/>
-                <a:ea typeface="Microsoft JhengHei"/>
-              </a:rPr>
-              <a:t>摘要</a:t>
-            </a:r>
-            <a:endParaRPr b="0" lang="en-US" sz="1400" spc="-1" strike="noStrike">
-              <a:solidFill>
-                <a:srgbClr val="000000"/>
-              </a:solidFill>
-              <a:latin typeface="Arial"/>
-            </a:endParaRPr>
-          </a:p>
-        </p:txBody>
-      </p:sp>
-      <p:sp>
-        <p:nvSpPr>
-          <p:cNvPr id="162" name="Text 11"/>
-          <p:cNvSpPr/>
-          <p:nvPr/>
-        </p:nvSpPr>
-        <p:spPr>
-          <a:xfrm>
-            <a:off x="5074920" y="1874520"/>
-            <a:ext cx="219240" cy="914040"/>
-          </a:xfrm>
-          <a:prstGeom prst="rect">
-            <a:avLst/>
-          </a:prstGeom>
-          <a:noFill/>
-          <a:ln w="0">
-            <a:noFill/>
-          </a:ln>
-        </p:spPr>
-        <p:style>
-          <a:lnRef idx="0"/>
-          <a:fillRef idx="0"/>
-          <a:effectRef idx="0"/>
-          <a:fontRef idx="minor"/>
-        </p:style>
-        <p:txBody>
-          <a:bodyPr lIns="0" rIns="0" tIns="0" bIns="0" anchor="ctr">
-            <a:noAutofit/>
-          </a:bodyPr>
-          <a:p>
-            <a:pPr algn="ctr" defTabSz="914400">
-              <a:lnSpc>
-                <a:spcPct val="100000"/>
-              </a:lnSpc>
-              <a:tabLst>
-                <a:tab algn="l" pos="0"/>
-              </a:tabLst>
-            </a:pPr>
-            <a:r>
-              <a:rPr b="1" lang="en-US" sz="2000" spc="-1" strike="noStrike">
-                <a:solidFill>
-                  <a:srgbClr val="8e86f5"/>
-                </a:solidFill>
-                <a:latin typeface="Microsoft JhengHei"/>
-                <a:ea typeface="Microsoft JhengHei"/>
-              </a:rPr>
-              <a:t>›</a:t>
-            </a:r>
-            <a:endParaRPr b="0" lang="en-US" sz="2000" spc="-1" strike="noStrike">
-              <a:solidFill>
-                <a:srgbClr val="000000"/>
-              </a:solidFill>
-              <a:latin typeface="Arial"/>
-            </a:endParaRPr>
-          </a:p>
-        </p:txBody>
-      </p:sp>
-      <p:sp>
-        <p:nvSpPr>
-          <p:cNvPr id="163" name="Shape 12"/>
-          <p:cNvSpPr/>
-          <p:nvPr/>
-        </p:nvSpPr>
-        <p:spPr>
-          <a:xfrm>
-            <a:off x="5294520" y="1874520"/>
-            <a:ext cx="1992960" cy="914040"/>
-          </a:xfrm>
-          <a:prstGeom prst="rect">
-            <a:avLst/>
-          </a:prstGeom>
-          <a:solidFill>
-            <a:srgbClr val="f0f2fa"/>
-          </a:solidFill>
-          <a:ln w="9525">
-            <a:solidFill>
-              <a:srgbClr val="dde1f2"/>
-            </a:solidFill>
-            <a:round/>
-          </a:ln>
-        </p:spPr>
-        <p:style>
-          <a:lnRef idx="0"/>
-          <a:fillRef idx="0"/>
-          <a:effectRef idx="0"/>
-          <a:fontRef idx="minor"/>
-        </p:style>
-        <p:txBody>
-          <a:bodyPr lIns="90000" rIns="90000" tIns="45000" bIns="45000" anchor="t">
-            <a:noAutofit/>
-          </a:bodyPr>
-          <a:p>
+                <a:latin typeface="Microsoft JhengHei"/>
+                <a:ea typeface="Microsoft JhengHei"/>
+              </a:rPr>
+              <a:t>翻譯會原樣保留的內容</a:t>
+            </a:r>
             <a:endParaRPr b="0" lang="en-US" sz="1800" spc="-1" strike="noStrike">
               <a:solidFill>
                 <a:srgbClr val="000000"/>
@@ -4273,758 +3977,14 @@
       </p:sp>
       <p:sp>
         <p:nvSpPr>
-          <p:cNvPr id="164" name="Text 13"/>
-          <p:cNvSpPr/>
-          <p:nvPr/>
-        </p:nvSpPr>
-        <p:spPr>
-          <a:xfrm>
-            <a:off x="5349240" y="1974960"/>
-            <a:ext cx="1883160" cy="365400"/>
-          </a:xfrm>
-          <a:prstGeom prst="rect">
-            <a:avLst/>
-          </a:prstGeom>
-          <a:noFill/>
-          <a:ln w="0">
-            <a:noFill/>
-          </a:ln>
-        </p:spPr>
-        <p:style>
-          <a:lnRef idx="0"/>
-          <a:fillRef idx="0"/>
-          <a:effectRef idx="0"/>
-          <a:fontRef idx="minor"/>
-        </p:style>
-        <p:txBody>
-          <a:bodyPr lIns="0" rIns="0" tIns="0" bIns="0" anchor="ctr">
-            <a:noAutofit/>
-          </a:bodyPr>
-          <a:p>
-            <a:pPr algn="ctr" defTabSz="914400">
-              <a:lnSpc>
-                <a:spcPct val="100000"/>
-              </a:lnSpc>
-              <a:tabLst>
-                <a:tab algn="l" pos="0"/>
-              </a:tabLst>
-            </a:pPr>
-            <a:r>
-              <a:rPr b="1" lang="en-US" sz="1100" spc="-1" strike="noStrike">
-                <a:solidFill>
-                  <a:srgbClr val="5b4fe8"/>
-                </a:solidFill>
-                <a:latin typeface="Consolas"/>
-                <a:ea typeface="Consolas"/>
-              </a:rPr>
-              <a:t>meeting_notes</a:t>
-            </a:r>
-            <a:endParaRPr b="0" lang="en-US" sz="1100" spc="-1" strike="noStrike">
-              <a:solidFill>
-                <a:srgbClr val="000000"/>
-              </a:solidFill>
-              <a:latin typeface="Arial"/>
-            </a:endParaRPr>
-          </a:p>
-        </p:txBody>
-      </p:sp>
-      <p:sp>
-        <p:nvSpPr>
-          <p:cNvPr id="165" name="Text 14"/>
-          <p:cNvSpPr/>
-          <p:nvPr/>
-        </p:nvSpPr>
-        <p:spPr>
-          <a:xfrm>
-            <a:off x="5349240" y="2340720"/>
-            <a:ext cx="1883160" cy="365400"/>
-          </a:xfrm>
-          <a:prstGeom prst="rect">
-            <a:avLst/>
-          </a:prstGeom>
-          <a:noFill/>
-          <a:ln w="0">
-            <a:noFill/>
-          </a:ln>
-        </p:spPr>
-        <p:style>
-          <a:lnRef idx="0"/>
-          <a:fillRef idx="0"/>
-          <a:effectRef idx="0"/>
-          <a:fontRef idx="minor"/>
-        </p:style>
-        <p:txBody>
-          <a:bodyPr lIns="0" rIns="0" tIns="0" bIns="0" anchor="ctr">
-            <a:noAutofit/>
-          </a:bodyPr>
-          <a:p>
-            <a:pPr algn="ctr" defTabSz="914400">
-              <a:lnSpc>
-                <a:spcPct val="100000"/>
-              </a:lnSpc>
-              <a:tabLst>
-                <a:tab algn="l" pos="0"/>
-              </a:tabLst>
-            </a:pPr>
-            <a:r>
-              <a:rPr b="0" lang="zh-CN" sz="1400" spc="-1" strike="noStrike">
-                <a:solidFill>
-                  <a:srgbClr val="1e1f35"/>
-                </a:solidFill>
-                <a:latin typeface="Microsoft JhengHei"/>
-                <a:ea typeface="Microsoft JhengHei"/>
-              </a:rPr>
-              <a:t>會議重點</a:t>
-            </a:r>
-            <a:endParaRPr b="0" lang="en-US" sz="1400" spc="-1" strike="noStrike">
-              <a:solidFill>
-                <a:srgbClr val="000000"/>
-              </a:solidFill>
-              <a:latin typeface="Arial"/>
-            </a:endParaRPr>
-          </a:p>
-        </p:txBody>
-      </p:sp>
-      <p:sp>
-        <p:nvSpPr>
-          <p:cNvPr id="166" name="Text 15"/>
-          <p:cNvSpPr/>
-          <p:nvPr/>
-        </p:nvSpPr>
-        <p:spPr>
-          <a:xfrm>
-            <a:off x="7287840" y="1874520"/>
-            <a:ext cx="219240" cy="914040"/>
-          </a:xfrm>
-          <a:prstGeom prst="rect">
-            <a:avLst/>
-          </a:prstGeom>
-          <a:noFill/>
-          <a:ln w="0">
-            <a:noFill/>
-          </a:ln>
-        </p:spPr>
-        <p:style>
-          <a:lnRef idx="0"/>
-          <a:fillRef idx="0"/>
-          <a:effectRef idx="0"/>
-          <a:fontRef idx="minor"/>
-        </p:style>
-        <p:txBody>
-          <a:bodyPr lIns="0" rIns="0" tIns="0" bIns="0" anchor="ctr">
-            <a:noAutofit/>
-          </a:bodyPr>
-          <a:p>
-            <a:pPr algn="ctr" defTabSz="914400">
-              <a:lnSpc>
-                <a:spcPct val="100000"/>
-              </a:lnSpc>
-              <a:tabLst>
-                <a:tab algn="l" pos="0"/>
-              </a:tabLst>
-            </a:pPr>
-            <a:r>
-              <a:rPr b="1" lang="en-US" sz="2000" spc="-1" strike="noStrike">
-                <a:solidFill>
-                  <a:srgbClr val="8e86f5"/>
-                </a:solidFill>
-                <a:latin typeface="Microsoft JhengHei"/>
-                <a:ea typeface="Microsoft JhengHei"/>
-              </a:rPr>
-              <a:t>›</a:t>
-            </a:r>
-            <a:endParaRPr b="0" lang="en-US" sz="2000" spc="-1" strike="noStrike">
-              <a:solidFill>
-                <a:srgbClr val="000000"/>
-              </a:solidFill>
-              <a:latin typeface="Arial"/>
-            </a:endParaRPr>
-          </a:p>
-        </p:txBody>
-      </p:sp>
-      <p:sp>
-        <p:nvSpPr>
-          <p:cNvPr id="167" name="Shape 16"/>
-          <p:cNvSpPr/>
-          <p:nvPr/>
-        </p:nvSpPr>
-        <p:spPr>
-          <a:xfrm>
-            <a:off x="7507080" y="1874520"/>
-            <a:ext cx="1992960" cy="914040"/>
-          </a:xfrm>
-          <a:prstGeom prst="rect">
-            <a:avLst/>
-          </a:prstGeom>
-          <a:solidFill>
-            <a:srgbClr val="ffffff"/>
-          </a:solidFill>
-          <a:ln w="15875">
-            <a:solidFill>
-              <a:srgbClr val="8e86f5"/>
-            </a:solidFill>
-            <a:prstDash val="dash"/>
-            <a:round/>
-          </a:ln>
-        </p:spPr>
-        <p:style>
-          <a:lnRef idx="0"/>
-          <a:fillRef idx="0"/>
-          <a:effectRef idx="0"/>
-          <a:fontRef idx="minor"/>
-        </p:style>
-        <p:txBody>
-          <a:bodyPr lIns="90000" rIns="90000" tIns="45000" bIns="45000" anchor="t">
-            <a:noAutofit/>
-          </a:bodyPr>
-          <a:p>
-            <a:endParaRPr b="0" lang="en-US" sz="1800" spc="-1" strike="noStrike">
-              <a:solidFill>
-                <a:srgbClr val="000000"/>
-              </a:solidFill>
-              <a:latin typeface="Arial"/>
-            </a:endParaRPr>
-          </a:p>
-        </p:txBody>
-      </p:sp>
-      <p:sp>
-        <p:nvSpPr>
-          <p:cNvPr id="168" name="Text 17"/>
-          <p:cNvSpPr/>
-          <p:nvPr/>
-        </p:nvSpPr>
-        <p:spPr>
-          <a:xfrm>
-            <a:off x="7562160" y="1974960"/>
-            <a:ext cx="1883160" cy="365400"/>
-          </a:xfrm>
-          <a:prstGeom prst="rect">
-            <a:avLst/>
-          </a:prstGeom>
-          <a:noFill/>
-          <a:ln w="0">
-            <a:noFill/>
-          </a:ln>
-        </p:spPr>
-        <p:style>
-          <a:lnRef idx="0"/>
-          <a:fillRef idx="0"/>
-          <a:effectRef idx="0"/>
-          <a:fontRef idx="minor"/>
-        </p:style>
-        <p:txBody>
-          <a:bodyPr lIns="0" rIns="0" tIns="0" bIns="0" anchor="ctr">
-            <a:noAutofit/>
-          </a:bodyPr>
-          <a:p>
-            <a:pPr algn="ctr" defTabSz="914400">
-              <a:lnSpc>
-                <a:spcPct val="100000"/>
-              </a:lnSpc>
-              <a:tabLst>
-                <a:tab algn="l" pos="0"/>
-              </a:tabLst>
-            </a:pPr>
-            <a:r>
-              <a:rPr b="1" lang="en-US" sz="1100" spc="-1" strike="noStrike">
-                <a:solidFill>
-                  <a:srgbClr val="5b4fe8"/>
-                </a:solidFill>
-                <a:latin typeface="Consolas"/>
-                <a:ea typeface="Consolas"/>
-              </a:rPr>
-              <a:t>translate</a:t>
-            </a:r>
-            <a:endParaRPr b="0" lang="en-US" sz="1100" spc="-1" strike="noStrike">
-              <a:solidFill>
-                <a:srgbClr val="000000"/>
-              </a:solidFill>
-              <a:latin typeface="Arial"/>
-            </a:endParaRPr>
-          </a:p>
-        </p:txBody>
-      </p:sp>
-      <p:sp>
-        <p:nvSpPr>
-          <p:cNvPr id="169" name="Text 18"/>
-          <p:cNvSpPr/>
-          <p:nvPr/>
-        </p:nvSpPr>
-        <p:spPr>
-          <a:xfrm>
-            <a:off x="7562160" y="2340720"/>
-            <a:ext cx="1883160" cy="365400"/>
-          </a:xfrm>
-          <a:prstGeom prst="rect">
-            <a:avLst/>
-          </a:prstGeom>
-          <a:noFill/>
-          <a:ln w="0">
-            <a:noFill/>
-          </a:ln>
-        </p:spPr>
-        <p:style>
-          <a:lnRef idx="0"/>
-          <a:fillRef idx="0"/>
-          <a:effectRef idx="0"/>
-          <a:fontRef idx="minor"/>
-        </p:style>
-        <p:txBody>
-          <a:bodyPr lIns="0" rIns="0" tIns="0" bIns="0" anchor="ctr">
-            <a:noAutofit/>
-          </a:bodyPr>
-          <a:p>
-            <a:pPr algn="ctr" defTabSz="914400">
-              <a:lnSpc>
-                <a:spcPct val="100000"/>
-              </a:lnSpc>
-              <a:tabLst>
-                <a:tab algn="l" pos="0"/>
-              </a:tabLst>
-            </a:pPr>
-            <a:r>
-              <a:rPr b="0" lang="zh-CN" sz="1400" spc="-1" strike="noStrike">
-                <a:solidFill>
-                  <a:srgbClr val="1e1f35"/>
-                </a:solidFill>
-                <a:latin typeface="Microsoft JhengHei"/>
-                <a:ea typeface="Microsoft JhengHei"/>
-              </a:rPr>
-              <a:t>可選翻譯</a:t>
-            </a:r>
-            <a:endParaRPr b="0" lang="en-US" sz="1400" spc="-1" strike="noStrike">
-              <a:solidFill>
-                <a:srgbClr val="000000"/>
-              </a:solidFill>
-              <a:latin typeface="Arial"/>
-            </a:endParaRPr>
-          </a:p>
-        </p:txBody>
-      </p:sp>
-      <p:sp>
-        <p:nvSpPr>
-          <p:cNvPr id="170" name="Text 19"/>
-          <p:cNvSpPr/>
-          <p:nvPr/>
-        </p:nvSpPr>
-        <p:spPr>
-          <a:xfrm>
-            <a:off x="9500760" y="1874520"/>
-            <a:ext cx="219240" cy="914040"/>
-          </a:xfrm>
-          <a:prstGeom prst="rect">
-            <a:avLst/>
-          </a:prstGeom>
-          <a:noFill/>
-          <a:ln w="0">
-            <a:noFill/>
-          </a:ln>
-        </p:spPr>
-        <p:style>
-          <a:lnRef idx="0"/>
-          <a:fillRef idx="0"/>
-          <a:effectRef idx="0"/>
-          <a:fontRef idx="minor"/>
-        </p:style>
-        <p:txBody>
-          <a:bodyPr lIns="0" rIns="0" tIns="0" bIns="0" anchor="ctr">
-            <a:noAutofit/>
-          </a:bodyPr>
-          <a:p>
-            <a:pPr algn="ctr" defTabSz="914400">
-              <a:lnSpc>
-                <a:spcPct val="100000"/>
-              </a:lnSpc>
-              <a:tabLst>
-                <a:tab algn="l" pos="0"/>
-              </a:tabLst>
-            </a:pPr>
-            <a:r>
-              <a:rPr b="1" lang="en-US" sz="2000" spc="-1" strike="noStrike">
-                <a:solidFill>
-                  <a:srgbClr val="8e86f5"/>
-                </a:solidFill>
-                <a:latin typeface="Microsoft JhengHei"/>
-                <a:ea typeface="Microsoft JhengHei"/>
-              </a:rPr>
-              <a:t>›</a:t>
-            </a:r>
-            <a:endParaRPr b="0" lang="en-US" sz="2000" spc="-1" strike="noStrike">
-              <a:solidFill>
-                <a:srgbClr val="000000"/>
-              </a:solidFill>
-              <a:latin typeface="Arial"/>
-            </a:endParaRPr>
-          </a:p>
-        </p:txBody>
-      </p:sp>
-      <p:sp>
-        <p:nvSpPr>
-          <p:cNvPr id="171" name="Shape 20"/>
-          <p:cNvSpPr/>
-          <p:nvPr/>
-        </p:nvSpPr>
-        <p:spPr>
-          <a:xfrm>
-            <a:off x="9720000" y="1874520"/>
-            <a:ext cx="1992960" cy="914040"/>
-          </a:xfrm>
-          <a:prstGeom prst="rect">
-            <a:avLst/>
-          </a:prstGeom>
-          <a:solidFill>
-            <a:srgbClr val="f0f2fa"/>
-          </a:solidFill>
-          <a:ln w="9525">
-            <a:solidFill>
-              <a:srgbClr val="dde1f2"/>
-            </a:solidFill>
-            <a:round/>
-          </a:ln>
-        </p:spPr>
-        <p:style>
-          <a:lnRef idx="0"/>
-          <a:fillRef idx="0"/>
-          <a:effectRef idx="0"/>
-          <a:fontRef idx="minor"/>
-        </p:style>
-        <p:txBody>
-          <a:bodyPr lIns="90000" rIns="90000" tIns="45000" bIns="45000" anchor="t">
-            <a:noAutofit/>
-          </a:bodyPr>
-          <a:p>
-            <a:endParaRPr b="0" lang="en-US" sz="1800" spc="-1" strike="noStrike">
-              <a:solidFill>
-                <a:srgbClr val="000000"/>
-              </a:solidFill>
-              <a:latin typeface="Arial"/>
-            </a:endParaRPr>
-          </a:p>
-        </p:txBody>
-      </p:sp>
-      <p:sp>
-        <p:nvSpPr>
-          <p:cNvPr id="172" name="Text 21"/>
-          <p:cNvSpPr/>
-          <p:nvPr/>
-        </p:nvSpPr>
-        <p:spPr>
-          <a:xfrm>
-            <a:off x="9775080" y="1974960"/>
-            <a:ext cx="1883160" cy="365400"/>
-          </a:xfrm>
-          <a:prstGeom prst="rect">
-            <a:avLst/>
-          </a:prstGeom>
-          <a:noFill/>
-          <a:ln w="0">
-            <a:noFill/>
-          </a:ln>
-        </p:spPr>
-        <p:style>
-          <a:lnRef idx="0"/>
-          <a:fillRef idx="0"/>
-          <a:effectRef idx="0"/>
-          <a:fontRef idx="minor"/>
-        </p:style>
-        <p:txBody>
-          <a:bodyPr lIns="0" rIns="0" tIns="0" bIns="0" anchor="ctr">
-            <a:noAutofit/>
-          </a:bodyPr>
-          <a:p>
-            <a:pPr algn="ctr" defTabSz="914400">
-              <a:lnSpc>
-                <a:spcPct val="100000"/>
-              </a:lnSpc>
-              <a:tabLst>
-                <a:tab algn="l" pos="0"/>
-              </a:tabLst>
-            </a:pPr>
-            <a:r>
-              <a:rPr b="1" lang="en-US" sz="1100" spc="-1" strike="noStrike">
-                <a:solidFill>
-                  <a:srgbClr val="5b4fe8"/>
-                </a:solidFill>
-                <a:latin typeface="Consolas"/>
-                <a:ea typeface="Consolas"/>
-              </a:rPr>
-              <a:t>export_markdown</a:t>
-            </a:r>
-            <a:endParaRPr b="0" lang="en-US" sz="1100" spc="-1" strike="noStrike">
-              <a:solidFill>
-                <a:srgbClr val="000000"/>
-              </a:solidFill>
-              <a:latin typeface="Arial"/>
-            </a:endParaRPr>
-          </a:p>
-        </p:txBody>
-      </p:sp>
-      <p:sp>
-        <p:nvSpPr>
-          <p:cNvPr id="173" name="Text 22"/>
-          <p:cNvSpPr/>
-          <p:nvPr/>
-        </p:nvSpPr>
-        <p:spPr>
-          <a:xfrm>
-            <a:off x="9775080" y="2340720"/>
-            <a:ext cx="1883160" cy="365400"/>
-          </a:xfrm>
-          <a:prstGeom prst="rect">
-            <a:avLst/>
-          </a:prstGeom>
-          <a:noFill/>
-          <a:ln w="0">
-            <a:noFill/>
-          </a:ln>
-        </p:spPr>
-        <p:style>
-          <a:lnRef idx="0"/>
-          <a:fillRef idx="0"/>
-          <a:effectRef idx="0"/>
-          <a:fontRef idx="minor"/>
-        </p:style>
-        <p:txBody>
-          <a:bodyPr lIns="0" rIns="0" tIns="0" bIns="0" anchor="ctr">
-            <a:noAutofit/>
-          </a:bodyPr>
-          <a:p>
-            <a:pPr algn="ctr" defTabSz="914400">
-              <a:lnSpc>
-                <a:spcPct val="100000"/>
-              </a:lnSpc>
-              <a:tabLst>
-                <a:tab algn="l" pos="0"/>
-              </a:tabLst>
-            </a:pPr>
-            <a:r>
-              <a:rPr b="0" lang="zh-CN" sz="1400" spc="-1" strike="noStrike">
-                <a:solidFill>
-                  <a:srgbClr val="1e1f35"/>
-                </a:solidFill>
-                <a:latin typeface="Microsoft JhengHei"/>
-                <a:ea typeface="Microsoft JhengHei"/>
-              </a:rPr>
-              <a:t>輸出成果</a:t>
-            </a:r>
-            <a:endParaRPr b="0" lang="en-US" sz="1400" spc="-1" strike="noStrike">
-              <a:solidFill>
-                <a:srgbClr val="000000"/>
-              </a:solidFill>
-              <a:latin typeface="Arial"/>
-            </a:endParaRPr>
-          </a:p>
-        </p:txBody>
-      </p:sp>
-      <p:sp>
-        <p:nvSpPr>
-          <p:cNvPr id="174" name="Text 23"/>
-          <p:cNvSpPr/>
-          <p:nvPr/>
-        </p:nvSpPr>
-        <p:spPr>
-          <a:xfrm>
-            <a:off x="868680" y="2926080"/>
-            <a:ext cx="10606680" cy="365400"/>
-          </a:xfrm>
-          <a:prstGeom prst="rect">
-            <a:avLst/>
-          </a:prstGeom>
-          <a:noFill/>
-          <a:ln w="0">
-            <a:noFill/>
-          </a:ln>
-        </p:spPr>
-        <p:style>
-          <a:lnRef idx="0"/>
-          <a:fillRef idx="0"/>
-          <a:effectRef idx="0"/>
-          <a:fontRef idx="minor"/>
-        </p:style>
-        <p:txBody>
-          <a:bodyPr lIns="0" rIns="0" tIns="0" bIns="0" anchor="ctr">
-            <a:noAutofit/>
-          </a:bodyPr>
-          <a:p>
-            <a:pPr defTabSz="914400">
-              <a:lnSpc>
-                <a:spcPct val="100000"/>
-              </a:lnSpc>
-              <a:tabLst>
-                <a:tab algn="l" pos="0"/>
-              </a:tabLst>
-            </a:pPr>
-            <a:r>
-              <a:rPr b="0" lang="zh-CN" sz="1400" spc="-1" strike="noStrike">
-                <a:solidFill>
-                  <a:srgbClr val="6b6e85"/>
-                </a:solidFill>
-                <a:latin typeface="Microsoft JhengHei"/>
-                <a:ea typeface="Microsoft JhengHei"/>
-              </a:rPr>
-              <a:t>狀態圖示：✓ 完成　● 執行中　○ 待執行　✕ 失敗</a:t>
-            </a:r>
-            <a:endParaRPr b="0" lang="en-US" sz="1400" spc="-1" strike="noStrike">
-              <a:solidFill>
-                <a:srgbClr val="000000"/>
-              </a:solidFill>
-              <a:latin typeface="Arial"/>
-            </a:endParaRPr>
-          </a:p>
-        </p:txBody>
-      </p:sp>
-      <p:sp>
-        <p:nvSpPr>
-          <p:cNvPr id="175" name="Shape 24"/>
-          <p:cNvSpPr/>
-          <p:nvPr/>
-        </p:nvSpPr>
-        <p:spPr>
-          <a:xfrm>
-            <a:off x="868680" y="3429000"/>
-            <a:ext cx="5120280" cy="2377080"/>
-          </a:xfrm>
-          <a:prstGeom prst="rect">
-            <a:avLst/>
-          </a:prstGeom>
-          <a:solidFill>
-            <a:srgbClr val="f0f2fa"/>
-          </a:solidFill>
-          <a:ln w="9525">
-            <a:solidFill>
-              <a:srgbClr val="dde1f2"/>
-            </a:solidFill>
-            <a:round/>
-          </a:ln>
-        </p:spPr>
-        <p:style>
-          <a:lnRef idx="0"/>
-          <a:fillRef idx="0"/>
-          <a:effectRef idx="0"/>
-          <a:fontRef idx="minor"/>
-        </p:style>
-        <p:txBody>
-          <a:bodyPr lIns="90000" rIns="90000" tIns="45000" bIns="45000" anchor="t">
-            <a:noAutofit/>
-          </a:bodyPr>
-          <a:p>
-            <a:endParaRPr b="0" lang="en-US" sz="1800" spc="-1" strike="noStrike">
-              <a:solidFill>
-                <a:srgbClr val="000000"/>
-              </a:solidFill>
-              <a:latin typeface="Arial"/>
-            </a:endParaRPr>
-          </a:p>
-        </p:txBody>
-      </p:sp>
-      <p:sp>
-        <p:nvSpPr>
-          <p:cNvPr id="176" name="Shape 25"/>
-          <p:cNvSpPr/>
-          <p:nvPr/>
-        </p:nvSpPr>
-        <p:spPr>
-          <a:xfrm>
-            <a:off x="868680" y="3429000"/>
-            <a:ext cx="68400" cy="2377080"/>
-          </a:xfrm>
-          <a:prstGeom prst="rect">
-            <a:avLst/>
-          </a:prstGeom>
-          <a:solidFill>
-            <a:srgbClr val="5b4fe8"/>
-          </a:solidFill>
-          <a:ln w="0">
-            <a:noFill/>
-          </a:ln>
-        </p:spPr>
-        <p:style>
-          <a:lnRef idx="0"/>
-          <a:fillRef idx="0"/>
-          <a:effectRef idx="0"/>
-          <a:fontRef idx="minor"/>
-        </p:style>
-        <p:txBody>
-          <a:bodyPr lIns="90000" rIns="90000" tIns="45000" bIns="45000" anchor="t">
-            <a:noAutofit/>
-          </a:bodyPr>
-          <a:p>
-            <a:endParaRPr b="0" lang="en-US" sz="1800" spc="-1" strike="noStrike">
-              <a:solidFill>
-                <a:srgbClr val="ffffff"/>
-              </a:solidFill>
-              <a:latin typeface="Arial"/>
-            </a:endParaRPr>
-          </a:p>
-        </p:txBody>
-      </p:sp>
-      <p:sp>
-        <p:nvSpPr>
-          <p:cNvPr id="177" name="Text 26"/>
-          <p:cNvSpPr/>
-          <p:nvPr/>
-        </p:nvSpPr>
-        <p:spPr>
-          <a:xfrm>
-            <a:off x="1124640" y="3575160"/>
-            <a:ext cx="4663080" cy="365400"/>
-          </a:xfrm>
-          <a:prstGeom prst="rect">
-            <a:avLst/>
-          </a:prstGeom>
-          <a:noFill/>
-          <a:ln w="0">
-            <a:noFill/>
-          </a:ln>
-        </p:spPr>
-        <p:style>
-          <a:lnRef idx="0"/>
-          <a:fillRef idx="0"/>
-          <a:effectRef idx="0"/>
-          <a:fontRef idx="minor"/>
-        </p:style>
-        <p:txBody>
-          <a:bodyPr lIns="0" rIns="0" tIns="0" bIns="0" anchor="ctr">
-            <a:noAutofit/>
-          </a:bodyPr>
-          <a:p>
-            <a:pPr defTabSz="914400">
-              <a:lnSpc>
-                <a:spcPct val="100000"/>
-              </a:lnSpc>
-              <a:tabLst>
-                <a:tab algn="l" pos="0"/>
-              </a:tabLst>
-            </a:pPr>
-            <a:r>
-              <a:rPr b="1" lang="zh-CN" sz="1800" spc="-1" strike="noStrike">
-                <a:solidFill>
-                  <a:srgbClr val="5b4fe8"/>
-                </a:solidFill>
-                <a:latin typeface="Microsoft JhengHei"/>
-                <a:ea typeface="Microsoft JhengHei"/>
-              </a:rPr>
-              <a:t>操作</a:t>
-            </a:r>
-            <a:endParaRPr b="0" lang="en-US" sz="1800" spc="-1" strike="noStrike">
-              <a:solidFill>
-                <a:srgbClr val="000000"/>
-              </a:solidFill>
-              <a:latin typeface="Arial"/>
-            </a:endParaRPr>
-          </a:p>
-        </p:txBody>
-      </p:sp>
-      <p:sp>
-        <p:nvSpPr>
-          <p:cNvPr id="178" name="Text 27"/>
-          <p:cNvSpPr/>
-          <p:nvPr/>
-        </p:nvSpPr>
-        <p:spPr>
-          <a:xfrm>
-            <a:off x="1124640" y="3996000"/>
-            <a:ext cx="4663080" cy="1663920"/>
+          <p:cNvPr id="150" name="Text 10"/>
+          <p:cNvSpPr/>
+          <p:nvPr/>
+        </p:nvSpPr>
+        <p:spPr>
+          <a:xfrm>
+            <a:off x="1124640" y="4407480"/>
+            <a:ext cx="10058040" cy="978120"/>
           </a:xfrm>
           <a:prstGeom prst="rect">
             <a:avLst/>
@@ -5056,405 +4016,76 @@
               <a:buChar char=""/>
             </a:pPr>
             <a:r>
-              <a:rPr b="0" lang="zh-CN" sz="1400" spc="-1" strike="noStrike">
+              <a:rPr b="0" lang="zh-CN" sz="1550" spc="-1" strike="noStrike">
                 <a:solidFill>
                   <a:srgbClr val="1e1f35"/>
                 </a:solidFill>
                 <a:latin typeface="Microsoft JhengHei"/>
                 <a:ea typeface="Microsoft JhengHei"/>
               </a:rPr>
-              <a:t>先完成前一頁的文件分析</a:t>
-            </a:r>
-            <a:endParaRPr b="0" lang="en-US" sz="1400" spc="-1" strike="noStrike">
-              <a:solidFill>
-                <a:srgbClr val="000000"/>
-              </a:solidFill>
-              <a:latin typeface="Arial"/>
-            </a:endParaRPr>
-          </a:p>
-          <a:p>
-            <a:pPr marL="343080" indent="-343080" defTabSz="914400">
-              <a:lnSpc>
-                <a:spcPct val="122000"/>
-              </a:lnSpc>
-              <a:buClr>
-                <a:srgbClr val="1e1f35"/>
-              </a:buClr>
-              <a:buFont typeface="Symbol" charset="2"/>
-              <a:buChar char=""/>
-            </a:pPr>
-            <a:r>
-              <a:rPr b="0" lang="zh-CN" sz="1400" spc="-1" strike="noStrike">
+              <a:t>程式碼、</a:t>
+            </a:r>
+            <a:r>
+              <a:rPr b="0" lang="en-US" sz="1550" spc="-1" strike="noStrike">
                 <a:solidFill>
                   <a:srgbClr val="1e1f35"/>
                 </a:solidFill>
                 <a:latin typeface="Microsoft JhengHei"/>
                 <a:ea typeface="Microsoft JhengHei"/>
               </a:rPr>
-              <a:t>需要英文版時勾選「加入英文翻譯」</a:t>
-            </a:r>
-            <a:endParaRPr b="0" lang="en-US" sz="1400" spc="-1" strike="noStrike">
-              <a:solidFill>
-                <a:srgbClr val="000000"/>
-              </a:solidFill>
-              <a:latin typeface="Arial"/>
-            </a:endParaRPr>
-          </a:p>
-          <a:p>
-            <a:pPr marL="343080" indent="-343080" defTabSz="914400">
-              <a:lnSpc>
-                <a:spcPct val="122000"/>
-              </a:lnSpc>
-              <a:buClr>
-                <a:srgbClr val="1e1f35"/>
-              </a:buClr>
-              <a:buFont typeface="Symbol" charset="2"/>
-              <a:buChar char=""/>
-            </a:pPr>
-            <a:r>
-              <a:rPr b="0" lang="zh-CN" sz="1400" spc="-1" strike="noStrike">
+              <a:t>SQL</a:t>
+            </a:r>
+            <a:r>
+              <a:rPr b="0" lang="zh-CN" sz="1550" spc="-1" strike="noStrike">
                 <a:solidFill>
                   <a:srgbClr val="1e1f35"/>
                 </a:solidFill>
                 <a:latin typeface="Microsoft JhengHei"/>
                 <a:ea typeface="Microsoft JhengHei"/>
               </a:rPr>
-              <a:t>按「建立文件會議包」</a:t>
-            </a:r>
-            <a:endParaRPr b="0" lang="en-US" sz="1400" spc="-1" strike="noStrike">
-              <a:solidFill>
-                <a:srgbClr val="000000"/>
-              </a:solidFill>
-              <a:latin typeface="Arial"/>
-            </a:endParaRPr>
-          </a:p>
-          <a:p>
-            <a:pPr marL="343080" indent="-343080" defTabSz="914400">
-              <a:lnSpc>
-                <a:spcPct val="122000"/>
-              </a:lnSpc>
-              <a:buClr>
-                <a:srgbClr val="1e1f35"/>
-              </a:buClr>
-              <a:buFont typeface="Symbol" charset="2"/>
-              <a:buChar char=""/>
-            </a:pPr>
-            <a:r>
-              <a:rPr b="0" lang="zh-CN" sz="1400" spc="-1" strike="noStrike">
+              <a:t>、</a:t>
+            </a:r>
+            <a:r>
+              <a:rPr b="0" lang="en-US" sz="1550" spc="-1" strike="noStrike">
                 <a:solidFill>
                   <a:srgbClr val="1e1f35"/>
                 </a:solidFill>
                 <a:latin typeface="Microsoft JhengHei"/>
                 <a:ea typeface="Microsoft JhengHei"/>
               </a:rPr>
-              <a:t>執行中可取消；失敗可重新執行</a:t>
-            </a:r>
-            <a:endParaRPr b="0" lang="en-US" sz="1400" spc="-1" strike="noStrike">
-              <a:solidFill>
-                <a:srgbClr val="000000"/>
-              </a:solidFill>
-              <a:latin typeface="Arial"/>
-            </a:endParaRPr>
-          </a:p>
-        </p:txBody>
-      </p:sp>
-      <p:sp>
-        <p:nvSpPr>
-          <p:cNvPr id="179" name="Shape 28"/>
-          <p:cNvSpPr/>
-          <p:nvPr/>
-        </p:nvSpPr>
-        <p:spPr>
-          <a:xfrm>
-            <a:off x="6263640" y="3429000"/>
-            <a:ext cx="5120280" cy="2377080"/>
-          </a:xfrm>
-          <a:prstGeom prst="rect">
-            <a:avLst/>
-          </a:prstGeom>
-          <a:solidFill>
-            <a:srgbClr val="f0f2fa"/>
-          </a:solidFill>
-          <a:ln w="9525">
-            <a:solidFill>
-              <a:srgbClr val="dde1f2"/>
-            </a:solidFill>
-            <a:round/>
-          </a:ln>
-        </p:spPr>
-        <p:style>
-          <a:lnRef idx="0"/>
-          <a:fillRef idx="0"/>
-          <a:effectRef idx="0"/>
-          <a:fontRef idx="minor"/>
-        </p:style>
-        <p:txBody>
-          <a:bodyPr lIns="90000" rIns="90000" tIns="45000" bIns="45000" anchor="t">
-            <a:noAutofit/>
-          </a:bodyPr>
-          <a:p>
-            <a:endParaRPr b="0" lang="en-US" sz="1800" spc="-1" strike="noStrike">
-              <a:solidFill>
-                <a:srgbClr val="000000"/>
-              </a:solidFill>
-              <a:latin typeface="Arial"/>
-            </a:endParaRPr>
-          </a:p>
-        </p:txBody>
-      </p:sp>
-      <p:sp>
-        <p:nvSpPr>
-          <p:cNvPr id="180" name="Shape 29"/>
-          <p:cNvSpPr/>
-          <p:nvPr/>
-        </p:nvSpPr>
-        <p:spPr>
-          <a:xfrm>
-            <a:off x="6263640" y="3429000"/>
-            <a:ext cx="68400" cy="2377080"/>
-          </a:xfrm>
-          <a:prstGeom prst="rect">
-            <a:avLst/>
-          </a:prstGeom>
-          <a:solidFill>
-            <a:srgbClr val="5b4fe8"/>
-          </a:solidFill>
-          <a:ln w="0">
-            <a:noFill/>
-          </a:ln>
-        </p:spPr>
-        <p:style>
-          <a:lnRef idx="0"/>
-          <a:fillRef idx="0"/>
-          <a:effectRef idx="0"/>
-          <a:fontRef idx="minor"/>
-        </p:style>
-        <p:txBody>
-          <a:bodyPr lIns="90000" rIns="90000" tIns="45000" bIns="45000" anchor="t">
-            <a:noAutofit/>
-          </a:bodyPr>
-          <a:p>
-            <a:endParaRPr b="0" lang="en-US" sz="1800" spc="-1" strike="noStrike">
-              <a:solidFill>
-                <a:srgbClr val="ffffff"/>
-              </a:solidFill>
-              <a:latin typeface="Arial"/>
-            </a:endParaRPr>
-          </a:p>
-        </p:txBody>
-      </p:sp>
-      <p:sp>
-        <p:nvSpPr>
-          <p:cNvPr id="181" name="Text 30"/>
-          <p:cNvSpPr/>
-          <p:nvPr/>
-        </p:nvSpPr>
-        <p:spPr>
-          <a:xfrm>
-            <a:off x="6519600" y="3575160"/>
-            <a:ext cx="4663080" cy="365400"/>
-          </a:xfrm>
-          <a:prstGeom prst="rect">
-            <a:avLst/>
-          </a:prstGeom>
-          <a:noFill/>
-          <a:ln w="0">
-            <a:noFill/>
-          </a:ln>
-        </p:spPr>
-        <p:style>
-          <a:lnRef idx="0"/>
-          <a:fillRef idx="0"/>
-          <a:effectRef idx="0"/>
-          <a:fontRef idx="minor"/>
-        </p:style>
-        <p:txBody>
-          <a:bodyPr lIns="0" rIns="0" tIns="0" bIns="0" anchor="ctr">
-            <a:noAutofit/>
-          </a:bodyPr>
-          <a:p>
-            <a:pPr defTabSz="914400">
-              <a:lnSpc>
-                <a:spcPct val="100000"/>
-              </a:lnSpc>
-              <a:tabLst>
-                <a:tab algn="l" pos="0"/>
-              </a:tabLst>
-            </a:pPr>
-            <a:r>
-              <a:rPr b="1" lang="zh-CN" sz="1800" spc="-1" strike="noStrike">
-                <a:solidFill>
-                  <a:srgbClr val="5b4fe8"/>
-                </a:solidFill>
-                <a:latin typeface="Microsoft JhengHei"/>
-                <a:ea typeface="Microsoft JhengHei"/>
-              </a:rPr>
-              <a:t>安全設計</a:t>
-            </a:r>
-            <a:endParaRPr b="0" lang="en-US" sz="1800" spc="-1" strike="noStrike">
-              <a:solidFill>
-                <a:srgbClr val="000000"/>
-              </a:solidFill>
-              <a:latin typeface="Arial"/>
-            </a:endParaRPr>
-          </a:p>
-        </p:txBody>
-      </p:sp>
-      <p:sp>
-        <p:nvSpPr>
-          <p:cNvPr id="182" name="Text 31"/>
-          <p:cNvSpPr/>
-          <p:nvPr/>
-        </p:nvSpPr>
-        <p:spPr>
-          <a:xfrm>
-            <a:off x="6519600" y="3996000"/>
-            <a:ext cx="4663080" cy="1663920"/>
-          </a:xfrm>
-          <a:prstGeom prst="rect">
-            <a:avLst/>
-          </a:prstGeom>
-          <a:noFill/>
-          <a:ln w="0">
-            <a:noFill/>
-          </a:ln>
-        </p:spPr>
-        <p:style>
-          <a:lnRef idx="0"/>
-          <a:fillRef idx="0"/>
-          <a:effectRef idx="0"/>
-          <a:fontRef idx="minor"/>
-        </p:style>
-        <p:txBody>
-          <a:bodyPr lIns="0" rIns="0" tIns="0" bIns="0" anchor="t">
-            <a:noAutofit/>
-          </a:bodyPr>
-          <a:p>
-            <a:pPr marL="343080" indent="-343080" defTabSz="914400">
-              <a:lnSpc>
-                <a:spcPct val="122000"/>
-              </a:lnSpc>
-              <a:buClr>
-                <a:srgbClr val="1e1f35"/>
-              </a:buClr>
-              <a:buFont typeface="Symbol" charset="2"/>
-              <a:buChar char=""/>
-            </a:pPr>
-            <a:r>
-              <a:rPr b="0" lang="zh-CN" sz="1400" spc="-1" strike="noStrike">
+              <a:t>JSON Key</a:t>
+            </a:r>
+            <a:r>
+              <a:rPr b="0" lang="zh-CN" sz="1550" spc="-1" strike="noStrike">
                 <a:solidFill>
                   <a:srgbClr val="1e1f35"/>
                 </a:solidFill>
                 <a:latin typeface="Microsoft JhengHei"/>
                 <a:ea typeface="Microsoft JhengHei"/>
               </a:rPr>
-              <a:t>同一次失敗最多重試 </a:t>
-            </a:r>
-            <a:r>
-              <a:rPr b="0" lang="en-US" sz="1400" spc="-1" strike="noStrike">
+              <a:t>、</a:t>
+            </a:r>
+            <a:r>
+              <a:rPr b="0" lang="en-US" sz="1550" spc="-1" strike="noStrike">
                 <a:solidFill>
                   <a:srgbClr val="1e1f35"/>
                 </a:solidFill>
                 <a:latin typeface="Microsoft JhengHei"/>
                 <a:ea typeface="Microsoft JhengHei"/>
               </a:rPr>
-              <a:t>3 </a:t>
-            </a:r>
-            <a:r>
-              <a:rPr b="0" lang="zh-CN" sz="1400" spc="-1" strike="noStrike">
+              <a:t>API path </a:t>
+            </a:r>
+            <a:r>
+              <a:rPr b="0" lang="zh-CN" sz="1550" spc="-1" strike="noStrike">
                 <a:solidFill>
                   <a:srgbClr val="1e1f35"/>
                 </a:solidFill>
                 <a:latin typeface="Microsoft JhengHei"/>
                 <a:ea typeface="Microsoft JhengHei"/>
               </a:rPr>
-              <a:t>次</a:t>
-            </a:r>
-            <a:endParaRPr b="0" lang="en-US" sz="1400" spc="-1" strike="noStrike">
-              <a:solidFill>
-                <a:srgbClr val="000000"/>
-              </a:solidFill>
-              <a:latin typeface="Arial"/>
-            </a:endParaRPr>
-          </a:p>
-          <a:p>
-            <a:pPr marL="343080" indent="-343080" defTabSz="914400">
-              <a:lnSpc>
-                <a:spcPct val="122000"/>
-              </a:lnSpc>
-              <a:buClr>
-                <a:srgbClr val="1e1f35"/>
-              </a:buClr>
-              <a:buFont typeface="Symbol" charset="2"/>
-              <a:buChar char=""/>
-            </a:pPr>
-            <a:r>
-              <a:rPr b="0" lang="zh-CN" sz="1400" spc="-1" strike="noStrike">
-                <a:solidFill>
-                  <a:srgbClr val="1e1f35"/>
-                </a:solidFill>
-                <a:latin typeface="Microsoft JhengHei"/>
-                <a:ea typeface="Microsoft JhengHei"/>
-              </a:rPr>
-              <a:t>中途失敗保留「部分成果」</a:t>
-            </a:r>
-            <a:endParaRPr b="0" lang="en-US" sz="1400" spc="-1" strike="noStrike">
-              <a:solidFill>
-                <a:srgbClr val="000000"/>
-              </a:solidFill>
-              <a:latin typeface="Arial"/>
-            </a:endParaRPr>
-          </a:p>
-          <a:p>
-            <a:pPr marL="343080" indent="-343080" defTabSz="914400">
-              <a:lnSpc>
-                <a:spcPct val="122000"/>
-              </a:lnSpc>
-              <a:buClr>
-                <a:srgbClr val="1e1f35"/>
-              </a:buClr>
-              <a:buFont typeface="Symbol" charset="2"/>
-              <a:buChar char=""/>
-            </a:pPr>
-            <a:r>
-              <a:rPr b="0" lang="zh-CN" sz="1400" spc="-1" strike="noStrike">
-                <a:solidFill>
-                  <a:srgbClr val="1e1f35"/>
-                </a:solidFill>
-                <a:latin typeface="Microsoft JhengHei"/>
-                <a:ea typeface="Microsoft JhengHei"/>
-              </a:rPr>
-              <a:t>標示抽樣涵蓋範圍與來源定位</a:t>
-            </a:r>
-            <a:endParaRPr b="0" lang="en-US" sz="1400" spc="-1" strike="noStrike">
-              <a:solidFill>
-                <a:srgbClr val="000000"/>
-              </a:solidFill>
-              <a:latin typeface="Arial"/>
-            </a:endParaRPr>
-          </a:p>
-          <a:p>
-            <a:pPr marL="343080" indent="-343080" defTabSz="914400">
-              <a:lnSpc>
-                <a:spcPct val="122000"/>
-              </a:lnSpc>
-              <a:buClr>
-                <a:srgbClr val="1e1f35"/>
-              </a:buClr>
-              <a:buFont typeface="Symbol" charset="2"/>
-              <a:buChar char=""/>
-            </a:pPr>
-            <a:r>
-              <a:rPr b="0" lang="zh-CN" sz="1400" spc="-1" strike="noStrike">
-                <a:solidFill>
-                  <a:srgbClr val="1e1f35"/>
-                </a:solidFill>
-                <a:latin typeface="Microsoft JhengHei"/>
-                <a:ea typeface="Microsoft JhengHei"/>
-              </a:rPr>
-              <a:t>程式被強制關閉可直接重新執行</a:t>
-            </a:r>
-            <a:endParaRPr b="0" lang="en-US" sz="1400" spc="-1" strike="noStrike">
+              <a:t>與檔名不會被翻譯</a:t>
+            </a:r>
+            <a:endParaRPr b="0" lang="en-US" sz="1550" spc="-1" strike="noStrike">
               <a:solidFill>
                 <a:srgbClr val="000000"/>
               </a:solidFill>
@@ -5502,7 +4133,7 @@
       </p:grpSpPr>
       <p:sp>
         <p:nvSpPr>
-          <p:cNvPr id="183" name="Shape 0"/>
+          <p:cNvPr id="151" name="Shape 0"/>
           <p:cNvSpPr/>
           <p:nvPr/>
         </p:nvSpPr>
@@ -5543,7 +4174,7 @@
       </p:sp>
       <p:sp>
         <p:nvSpPr>
-          <p:cNvPr id="184" name="Shape 1"/>
+          <p:cNvPr id="152" name="Shape 1"/>
           <p:cNvSpPr/>
           <p:nvPr/>
         </p:nvSpPr>
@@ -5584,7 +4215,7 @@
       </p:sp>
       <p:sp>
         <p:nvSpPr>
-          <p:cNvPr id="185" name="Text 2"/>
+          <p:cNvPr id="153" name="Text 2"/>
           <p:cNvSpPr/>
           <p:nvPr/>
         </p:nvSpPr>
@@ -5628,7 +4259,7 @@
                 <a:latin typeface="Microsoft JhengHei"/>
                 <a:ea typeface="Microsoft JhengHei"/>
               </a:rPr>
-              <a:t>清理 </a:t>
+              <a:t>切換 </a:t>
             </a:r>
             <a:r>
               <a:rPr b="1" lang="en-US" sz="2800" spc="-1" strike="noStrike">
@@ -5638,17 +4269,7 @@
                 <a:latin typeface="Microsoft JhengHei"/>
                 <a:ea typeface="Microsoft JhengHei"/>
               </a:rPr>
-              <a:t>Workflow </a:t>
-            </a:r>
-            <a:r>
-              <a:rPr b="1" lang="zh-CN" sz="2800" spc="-1" strike="noStrike">
-                <a:solidFill>
-                  <a:srgbClr val="ffffff"/>
-                </a:solidFill>
-                <a:latin typeface="Microsoft JhengHei"/>
-                <a:ea typeface="Microsoft JhengHei"/>
-              </a:rPr>
-              <a:t>歷史</a:t>
+              <a:t>Skin</a:t>
             </a:r>
             <a:endParaRPr b="0" lang="en-US" sz="2800" spc="-1" strike="noStrike">
               <a:solidFill>
@@ -5661,7 +4282,7 @@
       </p:sp>
       <p:sp>
         <p:nvSpPr>
-          <p:cNvPr id="186" name="Text 3"/>
+          <p:cNvPr id="154" name="Text 3"/>
           <p:cNvSpPr/>
           <p:nvPr/>
         </p:nvSpPr>
@@ -5705,7 +4326,7 @@
                 <a:latin typeface="Microsoft JhengHei"/>
                 <a:ea typeface="Microsoft JhengHei"/>
               </a:rPr>
-              <a:t>成果會累積在本機，可自行清理</a:t>
+              <a:t>可依個人偏好更換貓咪外觀</a:t>
             </a:r>
             <a:endParaRPr b="0" lang="en-US" sz="1900" spc="-1" strike="noStrike">
               <a:solidFill>
@@ -5718,7 +4339,7 @@
       </p:sp>
       <p:sp>
         <p:nvSpPr>
-          <p:cNvPr id="187" name="Shape 4"/>
+          <p:cNvPr id="155" name="Shape 4"/>
           <p:cNvSpPr/>
           <p:nvPr/>
         </p:nvSpPr>
@@ -5759,7 +4380,7 @@
       </p:sp>
       <p:sp>
         <p:nvSpPr>
-          <p:cNvPr id="188" name="Text 5"/>
+          <p:cNvPr id="156" name="Text 5"/>
           <p:cNvSpPr/>
           <p:nvPr/>
         </p:nvSpPr>
@@ -5816,7 +4437,7 @@
       </p:sp>
       <p:sp>
         <p:nvSpPr>
-          <p:cNvPr id="189" name="Text 6"/>
+          <p:cNvPr id="157" name="Text 6"/>
           <p:cNvSpPr/>
           <p:nvPr/>
         </p:nvSpPr>
@@ -5860,27 +4481,7 @@
                 <a:latin typeface="Microsoft JhengHei"/>
                 <a:ea typeface="Microsoft JhengHei"/>
               </a:rPr>
-              <a:t>在文件助手上方按「清理 </a:t>
-            </a:r>
-            <a:r>
-              <a:rPr b="0" lang="en-US" sz="1650" spc="-1" strike="noStrike">
-                <a:solidFill>
-                  <a:srgbClr val="1e1f35"/>
-                </a:solidFill>
-                <a:latin typeface="Microsoft JhengHei"/>
-                <a:ea typeface="Microsoft JhengHei"/>
-              </a:rPr>
-              <a:t>Workflow </a:t>
-            </a:r>
-            <a:r>
-              <a:rPr b="0" lang="zh-CN" sz="1650" spc="-1" strike="noStrike">
-                <a:solidFill>
-                  <a:srgbClr val="1e1f35"/>
-                </a:solidFill>
-                <a:latin typeface="Microsoft JhengHei"/>
-                <a:ea typeface="Microsoft JhengHei"/>
-              </a:rPr>
-              <a:t>歷史」。</a:t>
+              <a:t>右鍵點選桌面貓咪。</a:t>
             </a:r>
             <a:endParaRPr b="0" lang="en-US" sz="1650" spc="-1" strike="noStrike">
               <a:solidFill>
@@ -5893,7 +4494,7 @@
       </p:sp>
       <p:sp>
         <p:nvSpPr>
-          <p:cNvPr id="190" name="Shape 7"/>
+          <p:cNvPr id="158" name="Shape 7"/>
           <p:cNvSpPr/>
           <p:nvPr/>
         </p:nvSpPr>
@@ -5934,7 +4535,7 @@
       </p:sp>
       <p:sp>
         <p:nvSpPr>
-          <p:cNvPr id="191" name="Text 8"/>
+          <p:cNvPr id="159" name="Text 8"/>
           <p:cNvSpPr/>
           <p:nvPr/>
         </p:nvSpPr>
@@ -5991,7 +4592,7 @@
       </p:sp>
       <p:sp>
         <p:nvSpPr>
-          <p:cNvPr id="192" name="Text 9"/>
+          <p:cNvPr id="160" name="Text 9"/>
           <p:cNvSpPr/>
           <p:nvPr/>
         </p:nvSpPr>
@@ -6035,7 +4636,7 @@
                 <a:latin typeface="Microsoft JhengHei"/>
                 <a:ea typeface="Microsoft JhengHei"/>
               </a:rPr>
-              <a:t>確認提示後，清除已結束的 </a:t>
+              <a:t>開啟「切換 </a:t>
             </a:r>
             <a:r>
               <a:rPr b="0" lang="en-US" sz="1650" spc="-1" strike="noStrike">
@@ -6045,7 +4646,7 @@
                 <a:latin typeface="Microsoft JhengHei"/>
                 <a:ea typeface="Microsoft JhengHei"/>
               </a:rPr>
-              <a:t>Run </a:t>
+              <a:t>Skin</a:t>
             </a:r>
             <a:r>
               <a:rPr b="0" lang="zh-CN" sz="1650" spc="-1" strike="noStrike">
@@ -6055,27 +4656,7 @@
                 <a:latin typeface="Microsoft JhengHei"/>
                 <a:ea typeface="Microsoft JhengHei"/>
               </a:rPr>
-              <a:t>與 </a:t>
-            </a:r>
-            <a:r>
-              <a:rPr b="0" lang="en-US" sz="1650" spc="-1" strike="noStrike">
-                <a:solidFill>
-                  <a:srgbClr val="1e1f35"/>
-                </a:solidFill>
-                <a:latin typeface="Microsoft JhengHei"/>
-                <a:ea typeface="Microsoft JhengHei"/>
-              </a:rPr>
-              <a:t>Markdown </a:t>
-            </a:r>
-            <a:r>
-              <a:rPr b="0" lang="zh-CN" sz="1650" spc="-1" strike="noStrike">
-                <a:solidFill>
-                  <a:srgbClr val="1e1f35"/>
-                </a:solidFill>
-                <a:latin typeface="Microsoft JhengHei"/>
-                <a:ea typeface="Microsoft JhengHei"/>
-              </a:rPr>
-              <a:t>成果。</a:t>
+              <a:t>」子選單。</a:t>
             </a:r>
             <a:endParaRPr b="0" lang="en-US" sz="1650" spc="-1" strike="noStrike">
               <a:solidFill>
@@ -6088,7 +4669,7 @@
       </p:sp>
       <p:sp>
         <p:nvSpPr>
-          <p:cNvPr id="193" name="Shape 10"/>
+          <p:cNvPr id="161" name="Shape 10"/>
           <p:cNvSpPr/>
           <p:nvPr/>
         </p:nvSpPr>
@@ -6129,7 +4710,7 @@
       </p:sp>
       <p:sp>
         <p:nvSpPr>
-          <p:cNvPr id="194" name="Text 11"/>
+          <p:cNvPr id="162" name="Text 11"/>
           <p:cNvSpPr/>
           <p:nvPr/>
         </p:nvSpPr>
@@ -6186,7 +4767,7 @@
       </p:sp>
       <p:sp>
         <p:nvSpPr>
-          <p:cNvPr id="195" name="Text 12"/>
+          <p:cNvPr id="163" name="Text 12"/>
           <p:cNvSpPr/>
           <p:nvPr/>
         </p:nvSpPr>
@@ -6230,7 +4811,67 @@
                 <a:latin typeface="Microsoft JhengHei"/>
                 <a:ea typeface="Microsoft JhengHei"/>
               </a:rPr>
-              <a:t>執行中的工作會保留，不會被清掉。</a:t>
+              <a:t>選擇 </a:t>
+            </a:r>
+            <a:r>
+              <a:rPr b="0" lang="en-US" sz="1650" spc="-1" strike="noStrike">
+                <a:solidFill>
+                  <a:srgbClr val="1e1f35"/>
+                </a:solidFill>
+                <a:latin typeface="Microsoft JhengHei"/>
+                <a:ea typeface="Microsoft JhengHei"/>
+              </a:rPr>
+              <a:t>bluecat</a:t>
+            </a:r>
+            <a:r>
+              <a:rPr b="0" lang="zh-CN" sz="1650" spc="-1" strike="noStrike">
+                <a:solidFill>
+                  <a:srgbClr val="1e1f35"/>
+                </a:solidFill>
+                <a:latin typeface="Microsoft JhengHei"/>
+                <a:ea typeface="Microsoft JhengHei"/>
+              </a:rPr>
+              <a:t>、</a:t>
+            </a:r>
+            <a:r>
+              <a:rPr b="0" lang="en-US" sz="1650" spc="-1" strike="noStrike">
+                <a:solidFill>
+                  <a:srgbClr val="1e1f35"/>
+                </a:solidFill>
+                <a:latin typeface="Microsoft JhengHei"/>
+                <a:ea typeface="Microsoft JhengHei"/>
+              </a:rPr>
+              <a:t>cowcat </a:t>
+            </a:r>
+            <a:r>
+              <a:rPr b="0" lang="zh-CN" sz="1650" spc="-1" strike="noStrike">
+                <a:solidFill>
+                  <a:srgbClr val="1e1f35"/>
+                </a:solidFill>
+                <a:latin typeface="Microsoft JhengHei"/>
+                <a:ea typeface="Microsoft JhengHei"/>
+              </a:rPr>
+              <a:t>或 </a:t>
+            </a:r>
+            <a:r>
+              <a:rPr b="0" lang="en-US" sz="1650" spc="-1" strike="noStrike">
+                <a:solidFill>
+                  <a:srgbClr val="1e1f35"/>
+                </a:solidFill>
+                <a:latin typeface="Microsoft JhengHei"/>
+                <a:ea typeface="Microsoft JhengHei"/>
+              </a:rPr>
+              <a:t>ragdollcat</a:t>
+            </a:r>
+            <a:r>
+              <a:rPr b="0" lang="zh-CN" sz="1650" spc="-1" strike="noStrike">
+                <a:solidFill>
+                  <a:srgbClr val="1e1f35"/>
+                </a:solidFill>
+                <a:latin typeface="Microsoft JhengHei"/>
+                <a:ea typeface="Microsoft JhengHei"/>
+              </a:rPr>
+              <a:t>。</a:t>
             </a:r>
             <a:endParaRPr b="0" lang="en-US" sz="1650" spc="-1" strike="noStrike">
               <a:solidFill>
@@ -6243,7 +4884,7 @@
       </p:sp>
       <p:sp>
         <p:nvSpPr>
-          <p:cNvPr id="196" name="Shape 13"/>
+          <p:cNvPr id="164" name="Shape 13"/>
           <p:cNvSpPr/>
           <p:nvPr/>
         </p:nvSpPr>
@@ -6284,7 +4925,7 @@
       </p:sp>
       <p:sp>
         <p:nvSpPr>
-          <p:cNvPr id="197" name="Text 14"/>
+          <p:cNvPr id="165" name="Text 14"/>
           <p:cNvSpPr/>
           <p:nvPr/>
         </p:nvSpPr>
@@ -6328,7 +4969,7 @@
                 <a:latin typeface="Microsoft JhengHei"/>
                 <a:ea typeface="Microsoft JhengHei"/>
               </a:rPr>
-              <a:t>系統另會自動保留最近的執行紀錄，不需每次手動清理。</a:t>
+              <a:t>切換後立即生效，重新啟動後也會保留最後一次選擇。</a:t>
             </a:r>
             <a:endParaRPr b="0" lang="en-US" sz="1350" spc="-1" strike="noStrike">
               <a:solidFill>
@@ -6378,7 +5019,7 @@
       </p:grpSpPr>
       <p:sp>
         <p:nvSpPr>
-          <p:cNvPr id="198" name="Shape 0"/>
+          <p:cNvPr id="166" name="Shape 0"/>
           <p:cNvSpPr/>
           <p:nvPr/>
         </p:nvSpPr>
@@ -6419,7 +5060,7 @@
       </p:sp>
       <p:sp>
         <p:nvSpPr>
-          <p:cNvPr id="199" name="Shape 1"/>
+          <p:cNvPr id="167" name="Shape 1"/>
           <p:cNvSpPr/>
           <p:nvPr/>
         </p:nvSpPr>
@@ -6460,7 +5101,7 @@
       </p:sp>
       <p:sp>
         <p:nvSpPr>
-          <p:cNvPr id="200" name="Text 2"/>
+          <p:cNvPr id="168" name="Text 2"/>
           <p:cNvSpPr/>
           <p:nvPr/>
         </p:nvSpPr>
@@ -6504,27 +5145,7 @@
                 <a:latin typeface="Microsoft JhengHei"/>
                 <a:ea typeface="Microsoft JhengHei"/>
               </a:rPr>
-              <a:t>工具箱：</a:t>
-            </a:r>
-            <a:r>
-              <a:rPr b="1" lang="en-US" sz="2800" spc="-1" strike="noStrike">
-                <a:solidFill>
-                  <a:srgbClr val="ffffff"/>
-                </a:solidFill>
-                <a:latin typeface="Microsoft JhengHei"/>
-                <a:ea typeface="Microsoft JhengHei"/>
-              </a:rPr>
-              <a:t>JSON </a:t>
-            </a:r>
-            <a:r>
-              <a:rPr b="1" lang="zh-CN" sz="2800" spc="-1" strike="noStrike">
-                <a:solidFill>
-                  <a:srgbClr val="ffffff"/>
-                </a:solidFill>
-                <a:latin typeface="Microsoft JhengHei"/>
-                <a:ea typeface="Microsoft JhengHei"/>
-              </a:rPr>
-              <a:t>與翻譯</a:t>
+              <a:t>用量顯示（選用）</a:t>
             </a:r>
             <a:endParaRPr b="0" lang="en-US" sz="2800" spc="-1" strike="noStrike">
               <a:solidFill>
@@ -6537,14 +5158,101 @@
       </p:sp>
       <p:sp>
         <p:nvSpPr>
-          <p:cNvPr id="201" name="Shape 3"/>
-          <p:cNvSpPr/>
-          <p:nvPr/>
-        </p:nvSpPr>
-        <p:spPr>
-          <a:xfrm>
-            <a:off x="868680" y="1325880"/>
-            <a:ext cx="5120280" cy="2285640"/>
+          <p:cNvPr id="169" name="Text 3"/>
+          <p:cNvSpPr/>
+          <p:nvPr/>
+        </p:nvSpPr>
+        <p:spPr>
+          <a:xfrm>
+            <a:off x="868680" y="1188720"/>
+            <a:ext cx="10634040" cy="456840"/>
+          </a:xfrm>
+          <a:prstGeom prst="rect">
+            <a:avLst/>
+          </a:prstGeom>
+          <a:noFill/>
+          <a:ln w="0">
+            <a:noFill/>
+          </a:ln>
+        </p:spPr>
+        <p:style>
+          <a:lnRef idx="0"/>
+          <a:fillRef idx="0"/>
+          <a:effectRef idx="0"/>
+          <a:fontRef idx="minor"/>
+        </p:style>
+        <p:txBody>
+          <a:bodyPr lIns="0" rIns="0" tIns="0" bIns="0" anchor="ctr">
+            <a:noAutofit/>
+          </a:bodyPr>
+          <a:p>
+            <a:pPr defTabSz="914400">
+              <a:lnSpc>
+                <a:spcPct val="100000"/>
+              </a:lnSpc>
+              <a:tabLst>
+                <a:tab algn="l" pos="0"/>
+              </a:tabLst>
+            </a:pPr>
+            <a:r>
+              <a:rPr b="1" lang="en-US" sz="1900" spc="-1" strike="noStrike">
+                <a:solidFill>
+                  <a:srgbClr val="5b4fe8"/>
+                </a:solidFill>
+                <a:latin typeface="Microsoft JhengHei"/>
+                <a:ea typeface="Microsoft JhengHei"/>
+              </a:rPr>
+              <a:t>Claude</a:t>
+            </a:r>
+            <a:r>
+              <a:rPr b="1" lang="zh-CN" sz="1900" spc="-1" strike="noStrike">
+                <a:solidFill>
+                  <a:srgbClr val="5b4fe8"/>
+                </a:solidFill>
+                <a:latin typeface="Microsoft JhengHei"/>
+                <a:ea typeface="Microsoft JhengHei"/>
+              </a:rPr>
+              <a:t>／</a:t>
+            </a:r>
+            <a:r>
+              <a:rPr b="1" lang="en-US" sz="1900" spc="-1" strike="noStrike">
+                <a:solidFill>
+                  <a:srgbClr val="5b4fe8"/>
+                </a:solidFill>
+                <a:latin typeface="Microsoft JhengHei"/>
+                <a:ea typeface="Microsoft JhengHei"/>
+              </a:rPr>
+              <a:t>Codex </a:t>
+            </a:r>
+            <a:r>
+              <a:rPr b="1" lang="zh-CN" sz="1900" spc="-1" strike="noStrike">
+                <a:solidFill>
+                  <a:srgbClr val="5b4fe8"/>
+                </a:solidFill>
+                <a:latin typeface="Microsoft JhengHei"/>
+                <a:ea typeface="Microsoft JhengHei"/>
+              </a:rPr>
+              <a:t>用量可個別開關</a:t>
+            </a:r>
+            <a:endParaRPr b="0" lang="en-US" sz="1900" spc="-1" strike="noStrike">
+              <a:solidFill>
+                <a:srgbClr val="000000"/>
+              </a:solidFill>
+              <a:latin typeface="Arial"/>
+            </a:endParaRPr>
+          </a:p>
+        </p:txBody>
+      </p:sp>
+      <p:sp>
+        <p:nvSpPr>
+          <p:cNvPr id="170" name="Shape 4"/>
+          <p:cNvSpPr/>
+          <p:nvPr/>
+        </p:nvSpPr>
+        <p:spPr>
+          <a:xfrm>
+            <a:off x="868680" y="2075760"/>
+            <a:ext cx="10606680" cy="2102760"/>
           </a:xfrm>
           <a:prstGeom prst="rect">
             <a:avLst/>
@@ -6581,14 +5289,14 @@
       </p:sp>
       <p:sp>
         <p:nvSpPr>
-          <p:cNvPr id="202" name="Shape 4"/>
-          <p:cNvSpPr/>
-          <p:nvPr/>
-        </p:nvSpPr>
-        <p:spPr>
-          <a:xfrm>
-            <a:off x="868680" y="1325880"/>
-            <a:ext cx="68400" cy="2285640"/>
+          <p:cNvPr id="171" name="Shape 5"/>
+          <p:cNvSpPr/>
+          <p:nvPr/>
+        </p:nvSpPr>
+        <p:spPr>
+          <a:xfrm>
+            <a:off x="868680" y="2075760"/>
+            <a:ext cx="68400" cy="2102760"/>
           </a:xfrm>
           <a:prstGeom prst="rect">
             <a:avLst/>
@@ -6622,14 +5330,14 @@
       </p:sp>
       <p:sp>
         <p:nvSpPr>
-          <p:cNvPr id="203" name="Text 5"/>
-          <p:cNvSpPr/>
-          <p:nvPr/>
-        </p:nvSpPr>
-        <p:spPr>
-          <a:xfrm>
-            <a:off x="1124640" y="1472040"/>
-            <a:ext cx="4663080" cy="365400"/>
+          <p:cNvPr id="172" name="Text 6"/>
+          <p:cNvSpPr/>
+          <p:nvPr/>
+        </p:nvSpPr>
+        <p:spPr>
+          <a:xfrm>
+            <a:off x="1124640" y="2221920"/>
+            <a:ext cx="10149480" cy="365400"/>
           </a:xfrm>
           <a:prstGeom prst="rect">
             <a:avLst/>
@@ -6659,44 +5367,14 @@
               </a:tabLst>
             </a:pPr>
             <a:r>
-              <a:rPr b="1" lang="en-US" sz="1800" spc="-1" strike="noStrike">
+              <a:rPr b="1" lang="zh-CN" sz="1800" spc="-1" strike="noStrike">
                 <a:solidFill>
                   <a:srgbClr val="5b4fe8"/>
                 </a:solidFill>
                 <a:latin typeface="Microsoft JhengHei"/>
                 <a:ea typeface="Microsoft JhengHei"/>
               </a:rPr>
-              <a:t>JSON </a:t>
-            </a:r>
-            <a:r>
-              <a:rPr b="1" lang="zh-CN" sz="1800" spc="-1" strike="noStrike">
-                <a:solidFill>
-                  <a:srgbClr val="5b4fe8"/>
-                </a:solidFill>
-                <a:latin typeface="Microsoft JhengHei"/>
-                <a:ea typeface="Microsoft JhengHei"/>
-              </a:rPr>
-              <a:t>工具（不需 </a:t>
-            </a:r>
-            <a:r>
-              <a:rPr b="1" lang="en-US" sz="1800" spc="-1" strike="noStrike">
-                <a:solidFill>
-                  <a:srgbClr val="5b4fe8"/>
-                </a:solidFill>
-                <a:latin typeface="Microsoft JhengHei"/>
-                <a:ea typeface="Microsoft JhengHei"/>
-              </a:rPr>
-              <a:t>LLM</a:t>
-            </a:r>
-            <a:r>
-              <a:rPr b="1" lang="zh-CN" sz="1800" spc="-1" strike="noStrike">
-                <a:solidFill>
-                  <a:srgbClr val="5b4fe8"/>
-                </a:solidFill>
-                <a:latin typeface="Microsoft JhengHei"/>
-                <a:ea typeface="Microsoft JhengHei"/>
-              </a:rPr>
-              <a:t>）</a:t>
+              <a:t>重點</a:t>
             </a:r>
             <a:endParaRPr b="0" lang="en-US" sz="1800" spc="-1" strike="noStrike">
               <a:solidFill>
@@ -6709,14 +5387,14 @@
       </p:sp>
       <p:sp>
         <p:nvSpPr>
-          <p:cNvPr id="204" name="Text 6"/>
-          <p:cNvSpPr/>
-          <p:nvPr/>
-        </p:nvSpPr>
-        <p:spPr>
-          <a:xfrm>
-            <a:off x="1124640" y="1892880"/>
-            <a:ext cx="4663080" cy="1572480"/>
+          <p:cNvPr id="173" name="Text 7"/>
+          <p:cNvSpPr/>
+          <p:nvPr/>
+        </p:nvSpPr>
+        <p:spPr>
+          <a:xfrm>
+            <a:off x="1124640" y="2642760"/>
+            <a:ext cx="10149480" cy="1389600"/>
           </a:xfrm>
           <a:prstGeom prst="rect">
             <a:avLst/>
@@ -6748,56 +5426,16 @@
               <a:buChar char=""/>
             </a:pPr>
             <a:r>
-              <a:rPr b="0" lang="en-US" sz="1500" spc="-1" strike="noStrike">
+              <a:rPr b="0" lang="zh-CN" sz="1600" spc="-1" strike="noStrike">
                 <a:solidFill>
                   <a:srgbClr val="1e1f35"/>
                 </a:solidFill>
                 <a:latin typeface="Microsoft JhengHei"/>
                 <a:ea typeface="Microsoft JhengHei"/>
               </a:rPr>
-              <a:t>Format</a:t>
-            </a:r>
-            <a:r>
-              <a:rPr b="0" lang="zh-CN" sz="1500" spc="-1" strike="noStrike">
-                <a:solidFill>
-                  <a:srgbClr val="1e1f35"/>
-                </a:solidFill>
-                <a:latin typeface="Microsoft JhengHei"/>
-                <a:ea typeface="Microsoft JhengHei"/>
-              </a:rPr>
-              <a:t>／</a:t>
-            </a:r>
-            <a:r>
-              <a:rPr b="0" lang="en-US" sz="1500" spc="-1" strike="noStrike">
-                <a:solidFill>
-                  <a:srgbClr val="1e1f35"/>
-                </a:solidFill>
-                <a:latin typeface="Microsoft JhengHei"/>
-                <a:ea typeface="Microsoft JhengHei"/>
-              </a:rPr>
-              <a:t>Minify</a:t>
-            </a:r>
-            <a:r>
-              <a:rPr b="0" lang="zh-CN" sz="1500" spc="-1" strike="noStrike">
-                <a:solidFill>
-                  <a:srgbClr val="1e1f35"/>
-                </a:solidFill>
-                <a:latin typeface="Microsoft JhengHei"/>
-                <a:ea typeface="Microsoft JhengHei"/>
-              </a:rPr>
-              <a:t>／</a:t>
-            </a:r>
-            <a:r>
-              <a:rPr b="0" lang="en-US" sz="1500" spc="-1" strike="noStrike">
-                <a:solidFill>
-                  <a:srgbClr val="1e1f35"/>
-                </a:solidFill>
-                <a:latin typeface="Microsoft JhengHei"/>
-                <a:ea typeface="Microsoft JhengHei"/>
-              </a:rPr>
-              <a:t>Validate</a:t>
-            </a:r>
-            <a:endParaRPr b="0" lang="en-US" sz="1500" spc="-1" strike="noStrike">
+              <a:t>不影響聊天或文件問答</a:t>
+            </a:r>
+            <a:endParaRPr b="0" lang="en-US" sz="1600" spc="-1" strike="noStrike">
               <a:solidFill>
                 <a:srgbClr val="000000"/>
               </a:solidFill>
@@ -6816,84 +5454,63 @@
               <a:buChar char=""/>
             </a:pPr>
             <a:r>
-              <a:rPr b="0" lang="zh-CN" sz="1500" spc="-1" strike="noStrike">
+              <a:rPr b="0" lang="zh-CN" sz="1600" spc="-1" strike="noStrike">
                 <a:solidFill>
                   <a:srgbClr val="1e1f35"/>
                 </a:solidFill>
                 <a:latin typeface="Microsoft JhengHei"/>
                 <a:ea typeface="Microsoft JhengHei"/>
               </a:rPr>
-              <a:t>搜尋與 </a:t>
-            </a:r>
-            <a:r>
-              <a:rPr b="0" lang="en-US" sz="1500" spc="-1" strike="noStrike">
+              <a:t>未安裝或未登入時顯示 </a:t>
+            </a:r>
+            <a:r>
+              <a:rPr b="0" lang="en-US" sz="1600" spc="-1" strike="noStrike">
                 <a:solidFill>
                   <a:srgbClr val="1e1f35"/>
                 </a:solidFill>
                 <a:latin typeface="Microsoft JhengHei"/>
                 <a:ea typeface="Microsoft JhengHei"/>
               </a:rPr>
-              <a:t>JSONPath</a:t>
-            </a:r>
-            <a:endParaRPr b="0" lang="en-US" sz="1500" spc="-1" strike="noStrike">
-              <a:solidFill>
-                <a:srgbClr val="000000"/>
-              </a:solidFill>
-              <a:latin typeface="Arial"/>
-            </a:endParaRPr>
-          </a:p>
-          <a:p>
-            <a:pPr marL="343080" indent="-343080" defTabSz="914400">
-              <a:lnSpc>
-                <a:spcPct val="122000"/>
-              </a:lnSpc>
-              <a:buClr>
-                <a:srgbClr val="1e1f35"/>
-              </a:buClr>
-              <a:buFont typeface="Symbol" charset="2"/>
-              <a:buChar char=""/>
-            </a:pPr>
-            <a:r>
-              <a:rPr b="0" lang="zh-CN" sz="1500" spc="-1" strike="noStrike">
+              <a:t>No use</a:t>
+            </a:r>
+            <a:r>
+              <a:rPr b="0" lang="zh-CN" sz="1600" spc="-1" strike="noStrike">
                 <a:solidFill>
                   <a:srgbClr val="1e1f35"/>
                 </a:solidFill>
                 <a:latin typeface="Microsoft JhengHei"/>
                 <a:ea typeface="Microsoft JhengHei"/>
               </a:rPr>
-              <a:t>格式錯誤會顯示行與欄</a:t>
-            </a:r>
-            <a:endParaRPr b="0" lang="en-US" sz="1500" spc="-1" strike="noStrike">
-              <a:solidFill>
-                <a:srgbClr val="000000"/>
-              </a:solidFill>
-              <a:latin typeface="Arial"/>
-            </a:endParaRPr>
-          </a:p>
-        </p:txBody>
-      </p:sp>
-      <p:sp>
-        <p:nvSpPr>
-          <p:cNvPr id="205" name="Shape 7"/>
-          <p:cNvSpPr/>
-          <p:nvPr/>
-        </p:nvSpPr>
-        <p:spPr>
-          <a:xfrm>
-            <a:off x="6263640" y="1325880"/>
-            <a:ext cx="5120280" cy="2285640"/>
+              <a:t>，不會查詢</a:t>
+            </a:r>
+            <a:endParaRPr b="0" lang="en-US" sz="1600" spc="-1" strike="noStrike">
+              <a:solidFill>
+                <a:srgbClr val="000000"/>
+              </a:solidFill>
+              <a:latin typeface="Arial"/>
+            </a:endParaRPr>
+          </a:p>
+        </p:txBody>
+      </p:sp>
+      <p:sp>
+        <p:nvSpPr>
+          <p:cNvPr id="174" name="Shape 8"/>
+          <p:cNvSpPr/>
+          <p:nvPr/>
+        </p:nvSpPr>
+        <p:spPr>
+          <a:xfrm>
+            <a:off x="868680" y="5394960"/>
+            <a:ext cx="10634040" cy="502560"/>
           </a:xfrm>
           <a:prstGeom prst="rect">
             <a:avLst/>
           </a:prstGeom>
           <a:solidFill>
-            <a:srgbClr val="f0f2fa"/>
+            <a:srgbClr val="eef0fa"/>
           </a:solidFill>
-          <a:ln w="9525">
-            <a:solidFill>
-              <a:srgbClr val="dde1f2"/>
-            </a:solidFill>
-            <a:round/>
+          <a:ln w="0">
+            <a:noFill/>
           </a:ln>
         </p:spPr>
         <p:style>
@@ -6918,55 +5535,14 @@
       </p:sp>
       <p:sp>
         <p:nvSpPr>
-          <p:cNvPr id="206" name="Shape 8"/>
-          <p:cNvSpPr/>
-          <p:nvPr/>
-        </p:nvSpPr>
-        <p:spPr>
-          <a:xfrm>
-            <a:off x="6263640" y="1325880"/>
-            <a:ext cx="68400" cy="2285640"/>
-          </a:xfrm>
-          <a:prstGeom prst="rect">
-            <a:avLst/>
-          </a:prstGeom>
-          <a:solidFill>
-            <a:srgbClr val="5b4fe8"/>
-          </a:solidFill>
-          <a:ln w="0">
-            <a:noFill/>
-          </a:ln>
-        </p:spPr>
-        <p:style>
-          <a:lnRef idx="0"/>
-          <a:fillRef idx="0"/>
-          <a:effectRef idx="0"/>
-          <a:fontRef idx="minor"/>
-        </p:style>
-        <p:txBody>
-          <a:bodyPr lIns="90000" rIns="90000" tIns="45000" bIns="45000" anchor="t">
-            <a:noAutofit/>
-          </a:bodyPr>
-          <a:p>
-            <a:endParaRPr b="0" lang="en-US" sz="1800" spc="-1" strike="noStrike">
-              <a:solidFill>
-                <a:srgbClr val="ffffff"/>
-              </a:solidFill>
-              <a:latin typeface="Arial"/>
-            </a:endParaRPr>
-          </a:p>
-        </p:txBody>
-      </p:sp>
-      <p:sp>
-        <p:nvSpPr>
-          <p:cNvPr id="207" name="Text 9"/>
-          <p:cNvSpPr/>
-          <p:nvPr/>
-        </p:nvSpPr>
-        <p:spPr>
-          <a:xfrm>
-            <a:off x="6519600" y="1472040"/>
-            <a:ext cx="4663080" cy="365400"/>
+          <p:cNvPr id="175" name="Text 9"/>
+          <p:cNvSpPr/>
+          <p:nvPr/>
+        </p:nvSpPr>
+        <p:spPr>
+          <a:xfrm>
+            <a:off x="1051560" y="5394960"/>
+            <a:ext cx="10268280" cy="502560"/>
           </a:xfrm>
           <a:prstGeom prst="rect">
             <a:avLst/>
@@ -6996,518 +5572,14 @@
               </a:tabLst>
             </a:pPr>
             <a:r>
-              <a:rPr b="1" lang="zh-CN" sz="1800" spc="-1" strike="noStrike">
-                <a:solidFill>
-                  <a:srgbClr val="5b4fe8"/>
-                </a:solidFill>
-                <a:latin typeface="Microsoft JhengHei"/>
-                <a:ea typeface="Microsoft JhengHei"/>
-              </a:rPr>
-              <a:t>翻譯工具（語意處理）</a:t>
-            </a:r>
-            <a:endParaRPr b="0" lang="en-US" sz="1800" spc="-1" strike="noStrike">
-              <a:solidFill>
-                <a:srgbClr val="000000"/>
-              </a:solidFill>
-              <a:latin typeface="Arial"/>
-            </a:endParaRPr>
-          </a:p>
-        </p:txBody>
-      </p:sp>
-      <p:sp>
-        <p:nvSpPr>
-          <p:cNvPr id="208" name="Text 10"/>
-          <p:cNvSpPr/>
-          <p:nvPr/>
-        </p:nvSpPr>
-        <p:spPr>
-          <a:xfrm>
-            <a:off x="6519600" y="1892880"/>
-            <a:ext cx="4663080" cy="1572480"/>
-          </a:xfrm>
-          <a:prstGeom prst="rect">
-            <a:avLst/>
-          </a:prstGeom>
-          <a:noFill/>
-          <a:ln w="0">
-            <a:noFill/>
-          </a:ln>
-        </p:spPr>
-        <p:style>
-          <a:lnRef idx="0"/>
-          <a:fillRef idx="0"/>
-          <a:effectRef idx="0"/>
-          <a:fontRef idx="minor"/>
-        </p:style>
-        <p:txBody>
-          <a:bodyPr lIns="0" rIns="0" tIns="0" bIns="0" anchor="t">
-            <a:noAutofit/>
-          </a:bodyPr>
-          <a:p>
-            <a:pPr marL="343080" indent="-343080" defTabSz="914400">
-              <a:lnSpc>
-                <a:spcPct val="122000"/>
-              </a:lnSpc>
-              <a:buClr>
-                <a:srgbClr val="1e1f35"/>
-              </a:buClr>
-              <a:buFont typeface="Symbol" charset="2"/>
-              <a:buChar char=""/>
-            </a:pPr>
-            <a:r>
-              <a:rPr b="0" lang="zh-CN" sz="1500" spc="-1" strike="noStrike">
-                <a:solidFill>
-                  <a:srgbClr val="1e1f35"/>
-                </a:solidFill>
-                <a:latin typeface="Microsoft JhengHei"/>
-                <a:ea typeface="Microsoft JhengHei"/>
-              </a:rPr>
-              <a:t>來源可自動偵測或指定</a:t>
-            </a:r>
-            <a:endParaRPr b="0" lang="en-US" sz="1500" spc="-1" strike="noStrike">
-              <a:solidFill>
-                <a:srgbClr val="000000"/>
-              </a:solidFill>
-              <a:latin typeface="Arial"/>
-            </a:endParaRPr>
-          </a:p>
-          <a:p>
-            <a:pPr marL="343080" indent="-343080" defTabSz="914400">
-              <a:lnSpc>
-                <a:spcPct val="122000"/>
-              </a:lnSpc>
-              <a:buClr>
-                <a:srgbClr val="1e1f35"/>
-              </a:buClr>
-              <a:buFont typeface="Symbol" charset="2"/>
-              <a:buChar char=""/>
-            </a:pPr>
-            <a:r>
-              <a:rPr b="0" lang="zh-CN" sz="1500" spc="-1" strike="noStrike">
-                <a:solidFill>
-                  <a:srgbClr val="1e1f35"/>
-                </a:solidFill>
-                <a:latin typeface="Microsoft JhengHei"/>
-                <a:ea typeface="Microsoft JhengHei"/>
-              </a:rPr>
-              <a:t>英／繁中／簡中，可用 ⇄ 互換</a:t>
-            </a:r>
-            <a:endParaRPr b="0" lang="en-US" sz="1500" spc="-1" strike="noStrike">
-              <a:solidFill>
-                <a:srgbClr val="000000"/>
-              </a:solidFill>
-              <a:latin typeface="Arial"/>
-            </a:endParaRPr>
-          </a:p>
-          <a:p>
-            <a:pPr marL="343080" indent="-343080" defTabSz="914400">
-              <a:lnSpc>
-                <a:spcPct val="122000"/>
-              </a:lnSpc>
-              <a:buClr>
-                <a:srgbClr val="1e1f35"/>
-              </a:buClr>
-              <a:buFont typeface="Symbol" charset="2"/>
-              <a:buChar char=""/>
-            </a:pPr>
-            <a:r>
-              <a:rPr b="0" lang="zh-CN" sz="1500" spc="-1" strike="noStrike">
-                <a:solidFill>
-                  <a:srgbClr val="1e1f35"/>
-                </a:solidFill>
-                <a:latin typeface="Microsoft JhengHei"/>
-                <a:ea typeface="Microsoft JhengHei"/>
-              </a:rPr>
-              <a:t>一般／技術／商務／中英對照</a:t>
-            </a:r>
-            <a:endParaRPr b="0" lang="en-US" sz="1500" spc="-1" strike="noStrike">
-              <a:solidFill>
-                <a:srgbClr val="000000"/>
-              </a:solidFill>
-              <a:latin typeface="Arial"/>
-            </a:endParaRPr>
-          </a:p>
-        </p:txBody>
-      </p:sp>
-      <p:sp>
-        <p:nvSpPr>
-          <p:cNvPr id="209" name="Shape 11"/>
-          <p:cNvSpPr/>
-          <p:nvPr/>
-        </p:nvSpPr>
-        <p:spPr>
-          <a:xfrm>
-            <a:off x="868680" y="3840480"/>
-            <a:ext cx="10515240" cy="1691280"/>
-          </a:xfrm>
-          <a:prstGeom prst="rect">
-            <a:avLst/>
-          </a:prstGeom>
-          <a:solidFill>
-            <a:srgbClr val="f0f2fa"/>
-          </a:solidFill>
-          <a:ln w="9525">
-            <a:solidFill>
-              <a:srgbClr val="dde1f2"/>
-            </a:solidFill>
-            <a:round/>
-          </a:ln>
-        </p:spPr>
-        <p:style>
-          <a:lnRef idx="0"/>
-          <a:fillRef idx="0"/>
-          <a:effectRef idx="0"/>
-          <a:fontRef idx="minor"/>
-        </p:style>
-        <p:txBody>
-          <a:bodyPr lIns="90000" rIns="90000" tIns="45000" bIns="45000" anchor="t">
-            <a:noAutofit/>
-          </a:bodyPr>
-          <a:p>
-            <a:endParaRPr b="0" lang="en-US" sz="1800" spc="-1" strike="noStrike">
-              <a:solidFill>
-                <a:srgbClr val="000000"/>
-              </a:solidFill>
-              <a:latin typeface="Arial"/>
-            </a:endParaRPr>
-          </a:p>
-        </p:txBody>
-      </p:sp>
-      <p:sp>
-        <p:nvSpPr>
-          <p:cNvPr id="210" name="Shape 12"/>
-          <p:cNvSpPr/>
-          <p:nvPr/>
-        </p:nvSpPr>
-        <p:spPr>
-          <a:xfrm>
-            <a:off x="868680" y="3840480"/>
-            <a:ext cx="68400" cy="1691280"/>
-          </a:xfrm>
-          <a:prstGeom prst="rect">
-            <a:avLst/>
-          </a:prstGeom>
-          <a:solidFill>
-            <a:srgbClr val="5b4fe8"/>
-          </a:solidFill>
-          <a:ln w="0">
-            <a:noFill/>
-          </a:ln>
-        </p:spPr>
-        <p:style>
-          <a:lnRef idx="0"/>
-          <a:fillRef idx="0"/>
-          <a:effectRef idx="0"/>
-          <a:fontRef idx="minor"/>
-        </p:style>
-        <p:txBody>
-          <a:bodyPr lIns="90000" rIns="90000" tIns="45000" bIns="45000" anchor="t">
-            <a:noAutofit/>
-          </a:bodyPr>
-          <a:p>
-            <a:endParaRPr b="0" lang="en-US" sz="1800" spc="-1" strike="noStrike">
-              <a:solidFill>
-                <a:srgbClr val="ffffff"/>
-              </a:solidFill>
-              <a:latin typeface="Arial"/>
-            </a:endParaRPr>
-          </a:p>
-        </p:txBody>
-      </p:sp>
-      <p:sp>
-        <p:nvSpPr>
-          <p:cNvPr id="211" name="Text 13"/>
-          <p:cNvSpPr/>
-          <p:nvPr/>
-        </p:nvSpPr>
-        <p:spPr>
-          <a:xfrm>
-            <a:off x="1124640" y="3986640"/>
-            <a:ext cx="10058040" cy="365400"/>
-          </a:xfrm>
-          <a:prstGeom prst="rect">
-            <a:avLst/>
-          </a:prstGeom>
-          <a:noFill/>
-          <a:ln w="0">
-            <a:noFill/>
-          </a:ln>
-        </p:spPr>
-        <p:style>
-          <a:lnRef idx="0"/>
-          <a:fillRef idx="0"/>
-          <a:effectRef idx="0"/>
-          <a:fontRef idx="minor"/>
-        </p:style>
-        <p:txBody>
-          <a:bodyPr lIns="0" rIns="0" tIns="0" bIns="0" anchor="ctr">
-            <a:noAutofit/>
-          </a:bodyPr>
-          <a:p>
-            <a:pPr defTabSz="914400">
-              <a:lnSpc>
-                <a:spcPct val="100000"/>
-              </a:lnSpc>
-              <a:tabLst>
-                <a:tab algn="l" pos="0"/>
-              </a:tabLst>
-            </a:pPr>
-            <a:r>
-              <a:rPr b="1" lang="zh-CN" sz="1800" spc="-1" strike="noStrike">
-                <a:solidFill>
-                  <a:srgbClr val="5b4fe8"/>
-                </a:solidFill>
-                <a:latin typeface="Microsoft JhengHei"/>
-                <a:ea typeface="Microsoft JhengHei"/>
-              </a:rPr>
-              <a:t>翻譯會原樣保留的內容</a:t>
-            </a:r>
-            <a:endParaRPr b="0" lang="en-US" sz="1800" spc="-1" strike="noStrike">
-              <a:solidFill>
-                <a:srgbClr val="000000"/>
-              </a:solidFill>
-              <a:latin typeface="Arial"/>
-            </a:endParaRPr>
-          </a:p>
-        </p:txBody>
-      </p:sp>
-      <p:sp>
-        <p:nvSpPr>
-          <p:cNvPr id="212" name="Text 14"/>
-          <p:cNvSpPr/>
-          <p:nvPr/>
-        </p:nvSpPr>
-        <p:spPr>
-          <a:xfrm>
-            <a:off x="1124640" y="4407480"/>
-            <a:ext cx="10058040" cy="978120"/>
-          </a:xfrm>
-          <a:prstGeom prst="rect">
-            <a:avLst/>
-          </a:prstGeom>
-          <a:noFill/>
-          <a:ln w="0">
-            <a:noFill/>
-          </a:ln>
-        </p:spPr>
-        <p:style>
-          <a:lnRef idx="0"/>
-          <a:fillRef idx="0"/>
-          <a:effectRef idx="0"/>
-          <a:fontRef idx="minor"/>
-        </p:style>
-        <p:txBody>
-          <a:bodyPr lIns="0" rIns="0" tIns="0" bIns="0" anchor="t">
-            <a:noAutofit/>
-          </a:bodyPr>
-          <a:p>
-            <a:pPr marL="343080" indent="-343080" defTabSz="914400">
-              <a:lnSpc>
-                <a:spcPct val="122000"/>
-              </a:lnSpc>
-              <a:buClr>
-                <a:srgbClr val="1e1f35"/>
-              </a:buClr>
-              <a:buFont typeface="Symbol" charset="2"/>
-              <a:buChar char=""/>
-            </a:pPr>
-            <a:r>
-              <a:rPr b="0" lang="zh-CN" sz="1550" spc="-1" strike="noStrike">
-                <a:solidFill>
-                  <a:srgbClr val="1e1f35"/>
-                </a:solidFill>
-                <a:latin typeface="Microsoft JhengHei"/>
-                <a:ea typeface="Microsoft JhengHei"/>
-              </a:rPr>
-              <a:t>程式碼、</a:t>
-            </a:r>
-            <a:r>
-              <a:rPr b="0" lang="en-US" sz="1550" spc="-1" strike="noStrike">
-                <a:solidFill>
-                  <a:srgbClr val="1e1f35"/>
-                </a:solidFill>
-                <a:latin typeface="Microsoft JhengHei"/>
-                <a:ea typeface="Microsoft JhengHei"/>
-              </a:rPr>
-              <a:t>SQL</a:t>
-            </a:r>
-            <a:r>
-              <a:rPr b="0" lang="zh-CN" sz="1550" spc="-1" strike="noStrike">
-                <a:solidFill>
-                  <a:srgbClr val="1e1f35"/>
-                </a:solidFill>
-                <a:latin typeface="Microsoft JhengHei"/>
-                <a:ea typeface="Microsoft JhengHei"/>
-              </a:rPr>
-              <a:t>、</a:t>
-            </a:r>
-            <a:r>
-              <a:rPr b="0" lang="en-US" sz="1550" spc="-1" strike="noStrike">
-                <a:solidFill>
-                  <a:srgbClr val="1e1f35"/>
-                </a:solidFill>
-                <a:latin typeface="Microsoft JhengHei"/>
-                <a:ea typeface="Microsoft JhengHei"/>
-              </a:rPr>
-              <a:t>JSON Key</a:t>
-            </a:r>
-            <a:r>
-              <a:rPr b="0" lang="zh-CN" sz="1550" spc="-1" strike="noStrike">
-                <a:solidFill>
-                  <a:srgbClr val="1e1f35"/>
-                </a:solidFill>
-                <a:latin typeface="Microsoft JhengHei"/>
-                <a:ea typeface="Microsoft JhengHei"/>
-              </a:rPr>
-              <a:t>、</a:t>
-            </a:r>
-            <a:r>
-              <a:rPr b="0" lang="en-US" sz="1550" spc="-1" strike="noStrike">
-                <a:solidFill>
-                  <a:srgbClr val="1e1f35"/>
-                </a:solidFill>
-                <a:latin typeface="Microsoft JhengHei"/>
-                <a:ea typeface="Microsoft JhengHei"/>
-              </a:rPr>
-              <a:t>API path </a:t>
-            </a:r>
-            <a:r>
-              <a:rPr b="0" lang="zh-CN" sz="1550" spc="-1" strike="noStrike">
-                <a:solidFill>
-                  <a:srgbClr val="1e1f35"/>
-                </a:solidFill>
-                <a:latin typeface="Microsoft JhengHei"/>
-                <a:ea typeface="Microsoft JhengHei"/>
-              </a:rPr>
-              <a:t>與檔名不會被翻譯</a:t>
-            </a:r>
-            <a:endParaRPr b="0" lang="en-US" sz="1550" spc="-1" strike="noStrike">
-              <a:solidFill>
-                <a:srgbClr val="000000"/>
-              </a:solidFill>
-              <a:latin typeface="Arial"/>
-            </a:endParaRPr>
-          </a:p>
-        </p:txBody>
-      </p:sp>
-      <p:sp>
-        <p:nvSpPr>
-          <p:cNvPr id="213" name="Shape 15"/>
-          <p:cNvSpPr/>
-          <p:nvPr/>
-        </p:nvSpPr>
-        <p:spPr>
-          <a:xfrm>
-            <a:off x="868680" y="5760720"/>
-            <a:ext cx="10634040" cy="502560"/>
-          </a:xfrm>
-          <a:prstGeom prst="rect">
-            <a:avLst/>
-          </a:prstGeom>
-          <a:solidFill>
-            <a:srgbClr val="eef0fa"/>
-          </a:solidFill>
-          <a:ln w="0">
-            <a:noFill/>
-          </a:ln>
-        </p:spPr>
-        <p:style>
-          <a:lnRef idx="0"/>
-          <a:fillRef idx="0"/>
-          <a:effectRef idx="0"/>
-          <a:fontRef idx="minor"/>
-        </p:style>
-        <p:txBody>
-          <a:bodyPr lIns="90000" rIns="90000" tIns="45000" bIns="45000" anchor="t">
-            <a:noAutofit/>
-          </a:bodyPr>
-          <a:p>
-            <a:endParaRPr b="0" lang="en-US" sz="1800" spc="-1" strike="noStrike">
-              <a:solidFill>
-                <a:srgbClr val="000000"/>
-              </a:solidFill>
-              <a:latin typeface="Arial"/>
-            </a:endParaRPr>
-          </a:p>
-        </p:txBody>
-      </p:sp>
-      <p:sp>
-        <p:nvSpPr>
-          <p:cNvPr id="214" name="Text 16"/>
-          <p:cNvSpPr/>
-          <p:nvPr/>
-        </p:nvSpPr>
-        <p:spPr>
-          <a:xfrm>
-            <a:off x="1051560" y="5760720"/>
-            <a:ext cx="10268280" cy="502560"/>
-          </a:xfrm>
-          <a:prstGeom prst="rect">
-            <a:avLst/>
-          </a:prstGeom>
-          <a:noFill/>
-          <a:ln w="0">
-            <a:noFill/>
-          </a:ln>
-        </p:spPr>
-        <p:style>
-          <a:lnRef idx="0"/>
-          <a:fillRef idx="0"/>
-          <a:effectRef idx="0"/>
-          <a:fontRef idx="minor"/>
-        </p:style>
-        <p:txBody>
-          <a:bodyPr lIns="0" rIns="0" tIns="0" bIns="0" anchor="ctr">
-            <a:noAutofit/>
-          </a:bodyPr>
-          <a:p>
-            <a:pPr defTabSz="914400">
-              <a:lnSpc>
-                <a:spcPct val="100000"/>
-              </a:lnSpc>
-              <a:tabLst>
-                <a:tab algn="l" pos="0"/>
-              </a:tabLst>
-            </a:pPr>
-            <a:r>
-              <a:rPr b="0" lang="en-US" sz="1350" spc="-1" strike="noStrike">
+              <a:rPr b="0" lang="zh-CN" sz="1350" spc="-1" strike="noStrike">
                 <a:solidFill>
                   <a:srgbClr val="6b6e85"/>
                 </a:solidFill>
                 <a:latin typeface="Microsoft JhengHei"/>
                 <a:ea typeface="Microsoft JhengHei"/>
               </a:rPr>
-              <a:t>JSON </a:t>
-            </a:r>
-            <a:r>
-              <a:rPr b="0" lang="zh-CN" sz="1350" spc="-1" strike="noStrike">
-                <a:solidFill>
-                  <a:srgbClr val="6b6e85"/>
-                </a:solidFill>
-                <a:latin typeface="Microsoft JhengHei"/>
-                <a:ea typeface="Microsoft JhengHei"/>
-              </a:rPr>
-              <a:t>工具在 </a:t>
-            </a:r>
-            <a:r>
-              <a:rPr b="0" lang="en-US" sz="1350" spc="-1" strike="noStrike">
-                <a:solidFill>
-                  <a:srgbClr val="6b6e85"/>
-                </a:solidFill>
-                <a:latin typeface="Microsoft JhengHei"/>
-                <a:ea typeface="Microsoft JhengHei"/>
-              </a:rPr>
-              <a:t>LLM </a:t>
-            </a:r>
-            <a:r>
-              <a:rPr b="0" lang="zh-CN" sz="1350" spc="-1" strike="noStrike">
-                <a:solidFill>
-                  <a:srgbClr val="6b6e85"/>
-                </a:solidFill>
-                <a:latin typeface="Microsoft JhengHei"/>
-                <a:ea typeface="Microsoft JhengHei"/>
-              </a:rPr>
-              <a:t>離線時仍可完全使用。</a:t>
+              <a:t>此功能預設關閉，首次啟用需要在自己的電腦上同意。</a:t>
             </a:r>
             <a:endParaRPr b="0" lang="en-US" sz="1350" spc="-1" strike="noStrike">
               <a:solidFill>
@@ -7557,7 +5629,7 @@
       </p:grpSpPr>
       <p:sp>
         <p:nvSpPr>
-          <p:cNvPr id="215" name="Shape 0"/>
+          <p:cNvPr id="176" name="Shape 0"/>
           <p:cNvSpPr/>
           <p:nvPr/>
         </p:nvSpPr>
@@ -7598,7 +5670,7 @@
       </p:sp>
       <p:sp>
         <p:nvSpPr>
-          <p:cNvPr id="216" name="Shape 1"/>
+          <p:cNvPr id="177" name="Shape 1"/>
           <p:cNvSpPr/>
           <p:nvPr/>
         </p:nvSpPr>
@@ -7639,7 +5711,7 @@
       </p:sp>
       <p:sp>
         <p:nvSpPr>
-          <p:cNvPr id="217" name="Text 2"/>
+          <p:cNvPr id="178" name="Text 2"/>
           <p:cNvSpPr/>
           <p:nvPr/>
         </p:nvSpPr>
@@ -7683,17 +5755,7 @@
                 <a:latin typeface="Microsoft JhengHei"/>
                 <a:ea typeface="Microsoft JhengHei"/>
               </a:rPr>
-              <a:t>切換 </a:t>
-            </a:r>
-            <a:r>
-              <a:rPr b="1" lang="en-US" sz="2800" spc="-1" strike="noStrike">
-                <a:solidFill>
-                  <a:srgbClr val="ffffff"/>
-                </a:solidFill>
-                <a:latin typeface="Microsoft JhengHei"/>
-                <a:ea typeface="Microsoft JhengHei"/>
-              </a:rPr>
-              <a:t>Skin</a:t>
+              <a:t>桌寵管理</a:t>
             </a:r>
             <a:endParaRPr b="0" lang="en-US" sz="2800" spc="-1" strike="noStrike">
               <a:solidFill>
@@ -7706,7 +5768,7 @@
       </p:sp>
       <p:sp>
         <p:nvSpPr>
-          <p:cNvPr id="218" name="Text 3"/>
+          <p:cNvPr id="179" name="Text 3"/>
           <p:cNvSpPr/>
           <p:nvPr/>
         </p:nvSpPr>
@@ -7750,7 +5812,7 @@
                 <a:latin typeface="Microsoft JhengHei"/>
                 <a:ea typeface="Microsoft JhengHei"/>
               </a:rPr>
-              <a:t>可依個人偏好更換貓咪外觀</a:t>
+              <a:t>維持桌面工作習慣，不必一直開著聊天視窗</a:t>
             </a:r>
             <a:endParaRPr b="0" lang="en-US" sz="1900" spc="-1" strike="noStrike">
               <a:solidFill>
@@ -7763,16 +5825,60 @@
       </p:sp>
       <p:sp>
         <p:nvSpPr>
-          <p:cNvPr id="219" name="Shape 4"/>
-          <p:cNvSpPr/>
-          <p:nvPr/>
-        </p:nvSpPr>
-        <p:spPr>
-          <a:xfrm>
-            <a:off x="868680" y="2030040"/>
-            <a:ext cx="420120" cy="420120"/>
-          </a:xfrm>
-          <a:prstGeom prst="ellipse">
+          <p:cNvPr id="180" name="Shape 4"/>
+          <p:cNvSpPr/>
+          <p:nvPr/>
+        </p:nvSpPr>
+        <p:spPr>
+          <a:xfrm>
+            <a:off x="868680" y="1938600"/>
+            <a:ext cx="10606680" cy="3017160"/>
+          </a:xfrm>
+          <a:prstGeom prst="rect">
+            <a:avLst/>
+          </a:prstGeom>
+          <a:solidFill>
+            <a:srgbClr val="f0f2fa"/>
+          </a:solidFill>
+          <a:ln w="9525">
+            <a:solidFill>
+              <a:srgbClr val="dde1f2"/>
+            </a:solidFill>
+            <a:round/>
+          </a:ln>
+        </p:spPr>
+        <p:style>
+          <a:lnRef idx="0"/>
+          <a:fillRef idx="0"/>
+          <a:effectRef idx="0"/>
+          <a:fontRef idx="minor"/>
+        </p:style>
+        <p:txBody>
+          <a:bodyPr lIns="90000" rIns="90000" tIns="45000" bIns="45000" anchor="t">
+            <a:noAutofit/>
+          </a:bodyPr>
+          <a:p>
+            <a:endParaRPr b="0" lang="en-US" sz="1800" spc="-1" strike="noStrike">
+              <a:solidFill>
+                <a:srgbClr val="000000"/>
+              </a:solidFill>
+              <a:latin typeface="Arial"/>
+            </a:endParaRPr>
+          </a:p>
+        </p:txBody>
+      </p:sp>
+      <p:sp>
+        <p:nvSpPr>
+          <p:cNvPr id="181" name="Shape 5"/>
+          <p:cNvSpPr/>
+          <p:nvPr/>
+        </p:nvSpPr>
+        <p:spPr>
+          <a:xfrm>
+            <a:off x="868680" y="1938600"/>
+            <a:ext cx="68400" cy="3017160"/>
+          </a:xfrm>
+          <a:prstGeom prst="rect">
             <a:avLst/>
           </a:prstGeom>
           <a:solidFill>
@@ -7804,14 +5910,14 @@
       </p:sp>
       <p:sp>
         <p:nvSpPr>
-          <p:cNvPr id="220" name="Text 5"/>
-          <p:cNvSpPr/>
-          <p:nvPr/>
-        </p:nvSpPr>
-        <p:spPr>
-          <a:xfrm>
-            <a:off x="868680" y="2030040"/>
-            <a:ext cx="420120" cy="420120"/>
+          <p:cNvPr id="182" name="Text 6"/>
+          <p:cNvSpPr/>
+          <p:nvPr/>
+        </p:nvSpPr>
+        <p:spPr>
+          <a:xfrm>
+            <a:off x="1124640" y="2084760"/>
+            <a:ext cx="10149480" cy="365400"/>
           </a:xfrm>
           <a:prstGeom prst="rect">
             <a:avLst/>
@@ -7832,7 +5938,7 @@
             <a:noAutofit/>
           </a:bodyPr>
           <a:p>
-            <a:pPr algn="ctr" defTabSz="914400">
+            <a:pPr defTabSz="914400">
               <a:lnSpc>
                 <a:spcPct val="100000"/>
               </a:lnSpc>
@@ -7841,34 +5947,34 @@
               </a:tabLst>
             </a:pPr>
             <a:r>
-              <a:rPr b="1" lang="en-US" sz="1700" spc="-1" strike="noStrike">
-                <a:solidFill>
-                  <a:srgbClr val="ffffff"/>
-                </a:solidFill>
-                <a:latin typeface="Microsoft JhengHei"/>
-                <a:ea typeface="Microsoft JhengHei"/>
-              </a:rPr>
-              <a:t>1</a:t>
-            </a:r>
-            <a:endParaRPr b="0" lang="en-US" sz="1700" spc="-1" strike="noStrike">
-              <a:solidFill>
-                <a:srgbClr val="000000"/>
-              </a:solidFill>
-              <a:latin typeface="Arial"/>
-            </a:endParaRPr>
-          </a:p>
-        </p:txBody>
-      </p:sp>
-      <p:sp>
-        <p:nvSpPr>
-          <p:cNvPr id="221" name="Text 6"/>
-          <p:cNvSpPr/>
-          <p:nvPr/>
-        </p:nvSpPr>
-        <p:spPr>
-          <a:xfrm>
-            <a:off x="1490400" y="1974960"/>
-            <a:ext cx="9920880" cy="548280"/>
+              <a:rPr b="1" lang="zh-CN" sz="1800" spc="-1" strike="noStrike">
+                <a:solidFill>
+                  <a:srgbClr val="5b4fe8"/>
+                </a:solidFill>
+                <a:latin typeface="Microsoft JhengHei"/>
+                <a:ea typeface="Microsoft JhengHei"/>
+              </a:rPr>
+              <a:t>可以做的事</a:t>
+            </a:r>
+            <a:endParaRPr b="0" lang="en-US" sz="1800" spc="-1" strike="noStrike">
+              <a:solidFill>
+                <a:srgbClr val="000000"/>
+              </a:solidFill>
+              <a:latin typeface="Arial"/>
+            </a:endParaRPr>
+          </a:p>
+        </p:txBody>
+      </p:sp>
+      <p:sp>
+        <p:nvSpPr>
+          <p:cNvPr id="183" name="Text 7"/>
+          <p:cNvSpPr/>
+          <p:nvPr/>
+        </p:nvSpPr>
+        <p:spPr>
+          <a:xfrm>
+            <a:off x="1124640" y="2505600"/>
+            <a:ext cx="10149480" cy="2304000"/>
           </a:xfrm>
           <a:prstGeom prst="rect">
             <a:avLst/>
@@ -7885,517 +5991,59 @@
           <a:fontRef idx="minor"/>
         </p:style>
         <p:txBody>
-          <a:bodyPr lIns="0" rIns="0" tIns="0" bIns="0" anchor="ctr">
-            <a:noAutofit/>
-          </a:bodyPr>
-          <a:p>
-            <a:pPr defTabSz="914400">
-              <a:lnSpc>
-                <a:spcPct val="100000"/>
-              </a:lnSpc>
-              <a:tabLst>
-                <a:tab algn="l" pos="0"/>
-              </a:tabLst>
-            </a:pPr>
-            <a:r>
-              <a:rPr b="0" lang="zh-CN" sz="1650" spc="-1" strike="noStrike">
+          <a:bodyPr lIns="0" rIns="0" tIns="0" bIns="0" anchor="t">
+            <a:noAutofit/>
+          </a:bodyPr>
+          <a:p>
+            <a:pPr marL="343080" indent="-343080" defTabSz="914400">
+              <a:lnSpc>
+                <a:spcPct val="122000"/>
+              </a:lnSpc>
+              <a:buClr>
+                <a:srgbClr val="1e1f35"/>
+              </a:buClr>
+              <a:buFont typeface="Symbol" charset="2"/>
+              <a:buChar char=""/>
+            </a:pPr>
+            <a:r>
+              <a:rPr b="0" lang="zh-CN" sz="1600" spc="-1" strike="noStrike">
                 <a:solidFill>
                   <a:srgbClr val="1e1f35"/>
                 </a:solidFill>
                 <a:latin typeface="Microsoft JhengHei"/>
                 <a:ea typeface="Microsoft JhengHei"/>
               </a:rPr>
-              <a:t>右鍵點選桌面貓咪。</a:t>
-            </a:r>
-            <a:endParaRPr b="0" lang="en-US" sz="1650" spc="-1" strike="noStrike">
-              <a:solidFill>
-                <a:srgbClr val="000000"/>
-              </a:solidFill>
-              <a:latin typeface="Arial"/>
-            </a:endParaRPr>
-          </a:p>
-        </p:txBody>
-      </p:sp>
-      <p:sp>
-        <p:nvSpPr>
-          <p:cNvPr id="222" name="Shape 7"/>
-          <p:cNvSpPr/>
-          <p:nvPr/>
-        </p:nvSpPr>
-        <p:spPr>
-          <a:xfrm>
-            <a:off x="868680" y="2853000"/>
-            <a:ext cx="420120" cy="420120"/>
-          </a:xfrm>
-          <a:prstGeom prst="ellipse">
-            <a:avLst/>
-          </a:prstGeom>
-          <a:solidFill>
-            <a:srgbClr val="5b4fe8"/>
-          </a:solidFill>
-          <a:ln w="0">
-            <a:noFill/>
-          </a:ln>
-        </p:spPr>
-        <p:style>
-          <a:lnRef idx="0"/>
-          <a:fillRef idx="0"/>
-          <a:effectRef idx="0"/>
-          <a:fontRef idx="minor"/>
-        </p:style>
-        <p:txBody>
-          <a:bodyPr lIns="90000" rIns="90000" tIns="45000" bIns="45000" anchor="t">
-            <a:noAutofit/>
-          </a:bodyPr>
-          <a:p>
-            <a:endParaRPr b="0" lang="en-US" sz="1800" spc="-1" strike="noStrike">
-              <a:solidFill>
-                <a:srgbClr val="ffffff"/>
-              </a:solidFill>
-              <a:latin typeface="Arial"/>
-            </a:endParaRPr>
-          </a:p>
-        </p:txBody>
-      </p:sp>
-      <p:sp>
-        <p:nvSpPr>
-          <p:cNvPr id="223" name="Text 8"/>
-          <p:cNvSpPr/>
-          <p:nvPr/>
-        </p:nvSpPr>
-        <p:spPr>
-          <a:xfrm>
-            <a:off x="868680" y="2853000"/>
-            <a:ext cx="420120" cy="420120"/>
-          </a:xfrm>
-          <a:prstGeom prst="rect">
-            <a:avLst/>
-          </a:prstGeom>
-          <a:noFill/>
-          <a:ln w="0">
-            <a:noFill/>
-          </a:ln>
-        </p:spPr>
-        <p:style>
-          <a:lnRef idx="0"/>
-          <a:fillRef idx="0"/>
-          <a:effectRef idx="0"/>
-          <a:fontRef idx="minor"/>
-        </p:style>
-        <p:txBody>
-          <a:bodyPr lIns="0" rIns="0" tIns="0" bIns="0" anchor="ctr">
-            <a:noAutofit/>
-          </a:bodyPr>
-          <a:p>
-            <a:pPr algn="ctr" defTabSz="914400">
-              <a:lnSpc>
-                <a:spcPct val="100000"/>
-              </a:lnSpc>
-              <a:tabLst>
-                <a:tab algn="l" pos="0"/>
-              </a:tabLst>
-            </a:pPr>
-            <a:r>
-              <a:rPr b="1" lang="en-US" sz="1700" spc="-1" strike="noStrike">
-                <a:solidFill>
-                  <a:srgbClr val="ffffff"/>
-                </a:solidFill>
-                <a:latin typeface="Microsoft JhengHei"/>
-                <a:ea typeface="Microsoft JhengHei"/>
-              </a:rPr>
-              <a:t>2</a:t>
-            </a:r>
-            <a:endParaRPr b="0" lang="en-US" sz="1700" spc="-1" strike="noStrike">
-              <a:solidFill>
-                <a:srgbClr val="000000"/>
-              </a:solidFill>
-              <a:latin typeface="Arial"/>
-            </a:endParaRPr>
-          </a:p>
-        </p:txBody>
-      </p:sp>
-      <p:sp>
-        <p:nvSpPr>
-          <p:cNvPr id="224" name="Text 9"/>
-          <p:cNvSpPr/>
-          <p:nvPr/>
-        </p:nvSpPr>
-        <p:spPr>
-          <a:xfrm>
-            <a:off x="1490400" y="2797920"/>
-            <a:ext cx="9920880" cy="548280"/>
-          </a:xfrm>
-          <a:prstGeom prst="rect">
-            <a:avLst/>
-          </a:prstGeom>
-          <a:noFill/>
-          <a:ln w="0">
-            <a:noFill/>
-          </a:ln>
-        </p:spPr>
-        <p:style>
-          <a:lnRef idx="0"/>
-          <a:fillRef idx="0"/>
-          <a:effectRef idx="0"/>
-          <a:fontRef idx="minor"/>
-        </p:style>
-        <p:txBody>
-          <a:bodyPr lIns="0" rIns="0" tIns="0" bIns="0" anchor="ctr">
-            <a:noAutofit/>
-          </a:bodyPr>
-          <a:p>
-            <a:pPr defTabSz="914400">
-              <a:lnSpc>
-                <a:spcPct val="100000"/>
-              </a:lnSpc>
-              <a:tabLst>
-                <a:tab algn="l" pos="0"/>
-              </a:tabLst>
-            </a:pPr>
-            <a:r>
-              <a:rPr b="0" lang="zh-CN" sz="1650" spc="-1" strike="noStrike">
+              <a:t>左鍵拖曳貓咪或用量徽章，可移到適合的位置；位置會保留</a:t>
+            </a:r>
+            <a:endParaRPr b="0" lang="en-US" sz="1600" spc="-1" strike="noStrike">
+              <a:solidFill>
+                <a:srgbClr val="000000"/>
+              </a:solidFill>
+              <a:latin typeface="Arial"/>
+            </a:endParaRPr>
+          </a:p>
+          <a:p>
+            <a:pPr marL="343080" indent="-343080" defTabSz="914400">
+              <a:lnSpc>
+                <a:spcPct val="122000"/>
+              </a:lnSpc>
+              <a:buClr>
+                <a:srgbClr val="1e1f35"/>
+              </a:buClr>
+              <a:buFont typeface="Symbol" charset="2"/>
+              <a:buChar char=""/>
+            </a:pPr>
+            <a:r>
+              <a:rPr b="0" lang="zh-CN" sz="1600" spc="-1" strike="noStrike">
                 <a:solidFill>
                   <a:srgbClr val="1e1f35"/>
                 </a:solidFill>
                 <a:latin typeface="Microsoft JhengHei"/>
                 <a:ea typeface="Microsoft JhengHei"/>
               </a:rPr>
-              <a:t>開啟「切換 </a:t>
-            </a:r>
-            <a:r>
-              <a:rPr b="0" lang="en-US" sz="1650" spc="-1" strike="noStrike">
-                <a:solidFill>
-                  <a:srgbClr val="1e1f35"/>
-                </a:solidFill>
-                <a:latin typeface="Microsoft JhengHei"/>
-                <a:ea typeface="Microsoft JhengHei"/>
-              </a:rPr>
-              <a:t>Skin</a:t>
-            </a:r>
-            <a:r>
-              <a:rPr b="0" lang="zh-CN" sz="1650" spc="-1" strike="noStrike">
-                <a:solidFill>
-                  <a:srgbClr val="1e1f35"/>
-                </a:solidFill>
-                <a:latin typeface="Microsoft JhengHei"/>
-                <a:ea typeface="Microsoft JhengHei"/>
-              </a:rPr>
-              <a:t>」子選單。</a:t>
-            </a:r>
-            <a:endParaRPr b="0" lang="en-US" sz="1650" spc="-1" strike="noStrike">
-              <a:solidFill>
-                <a:srgbClr val="000000"/>
-              </a:solidFill>
-              <a:latin typeface="Arial"/>
-            </a:endParaRPr>
-          </a:p>
-        </p:txBody>
-      </p:sp>
-      <p:sp>
-        <p:nvSpPr>
-          <p:cNvPr id="225" name="Shape 10"/>
-          <p:cNvSpPr/>
-          <p:nvPr/>
-        </p:nvSpPr>
-        <p:spPr>
-          <a:xfrm>
-            <a:off x="868680" y="3675960"/>
-            <a:ext cx="420120" cy="420120"/>
-          </a:xfrm>
-          <a:prstGeom prst="ellipse">
-            <a:avLst/>
-          </a:prstGeom>
-          <a:solidFill>
-            <a:srgbClr val="5b4fe8"/>
-          </a:solidFill>
-          <a:ln w="0">
-            <a:noFill/>
-          </a:ln>
-        </p:spPr>
-        <p:style>
-          <a:lnRef idx="0"/>
-          <a:fillRef idx="0"/>
-          <a:effectRef idx="0"/>
-          <a:fontRef idx="minor"/>
-        </p:style>
-        <p:txBody>
-          <a:bodyPr lIns="90000" rIns="90000" tIns="45000" bIns="45000" anchor="t">
-            <a:noAutofit/>
-          </a:bodyPr>
-          <a:p>
-            <a:endParaRPr b="0" lang="en-US" sz="1800" spc="-1" strike="noStrike">
-              <a:solidFill>
-                <a:srgbClr val="ffffff"/>
-              </a:solidFill>
-              <a:latin typeface="Arial"/>
-            </a:endParaRPr>
-          </a:p>
-        </p:txBody>
-      </p:sp>
-      <p:sp>
-        <p:nvSpPr>
-          <p:cNvPr id="226" name="Text 11"/>
-          <p:cNvSpPr/>
-          <p:nvPr/>
-        </p:nvSpPr>
-        <p:spPr>
-          <a:xfrm>
-            <a:off x="868680" y="3675960"/>
-            <a:ext cx="420120" cy="420120"/>
-          </a:xfrm>
-          <a:prstGeom prst="rect">
-            <a:avLst/>
-          </a:prstGeom>
-          <a:noFill/>
-          <a:ln w="0">
-            <a:noFill/>
-          </a:ln>
-        </p:spPr>
-        <p:style>
-          <a:lnRef idx="0"/>
-          <a:fillRef idx="0"/>
-          <a:effectRef idx="0"/>
-          <a:fontRef idx="minor"/>
-        </p:style>
-        <p:txBody>
-          <a:bodyPr lIns="0" rIns="0" tIns="0" bIns="0" anchor="ctr">
-            <a:noAutofit/>
-          </a:bodyPr>
-          <a:p>
-            <a:pPr algn="ctr" defTabSz="914400">
-              <a:lnSpc>
-                <a:spcPct val="100000"/>
-              </a:lnSpc>
-              <a:tabLst>
-                <a:tab algn="l" pos="0"/>
-              </a:tabLst>
-            </a:pPr>
-            <a:r>
-              <a:rPr b="1" lang="en-US" sz="1700" spc="-1" strike="noStrike">
-                <a:solidFill>
-                  <a:srgbClr val="ffffff"/>
-                </a:solidFill>
-                <a:latin typeface="Microsoft JhengHei"/>
-                <a:ea typeface="Microsoft JhengHei"/>
-              </a:rPr>
-              <a:t>3</a:t>
-            </a:r>
-            <a:endParaRPr b="0" lang="en-US" sz="1700" spc="-1" strike="noStrike">
-              <a:solidFill>
-                <a:srgbClr val="000000"/>
-              </a:solidFill>
-              <a:latin typeface="Arial"/>
-            </a:endParaRPr>
-          </a:p>
-        </p:txBody>
-      </p:sp>
-      <p:sp>
-        <p:nvSpPr>
-          <p:cNvPr id="227" name="Text 12"/>
-          <p:cNvSpPr/>
-          <p:nvPr/>
-        </p:nvSpPr>
-        <p:spPr>
-          <a:xfrm>
-            <a:off x="1490400" y="3620880"/>
-            <a:ext cx="9920880" cy="548280"/>
-          </a:xfrm>
-          <a:prstGeom prst="rect">
-            <a:avLst/>
-          </a:prstGeom>
-          <a:noFill/>
-          <a:ln w="0">
-            <a:noFill/>
-          </a:ln>
-        </p:spPr>
-        <p:style>
-          <a:lnRef idx="0"/>
-          <a:fillRef idx="0"/>
-          <a:effectRef idx="0"/>
-          <a:fontRef idx="minor"/>
-        </p:style>
-        <p:txBody>
-          <a:bodyPr lIns="0" rIns="0" tIns="0" bIns="0" anchor="ctr">
-            <a:noAutofit/>
-          </a:bodyPr>
-          <a:p>
-            <a:pPr defTabSz="914400">
-              <a:lnSpc>
-                <a:spcPct val="100000"/>
-              </a:lnSpc>
-              <a:tabLst>
-                <a:tab algn="l" pos="0"/>
-              </a:tabLst>
-            </a:pPr>
-            <a:r>
-              <a:rPr b="0" lang="zh-CN" sz="1650" spc="-1" strike="noStrike">
-                <a:solidFill>
-                  <a:srgbClr val="1e1f35"/>
-                </a:solidFill>
-                <a:latin typeface="Microsoft JhengHei"/>
-                <a:ea typeface="Microsoft JhengHei"/>
-              </a:rPr>
-              <a:t>選擇 </a:t>
-            </a:r>
-            <a:r>
-              <a:rPr b="0" lang="en-US" sz="1650" spc="-1" strike="noStrike">
-                <a:solidFill>
-                  <a:srgbClr val="1e1f35"/>
-                </a:solidFill>
-                <a:latin typeface="Microsoft JhengHei"/>
-                <a:ea typeface="Microsoft JhengHei"/>
-              </a:rPr>
-              <a:t>bluecat</a:t>
-            </a:r>
-            <a:r>
-              <a:rPr b="0" lang="zh-CN" sz="1650" spc="-1" strike="noStrike">
-                <a:solidFill>
-                  <a:srgbClr val="1e1f35"/>
-                </a:solidFill>
-                <a:latin typeface="Microsoft JhengHei"/>
-                <a:ea typeface="Microsoft JhengHei"/>
-              </a:rPr>
-              <a:t>、</a:t>
-            </a:r>
-            <a:r>
-              <a:rPr b="0" lang="en-US" sz="1650" spc="-1" strike="noStrike">
-                <a:solidFill>
-                  <a:srgbClr val="1e1f35"/>
-                </a:solidFill>
-                <a:latin typeface="Microsoft JhengHei"/>
-                <a:ea typeface="Microsoft JhengHei"/>
-              </a:rPr>
-              <a:t>cowcat </a:t>
-            </a:r>
-            <a:r>
-              <a:rPr b="0" lang="zh-CN" sz="1650" spc="-1" strike="noStrike">
-                <a:solidFill>
-                  <a:srgbClr val="1e1f35"/>
-                </a:solidFill>
-                <a:latin typeface="Microsoft JhengHei"/>
-                <a:ea typeface="Microsoft JhengHei"/>
-              </a:rPr>
-              <a:t>或 </a:t>
-            </a:r>
-            <a:r>
-              <a:rPr b="0" lang="en-US" sz="1650" spc="-1" strike="noStrike">
-                <a:solidFill>
-                  <a:srgbClr val="1e1f35"/>
-                </a:solidFill>
-                <a:latin typeface="Microsoft JhengHei"/>
-                <a:ea typeface="Microsoft JhengHei"/>
-              </a:rPr>
-              <a:t>ragdollcat</a:t>
-            </a:r>
-            <a:r>
-              <a:rPr b="0" lang="zh-CN" sz="1650" spc="-1" strike="noStrike">
-                <a:solidFill>
-                  <a:srgbClr val="1e1f35"/>
-                </a:solidFill>
-                <a:latin typeface="Microsoft JhengHei"/>
-                <a:ea typeface="Microsoft JhengHei"/>
-              </a:rPr>
-              <a:t>。</a:t>
-            </a:r>
-            <a:endParaRPr b="0" lang="en-US" sz="1650" spc="-1" strike="noStrike">
-              <a:solidFill>
-                <a:srgbClr val="000000"/>
-              </a:solidFill>
-              <a:latin typeface="Arial"/>
-            </a:endParaRPr>
-          </a:p>
-        </p:txBody>
-      </p:sp>
-      <p:sp>
-        <p:nvSpPr>
-          <p:cNvPr id="228" name="Shape 13"/>
-          <p:cNvSpPr/>
-          <p:nvPr/>
-        </p:nvSpPr>
-        <p:spPr>
-          <a:xfrm>
-            <a:off x="868680" y="5349240"/>
-            <a:ext cx="10634040" cy="502560"/>
-          </a:xfrm>
-          <a:prstGeom prst="rect">
-            <a:avLst/>
-          </a:prstGeom>
-          <a:solidFill>
-            <a:srgbClr val="eef0fa"/>
-          </a:solidFill>
-          <a:ln w="0">
-            <a:noFill/>
-          </a:ln>
-        </p:spPr>
-        <p:style>
-          <a:lnRef idx="0"/>
-          <a:fillRef idx="0"/>
-          <a:effectRef idx="0"/>
-          <a:fontRef idx="minor"/>
-        </p:style>
-        <p:txBody>
-          <a:bodyPr lIns="90000" rIns="90000" tIns="45000" bIns="45000" anchor="t">
-            <a:noAutofit/>
-          </a:bodyPr>
-          <a:p>
-            <a:endParaRPr b="0" lang="en-US" sz="1800" spc="-1" strike="noStrike">
-              <a:solidFill>
-                <a:srgbClr val="000000"/>
-              </a:solidFill>
-              <a:latin typeface="Arial"/>
-            </a:endParaRPr>
-          </a:p>
-        </p:txBody>
-      </p:sp>
-      <p:sp>
-        <p:nvSpPr>
-          <p:cNvPr id="229" name="Text 14"/>
-          <p:cNvSpPr/>
-          <p:nvPr/>
-        </p:nvSpPr>
-        <p:spPr>
-          <a:xfrm>
-            <a:off x="1051560" y="5349240"/>
-            <a:ext cx="10268280" cy="502560"/>
-          </a:xfrm>
-          <a:prstGeom prst="rect">
-            <a:avLst/>
-          </a:prstGeom>
-          <a:noFill/>
-          <a:ln w="0">
-            <a:noFill/>
-          </a:ln>
-        </p:spPr>
-        <p:style>
-          <a:lnRef idx="0"/>
-          <a:fillRef idx="0"/>
-          <a:effectRef idx="0"/>
-          <a:fontRef idx="minor"/>
-        </p:style>
-        <p:txBody>
-          <a:bodyPr lIns="0" rIns="0" tIns="0" bIns="0" anchor="ctr">
-            <a:noAutofit/>
-          </a:bodyPr>
-          <a:p>
-            <a:pPr defTabSz="914400">
-              <a:lnSpc>
-                <a:spcPct val="100000"/>
-              </a:lnSpc>
-              <a:tabLst>
-                <a:tab algn="l" pos="0"/>
-              </a:tabLst>
-            </a:pPr>
-            <a:r>
-              <a:rPr b="0" lang="zh-CN" sz="1350" spc="-1" strike="noStrike">
-                <a:solidFill>
-                  <a:srgbClr val="6b6e85"/>
-                </a:solidFill>
-                <a:latin typeface="Microsoft JhengHei"/>
-                <a:ea typeface="Microsoft JhengHei"/>
-              </a:rPr>
-              <a:t>切換後立即生效，重新啟動後也會保留最後一次選擇。</a:t>
-            </a:r>
-            <a:endParaRPr b="0" lang="en-US" sz="1350" spc="-1" strike="noStrike">
+              <a:t>系統匣可顯示／隱藏桌寵、快速提問、開啟文件助手與結束程式</a:t>
+            </a:r>
+            <a:endParaRPr b="0" lang="en-US" sz="1600" spc="-1" strike="noStrike">
               <a:solidFill>
                 <a:srgbClr val="000000"/>
               </a:solidFill>
@@ -8443,7 +6091,7 @@
       </p:grpSpPr>
       <p:sp>
         <p:nvSpPr>
-          <p:cNvPr id="230" name="Shape 0"/>
+          <p:cNvPr id="184" name="Shape 0"/>
           <p:cNvSpPr/>
           <p:nvPr/>
         </p:nvSpPr>
@@ -8484,7 +6132,7 @@
       </p:sp>
       <p:sp>
         <p:nvSpPr>
-          <p:cNvPr id="231" name="Shape 1"/>
+          <p:cNvPr id="185" name="Shape 1"/>
           <p:cNvSpPr/>
           <p:nvPr/>
         </p:nvSpPr>
@@ -8525,7 +6173,7 @@
       </p:sp>
       <p:sp>
         <p:nvSpPr>
-          <p:cNvPr id="232" name="Text 2"/>
+          <p:cNvPr id="186" name="Text 2"/>
           <p:cNvSpPr/>
           <p:nvPr/>
         </p:nvSpPr>
@@ -8569,7 +6217,7 @@
                 <a:latin typeface="Microsoft JhengHei"/>
                 <a:ea typeface="Microsoft JhengHei"/>
               </a:rPr>
-              <a:t>桌寵管理與排程</a:t>
+              <a:t>安全結束與常見提示</a:t>
             </a:r>
             <a:endParaRPr b="0" lang="en-US" sz="2800" spc="-1" strike="noStrike">
               <a:solidFill>
@@ -8582,7 +6230,7 @@
       </p:sp>
       <p:sp>
         <p:nvSpPr>
-          <p:cNvPr id="233" name="Text 3"/>
+          <p:cNvPr id="187" name="Text 3"/>
           <p:cNvSpPr/>
           <p:nvPr/>
         </p:nvSpPr>
@@ -8626,7 +6274,7 @@
                 <a:latin typeface="Microsoft JhengHei"/>
                 <a:ea typeface="Microsoft JhengHei"/>
               </a:rPr>
-              <a:t>維持桌面工作習慣，不必一直開著聊天視窗</a:t>
+              <a:t>從系統匣安全關閉</a:t>
             </a:r>
             <a:endParaRPr b="0" lang="en-US" sz="1900" spc="-1" strike="noStrike">
               <a:solidFill>
@@ -8639,14 +6287,499 @@
       </p:sp>
       <p:sp>
         <p:nvSpPr>
-          <p:cNvPr id="234" name="Shape 4"/>
-          <p:cNvSpPr/>
-          <p:nvPr/>
-        </p:nvSpPr>
-        <p:spPr>
-          <a:xfrm>
-            <a:off x="868680" y="1938600"/>
-            <a:ext cx="10606680" cy="3017160"/>
+          <p:cNvPr id="188" name="Shape 4"/>
+          <p:cNvSpPr/>
+          <p:nvPr/>
+        </p:nvSpPr>
+        <p:spPr>
+          <a:xfrm>
+            <a:off x="868680" y="1847160"/>
+            <a:ext cx="420120" cy="420120"/>
+          </a:xfrm>
+          <a:prstGeom prst="ellipse">
+            <a:avLst/>
+          </a:prstGeom>
+          <a:solidFill>
+            <a:srgbClr val="5b4fe8"/>
+          </a:solidFill>
+          <a:ln w="0">
+            <a:noFill/>
+          </a:ln>
+        </p:spPr>
+        <p:style>
+          <a:lnRef idx="0"/>
+          <a:fillRef idx="0"/>
+          <a:effectRef idx="0"/>
+          <a:fontRef idx="minor"/>
+        </p:style>
+        <p:txBody>
+          <a:bodyPr lIns="90000" rIns="90000" tIns="45000" bIns="45000" anchor="t">
+            <a:noAutofit/>
+          </a:bodyPr>
+          <a:p>
+            <a:endParaRPr b="0" lang="en-US" sz="1800" spc="-1" strike="noStrike">
+              <a:solidFill>
+                <a:srgbClr val="ffffff"/>
+              </a:solidFill>
+              <a:latin typeface="Arial"/>
+            </a:endParaRPr>
+          </a:p>
+        </p:txBody>
+      </p:sp>
+      <p:sp>
+        <p:nvSpPr>
+          <p:cNvPr id="189" name="Text 5"/>
+          <p:cNvSpPr/>
+          <p:nvPr/>
+        </p:nvSpPr>
+        <p:spPr>
+          <a:xfrm>
+            <a:off x="868680" y="1847160"/>
+            <a:ext cx="420120" cy="420120"/>
+          </a:xfrm>
+          <a:prstGeom prst="rect">
+            <a:avLst/>
+          </a:prstGeom>
+          <a:noFill/>
+          <a:ln w="0">
+            <a:noFill/>
+          </a:ln>
+        </p:spPr>
+        <p:style>
+          <a:lnRef idx="0"/>
+          <a:fillRef idx="0"/>
+          <a:effectRef idx="0"/>
+          <a:fontRef idx="minor"/>
+        </p:style>
+        <p:txBody>
+          <a:bodyPr lIns="0" rIns="0" tIns="0" bIns="0" anchor="ctr">
+            <a:noAutofit/>
+          </a:bodyPr>
+          <a:p>
+            <a:pPr algn="ctr" defTabSz="914400">
+              <a:lnSpc>
+                <a:spcPct val="100000"/>
+              </a:lnSpc>
+              <a:tabLst>
+                <a:tab algn="l" pos="0"/>
+              </a:tabLst>
+            </a:pPr>
+            <a:r>
+              <a:rPr b="1" lang="en-US" sz="1700" spc="-1" strike="noStrike">
+                <a:solidFill>
+                  <a:srgbClr val="ffffff"/>
+                </a:solidFill>
+                <a:latin typeface="Microsoft JhengHei"/>
+                <a:ea typeface="Microsoft JhengHei"/>
+              </a:rPr>
+              <a:t>1</a:t>
+            </a:r>
+            <a:endParaRPr b="0" lang="en-US" sz="1700" spc="-1" strike="noStrike">
+              <a:solidFill>
+                <a:srgbClr val="000000"/>
+              </a:solidFill>
+              <a:latin typeface="Arial"/>
+            </a:endParaRPr>
+          </a:p>
+        </p:txBody>
+      </p:sp>
+      <p:sp>
+        <p:nvSpPr>
+          <p:cNvPr id="190" name="Text 6"/>
+          <p:cNvSpPr/>
+          <p:nvPr/>
+        </p:nvSpPr>
+        <p:spPr>
+          <a:xfrm>
+            <a:off x="1490400" y="1792080"/>
+            <a:ext cx="9920880" cy="548280"/>
+          </a:xfrm>
+          <a:prstGeom prst="rect">
+            <a:avLst/>
+          </a:prstGeom>
+          <a:noFill/>
+          <a:ln w="0">
+            <a:noFill/>
+          </a:ln>
+        </p:spPr>
+        <p:style>
+          <a:lnRef idx="0"/>
+          <a:fillRef idx="0"/>
+          <a:effectRef idx="0"/>
+          <a:fontRef idx="minor"/>
+        </p:style>
+        <p:txBody>
+          <a:bodyPr lIns="0" rIns="0" tIns="0" bIns="0" anchor="ctr">
+            <a:noAutofit/>
+          </a:bodyPr>
+          <a:p>
+            <a:pPr defTabSz="914400">
+              <a:lnSpc>
+                <a:spcPct val="100000"/>
+              </a:lnSpc>
+              <a:tabLst>
+                <a:tab algn="l" pos="0"/>
+              </a:tabLst>
+            </a:pPr>
+            <a:r>
+              <a:rPr b="0" lang="zh-CN" sz="1600" spc="-1" strike="noStrike">
+                <a:solidFill>
+                  <a:srgbClr val="1e1f35"/>
+                </a:solidFill>
+                <a:latin typeface="Microsoft JhengHei"/>
+                <a:ea typeface="Microsoft JhengHei"/>
+              </a:rPr>
+              <a:t>在工作列右下角找到 </a:t>
+            </a:r>
+            <a:r>
+              <a:rPr b="0" lang="en-US" sz="1600" spc="-1" strike="noStrike">
+                <a:solidFill>
+                  <a:srgbClr val="1e1f35"/>
+                </a:solidFill>
+                <a:latin typeface="Microsoft JhengHei"/>
+                <a:ea typeface="Microsoft JhengHei"/>
+              </a:rPr>
+              <a:t>ClaudeCat </a:t>
+            </a:r>
+            <a:r>
+              <a:rPr b="0" lang="zh-CN" sz="1600" spc="-1" strike="noStrike">
+                <a:solidFill>
+                  <a:srgbClr val="1e1f35"/>
+                </a:solidFill>
+                <a:latin typeface="Microsoft JhengHei"/>
+                <a:ea typeface="Microsoft JhengHei"/>
+              </a:rPr>
+              <a:t>圖示。</a:t>
+            </a:r>
+            <a:endParaRPr b="0" lang="en-US" sz="1600" spc="-1" strike="noStrike">
+              <a:solidFill>
+                <a:srgbClr val="000000"/>
+              </a:solidFill>
+              <a:latin typeface="Arial"/>
+            </a:endParaRPr>
+          </a:p>
+        </p:txBody>
+      </p:sp>
+      <p:sp>
+        <p:nvSpPr>
+          <p:cNvPr id="191" name="Shape 7"/>
+          <p:cNvSpPr/>
+          <p:nvPr/>
+        </p:nvSpPr>
+        <p:spPr>
+          <a:xfrm>
+            <a:off x="868680" y="2560320"/>
+            <a:ext cx="420120" cy="420120"/>
+          </a:xfrm>
+          <a:prstGeom prst="ellipse">
+            <a:avLst/>
+          </a:prstGeom>
+          <a:solidFill>
+            <a:srgbClr val="5b4fe8"/>
+          </a:solidFill>
+          <a:ln w="0">
+            <a:noFill/>
+          </a:ln>
+        </p:spPr>
+        <p:style>
+          <a:lnRef idx="0"/>
+          <a:fillRef idx="0"/>
+          <a:effectRef idx="0"/>
+          <a:fontRef idx="minor"/>
+        </p:style>
+        <p:txBody>
+          <a:bodyPr lIns="90000" rIns="90000" tIns="45000" bIns="45000" anchor="t">
+            <a:noAutofit/>
+          </a:bodyPr>
+          <a:p>
+            <a:endParaRPr b="0" lang="en-US" sz="1800" spc="-1" strike="noStrike">
+              <a:solidFill>
+                <a:srgbClr val="ffffff"/>
+              </a:solidFill>
+              <a:latin typeface="Arial"/>
+            </a:endParaRPr>
+          </a:p>
+        </p:txBody>
+      </p:sp>
+      <p:sp>
+        <p:nvSpPr>
+          <p:cNvPr id="192" name="Text 8"/>
+          <p:cNvSpPr/>
+          <p:nvPr/>
+        </p:nvSpPr>
+        <p:spPr>
+          <a:xfrm>
+            <a:off x="868680" y="2560320"/>
+            <a:ext cx="420120" cy="420120"/>
+          </a:xfrm>
+          <a:prstGeom prst="rect">
+            <a:avLst/>
+          </a:prstGeom>
+          <a:noFill/>
+          <a:ln w="0">
+            <a:noFill/>
+          </a:ln>
+        </p:spPr>
+        <p:style>
+          <a:lnRef idx="0"/>
+          <a:fillRef idx="0"/>
+          <a:effectRef idx="0"/>
+          <a:fontRef idx="minor"/>
+        </p:style>
+        <p:txBody>
+          <a:bodyPr lIns="0" rIns="0" tIns="0" bIns="0" anchor="ctr">
+            <a:noAutofit/>
+          </a:bodyPr>
+          <a:p>
+            <a:pPr algn="ctr" defTabSz="914400">
+              <a:lnSpc>
+                <a:spcPct val="100000"/>
+              </a:lnSpc>
+              <a:tabLst>
+                <a:tab algn="l" pos="0"/>
+              </a:tabLst>
+            </a:pPr>
+            <a:r>
+              <a:rPr b="1" lang="en-US" sz="1700" spc="-1" strike="noStrike">
+                <a:solidFill>
+                  <a:srgbClr val="ffffff"/>
+                </a:solidFill>
+                <a:latin typeface="Microsoft JhengHei"/>
+                <a:ea typeface="Microsoft JhengHei"/>
+              </a:rPr>
+              <a:t>2</a:t>
+            </a:r>
+            <a:endParaRPr b="0" lang="en-US" sz="1700" spc="-1" strike="noStrike">
+              <a:solidFill>
+                <a:srgbClr val="000000"/>
+              </a:solidFill>
+              <a:latin typeface="Arial"/>
+            </a:endParaRPr>
+          </a:p>
+        </p:txBody>
+      </p:sp>
+      <p:sp>
+        <p:nvSpPr>
+          <p:cNvPr id="193" name="Text 9"/>
+          <p:cNvSpPr/>
+          <p:nvPr/>
+        </p:nvSpPr>
+        <p:spPr>
+          <a:xfrm>
+            <a:off x="1490400" y="2505600"/>
+            <a:ext cx="9920880" cy="548280"/>
+          </a:xfrm>
+          <a:prstGeom prst="rect">
+            <a:avLst/>
+          </a:prstGeom>
+          <a:noFill/>
+          <a:ln w="0">
+            <a:noFill/>
+          </a:ln>
+        </p:spPr>
+        <p:style>
+          <a:lnRef idx="0"/>
+          <a:fillRef idx="0"/>
+          <a:effectRef idx="0"/>
+          <a:fontRef idx="minor"/>
+        </p:style>
+        <p:txBody>
+          <a:bodyPr lIns="0" rIns="0" tIns="0" bIns="0" anchor="ctr">
+            <a:noAutofit/>
+          </a:bodyPr>
+          <a:p>
+            <a:pPr defTabSz="914400">
+              <a:lnSpc>
+                <a:spcPct val="100000"/>
+              </a:lnSpc>
+              <a:tabLst>
+                <a:tab algn="l" pos="0"/>
+              </a:tabLst>
+            </a:pPr>
+            <a:r>
+              <a:rPr b="0" lang="zh-CN" sz="1600" spc="-1" strike="noStrike">
+                <a:solidFill>
+                  <a:srgbClr val="1e1f35"/>
+                </a:solidFill>
+                <a:latin typeface="Microsoft JhengHei"/>
+                <a:ea typeface="Microsoft JhengHei"/>
+              </a:rPr>
+              <a:t>右鍵選「結束」。</a:t>
+            </a:r>
+            <a:endParaRPr b="0" lang="en-US" sz="1600" spc="-1" strike="noStrike">
+              <a:solidFill>
+                <a:srgbClr val="000000"/>
+              </a:solidFill>
+              <a:latin typeface="Arial"/>
+            </a:endParaRPr>
+          </a:p>
+        </p:txBody>
+      </p:sp>
+      <p:sp>
+        <p:nvSpPr>
+          <p:cNvPr id="194" name="Shape 10"/>
+          <p:cNvSpPr/>
+          <p:nvPr/>
+        </p:nvSpPr>
+        <p:spPr>
+          <a:xfrm>
+            <a:off x="868680" y="3273480"/>
+            <a:ext cx="420120" cy="420120"/>
+          </a:xfrm>
+          <a:prstGeom prst="ellipse">
+            <a:avLst/>
+          </a:prstGeom>
+          <a:solidFill>
+            <a:srgbClr val="5b4fe8"/>
+          </a:solidFill>
+          <a:ln w="0">
+            <a:noFill/>
+          </a:ln>
+        </p:spPr>
+        <p:style>
+          <a:lnRef idx="0"/>
+          <a:fillRef idx="0"/>
+          <a:effectRef idx="0"/>
+          <a:fontRef idx="minor"/>
+        </p:style>
+        <p:txBody>
+          <a:bodyPr lIns="90000" rIns="90000" tIns="45000" bIns="45000" anchor="t">
+            <a:noAutofit/>
+          </a:bodyPr>
+          <a:p>
+            <a:endParaRPr b="0" lang="en-US" sz="1800" spc="-1" strike="noStrike">
+              <a:solidFill>
+                <a:srgbClr val="ffffff"/>
+              </a:solidFill>
+              <a:latin typeface="Arial"/>
+            </a:endParaRPr>
+          </a:p>
+        </p:txBody>
+      </p:sp>
+      <p:sp>
+        <p:nvSpPr>
+          <p:cNvPr id="195" name="Text 11"/>
+          <p:cNvSpPr/>
+          <p:nvPr/>
+        </p:nvSpPr>
+        <p:spPr>
+          <a:xfrm>
+            <a:off x="868680" y="3273480"/>
+            <a:ext cx="420120" cy="420120"/>
+          </a:xfrm>
+          <a:prstGeom prst="rect">
+            <a:avLst/>
+          </a:prstGeom>
+          <a:noFill/>
+          <a:ln w="0">
+            <a:noFill/>
+          </a:ln>
+        </p:spPr>
+        <p:style>
+          <a:lnRef idx="0"/>
+          <a:fillRef idx="0"/>
+          <a:effectRef idx="0"/>
+          <a:fontRef idx="minor"/>
+        </p:style>
+        <p:txBody>
+          <a:bodyPr lIns="0" rIns="0" tIns="0" bIns="0" anchor="ctr">
+            <a:noAutofit/>
+          </a:bodyPr>
+          <a:p>
+            <a:pPr algn="ctr" defTabSz="914400">
+              <a:lnSpc>
+                <a:spcPct val="100000"/>
+              </a:lnSpc>
+              <a:tabLst>
+                <a:tab algn="l" pos="0"/>
+              </a:tabLst>
+            </a:pPr>
+            <a:r>
+              <a:rPr b="1" lang="en-US" sz="1700" spc="-1" strike="noStrike">
+                <a:solidFill>
+                  <a:srgbClr val="ffffff"/>
+                </a:solidFill>
+                <a:latin typeface="Microsoft JhengHei"/>
+                <a:ea typeface="Microsoft JhengHei"/>
+              </a:rPr>
+              <a:t>3</a:t>
+            </a:r>
+            <a:endParaRPr b="0" lang="en-US" sz="1700" spc="-1" strike="noStrike">
+              <a:solidFill>
+                <a:srgbClr val="000000"/>
+              </a:solidFill>
+              <a:latin typeface="Arial"/>
+            </a:endParaRPr>
+          </a:p>
+        </p:txBody>
+      </p:sp>
+      <p:sp>
+        <p:nvSpPr>
+          <p:cNvPr id="196" name="Text 12"/>
+          <p:cNvSpPr/>
+          <p:nvPr/>
+        </p:nvSpPr>
+        <p:spPr>
+          <a:xfrm>
+            <a:off x="1490400" y="3218760"/>
+            <a:ext cx="9920880" cy="548280"/>
+          </a:xfrm>
+          <a:prstGeom prst="rect">
+            <a:avLst/>
+          </a:prstGeom>
+          <a:noFill/>
+          <a:ln w="0">
+            <a:noFill/>
+          </a:ln>
+        </p:spPr>
+        <p:style>
+          <a:lnRef idx="0"/>
+          <a:fillRef idx="0"/>
+          <a:effectRef idx="0"/>
+          <a:fontRef idx="minor"/>
+        </p:style>
+        <p:txBody>
+          <a:bodyPr lIns="0" rIns="0" tIns="0" bIns="0" anchor="ctr">
+            <a:noAutofit/>
+          </a:bodyPr>
+          <a:p>
+            <a:pPr defTabSz="914400">
+              <a:lnSpc>
+                <a:spcPct val="100000"/>
+              </a:lnSpc>
+              <a:tabLst>
+                <a:tab algn="l" pos="0"/>
+              </a:tabLst>
+            </a:pPr>
+            <a:r>
+              <a:rPr b="0" lang="zh-CN" sz="1600" spc="-1" strike="noStrike">
+                <a:solidFill>
+                  <a:srgbClr val="1e1f35"/>
+                </a:solidFill>
+                <a:latin typeface="Microsoft JhengHei"/>
+                <a:ea typeface="Microsoft JhengHei"/>
+              </a:rPr>
+              <a:t>確認貓咪已從桌面消失。</a:t>
+            </a:r>
+            <a:endParaRPr b="0" lang="en-US" sz="1600" spc="-1" strike="noStrike">
+              <a:solidFill>
+                <a:srgbClr val="000000"/>
+              </a:solidFill>
+              <a:latin typeface="Arial"/>
+            </a:endParaRPr>
+          </a:p>
+        </p:txBody>
+      </p:sp>
+      <p:sp>
+        <p:nvSpPr>
+          <p:cNvPr id="197" name="Shape 13"/>
+          <p:cNvSpPr/>
+          <p:nvPr/>
+        </p:nvSpPr>
+        <p:spPr>
+          <a:xfrm>
+            <a:off x="868680" y="4114800"/>
+            <a:ext cx="10606680" cy="1691280"/>
           </a:xfrm>
           <a:prstGeom prst="rect">
             <a:avLst/>
@@ -8683,14 +6816,14 @@
       </p:sp>
       <p:sp>
         <p:nvSpPr>
-          <p:cNvPr id="235" name="Shape 5"/>
-          <p:cNvSpPr/>
-          <p:nvPr/>
-        </p:nvSpPr>
-        <p:spPr>
-          <a:xfrm>
-            <a:off x="868680" y="1938600"/>
-            <a:ext cx="68400" cy="3017160"/>
+          <p:cNvPr id="198" name="Shape 14"/>
+          <p:cNvSpPr/>
+          <p:nvPr/>
+        </p:nvSpPr>
+        <p:spPr>
+          <a:xfrm>
+            <a:off x="868680" y="4114800"/>
+            <a:ext cx="68400" cy="1691280"/>
           </a:xfrm>
           <a:prstGeom prst="rect">
             <a:avLst/>
@@ -8724,13 +6857,13 @@
       </p:sp>
       <p:sp>
         <p:nvSpPr>
-          <p:cNvPr id="236" name="Text 6"/>
-          <p:cNvSpPr/>
-          <p:nvPr/>
-        </p:nvSpPr>
-        <p:spPr>
-          <a:xfrm>
-            <a:off x="1124640" y="2084760"/>
+          <p:cNvPr id="199" name="Text 15"/>
+          <p:cNvSpPr/>
+          <p:nvPr/>
+        </p:nvSpPr>
+        <p:spPr>
+          <a:xfrm>
+            <a:off x="1124640" y="4260960"/>
             <a:ext cx="10149480" cy="365400"/>
           </a:xfrm>
           <a:prstGeom prst="rect">
@@ -8768,7 +6901,7 @@
                 <a:latin typeface="Microsoft JhengHei"/>
                 <a:ea typeface="Microsoft JhengHei"/>
               </a:rPr>
-              <a:t>可以做的事</a:t>
+              <a:t>常見提示</a:t>
             </a:r>
             <a:endParaRPr b="0" lang="en-US" sz="1800" spc="-1" strike="noStrike">
               <a:solidFill>
@@ -8781,14 +6914,14 @@
       </p:sp>
       <p:sp>
         <p:nvSpPr>
-          <p:cNvPr id="237" name="Text 7"/>
-          <p:cNvSpPr/>
-          <p:nvPr/>
-        </p:nvSpPr>
-        <p:spPr>
-          <a:xfrm>
-            <a:off x="1124640" y="2505600"/>
-            <a:ext cx="10149480" cy="2304000"/>
+          <p:cNvPr id="200" name="Text 16"/>
+          <p:cNvSpPr/>
+          <p:nvPr/>
+        </p:nvSpPr>
+        <p:spPr>
+          <a:xfrm>
+            <a:off x="1124640" y="4681800"/>
+            <a:ext cx="10149480" cy="978120"/>
           </a:xfrm>
           <a:prstGeom prst="rect">
             <a:avLst/>
@@ -8820,16 +6953,66 @@
               <a:buChar char=""/>
             </a:pPr>
             <a:r>
-              <a:rPr b="0" lang="zh-CN" sz="1600" spc="-1" strike="noStrike">
+              <a:rPr b="0" lang="zh-CN" sz="1450" spc="-1" strike="noStrike">
                 <a:solidFill>
                   <a:srgbClr val="1e1f35"/>
                 </a:solidFill>
                 <a:latin typeface="Microsoft JhengHei"/>
                 <a:ea typeface="Microsoft JhengHei"/>
               </a:rPr>
-              <a:t>左鍵拖曳貓咪或用量徽章，可移到適合的位置；位置會保留</a:t>
-            </a:r>
-            <a:endParaRPr b="0" lang="en-US" sz="1600" spc="-1" strike="noStrike">
+              <a:t>缺少模型／服務請聯絡 </a:t>
+            </a:r>
+            <a:r>
+              <a:rPr b="0" lang="en-US" sz="1450" spc="-1" strike="noStrike">
+                <a:solidFill>
+                  <a:srgbClr val="1e1f35"/>
+                </a:solidFill>
+                <a:latin typeface="Microsoft JhengHei"/>
+                <a:ea typeface="Microsoft JhengHei"/>
+              </a:rPr>
+              <a:t>IT</a:t>
+            </a:r>
+            <a:r>
+              <a:rPr b="0" lang="zh-CN" sz="1450" spc="-1" strike="noStrike">
+                <a:solidFill>
+                  <a:srgbClr val="1e1f35"/>
+                </a:solidFill>
+                <a:latin typeface="Microsoft JhengHei"/>
+                <a:ea typeface="Microsoft JhengHei"/>
+              </a:rPr>
+              <a:t>　　・　掃描型 </a:t>
+            </a:r>
+            <a:r>
+              <a:rPr b="0" lang="en-US" sz="1450" spc="-1" strike="noStrike">
+                <a:solidFill>
+                  <a:srgbClr val="1e1f35"/>
+                </a:solidFill>
+                <a:latin typeface="Microsoft JhengHei"/>
+                <a:ea typeface="Microsoft JhengHei"/>
+              </a:rPr>
+              <a:t>PDF </a:t>
+            </a:r>
+            <a:r>
+              <a:rPr b="0" lang="zh-CN" sz="1450" spc="-1" strike="noStrike">
+                <a:solidFill>
+                  <a:srgbClr val="1e1f35"/>
+                </a:solidFill>
+                <a:latin typeface="Microsoft JhengHei"/>
+                <a:ea typeface="Microsoft JhengHei"/>
+              </a:rPr>
+              <a:t>需要 </a:t>
+            </a:r>
+            <a:r>
+              <a:rPr b="0" lang="en-US" sz="1450" spc="-1" strike="noStrike">
+                <a:solidFill>
+                  <a:srgbClr val="1e1f35"/>
+                </a:solidFill>
+                <a:latin typeface="Microsoft JhengHei"/>
+                <a:ea typeface="Microsoft JhengHei"/>
+              </a:rPr>
+              <a:t>OCR</a:t>
+            </a:r>
+            <a:endParaRPr b="0" lang="en-US" sz="1450" spc="-1" strike="noStrike">
               <a:solidFill>
                 <a:srgbClr val="000000"/>
               </a:solidFill>
@@ -8848,44 +7031,16 @@
               <a:buChar char=""/>
             </a:pPr>
             <a:r>
-              <a:rPr b="0" lang="zh-CN" sz="1600" spc="-1" strike="noStrike">
+              <a:rPr b="0" lang="zh-CN" sz="1450" spc="-1" strike="noStrike">
                 <a:solidFill>
                   <a:srgbClr val="1e1f35"/>
                 </a:solidFill>
                 <a:latin typeface="Microsoft JhengHei"/>
                 <a:ea typeface="Microsoft JhengHei"/>
               </a:rPr>
-              <a:t>系統匣可顯示／隱藏桌寵、快速提問、開啟文件助手與結束程式</a:t>
-            </a:r>
-            <a:endParaRPr b="0" lang="en-US" sz="1600" spc="-1" strike="noStrike">
-              <a:solidFill>
-                <a:srgbClr val="000000"/>
-              </a:solidFill>
-              <a:latin typeface="Arial"/>
-            </a:endParaRPr>
-          </a:p>
-          <a:p>
-            <a:pPr marL="343080" indent="-343080" defTabSz="914400">
-              <a:lnSpc>
-                <a:spcPct val="122000"/>
-              </a:lnSpc>
-              <a:buClr>
-                <a:srgbClr val="1e1f35"/>
-              </a:buClr>
-              <a:buFont typeface="Symbol" charset="2"/>
-              <a:buChar char=""/>
-            </a:pPr>
-            <a:r>
-              <a:rPr b="0" lang="zh-CN" sz="1600" spc="-1" strike="noStrike">
-                <a:solidFill>
-                  <a:srgbClr val="1e1f35"/>
-                </a:solidFill>
-                <a:latin typeface="Microsoft JhengHei"/>
-                <a:ea typeface="Microsoft JhengHei"/>
-              </a:rPr>
-              <a:t>右鍵選「排程…」，可新增每日、每週或每小時提醒</a:t>
-            </a:r>
-            <a:endParaRPr b="0" lang="en-US" sz="1600" spc="-1" strike="noStrike">
+              <a:t>文件無資料時，請改問文件確實出現的內容</a:t>
+            </a:r>
+            <a:endParaRPr b="0" lang="en-US" sz="1450" spc="-1" strike="noStrike">
               <a:solidFill>
                 <a:srgbClr val="000000"/>
               </a:solidFill>
@@ -8908,1003 +7063,6 @@
 </file>
 
 <file path=ppt/slides/slide15.xml><?xml version="1.0" encoding="utf-8"?>
-<p:sld xmlns:a="http://schemas.openxmlformats.org/drawingml/2006/main" xmlns:p="http://schemas.openxmlformats.org/presentationml/2006/main" xmlns:r="http://schemas.openxmlformats.org/officeDocument/2006/relationships" xmlns:p14="http://schemas.microsoft.com/office/powerpoint/2010/main" xmlns:p15="http://schemas.microsoft.com/office/powerpoint/2012/main" xmlns:mc="http://schemas.openxmlformats.org/markup-compatibility/2006">
-  <p:cSld>
-    <p:bg>
-      <p:bgPr>
-        <a:solidFill>
-          <a:srgbClr val="ffffff"/>
-        </a:solidFill>
-      </p:bgPr>
-    </p:bg>
-    <p:spTree>
-      <p:nvGrpSpPr>
-        <p:cNvPr id="1" name=""/>
-        <p:cNvGrpSpPr/>
-        <p:nvPr/>
-      </p:nvGrpSpPr>
-      <p:grpSpPr>
-        <a:xfrm>
-          <a:off x="0" y="0"/>
-          <a:ext cx="0" cy="0"/>
-          <a:chOff x="0" y="0"/>
-          <a:chExt cx="0" cy="0"/>
-        </a:xfrm>
-      </p:grpSpPr>
-      <p:sp>
-        <p:nvSpPr>
-          <p:cNvPr id="238" name="Shape 0"/>
-          <p:cNvSpPr/>
-          <p:nvPr/>
-        </p:nvSpPr>
-        <p:spPr>
-          <a:xfrm>
-            <a:off x="0" y="0"/>
-            <a:ext cx="12188520" cy="959760"/>
-          </a:xfrm>
-          <a:prstGeom prst="rect">
-            <a:avLst/>
-          </a:prstGeom>
-          <a:solidFill>
-            <a:srgbClr val="5b4fe8"/>
-          </a:solidFill>
-          <a:ln w="0">
-            <a:noFill/>
-          </a:ln>
-        </p:spPr>
-        <p:style>
-          <a:lnRef idx="0"/>
-          <a:fillRef idx="0"/>
-          <a:effectRef idx="0"/>
-          <a:fontRef idx="minor"/>
-        </p:style>
-        <p:txBody>
-          <a:bodyPr lIns="90000" rIns="90000" tIns="45000" bIns="45000" anchor="t">
-            <a:noAutofit/>
-          </a:bodyPr>
-          <a:p>
-            <a:endParaRPr b="0" lang="en-US" sz="1800" spc="-1" strike="noStrike">
-              <a:solidFill>
-                <a:srgbClr val="ffffff"/>
-              </a:solidFill>
-              <a:latin typeface="Arial"/>
-            </a:endParaRPr>
-          </a:p>
-        </p:txBody>
-      </p:sp>
-      <p:sp>
-        <p:nvSpPr>
-          <p:cNvPr id="239" name="Shape 1"/>
-          <p:cNvSpPr/>
-          <p:nvPr/>
-        </p:nvSpPr>
-        <p:spPr>
-          <a:xfrm>
-            <a:off x="0" y="960120"/>
-            <a:ext cx="145800" cy="5897520"/>
-          </a:xfrm>
-          <a:prstGeom prst="rect">
-            <a:avLst/>
-          </a:prstGeom>
-          <a:solidFill>
-            <a:srgbClr val="5b4fe8"/>
-          </a:solidFill>
-          <a:ln w="0">
-            <a:noFill/>
-          </a:ln>
-        </p:spPr>
-        <p:style>
-          <a:lnRef idx="0"/>
-          <a:fillRef idx="0"/>
-          <a:effectRef idx="0"/>
-          <a:fontRef idx="minor"/>
-        </p:style>
-        <p:txBody>
-          <a:bodyPr lIns="90000" rIns="90000" tIns="45000" bIns="45000" anchor="t">
-            <a:noAutofit/>
-          </a:bodyPr>
-          <a:p>
-            <a:endParaRPr b="0" lang="en-US" sz="1800" spc="-1" strike="noStrike">
-              <a:solidFill>
-                <a:srgbClr val="ffffff"/>
-              </a:solidFill>
-              <a:latin typeface="Arial"/>
-            </a:endParaRPr>
-          </a:p>
-        </p:txBody>
-      </p:sp>
-      <p:sp>
-        <p:nvSpPr>
-          <p:cNvPr id="240" name="Text 2"/>
-          <p:cNvSpPr/>
-          <p:nvPr/>
-        </p:nvSpPr>
-        <p:spPr>
-          <a:xfrm>
-            <a:off x="548640" y="109800"/>
-            <a:ext cx="11091240" cy="731160"/>
-          </a:xfrm>
-          <a:prstGeom prst="rect">
-            <a:avLst/>
-          </a:prstGeom>
-          <a:noFill/>
-          <a:ln w="0">
-            <a:noFill/>
-          </a:ln>
-        </p:spPr>
-        <p:style>
-          <a:lnRef idx="0"/>
-          <a:fillRef idx="0"/>
-          <a:effectRef idx="0"/>
-          <a:fontRef idx="minor"/>
-        </p:style>
-        <p:txBody>
-          <a:bodyPr lIns="0" rIns="0" tIns="0" bIns="0" anchor="ctr">
-            <a:noAutofit/>
-          </a:bodyPr>
-          <a:p>
-            <a:pPr defTabSz="914400">
-              <a:lnSpc>
-                <a:spcPct val="100000"/>
-              </a:lnSpc>
-              <a:tabLst>
-                <a:tab algn="l" pos="0"/>
-              </a:tabLst>
-            </a:pPr>
-            <a:r>
-              <a:rPr b="1" lang="zh-CN" sz="2800" spc="-1" strike="noStrike">
-                <a:solidFill>
-                  <a:srgbClr val="ffffff"/>
-                </a:solidFill>
-                <a:latin typeface="Microsoft JhengHei"/>
-                <a:ea typeface="Microsoft JhengHei"/>
-              </a:rPr>
-              <a:t>安全結束與常見提示</a:t>
-            </a:r>
-            <a:endParaRPr b="0" lang="en-US" sz="2800" spc="-1" strike="noStrike">
-              <a:solidFill>
-                <a:srgbClr val="000000"/>
-              </a:solidFill>
-              <a:latin typeface="Arial"/>
-            </a:endParaRPr>
-          </a:p>
-        </p:txBody>
-      </p:sp>
-      <p:sp>
-        <p:nvSpPr>
-          <p:cNvPr id="241" name="Text 3"/>
-          <p:cNvSpPr/>
-          <p:nvPr/>
-        </p:nvSpPr>
-        <p:spPr>
-          <a:xfrm>
-            <a:off x="868680" y="1188720"/>
-            <a:ext cx="10634040" cy="456840"/>
-          </a:xfrm>
-          <a:prstGeom prst="rect">
-            <a:avLst/>
-          </a:prstGeom>
-          <a:noFill/>
-          <a:ln w="0">
-            <a:noFill/>
-          </a:ln>
-        </p:spPr>
-        <p:style>
-          <a:lnRef idx="0"/>
-          <a:fillRef idx="0"/>
-          <a:effectRef idx="0"/>
-          <a:fontRef idx="minor"/>
-        </p:style>
-        <p:txBody>
-          <a:bodyPr lIns="0" rIns="0" tIns="0" bIns="0" anchor="ctr">
-            <a:noAutofit/>
-          </a:bodyPr>
-          <a:p>
-            <a:pPr defTabSz="914400">
-              <a:lnSpc>
-                <a:spcPct val="100000"/>
-              </a:lnSpc>
-              <a:tabLst>
-                <a:tab algn="l" pos="0"/>
-              </a:tabLst>
-            </a:pPr>
-            <a:r>
-              <a:rPr b="1" lang="zh-CN" sz="1900" spc="-1" strike="noStrike">
-                <a:solidFill>
-                  <a:srgbClr val="5b4fe8"/>
-                </a:solidFill>
-                <a:latin typeface="Microsoft JhengHei"/>
-                <a:ea typeface="Microsoft JhengHei"/>
-              </a:rPr>
-              <a:t>從系統匣安全關閉</a:t>
-            </a:r>
-            <a:endParaRPr b="0" lang="en-US" sz="1900" spc="-1" strike="noStrike">
-              <a:solidFill>
-                <a:srgbClr val="000000"/>
-              </a:solidFill>
-              <a:latin typeface="Arial"/>
-            </a:endParaRPr>
-          </a:p>
-        </p:txBody>
-      </p:sp>
-      <p:sp>
-        <p:nvSpPr>
-          <p:cNvPr id="242" name="Shape 4"/>
-          <p:cNvSpPr/>
-          <p:nvPr/>
-        </p:nvSpPr>
-        <p:spPr>
-          <a:xfrm>
-            <a:off x="868680" y="1847160"/>
-            <a:ext cx="420120" cy="420120"/>
-          </a:xfrm>
-          <a:prstGeom prst="ellipse">
-            <a:avLst/>
-          </a:prstGeom>
-          <a:solidFill>
-            <a:srgbClr val="5b4fe8"/>
-          </a:solidFill>
-          <a:ln w="0">
-            <a:noFill/>
-          </a:ln>
-        </p:spPr>
-        <p:style>
-          <a:lnRef idx="0"/>
-          <a:fillRef idx="0"/>
-          <a:effectRef idx="0"/>
-          <a:fontRef idx="minor"/>
-        </p:style>
-        <p:txBody>
-          <a:bodyPr lIns="90000" rIns="90000" tIns="45000" bIns="45000" anchor="t">
-            <a:noAutofit/>
-          </a:bodyPr>
-          <a:p>
-            <a:endParaRPr b="0" lang="en-US" sz="1800" spc="-1" strike="noStrike">
-              <a:solidFill>
-                <a:srgbClr val="ffffff"/>
-              </a:solidFill>
-              <a:latin typeface="Arial"/>
-            </a:endParaRPr>
-          </a:p>
-        </p:txBody>
-      </p:sp>
-      <p:sp>
-        <p:nvSpPr>
-          <p:cNvPr id="243" name="Text 5"/>
-          <p:cNvSpPr/>
-          <p:nvPr/>
-        </p:nvSpPr>
-        <p:spPr>
-          <a:xfrm>
-            <a:off x="868680" y="1847160"/>
-            <a:ext cx="420120" cy="420120"/>
-          </a:xfrm>
-          <a:prstGeom prst="rect">
-            <a:avLst/>
-          </a:prstGeom>
-          <a:noFill/>
-          <a:ln w="0">
-            <a:noFill/>
-          </a:ln>
-        </p:spPr>
-        <p:style>
-          <a:lnRef idx="0"/>
-          <a:fillRef idx="0"/>
-          <a:effectRef idx="0"/>
-          <a:fontRef idx="minor"/>
-        </p:style>
-        <p:txBody>
-          <a:bodyPr lIns="0" rIns="0" tIns="0" bIns="0" anchor="ctr">
-            <a:noAutofit/>
-          </a:bodyPr>
-          <a:p>
-            <a:pPr algn="ctr" defTabSz="914400">
-              <a:lnSpc>
-                <a:spcPct val="100000"/>
-              </a:lnSpc>
-              <a:tabLst>
-                <a:tab algn="l" pos="0"/>
-              </a:tabLst>
-            </a:pPr>
-            <a:r>
-              <a:rPr b="1" lang="en-US" sz="1700" spc="-1" strike="noStrike">
-                <a:solidFill>
-                  <a:srgbClr val="ffffff"/>
-                </a:solidFill>
-                <a:latin typeface="Microsoft JhengHei"/>
-                <a:ea typeface="Microsoft JhengHei"/>
-              </a:rPr>
-              <a:t>1</a:t>
-            </a:r>
-            <a:endParaRPr b="0" lang="en-US" sz="1700" spc="-1" strike="noStrike">
-              <a:solidFill>
-                <a:srgbClr val="000000"/>
-              </a:solidFill>
-              <a:latin typeface="Arial"/>
-            </a:endParaRPr>
-          </a:p>
-        </p:txBody>
-      </p:sp>
-      <p:sp>
-        <p:nvSpPr>
-          <p:cNvPr id="244" name="Text 6"/>
-          <p:cNvSpPr/>
-          <p:nvPr/>
-        </p:nvSpPr>
-        <p:spPr>
-          <a:xfrm>
-            <a:off x="1490400" y="1792080"/>
-            <a:ext cx="9920880" cy="548280"/>
-          </a:xfrm>
-          <a:prstGeom prst="rect">
-            <a:avLst/>
-          </a:prstGeom>
-          <a:noFill/>
-          <a:ln w="0">
-            <a:noFill/>
-          </a:ln>
-        </p:spPr>
-        <p:style>
-          <a:lnRef idx="0"/>
-          <a:fillRef idx="0"/>
-          <a:effectRef idx="0"/>
-          <a:fontRef idx="minor"/>
-        </p:style>
-        <p:txBody>
-          <a:bodyPr lIns="0" rIns="0" tIns="0" bIns="0" anchor="ctr">
-            <a:noAutofit/>
-          </a:bodyPr>
-          <a:p>
-            <a:pPr defTabSz="914400">
-              <a:lnSpc>
-                <a:spcPct val="100000"/>
-              </a:lnSpc>
-              <a:tabLst>
-                <a:tab algn="l" pos="0"/>
-              </a:tabLst>
-            </a:pPr>
-            <a:r>
-              <a:rPr b="0" lang="zh-CN" sz="1600" spc="-1" strike="noStrike">
-                <a:solidFill>
-                  <a:srgbClr val="1e1f35"/>
-                </a:solidFill>
-                <a:latin typeface="Microsoft JhengHei"/>
-                <a:ea typeface="Microsoft JhengHei"/>
-              </a:rPr>
-              <a:t>在工作列右下角找到 </a:t>
-            </a:r>
-            <a:r>
-              <a:rPr b="0" lang="en-US" sz="1600" spc="-1" strike="noStrike">
-                <a:solidFill>
-                  <a:srgbClr val="1e1f35"/>
-                </a:solidFill>
-                <a:latin typeface="Microsoft JhengHei"/>
-                <a:ea typeface="Microsoft JhengHei"/>
-              </a:rPr>
-              <a:t>ClaudeCat </a:t>
-            </a:r>
-            <a:r>
-              <a:rPr b="0" lang="zh-CN" sz="1600" spc="-1" strike="noStrike">
-                <a:solidFill>
-                  <a:srgbClr val="1e1f35"/>
-                </a:solidFill>
-                <a:latin typeface="Microsoft JhengHei"/>
-                <a:ea typeface="Microsoft JhengHei"/>
-              </a:rPr>
-              <a:t>圖示。</a:t>
-            </a:r>
-            <a:endParaRPr b="0" lang="en-US" sz="1600" spc="-1" strike="noStrike">
-              <a:solidFill>
-                <a:srgbClr val="000000"/>
-              </a:solidFill>
-              <a:latin typeface="Arial"/>
-            </a:endParaRPr>
-          </a:p>
-        </p:txBody>
-      </p:sp>
-      <p:sp>
-        <p:nvSpPr>
-          <p:cNvPr id="245" name="Shape 7"/>
-          <p:cNvSpPr/>
-          <p:nvPr/>
-        </p:nvSpPr>
-        <p:spPr>
-          <a:xfrm>
-            <a:off x="868680" y="2560320"/>
-            <a:ext cx="420120" cy="420120"/>
-          </a:xfrm>
-          <a:prstGeom prst="ellipse">
-            <a:avLst/>
-          </a:prstGeom>
-          <a:solidFill>
-            <a:srgbClr val="5b4fe8"/>
-          </a:solidFill>
-          <a:ln w="0">
-            <a:noFill/>
-          </a:ln>
-        </p:spPr>
-        <p:style>
-          <a:lnRef idx="0"/>
-          <a:fillRef idx="0"/>
-          <a:effectRef idx="0"/>
-          <a:fontRef idx="minor"/>
-        </p:style>
-        <p:txBody>
-          <a:bodyPr lIns="90000" rIns="90000" tIns="45000" bIns="45000" anchor="t">
-            <a:noAutofit/>
-          </a:bodyPr>
-          <a:p>
-            <a:endParaRPr b="0" lang="en-US" sz="1800" spc="-1" strike="noStrike">
-              <a:solidFill>
-                <a:srgbClr val="ffffff"/>
-              </a:solidFill>
-              <a:latin typeface="Arial"/>
-            </a:endParaRPr>
-          </a:p>
-        </p:txBody>
-      </p:sp>
-      <p:sp>
-        <p:nvSpPr>
-          <p:cNvPr id="246" name="Text 8"/>
-          <p:cNvSpPr/>
-          <p:nvPr/>
-        </p:nvSpPr>
-        <p:spPr>
-          <a:xfrm>
-            <a:off x="868680" y="2560320"/>
-            <a:ext cx="420120" cy="420120"/>
-          </a:xfrm>
-          <a:prstGeom prst="rect">
-            <a:avLst/>
-          </a:prstGeom>
-          <a:noFill/>
-          <a:ln w="0">
-            <a:noFill/>
-          </a:ln>
-        </p:spPr>
-        <p:style>
-          <a:lnRef idx="0"/>
-          <a:fillRef idx="0"/>
-          <a:effectRef idx="0"/>
-          <a:fontRef idx="minor"/>
-        </p:style>
-        <p:txBody>
-          <a:bodyPr lIns="0" rIns="0" tIns="0" bIns="0" anchor="ctr">
-            <a:noAutofit/>
-          </a:bodyPr>
-          <a:p>
-            <a:pPr algn="ctr" defTabSz="914400">
-              <a:lnSpc>
-                <a:spcPct val="100000"/>
-              </a:lnSpc>
-              <a:tabLst>
-                <a:tab algn="l" pos="0"/>
-              </a:tabLst>
-            </a:pPr>
-            <a:r>
-              <a:rPr b="1" lang="en-US" sz="1700" spc="-1" strike="noStrike">
-                <a:solidFill>
-                  <a:srgbClr val="ffffff"/>
-                </a:solidFill>
-                <a:latin typeface="Microsoft JhengHei"/>
-                <a:ea typeface="Microsoft JhengHei"/>
-              </a:rPr>
-              <a:t>2</a:t>
-            </a:r>
-            <a:endParaRPr b="0" lang="en-US" sz="1700" spc="-1" strike="noStrike">
-              <a:solidFill>
-                <a:srgbClr val="000000"/>
-              </a:solidFill>
-              <a:latin typeface="Arial"/>
-            </a:endParaRPr>
-          </a:p>
-        </p:txBody>
-      </p:sp>
-      <p:sp>
-        <p:nvSpPr>
-          <p:cNvPr id="247" name="Text 9"/>
-          <p:cNvSpPr/>
-          <p:nvPr/>
-        </p:nvSpPr>
-        <p:spPr>
-          <a:xfrm>
-            <a:off x="1490400" y="2505600"/>
-            <a:ext cx="9920880" cy="548280"/>
-          </a:xfrm>
-          <a:prstGeom prst="rect">
-            <a:avLst/>
-          </a:prstGeom>
-          <a:noFill/>
-          <a:ln w="0">
-            <a:noFill/>
-          </a:ln>
-        </p:spPr>
-        <p:style>
-          <a:lnRef idx="0"/>
-          <a:fillRef idx="0"/>
-          <a:effectRef idx="0"/>
-          <a:fontRef idx="minor"/>
-        </p:style>
-        <p:txBody>
-          <a:bodyPr lIns="0" rIns="0" tIns="0" bIns="0" anchor="ctr">
-            <a:noAutofit/>
-          </a:bodyPr>
-          <a:p>
-            <a:pPr defTabSz="914400">
-              <a:lnSpc>
-                <a:spcPct val="100000"/>
-              </a:lnSpc>
-              <a:tabLst>
-                <a:tab algn="l" pos="0"/>
-              </a:tabLst>
-            </a:pPr>
-            <a:r>
-              <a:rPr b="0" lang="zh-CN" sz="1600" spc="-1" strike="noStrike">
-                <a:solidFill>
-                  <a:srgbClr val="1e1f35"/>
-                </a:solidFill>
-                <a:latin typeface="Microsoft JhengHei"/>
-                <a:ea typeface="Microsoft JhengHei"/>
-              </a:rPr>
-              <a:t>右鍵選「結束」。</a:t>
-            </a:r>
-            <a:endParaRPr b="0" lang="en-US" sz="1600" spc="-1" strike="noStrike">
-              <a:solidFill>
-                <a:srgbClr val="000000"/>
-              </a:solidFill>
-              <a:latin typeface="Arial"/>
-            </a:endParaRPr>
-          </a:p>
-        </p:txBody>
-      </p:sp>
-      <p:sp>
-        <p:nvSpPr>
-          <p:cNvPr id="248" name="Shape 10"/>
-          <p:cNvSpPr/>
-          <p:nvPr/>
-        </p:nvSpPr>
-        <p:spPr>
-          <a:xfrm>
-            <a:off x="868680" y="3273480"/>
-            <a:ext cx="420120" cy="420120"/>
-          </a:xfrm>
-          <a:prstGeom prst="ellipse">
-            <a:avLst/>
-          </a:prstGeom>
-          <a:solidFill>
-            <a:srgbClr val="5b4fe8"/>
-          </a:solidFill>
-          <a:ln w="0">
-            <a:noFill/>
-          </a:ln>
-        </p:spPr>
-        <p:style>
-          <a:lnRef idx="0"/>
-          <a:fillRef idx="0"/>
-          <a:effectRef idx="0"/>
-          <a:fontRef idx="minor"/>
-        </p:style>
-        <p:txBody>
-          <a:bodyPr lIns="90000" rIns="90000" tIns="45000" bIns="45000" anchor="t">
-            <a:noAutofit/>
-          </a:bodyPr>
-          <a:p>
-            <a:endParaRPr b="0" lang="en-US" sz="1800" spc="-1" strike="noStrike">
-              <a:solidFill>
-                <a:srgbClr val="ffffff"/>
-              </a:solidFill>
-              <a:latin typeface="Arial"/>
-            </a:endParaRPr>
-          </a:p>
-        </p:txBody>
-      </p:sp>
-      <p:sp>
-        <p:nvSpPr>
-          <p:cNvPr id="249" name="Text 11"/>
-          <p:cNvSpPr/>
-          <p:nvPr/>
-        </p:nvSpPr>
-        <p:spPr>
-          <a:xfrm>
-            <a:off x="868680" y="3273480"/>
-            <a:ext cx="420120" cy="420120"/>
-          </a:xfrm>
-          <a:prstGeom prst="rect">
-            <a:avLst/>
-          </a:prstGeom>
-          <a:noFill/>
-          <a:ln w="0">
-            <a:noFill/>
-          </a:ln>
-        </p:spPr>
-        <p:style>
-          <a:lnRef idx="0"/>
-          <a:fillRef idx="0"/>
-          <a:effectRef idx="0"/>
-          <a:fontRef idx="minor"/>
-        </p:style>
-        <p:txBody>
-          <a:bodyPr lIns="0" rIns="0" tIns="0" bIns="0" anchor="ctr">
-            <a:noAutofit/>
-          </a:bodyPr>
-          <a:p>
-            <a:pPr algn="ctr" defTabSz="914400">
-              <a:lnSpc>
-                <a:spcPct val="100000"/>
-              </a:lnSpc>
-              <a:tabLst>
-                <a:tab algn="l" pos="0"/>
-              </a:tabLst>
-            </a:pPr>
-            <a:r>
-              <a:rPr b="1" lang="en-US" sz="1700" spc="-1" strike="noStrike">
-                <a:solidFill>
-                  <a:srgbClr val="ffffff"/>
-                </a:solidFill>
-                <a:latin typeface="Microsoft JhengHei"/>
-                <a:ea typeface="Microsoft JhengHei"/>
-              </a:rPr>
-              <a:t>3</a:t>
-            </a:r>
-            <a:endParaRPr b="0" lang="en-US" sz="1700" spc="-1" strike="noStrike">
-              <a:solidFill>
-                <a:srgbClr val="000000"/>
-              </a:solidFill>
-              <a:latin typeface="Arial"/>
-            </a:endParaRPr>
-          </a:p>
-        </p:txBody>
-      </p:sp>
-      <p:sp>
-        <p:nvSpPr>
-          <p:cNvPr id="250" name="Text 12"/>
-          <p:cNvSpPr/>
-          <p:nvPr/>
-        </p:nvSpPr>
-        <p:spPr>
-          <a:xfrm>
-            <a:off x="1490400" y="3218760"/>
-            <a:ext cx="9920880" cy="548280"/>
-          </a:xfrm>
-          <a:prstGeom prst="rect">
-            <a:avLst/>
-          </a:prstGeom>
-          <a:noFill/>
-          <a:ln w="0">
-            <a:noFill/>
-          </a:ln>
-        </p:spPr>
-        <p:style>
-          <a:lnRef idx="0"/>
-          <a:fillRef idx="0"/>
-          <a:effectRef idx="0"/>
-          <a:fontRef idx="minor"/>
-        </p:style>
-        <p:txBody>
-          <a:bodyPr lIns="0" rIns="0" tIns="0" bIns="0" anchor="ctr">
-            <a:noAutofit/>
-          </a:bodyPr>
-          <a:p>
-            <a:pPr defTabSz="914400">
-              <a:lnSpc>
-                <a:spcPct val="100000"/>
-              </a:lnSpc>
-              <a:tabLst>
-                <a:tab algn="l" pos="0"/>
-              </a:tabLst>
-            </a:pPr>
-            <a:r>
-              <a:rPr b="0" lang="zh-CN" sz="1600" spc="-1" strike="noStrike">
-                <a:solidFill>
-                  <a:srgbClr val="1e1f35"/>
-                </a:solidFill>
-                <a:latin typeface="Microsoft JhengHei"/>
-                <a:ea typeface="Microsoft JhengHei"/>
-              </a:rPr>
-              <a:t>確認貓咪已從桌面消失。</a:t>
-            </a:r>
-            <a:endParaRPr b="0" lang="en-US" sz="1600" spc="-1" strike="noStrike">
-              <a:solidFill>
-                <a:srgbClr val="000000"/>
-              </a:solidFill>
-              <a:latin typeface="Arial"/>
-            </a:endParaRPr>
-          </a:p>
-        </p:txBody>
-      </p:sp>
-      <p:sp>
-        <p:nvSpPr>
-          <p:cNvPr id="251" name="Shape 13"/>
-          <p:cNvSpPr/>
-          <p:nvPr/>
-        </p:nvSpPr>
-        <p:spPr>
-          <a:xfrm>
-            <a:off x="868680" y="4114800"/>
-            <a:ext cx="10606680" cy="1691280"/>
-          </a:xfrm>
-          <a:prstGeom prst="rect">
-            <a:avLst/>
-          </a:prstGeom>
-          <a:solidFill>
-            <a:srgbClr val="f0f2fa"/>
-          </a:solidFill>
-          <a:ln w="9525">
-            <a:solidFill>
-              <a:srgbClr val="dde1f2"/>
-            </a:solidFill>
-            <a:round/>
-          </a:ln>
-        </p:spPr>
-        <p:style>
-          <a:lnRef idx="0"/>
-          <a:fillRef idx="0"/>
-          <a:effectRef idx="0"/>
-          <a:fontRef idx="minor"/>
-        </p:style>
-        <p:txBody>
-          <a:bodyPr lIns="90000" rIns="90000" tIns="45000" bIns="45000" anchor="t">
-            <a:noAutofit/>
-          </a:bodyPr>
-          <a:p>
-            <a:endParaRPr b="0" lang="en-US" sz="1800" spc="-1" strike="noStrike">
-              <a:solidFill>
-                <a:srgbClr val="000000"/>
-              </a:solidFill>
-              <a:latin typeface="Arial"/>
-            </a:endParaRPr>
-          </a:p>
-        </p:txBody>
-      </p:sp>
-      <p:sp>
-        <p:nvSpPr>
-          <p:cNvPr id="252" name="Shape 14"/>
-          <p:cNvSpPr/>
-          <p:nvPr/>
-        </p:nvSpPr>
-        <p:spPr>
-          <a:xfrm>
-            <a:off x="868680" y="4114800"/>
-            <a:ext cx="68400" cy="1691280"/>
-          </a:xfrm>
-          <a:prstGeom prst="rect">
-            <a:avLst/>
-          </a:prstGeom>
-          <a:solidFill>
-            <a:srgbClr val="5b4fe8"/>
-          </a:solidFill>
-          <a:ln w="0">
-            <a:noFill/>
-          </a:ln>
-        </p:spPr>
-        <p:style>
-          <a:lnRef idx="0"/>
-          <a:fillRef idx="0"/>
-          <a:effectRef idx="0"/>
-          <a:fontRef idx="minor"/>
-        </p:style>
-        <p:txBody>
-          <a:bodyPr lIns="90000" rIns="90000" tIns="45000" bIns="45000" anchor="t">
-            <a:noAutofit/>
-          </a:bodyPr>
-          <a:p>
-            <a:endParaRPr b="0" lang="en-US" sz="1800" spc="-1" strike="noStrike">
-              <a:solidFill>
-                <a:srgbClr val="ffffff"/>
-              </a:solidFill>
-              <a:latin typeface="Arial"/>
-            </a:endParaRPr>
-          </a:p>
-        </p:txBody>
-      </p:sp>
-      <p:sp>
-        <p:nvSpPr>
-          <p:cNvPr id="253" name="Text 15"/>
-          <p:cNvSpPr/>
-          <p:nvPr/>
-        </p:nvSpPr>
-        <p:spPr>
-          <a:xfrm>
-            <a:off x="1124640" y="4260960"/>
-            <a:ext cx="10149480" cy="365400"/>
-          </a:xfrm>
-          <a:prstGeom prst="rect">
-            <a:avLst/>
-          </a:prstGeom>
-          <a:noFill/>
-          <a:ln w="0">
-            <a:noFill/>
-          </a:ln>
-        </p:spPr>
-        <p:style>
-          <a:lnRef idx="0"/>
-          <a:fillRef idx="0"/>
-          <a:effectRef idx="0"/>
-          <a:fontRef idx="minor"/>
-        </p:style>
-        <p:txBody>
-          <a:bodyPr lIns="0" rIns="0" tIns="0" bIns="0" anchor="ctr">
-            <a:noAutofit/>
-          </a:bodyPr>
-          <a:p>
-            <a:pPr defTabSz="914400">
-              <a:lnSpc>
-                <a:spcPct val="100000"/>
-              </a:lnSpc>
-              <a:tabLst>
-                <a:tab algn="l" pos="0"/>
-              </a:tabLst>
-            </a:pPr>
-            <a:r>
-              <a:rPr b="1" lang="zh-CN" sz="1800" spc="-1" strike="noStrike">
-                <a:solidFill>
-                  <a:srgbClr val="5b4fe8"/>
-                </a:solidFill>
-                <a:latin typeface="Microsoft JhengHei"/>
-                <a:ea typeface="Microsoft JhengHei"/>
-              </a:rPr>
-              <a:t>常見提示</a:t>
-            </a:r>
-            <a:endParaRPr b="0" lang="en-US" sz="1800" spc="-1" strike="noStrike">
-              <a:solidFill>
-                <a:srgbClr val="000000"/>
-              </a:solidFill>
-              <a:latin typeface="Arial"/>
-            </a:endParaRPr>
-          </a:p>
-        </p:txBody>
-      </p:sp>
-      <p:sp>
-        <p:nvSpPr>
-          <p:cNvPr id="254" name="Text 16"/>
-          <p:cNvSpPr/>
-          <p:nvPr/>
-        </p:nvSpPr>
-        <p:spPr>
-          <a:xfrm>
-            <a:off x="1124640" y="4681800"/>
-            <a:ext cx="10149480" cy="978120"/>
-          </a:xfrm>
-          <a:prstGeom prst="rect">
-            <a:avLst/>
-          </a:prstGeom>
-          <a:noFill/>
-          <a:ln w="0">
-            <a:noFill/>
-          </a:ln>
-        </p:spPr>
-        <p:style>
-          <a:lnRef idx="0"/>
-          <a:fillRef idx="0"/>
-          <a:effectRef idx="0"/>
-          <a:fontRef idx="minor"/>
-        </p:style>
-        <p:txBody>
-          <a:bodyPr lIns="0" rIns="0" tIns="0" bIns="0" anchor="t">
-            <a:noAutofit/>
-          </a:bodyPr>
-          <a:p>
-            <a:pPr marL="343080" indent="-343080" defTabSz="914400">
-              <a:lnSpc>
-                <a:spcPct val="122000"/>
-              </a:lnSpc>
-              <a:buClr>
-                <a:srgbClr val="1e1f35"/>
-              </a:buClr>
-              <a:buFont typeface="Symbol" charset="2"/>
-              <a:buChar char=""/>
-            </a:pPr>
-            <a:r>
-              <a:rPr b="0" lang="zh-CN" sz="1450" spc="-1" strike="noStrike">
-                <a:solidFill>
-                  <a:srgbClr val="1e1f35"/>
-                </a:solidFill>
-                <a:latin typeface="Microsoft JhengHei"/>
-                <a:ea typeface="Microsoft JhengHei"/>
-              </a:rPr>
-              <a:t>缺少模型／服務請聯絡 </a:t>
-            </a:r>
-            <a:r>
-              <a:rPr b="0" lang="en-US" sz="1450" spc="-1" strike="noStrike">
-                <a:solidFill>
-                  <a:srgbClr val="1e1f35"/>
-                </a:solidFill>
-                <a:latin typeface="Microsoft JhengHei"/>
-                <a:ea typeface="Microsoft JhengHei"/>
-              </a:rPr>
-              <a:t>IT</a:t>
-            </a:r>
-            <a:r>
-              <a:rPr b="0" lang="zh-CN" sz="1450" spc="-1" strike="noStrike">
-                <a:solidFill>
-                  <a:srgbClr val="1e1f35"/>
-                </a:solidFill>
-                <a:latin typeface="Microsoft JhengHei"/>
-                <a:ea typeface="Microsoft JhengHei"/>
-              </a:rPr>
-              <a:t>　　・　掃描型 </a:t>
-            </a:r>
-            <a:r>
-              <a:rPr b="0" lang="en-US" sz="1450" spc="-1" strike="noStrike">
-                <a:solidFill>
-                  <a:srgbClr val="1e1f35"/>
-                </a:solidFill>
-                <a:latin typeface="Microsoft JhengHei"/>
-                <a:ea typeface="Microsoft JhengHei"/>
-              </a:rPr>
-              <a:t>PDF </a:t>
-            </a:r>
-            <a:r>
-              <a:rPr b="0" lang="zh-CN" sz="1450" spc="-1" strike="noStrike">
-                <a:solidFill>
-                  <a:srgbClr val="1e1f35"/>
-                </a:solidFill>
-                <a:latin typeface="Microsoft JhengHei"/>
-                <a:ea typeface="Microsoft JhengHei"/>
-              </a:rPr>
-              <a:t>需要 </a:t>
-            </a:r>
-            <a:r>
-              <a:rPr b="0" lang="en-US" sz="1450" spc="-1" strike="noStrike">
-                <a:solidFill>
-                  <a:srgbClr val="1e1f35"/>
-                </a:solidFill>
-                <a:latin typeface="Microsoft JhengHei"/>
-                <a:ea typeface="Microsoft JhengHei"/>
-              </a:rPr>
-              <a:t>OCR</a:t>
-            </a:r>
-            <a:endParaRPr b="0" lang="en-US" sz="1450" spc="-1" strike="noStrike">
-              <a:solidFill>
-                <a:srgbClr val="000000"/>
-              </a:solidFill>
-              <a:latin typeface="Arial"/>
-            </a:endParaRPr>
-          </a:p>
-          <a:p>
-            <a:pPr marL="343080" indent="-343080" defTabSz="914400">
-              <a:lnSpc>
-                <a:spcPct val="122000"/>
-              </a:lnSpc>
-              <a:buClr>
-                <a:srgbClr val="1e1f35"/>
-              </a:buClr>
-              <a:buFont typeface="Symbol" charset="2"/>
-              <a:buChar char=""/>
-            </a:pPr>
-            <a:r>
-              <a:rPr b="0" lang="zh-CN" sz="1450" spc="-1" strike="noStrike">
-                <a:solidFill>
-                  <a:srgbClr val="1e1f35"/>
-                </a:solidFill>
-                <a:latin typeface="Microsoft JhengHei"/>
-                <a:ea typeface="Microsoft JhengHei"/>
-              </a:rPr>
-              <a:t>文件無資料時，請改問文件確實出現的內容</a:t>
-            </a:r>
-            <a:endParaRPr b="0" lang="en-US" sz="1450" spc="-1" strike="noStrike">
-              <a:solidFill>
-                <a:srgbClr val="000000"/>
-              </a:solidFill>
-              <a:latin typeface="Arial"/>
-            </a:endParaRPr>
-          </a:p>
-        </p:txBody>
-      </p:sp>
-    </p:spTree>
-  </p:cSld>
-  <mc:AlternateContent>
-    <mc:Choice Requires="p14">
-      <p:transition spd="slow" p14:dur="2000"/>
-    </mc:Choice>
-    <mc:Fallback>
-      <p:transition spd="slow"/>
-    </mc:Fallback>
-  </mc:AlternateContent>
-</p:sld>
-</file>
-
-<file path=ppt/slides/slide16.xml><?xml version="1.0" encoding="utf-8"?>
 <p:sld xmlns:a="http://schemas.openxmlformats.org/drawingml/2006/main" xmlns:p="http://schemas.openxmlformats.org/presentationml/2006/main" xmlns:r="http://schemas.openxmlformats.org/officeDocument/2006/relationships" xmlns:p14="http://schemas.microsoft.com/office/powerpoint/2010/main" xmlns:p15="http://schemas.microsoft.com/office/powerpoint/2012/main" xmlns:mc="http://schemas.openxmlformats.org/markup-compatibility/2006">
   <p:cSld>
     <p:bg>
@@ -9930,7 +7088,7 @@
       </p:grpSpPr>
       <p:sp>
         <p:nvSpPr>
-          <p:cNvPr id="255" name="Shape 0"/>
+          <p:cNvPr id="201" name="Shape 0"/>
           <p:cNvSpPr/>
           <p:nvPr/>
         </p:nvSpPr>
@@ -9971,7 +7129,7 @@
       </p:sp>
       <p:sp>
         <p:nvSpPr>
-          <p:cNvPr id="256" name="Text 1"/>
+          <p:cNvPr id="202" name="Text 1"/>
           <p:cNvSpPr/>
           <p:nvPr/>
         </p:nvSpPr>
@@ -10048,7 +7206,7 @@
       </p:sp>
       <p:sp>
         <p:nvSpPr>
-          <p:cNvPr id="257" name="Text 2"/>
+          <p:cNvPr id="203" name="Text 2"/>
           <p:cNvSpPr/>
           <p:nvPr/>
         </p:nvSpPr>
@@ -10105,7 +7263,7 @@
       </p:sp>
       <p:sp>
         <p:nvSpPr>
-          <p:cNvPr id="258" name="Text 3"/>
+          <p:cNvPr id="204" name="Text 3"/>
           <p:cNvSpPr/>
           <p:nvPr/>
         </p:nvSpPr>
@@ -11056,7 +8214,7 @@
                 <a:latin typeface="Microsoft JhengHei"/>
                 <a:ea typeface="Microsoft JhengHei"/>
               </a:rPr>
-              <a:t>附件分析、簡報大綱匯出 </a:t>
+              <a:t>簡報大綱匯出 </a:t>
             </a:r>
             <a:r>
               <a:rPr b="0" lang="en-US" sz="1400" spc="-1" strike="noStrike">
@@ -11403,7 +8561,7 @@
                 <a:latin typeface="Microsoft JhengHei"/>
                 <a:ea typeface="Microsoft JhengHei"/>
               </a:rPr>
-              <a:t>、表格整理、比較文件</a:t>
+              <a:t>、表格整理</a:t>
             </a:r>
             <a:endParaRPr b="0" lang="en-US" sz="1400" spc="-1" strike="noStrike">
               <a:solidFill>
@@ -12028,7 +9186,7 @@
                 <a:latin typeface="Microsoft JhengHei"/>
                 <a:ea typeface="Microsoft JhengHei"/>
               </a:rPr>
-              <a:t>文件會議包</a:t>
+              <a:t>翻譯工具</a:t>
             </a:r>
             <a:endParaRPr b="0" lang="en-US" sz="1800" spc="-1" strike="noStrike">
               <a:solidFill>
@@ -12087,17 +9245,7 @@
                 <a:latin typeface="Microsoft JhengHei"/>
                 <a:ea typeface="Microsoft JhengHei"/>
               </a:rPr>
-              <a:t>一鍵：摘要 → 會議重點 → </a:t>
-            </a:r>
-            <a:r>
-              <a:rPr b="0" lang="en-US" sz="1400" spc="-1" strike="noStrike">
-                <a:solidFill>
-                  <a:srgbClr val="1e1f35"/>
-                </a:solidFill>
-                <a:latin typeface="Microsoft JhengHei"/>
-                <a:ea typeface="Microsoft JhengHei"/>
-              </a:rPr>
-              <a:t>Markdown</a:t>
+              <a:t>英／繁中／簡中，可自動偵測來源</a:t>
             </a:r>
             <a:endParaRPr b="0" lang="en-US" sz="1400" spc="-1" strike="noStrike">
               <a:solidFill>
@@ -12125,7 +9273,47 @@
                 <a:latin typeface="Microsoft JhengHei"/>
                 <a:ea typeface="Microsoft JhengHei"/>
               </a:rPr>
-              <a:t>可加英文翻譯；可取消、失敗可重試</a:t>
+              <a:t>保護程式碼、</a:t>
+            </a:r>
+            <a:r>
+              <a:rPr b="0" lang="en-US" sz="1400" spc="-1" strike="noStrike">
+                <a:solidFill>
+                  <a:srgbClr val="1e1f35"/>
+                </a:solidFill>
+                <a:latin typeface="Microsoft JhengHei"/>
+                <a:ea typeface="Microsoft JhengHei"/>
+              </a:rPr>
+              <a:t>SQL</a:t>
+            </a:r>
+            <a:r>
+              <a:rPr b="0" lang="zh-CN" sz="1400" spc="-1" strike="noStrike">
+                <a:solidFill>
+                  <a:srgbClr val="1e1f35"/>
+                </a:solidFill>
+                <a:latin typeface="Microsoft JhengHei"/>
+                <a:ea typeface="Microsoft JhengHei"/>
+              </a:rPr>
+              <a:t>、</a:t>
+            </a:r>
+            <a:r>
+              <a:rPr b="0" lang="en-US" sz="1400" spc="-1" strike="noStrike">
+                <a:solidFill>
+                  <a:srgbClr val="1e1f35"/>
+                </a:solidFill>
+                <a:latin typeface="Microsoft JhengHei"/>
+                <a:ea typeface="Microsoft JhengHei"/>
+              </a:rPr>
+              <a:t>API path </a:t>
+            </a:r>
+            <a:r>
+              <a:rPr b="0" lang="zh-CN" sz="1400" spc="-1" strike="noStrike">
+                <a:solidFill>
+                  <a:srgbClr val="1e1f35"/>
+                </a:solidFill>
+                <a:latin typeface="Microsoft JhengHei"/>
+                <a:ea typeface="Microsoft JhengHei"/>
+              </a:rPr>
+              <a:t>與檔名</a:t>
             </a:r>
             <a:endParaRPr b="0" lang="en-US" sz="1400" spc="-1" strike="noStrike">
               <a:solidFill>
@@ -12260,6 +9448,16 @@
               </a:tabLst>
             </a:pPr>
             <a:r>
+              <a:rPr b="1" lang="zh-CN" sz="1800" spc="-1" strike="noStrike">
+                <a:solidFill>
+                  <a:srgbClr val="5b4fe8"/>
+                </a:solidFill>
+                <a:latin typeface="Microsoft JhengHei"/>
+                <a:ea typeface="Microsoft JhengHei"/>
+              </a:rPr>
+              <a:t>桌寵 ・ </a:t>
+            </a:r>
+            <a:r>
               <a:rPr b="1" lang="en-US" sz="1800" spc="-1" strike="noStrike">
                 <a:solidFill>
                   <a:srgbClr val="5b4fe8"/>
@@ -12267,17 +9465,7 @@
                 <a:latin typeface="Microsoft JhengHei"/>
                 <a:ea typeface="Microsoft JhengHei"/>
               </a:rPr>
-              <a:t>JSON </a:t>
-            </a:r>
-            <a:r>
-              <a:rPr b="1" lang="zh-CN" sz="1800" spc="-1" strike="noStrike">
-                <a:solidFill>
-                  <a:srgbClr val="5b4fe8"/>
-                </a:solidFill>
-                <a:latin typeface="Microsoft JhengHei"/>
-                <a:ea typeface="Microsoft JhengHei"/>
-              </a:rPr>
-              <a:t>工具</a:t>
+              <a:t>Skin</a:t>
             </a:r>
             <a:endParaRPr b="0" lang="en-US" sz="1800" spc="-1" strike="noStrike">
               <a:solidFill>
@@ -12329,74 +9517,14 @@
               <a:buChar char=""/>
             </a:pPr>
             <a:r>
-              <a:rPr b="0" lang="en-US" sz="1400" spc="-1" strike="noStrike">
+              <a:rPr b="0" lang="zh-CN" sz="1400" spc="-1" strike="noStrike">
                 <a:solidFill>
                   <a:srgbClr val="1e1f35"/>
                 </a:solidFill>
                 <a:latin typeface="Microsoft JhengHei"/>
                 <a:ea typeface="Microsoft JhengHei"/>
               </a:rPr>
-              <a:t>Format</a:t>
-            </a:r>
-            <a:r>
-              <a:rPr b="0" lang="zh-CN" sz="1400" spc="-1" strike="noStrike">
-                <a:solidFill>
-                  <a:srgbClr val="1e1f35"/>
-                </a:solidFill>
-                <a:latin typeface="Microsoft JhengHei"/>
-                <a:ea typeface="Microsoft JhengHei"/>
-              </a:rPr>
-              <a:t>／</a:t>
-            </a:r>
-            <a:r>
-              <a:rPr b="0" lang="en-US" sz="1400" spc="-1" strike="noStrike">
-                <a:solidFill>
-                  <a:srgbClr val="1e1f35"/>
-                </a:solidFill>
-                <a:latin typeface="Microsoft JhengHei"/>
-                <a:ea typeface="Microsoft JhengHei"/>
-              </a:rPr>
-              <a:t>Minify</a:t>
-            </a:r>
-            <a:r>
-              <a:rPr b="0" lang="zh-CN" sz="1400" spc="-1" strike="noStrike">
-                <a:solidFill>
-                  <a:srgbClr val="1e1f35"/>
-                </a:solidFill>
-                <a:latin typeface="Microsoft JhengHei"/>
-                <a:ea typeface="Microsoft JhengHei"/>
-              </a:rPr>
-              <a:t>／</a:t>
-            </a:r>
-            <a:r>
-              <a:rPr b="0" lang="en-US" sz="1400" spc="-1" strike="noStrike">
-                <a:solidFill>
-                  <a:srgbClr val="1e1f35"/>
-                </a:solidFill>
-                <a:latin typeface="Microsoft JhengHei"/>
-                <a:ea typeface="Microsoft JhengHei"/>
-              </a:rPr>
-              <a:t>Validate</a:t>
-            </a:r>
-            <a:r>
-              <a:rPr b="0" lang="zh-CN" sz="1400" spc="-1" strike="noStrike">
-                <a:solidFill>
-                  <a:srgbClr val="1e1f35"/>
-                </a:solidFill>
-                <a:latin typeface="Microsoft JhengHei"/>
-                <a:ea typeface="Microsoft JhengHei"/>
-              </a:rPr>
-              <a:t>／</a:t>
-            </a:r>
-            <a:r>
-              <a:rPr b="0" lang="en-US" sz="1400" spc="-1" strike="noStrike">
-                <a:solidFill>
-                  <a:srgbClr val="1e1f35"/>
-                </a:solidFill>
-                <a:latin typeface="Microsoft JhengHei"/>
-                <a:ea typeface="Microsoft JhengHei"/>
-              </a:rPr>
-              <a:t>JSONPath</a:t>
+              <a:t>拖曳移動、系統匣顯示／隱藏</a:t>
             </a:r>
             <a:endParaRPr b="0" lang="en-US" sz="1400" spc="-1" strike="noStrike">
               <a:solidFill>
@@ -12424,7 +9552,7 @@
                 <a:latin typeface="Microsoft JhengHei"/>
                 <a:ea typeface="Microsoft JhengHei"/>
               </a:rPr>
-              <a:t>本機處理，完全不呼叫模型</a:t>
+              <a:t>三種外觀</a:t>
             </a:r>
             <a:endParaRPr b="0" lang="en-US" sz="1400" spc="-1" strike="noStrike">
               <a:solidFill>
@@ -12443,20 +9571,17 @@
         </p:nvSpPr>
         <p:spPr>
           <a:xfrm>
-            <a:off x="868680" y="3383280"/>
-            <a:ext cx="5120280" cy="1965600"/>
+            <a:off x="868680" y="5577840"/>
+            <a:ext cx="10634040" cy="502560"/>
           </a:xfrm>
           <a:prstGeom prst="rect">
             <a:avLst/>
           </a:prstGeom>
           <a:solidFill>
-            <a:srgbClr val="f0f2fa"/>
+            <a:srgbClr val="eef0fa"/>
           </a:solidFill>
-          <a:ln w="9525">
-            <a:solidFill>
-              <a:srgbClr val="dde1f2"/>
-            </a:solidFill>
-            <a:round/>
+          <a:ln w="0">
+            <a:noFill/>
           </a:ln>
         </p:spPr>
         <p:style>
@@ -12481,55 +9606,14 @@
       </p:sp>
       <p:sp>
         <p:nvSpPr>
-          <p:cNvPr id="46" name="Shape 12"/>
-          <p:cNvSpPr/>
-          <p:nvPr/>
-        </p:nvSpPr>
-        <p:spPr>
-          <a:xfrm>
-            <a:off x="868680" y="3383280"/>
-            <a:ext cx="68400" cy="1965600"/>
-          </a:xfrm>
-          <a:prstGeom prst="rect">
-            <a:avLst/>
-          </a:prstGeom>
-          <a:solidFill>
-            <a:srgbClr val="5b4fe8"/>
-          </a:solidFill>
-          <a:ln w="0">
-            <a:noFill/>
-          </a:ln>
-        </p:spPr>
-        <p:style>
-          <a:lnRef idx="0"/>
-          <a:fillRef idx="0"/>
-          <a:effectRef idx="0"/>
-          <a:fontRef idx="minor"/>
-        </p:style>
-        <p:txBody>
-          <a:bodyPr lIns="90000" rIns="90000" tIns="45000" bIns="45000" anchor="t">
-            <a:noAutofit/>
-          </a:bodyPr>
-          <a:p>
-            <a:endParaRPr b="0" lang="en-US" sz="1800" spc="-1" strike="noStrike">
-              <a:solidFill>
-                <a:srgbClr val="ffffff"/>
-              </a:solidFill>
-              <a:latin typeface="Arial"/>
-            </a:endParaRPr>
-          </a:p>
-        </p:txBody>
-      </p:sp>
-      <p:sp>
-        <p:nvSpPr>
-          <p:cNvPr id="47" name="Text 13"/>
-          <p:cNvSpPr/>
-          <p:nvPr/>
-        </p:nvSpPr>
-        <p:spPr>
-          <a:xfrm>
-            <a:off x="1124640" y="3529440"/>
-            <a:ext cx="4663080" cy="365400"/>
+          <p:cNvPr id="46" name="Text 12"/>
+          <p:cNvSpPr/>
+          <p:nvPr/>
+        </p:nvSpPr>
+        <p:spPr>
+          <a:xfrm>
+            <a:off x="1051560" y="5577840"/>
+            <a:ext cx="10268280" cy="502560"/>
           </a:xfrm>
           <a:prstGeom prst="rect">
             <a:avLst/>
@@ -12559,480 +9643,6 @@
               </a:tabLst>
             </a:pPr>
             <a:r>
-              <a:rPr b="1" lang="zh-CN" sz="1800" spc="-1" strike="noStrike">
-                <a:solidFill>
-                  <a:srgbClr val="5b4fe8"/>
-                </a:solidFill>
-                <a:latin typeface="Microsoft JhengHei"/>
-                <a:ea typeface="Microsoft JhengHei"/>
-              </a:rPr>
-              <a:t>翻譯工具</a:t>
-            </a:r>
-            <a:endParaRPr b="0" lang="en-US" sz="1800" spc="-1" strike="noStrike">
-              <a:solidFill>
-                <a:srgbClr val="000000"/>
-              </a:solidFill>
-              <a:latin typeface="Arial"/>
-            </a:endParaRPr>
-          </a:p>
-        </p:txBody>
-      </p:sp>
-      <p:sp>
-        <p:nvSpPr>
-          <p:cNvPr id="48" name="Text 14"/>
-          <p:cNvSpPr/>
-          <p:nvPr/>
-        </p:nvSpPr>
-        <p:spPr>
-          <a:xfrm>
-            <a:off x="1124640" y="3950280"/>
-            <a:ext cx="4663080" cy="1252440"/>
-          </a:xfrm>
-          <a:prstGeom prst="rect">
-            <a:avLst/>
-          </a:prstGeom>
-          <a:noFill/>
-          <a:ln w="0">
-            <a:noFill/>
-          </a:ln>
-        </p:spPr>
-        <p:style>
-          <a:lnRef idx="0"/>
-          <a:fillRef idx="0"/>
-          <a:effectRef idx="0"/>
-          <a:fontRef idx="minor"/>
-        </p:style>
-        <p:txBody>
-          <a:bodyPr lIns="0" rIns="0" tIns="0" bIns="0" anchor="t">
-            <a:noAutofit/>
-          </a:bodyPr>
-          <a:p>
-            <a:pPr marL="343080" indent="-343080" defTabSz="914400">
-              <a:lnSpc>
-                <a:spcPct val="122000"/>
-              </a:lnSpc>
-              <a:buClr>
-                <a:srgbClr val="1e1f35"/>
-              </a:buClr>
-              <a:buFont typeface="Symbol" charset="2"/>
-              <a:buChar char=""/>
-            </a:pPr>
-            <a:r>
-              <a:rPr b="0" lang="zh-CN" sz="1400" spc="-1" strike="noStrike">
-                <a:solidFill>
-                  <a:srgbClr val="1e1f35"/>
-                </a:solidFill>
-                <a:latin typeface="Microsoft JhengHei"/>
-                <a:ea typeface="Microsoft JhengHei"/>
-              </a:rPr>
-              <a:t>英／繁中／簡中，可自動偵測來源</a:t>
-            </a:r>
-            <a:endParaRPr b="0" lang="en-US" sz="1400" spc="-1" strike="noStrike">
-              <a:solidFill>
-                <a:srgbClr val="000000"/>
-              </a:solidFill>
-              <a:latin typeface="Arial"/>
-            </a:endParaRPr>
-          </a:p>
-          <a:p>
-            <a:pPr marL="343080" indent="-343080" defTabSz="914400">
-              <a:lnSpc>
-                <a:spcPct val="122000"/>
-              </a:lnSpc>
-              <a:buClr>
-                <a:srgbClr val="1e1f35"/>
-              </a:buClr>
-              <a:buFont typeface="Symbol" charset="2"/>
-              <a:buChar char=""/>
-            </a:pPr>
-            <a:r>
-              <a:rPr b="0" lang="zh-CN" sz="1400" spc="-1" strike="noStrike">
-                <a:solidFill>
-                  <a:srgbClr val="1e1f35"/>
-                </a:solidFill>
-                <a:latin typeface="Microsoft JhengHei"/>
-                <a:ea typeface="Microsoft JhengHei"/>
-              </a:rPr>
-              <a:t>保護程式碼、</a:t>
-            </a:r>
-            <a:r>
-              <a:rPr b="0" lang="en-US" sz="1400" spc="-1" strike="noStrike">
-                <a:solidFill>
-                  <a:srgbClr val="1e1f35"/>
-                </a:solidFill>
-                <a:latin typeface="Microsoft JhengHei"/>
-                <a:ea typeface="Microsoft JhengHei"/>
-              </a:rPr>
-              <a:t>SQL</a:t>
-            </a:r>
-            <a:r>
-              <a:rPr b="0" lang="zh-CN" sz="1400" spc="-1" strike="noStrike">
-                <a:solidFill>
-                  <a:srgbClr val="1e1f35"/>
-                </a:solidFill>
-                <a:latin typeface="Microsoft JhengHei"/>
-                <a:ea typeface="Microsoft JhengHei"/>
-              </a:rPr>
-              <a:t>、</a:t>
-            </a:r>
-            <a:r>
-              <a:rPr b="0" lang="en-US" sz="1400" spc="-1" strike="noStrike">
-                <a:solidFill>
-                  <a:srgbClr val="1e1f35"/>
-                </a:solidFill>
-                <a:latin typeface="Microsoft JhengHei"/>
-                <a:ea typeface="Microsoft JhengHei"/>
-              </a:rPr>
-              <a:t>API path </a:t>
-            </a:r>
-            <a:r>
-              <a:rPr b="0" lang="zh-CN" sz="1400" spc="-1" strike="noStrike">
-                <a:solidFill>
-                  <a:srgbClr val="1e1f35"/>
-                </a:solidFill>
-                <a:latin typeface="Microsoft JhengHei"/>
-                <a:ea typeface="Microsoft JhengHei"/>
-              </a:rPr>
-              <a:t>與檔名</a:t>
-            </a:r>
-            <a:endParaRPr b="0" lang="en-US" sz="1400" spc="-1" strike="noStrike">
-              <a:solidFill>
-                <a:srgbClr val="000000"/>
-              </a:solidFill>
-              <a:latin typeface="Arial"/>
-            </a:endParaRPr>
-          </a:p>
-        </p:txBody>
-      </p:sp>
-      <p:sp>
-        <p:nvSpPr>
-          <p:cNvPr id="49" name="Shape 15"/>
-          <p:cNvSpPr/>
-          <p:nvPr/>
-        </p:nvSpPr>
-        <p:spPr>
-          <a:xfrm>
-            <a:off x="6263640" y="3383280"/>
-            <a:ext cx="5120280" cy="1965600"/>
-          </a:xfrm>
-          <a:prstGeom prst="rect">
-            <a:avLst/>
-          </a:prstGeom>
-          <a:solidFill>
-            <a:srgbClr val="f0f2fa"/>
-          </a:solidFill>
-          <a:ln w="9525">
-            <a:solidFill>
-              <a:srgbClr val="dde1f2"/>
-            </a:solidFill>
-            <a:round/>
-          </a:ln>
-        </p:spPr>
-        <p:style>
-          <a:lnRef idx="0"/>
-          <a:fillRef idx="0"/>
-          <a:effectRef idx="0"/>
-          <a:fontRef idx="minor"/>
-        </p:style>
-        <p:txBody>
-          <a:bodyPr lIns="90000" rIns="90000" tIns="45000" bIns="45000" anchor="t">
-            <a:noAutofit/>
-          </a:bodyPr>
-          <a:p>
-            <a:endParaRPr b="0" lang="en-US" sz="1800" spc="-1" strike="noStrike">
-              <a:solidFill>
-                <a:srgbClr val="000000"/>
-              </a:solidFill>
-              <a:latin typeface="Arial"/>
-            </a:endParaRPr>
-          </a:p>
-        </p:txBody>
-      </p:sp>
-      <p:sp>
-        <p:nvSpPr>
-          <p:cNvPr id="50" name="Shape 16"/>
-          <p:cNvSpPr/>
-          <p:nvPr/>
-        </p:nvSpPr>
-        <p:spPr>
-          <a:xfrm>
-            <a:off x="6263640" y="3383280"/>
-            <a:ext cx="68400" cy="1965600"/>
-          </a:xfrm>
-          <a:prstGeom prst="rect">
-            <a:avLst/>
-          </a:prstGeom>
-          <a:solidFill>
-            <a:srgbClr val="5b4fe8"/>
-          </a:solidFill>
-          <a:ln w="0">
-            <a:noFill/>
-          </a:ln>
-        </p:spPr>
-        <p:style>
-          <a:lnRef idx="0"/>
-          <a:fillRef idx="0"/>
-          <a:effectRef idx="0"/>
-          <a:fontRef idx="minor"/>
-        </p:style>
-        <p:txBody>
-          <a:bodyPr lIns="90000" rIns="90000" tIns="45000" bIns="45000" anchor="t">
-            <a:noAutofit/>
-          </a:bodyPr>
-          <a:p>
-            <a:endParaRPr b="0" lang="en-US" sz="1800" spc="-1" strike="noStrike">
-              <a:solidFill>
-                <a:srgbClr val="ffffff"/>
-              </a:solidFill>
-              <a:latin typeface="Arial"/>
-            </a:endParaRPr>
-          </a:p>
-        </p:txBody>
-      </p:sp>
-      <p:sp>
-        <p:nvSpPr>
-          <p:cNvPr id="51" name="Text 17"/>
-          <p:cNvSpPr/>
-          <p:nvPr/>
-        </p:nvSpPr>
-        <p:spPr>
-          <a:xfrm>
-            <a:off x="6519600" y="3529440"/>
-            <a:ext cx="4663080" cy="365400"/>
-          </a:xfrm>
-          <a:prstGeom prst="rect">
-            <a:avLst/>
-          </a:prstGeom>
-          <a:noFill/>
-          <a:ln w="0">
-            <a:noFill/>
-          </a:ln>
-        </p:spPr>
-        <p:style>
-          <a:lnRef idx="0"/>
-          <a:fillRef idx="0"/>
-          <a:effectRef idx="0"/>
-          <a:fontRef idx="minor"/>
-        </p:style>
-        <p:txBody>
-          <a:bodyPr lIns="0" rIns="0" tIns="0" bIns="0" anchor="ctr">
-            <a:noAutofit/>
-          </a:bodyPr>
-          <a:p>
-            <a:pPr defTabSz="914400">
-              <a:lnSpc>
-                <a:spcPct val="100000"/>
-              </a:lnSpc>
-              <a:tabLst>
-                <a:tab algn="l" pos="0"/>
-              </a:tabLst>
-            </a:pPr>
-            <a:r>
-              <a:rPr b="1" lang="zh-CN" sz="1800" spc="-1" strike="noStrike">
-                <a:solidFill>
-                  <a:srgbClr val="5b4fe8"/>
-                </a:solidFill>
-                <a:latin typeface="Microsoft JhengHei"/>
-                <a:ea typeface="Microsoft JhengHei"/>
-              </a:rPr>
-              <a:t>桌寵 ・ </a:t>
-            </a:r>
-            <a:r>
-              <a:rPr b="1" lang="en-US" sz="1800" spc="-1" strike="noStrike">
-                <a:solidFill>
-                  <a:srgbClr val="5b4fe8"/>
-                </a:solidFill>
-                <a:latin typeface="Microsoft JhengHei"/>
-                <a:ea typeface="Microsoft JhengHei"/>
-              </a:rPr>
-              <a:t>Skin </a:t>
-            </a:r>
-            <a:r>
-              <a:rPr b="1" lang="zh-CN" sz="1800" spc="-1" strike="noStrike">
-                <a:solidFill>
-                  <a:srgbClr val="5b4fe8"/>
-                </a:solidFill>
-                <a:latin typeface="Microsoft JhengHei"/>
-                <a:ea typeface="Microsoft JhengHei"/>
-              </a:rPr>
-              <a:t>・ 排程</a:t>
-            </a:r>
-            <a:endParaRPr b="0" lang="en-US" sz="1800" spc="-1" strike="noStrike">
-              <a:solidFill>
-                <a:srgbClr val="000000"/>
-              </a:solidFill>
-              <a:latin typeface="Arial"/>
-            </a:endParaRPr>
-          </a:p>
-        </p:txBody>
-      </p:sp>
-      <p:sp>
-        <p:nvSpPr>
-          <p:cNvPr id="52" name="Text 18"/>
-          <p:cNvSpPr/>
-          <p:nvPr/>
-        </p:nvSpPr>
-        <p:spPr>
-          <a:xfrm>
-            <a:off x="6519600" y="3950280"/>
-            <a:ext cx="4663080" cy="1252440"/>
-          </a:xfrm>
-          <a:prstGeom prst="rect">
-            <a:avLst/>
-          </a:prstGeom>
-          <a:noFill/>
-          <a:ln w="0">
-            <a:noFill/>
-          </a:ln>
-        </p:spPr>
-        <p:style>
-          <a:lnRef idx="0"/>
-          <a:fillRef idx="0"/>
-          <a:effectRef idx="0"/>
-          <a:fontRef idx="minor"/>
-        </p:style>
-        <p:txBody>
-          <a:bodyPr lIns="0" rIns="0" tIns="0" bIns="0" anchor="t">
-            <a:noAutofit/>
-          </a:bodyPr>
-          <a:p>
-            <a:pPr marL="343080" indent="-343080" defTabSz="914400">
-              <a:lnSpc>
-                <a:spcPct val="122000"/>
-              </a:lnSpc>
-              <a:buClr>
-                <a:srgbClr val="1e1f35"/>
-              </a:buClr>
-              <a:buFont typeface="Symbol" charset="2"/>
-              <a:buChar char=""/>
-            </a:pPr>
-            <a:r>
-              <a:rPr b="0" lang="zh-CN" sz="1400" spc="-1" strike="noStrike">
-                <a:solidFill>
-                  <a:srgbClr val="1e1f35"/>
-                </a:solidFill>
-                <a:latin typeface="Microsoft JhengHei"/>
-                <a:ea typeface="Microsoft JhengHei"/>
-              </a:rPr>
-              <a:t>拖曳移動、系統匣顯示／隱藏</a:t>
-            </a:r>
-            <a:endParaRPr b="0" lang="en-US" sz="1400" spc="-1" strike="noStrike">
-              <a:solidFill>
-                <a:srgbClr val="000000"/>
-              </a:solidFill>
-              <a:latin typeface="Arial"/>
-            </a:endParaRPr>
-          </a:p>
-          <a:p>
-            <a:pPr marL="343080" indent="-343080" defTabSz="914400">
-              <a:lnSpc>
-                <a:spcPct val="122000"/>
-              </a:lnSpc>
-              <a:buClr>
-                <a:srgbClr val="1e1f35"/>
-              </a:buClr>
-              <a:buFont typeface="Symbol" charset="2"/>
-              <a:buChar char=""/>
-            </a:pPr>
-            <a:r>
-              <a:rPr b="0" lang="zh-CN" sz="1400" spc="-1" strike="noStrike">
-                <a:solidFill>
-                  <a:srgbClr val="1e1f35"/>
-                </a:solidFill>
-                <a:latin typeface="Microsoft JhengHei"/>
-                <a:ea typeface="Microsoft JhengHei"/>
-              </a:rPr>
-              <a:t>三種外觀；每日／每週／每小時提醒</a:t>
-            </a:r>
-            <a:endParaRPr b="0" lang="en-US" sz="1400" spc="-1" strike="noStrike">
-              <a:solidFill>
-                <a:srgbClr val="000000"/>
-              </a:solidFill>
-              <a:latin typeface="Arial"/>
-            </a:endParaRPr>
-          </a:p>
-        </p:txBody>
-      </p:sp>
-      <p:sp>
-        <p:nvSpPr>
-          <p:cNvPr id="53" name="Shape 19"/>
-          <p:cNvSpPr/>
-          <p:nvPr/>
-        </p:nvSpPr>
-        <p:spPr>
-          <a:xfrm>
-            <a:off x="868680" y="5577840"/>
-            <a:ext cx="10634040" cy="502560"/>
-          </a:xfrm>
-          <a:prstGeom prst="rect">
-            <a:avLst/>
-          </a:prstGeom>
-          <a:solidFill>
-            <a:srgbClr val="eef0fa"/>
-          </a:solidFill>
-          <a:ln w="0">
-            <a:noFill/>
-          </a:ln>
-        </p:spPr>
-        <p:style>
-          <a:lnRef idx="0"/>
-          <a:fillRef idx="0"/>
-          <a:effectRef idx="0"/>
-          <a:fontRef idx="minor"/>
-        </p:style>
-        <p:txBody>
-          <a:bodyPr lIns="90000" rIns="90000" tIns="45000" bIns="45000" anchor="t">
-            <a:noAutofit/>
-          </a:bodyPr>
-          <a:p>
-            <a:endParaRPr b="0" lang="en-US" sz="1800" spc="-1" strike="noStrike">
-              <a:solidFill>
-                <a:srgbClr val="000000"/>
-              </a:solidFill>
-              <a:latin typeface="Arial"/>
-            </a:endParaRPr>
-          </a:p>
-        </p:txBody>
-      </p:sp>
-      <p:sp>
-        <p:nvSpPr>
-          <p:cNvPr id="54" name="Text 20"/>
-          <p:cNvSpPr/>
-          <p:nvPr/>
-        </p:nvSpPr>
-        <p:spPr>
-          <a:xfrm>
-            <a:off x="1051560" y="5577840"/>
-            <a:ext cx="10268280" cy="502560"/>
-          </a:xfrm>
-          <a:prstGeom prst="rect">
-            <a:avLst/>
-          </a:prstGeom>
-          <a:noFill/>
-          <a:ln w="0">
-            <a:noFill/>
-          </a:ln>
-        </p:spPr>
-        <p:style>
-          <a:lnRef idx="0"/>
-          <a:fillRef idx="0"/>
-          <a:effectRef idx="0"/>
-          <a:fontRef idx="minor"/>
-        </p:style>
-        <p:txBody>
-          <a:bodyPr lIns="0" rIns="0" tIns="0" bIns="0" anchor="ctr">
-            <a:noAutofit/>
-          </a:bodyPr>
-          <a:p>
-            <a:pPr defTabSz="914400">
-              <a:lnSpc>
-                <a:spcPct val="100000"/>
-              </a:lnSpc>
-              <a:tabLst>
-                <a:tab algn="l" pos="0"/>
-              </a:tabLst>
-            </a:pPr>
-            <a:r>
               <a:rPr b="0" lang="zh-CN" sz="1350" spc="-1" strike="noStrike">
                 <a:solidFill>
                   <a:srgbClr val="6b6e85"/>
@@ -13060,7 +9670,47 @@
                 <a:latin typeface="Microsoft JhengHei"/>
                 <a:ea typeface="Microsoft JhengHei"/>
               </a:rPr>
-              <a:t>。使用者不需外網帳號。</a:t>
+              <a:t>。</a:t>
+            </a:r>
+            <a:r>
+              <a:rPr b="0" lang="en-US" sz="1350" spc="-1" strike="noStrike">
+                <a:solidFill>
+                  <a:srgbClr val="6b6e85"/>
+                </a:solidFill>
+                <a:latin typeface="Microsoft JhengHei"/>
+                <a:ea typeface="Microsoft JhengHei"/>
+              </a:rPr>
+              <a:t>Claude</a:t>
+            </a:r>
+            <a:r>
+              <a:rPr b="0" lang="zh-CN" sz="1350" spc="-1" strike="noStrike">
+                <a:solidFill>
+                  <a:srgbClr val="6b6e85"/>
+                </a:solidFill>
+                <a:latin typeface="Microsoft JhengHei"/>
+                <a:ea typeface="Microsoft JhengHei"/>
+              </a:rPr>
+              <a:t>／</a:t>
+            </a:r>
+            <a:r>
+              <a:rPr b="0" lang="en-US" sz="1350" spc="-1" strike="noStrike">
+                <a:solidFill>
+                  <a:srgbClr val="6b6e85"/>
+                </a:solidFill>
+                <a:latin typeface="Microsoft JhengHei"/>
+                <a:ea typeface="Microsoft JhengHei"/>
+              </a:rPr>
+              <a:t>Codex </a:t>
+            </a:r>
+            <a:r>
+              <a:rPr b="0" lang="zh-CN" sz="1350" spc="-1" strike="noStrike">
+                <a:solidFill>
+                  <a:srgbClr val="6b6e85"/>
+                </a:solidFill>
+                <a:latin typeface="Microsoft JhengHei"/>
+                <a:ea typeface="Microsoft JhengHei"/>
+              </a:rPr>
+              <a:t>用量功能完全獨立、預設關閉。使用者不需外網帳號。</a:t>
             </a:r>
             <a:endParaRPr b="0" lang="en-US" sz="1350" spc="-1" strike="noStrike">
               <a:solidFill>
@@ -13110,7 +9760,7 @@
       </p:grpSpPr>
       <p:sp>
         <p:nvSpPr>
-          <p:cNvPr id="55" name="Shape 0"/>
+          <p:cNvPr id="47" name="Shape 0"/>
           <p:cNvSpPr/>
           <p:nvPr/>
         </p:nvSpPr>
@@ -13151,7 +9801,7 @@
       </p:sp>
       <p:sp>
         <p:nvSpPr>
-          <p:cNvPr id="56" name="Shape 1"/>
+          <p:cNvPr id="48" name="Shape 1"/>
           <p:cNvSpPr/>
           <p:nvPr/>
         </p:nvSpPr>
@@ -13192,7 +9842,7 @@
       </p:sp>
       <p:sp>
         <p:nvSpPr>
-          <p:cNvPr id="57" name="Text 2"/>
+          <p:cNvPr id="49" name="Text 2"/>
           <p:cNvSpPr/>
           <p:nvPr/>
         </p:nvSpPr>
@@ -13249,7 +9899,7 @@
       </p:sp>
       <p:sp>
         <p:nvSpPr>
-          <p:cNvPr id="58" name="Text 3"/>
+          <p:cNvPr id="50" name="Text 3"/>
           <p:cNvSpPr/>
           <p:nvPr/>
         </p:nvSpPr>
@@ -13306,7 +9956,7 @@
       </p:sp>
       <p:sp>
         <p:nvSpPr>
-          <p:cNvPr id="59" name="Shape 4"/>
+          <p:cNvPr id="51" name="Shape 4"/>
           <p:cNvSpPr/>
           <p:nvPr/>
         </p:nvSpPr>
@@ -13350,7 +10000,7 @@
       </p:sp>
       <p:sp>
         <p:nvSpPr>
-          <p:cNvPr id="60" name="Shape 5"/>
+          <p:cNvPr id="52" name="Shape 5"/>
           <p:cNvSpPr/>
           <p:nvPr/>
         </p:nvSpPr>
@@ -13391,7 +10041,7 @@
       </p:sp>
       <p:sp>
         <p:nvSpPr>
-          <p:cNvPr id="61" name="Text 6"/>
+          <p:cNvPr id="53" name="Text 6"/>
           <p:cNvSpPr/>
           <p:nvPr/>
         </p:nvSpPr>
@@ -13448,7 +10098,7 @@
       </p:sp>
       <p:sp>
         <p:nvSpPr>
-          <p:cNvPr id="62" name="Text 7"/>
+          <p:cNvPr id="54" name="Text 7"/>
           <p:cNvSpPr/>
           <p:nvPr/>
         </p:nvSpPr>
@@ -13583,7 +10233,7 @@
       </p:sp>
       <p:sp>
         <p:nvSpPr>
-          <p:cNvPr id="63" name="Shape 8"/>
+          <p:cNvPr id="55" name="Shape 8"/>
           <p:cNvSpPr/>
           <p:nvPr/>
         </p:nvSpPr>
@@ -13627,7 +10277,7 @@
       </p:sp>
       <p:sp>
         <p:nvSpPr>
-          <p:cNvPr id="64" name="Shape 9"/>
+          <p:cNvPr id="56" name="Shape 9"/>
           <p:cNvSpPr/>
           <p:nvPr/>
         </p:nvSpPr>
@@ -13668,7 +10318,7 @@
       </p:sp>
       <p:sp>
         <p:nvSpPr>
-          <p:cNvPr id="65" name="Text 10"/>
+          <p:cNvPr id="57" name="Text 10"/>
           <p:cNvSpPr/>
           <p:nvPr/>
         </p:nvSpPr>
@@ -13725,7 +10375,7 @@
       </p:sp>
       <p:sp>
         <p:nvSpPr>
-          <p:cNvPr id="66" name="Text 11"/>
+          <p:cNvPr id="58" name="Text 11"/>
           <p:cNvSpPr/>
           <p:nvPr/>
         </p:nvSpPr>
@@ -13771,7 +10421,7 @@
                 <a:latin typeface="Microsoft JhengHei"/>
                 <a:ea typeface="Microsoft JhengHei"/>
               </a:rPr>
-              <a:t>JSON </a:t>
+              <a:t>Claude</a:t>
             </a:r>
             <a:r>
               <a:rPr b="0" lang="zh-CN" sz="1550" spc="-1" strike="noStrike">
@@ -13781,7 +10431,7 @@
                 <a:latin typeface="Microsoft JhengHei"/>
                 <a:ea typeface="Microsoft JhengHei"/>
               </a:rPr>
-              <a:t>的格式化、驗證、搜尋與 </a:t>
+              <a:t>／</a:t>
             </a:r>
             <a:r>
               <a:rPr b="0" lang="en-US" sz="1550" spc="-1" strike="noStrike">
@@ -13791,7 +10441,7 @@
                 <a:latin typeface="Microsoft JhengHei"/>
                 <a:ea typeface="Microsoft JhengHei"/>
               </a:rPr>
-              <a:t>JSONPath </a:t>
+              <a:t>Codex </a:t>
             </a:r>
             <a:r>
               <a:rPr b="0" lang="zh-CN" sz="1550" spc="-1" strike="noStrike">
@@ -13801,7 +10451,37 @@
                 <a:latin typeface="Microsoft JhengHei"/>
                 <a:ea typeface="Microsoft JhengHei"/>
               </a:rPr>
-              <a:t>為本機確定性工具</a:t>
+              <a:t>用量僅是可選顯示，聊天不會呼叫 </a:t>
+            </a:r>
+            <a:r>
+              <a:rPr b="0" lang="en-US" sz="1550" spc="-1" strike="noStrike">
+                <a:solidFill>
+                  <a:srgbClr val="1e1f35"/>
+                </a:solidFill>
+                <a:latin typeface="Microsoft JhengHei"/>
+                <a:ea typeface="Microsoft JhengHei"/>
+              </a:rPr>
+              <a:t>Claude </a:t>
+            </a:r>
+            <a:r>
+              <a:rPr b="0" lang="zh-CN" sz="1550" spc="-1" strike="noStrike">
+                <a:solidFill>
+                  <a:srgbClr val="1e1f35"/>
+                </a:solidFill>
+                <a:latin typeface="Microsoft JhengHei"/>
+                <a:ea typeface="Microsoft JhengHei"/>
+              </a:rPr>
+              <a:t>或 </a:t>
+            </a:r>
+            <a:r>
+              <a:rPr b="0" lang="en-US" sz="1550" spc="-1" strike="noStrike">
+                <a:solidFill>
+                  <a:srgbClr val="1e1f35"/>
+                </a:solidFill>
+                <a:latin typeface="Microsoft JhengHei"/>
+                <a:ea typeface="Microsoft JhengHei"/>
+              </a:rPr>
+              <a:t>Codex</a:t>
             </a:r>
             <a:endParaRPr b="0" lang="en-US" sz="1550" spc="-1" strike="noStrike">
               <a:solidFill>
@@ -13810,39 +10490,11 @@
               <a:latin typeface="Arial"/>
             </a:endParaRPr>
           </a:p>
-          <a:p>
-            <a:pPr marL="343080" indent="-343080" defTabSz="914400">
-              <a:lnSpc>
-                <a:spcPct val="122000"/>
-              </a:lnSpc>
-              <a:buClr>
-                <a:srgbClr val="1e1f35"/>
-              </a:buClr>
-              <a:buFont typeface="Symbol" charset="2"/>
-              <a:buChar char=""/>
-            </a:pPr>
-            <a:r>
-              <a:rPr b="0" lang="zh-CN" sz="1550" spc="-1" strike="noStrike">
-                <a:solidFill>
-                  <a:srgbClr val="1e1f35"/>
-                </a:solidFill>
-                <a:latin typeface="Microsoft JhengHei"/>
-                <a:ea typeface="Microsoft JhengHei"/>
-              </a:rPr>
-              <a:t>聊天與文件功能只使用公司內網模型</a:t>
-            </a:r>
-            <a:endParaRPr b="0" lang="en-US" sz="1550" spc="-1" strike="noStrike">
-              <a:solidFill>
-                <a:srgbClr val="000000"/>
-              </a:solidFill>
-              <a:latin typeface="Arial"/>
-            </a:endParaRPr>
-          </a:p>
-        </p:txBody>
-      </p:sp>
-      <p:sp>
-        <p:nvSpPr>
-          <p:cNvPr id="67" name="Shape 12"/>
+        </p:txBody>
+      </p:sp>
+      <p:sp>
+        <p:nvSpPr>
+          <p:cNvPr id="59" name="Shape 12"/>
           <p:cNvSpPr/>
           <p:nvPr/>
         </p:nvSpPr>
@@ -13883,7 +10535,7 @@
       </p:sp>
       <p:sp>
         <p:nvSpPr>
-          <p:cNvPr id="68" name="Text 13"/>
+          <p:cNvPr id="60" name="Text 13"/>
           <p:cNvSpPr/>
           <p:nvPr/>
         </p:nvSpPr>
@@ -13997,7 +10649,7 @@
       </p:grpSpPr>
       <p:sp>
         <p:nvSpPr>
-          <p:cNvPr id="69" name="Shape 0"/>
+          <p:cNvPr id="61" name="Shape 0"/>
           <p:cNvSpPr/>
           <p:nvPr/>
         </p:nvSpPr>
@@ -14038,7 +10690,7 @@
       </p:sp>
       <p:sp>
         <p:nvSpPr>
-          <p:cNvPr id="70" name="Shape 1"/>
+          <p:cNvPr id="62" name="Shape 1"/>
           <p:cNvSpPr/>
           <p:nvPr/>
         </p:nvSpPr>
@@ -14079,7 +10731,7 @@
       </p:sp>
       <p:sp>
         <p:nvSpPr>
-          <p:cNvPr id="71" name="Text 2"/>
+          <p:cNvPr id="63" name="Text 2"/>
           <p:cNvSpPr/>
           <p:nvPr/>
         </p:nvSpPr>
@@ -14136,7 +10788,7 @@
       </p:sp>
       <p:sp>
         <p:nvSpPr>
-          <p:cNvPr id="72" name="Shape 3"/>
+          <p:cNvPr id="64" name="Shape 3"/>
           <p:cNvSpPr/>
           <p:nvPr/>
         </p:nvSpPr>
@@ -14177,7 +10829,7 @@
       </p:sp>
       <p:sp>
         <p:nvSpPr>
-          <p:cNvPr id="73" name="Text 4"/>
+          <p:cNvPr id="65" name="Text 4"/>
           <p:cNvSpPr/>
           <p:nvPr/>
         </p:nvSpPr>
@@ -14234,7 +10886,7 @@
       </p:sp>
       <p:sp>
         <p:nvSpPr>
-          <p:cNvPr id="74" name="Text 5"/>
+          <p:cNvPr id="66" name="Text 5"/>
           <p:cNvSpPr/>
           <p:nvPr/>
         </p:nvSpPr>
@@ -14291,7 +10943,7 @@
       </p:sp>
       <p:sp>
         <p:nvSpPr>
-          <p:cNvPr id="75" name="Shape 6"/>
+          <p:cNvPr id="67" name="Shape 6"/>
           <p:cNvSpPr/>
           <p:nvPr/>
         </p:nvSpPr>
@@ -14332,7 +10984,7 @@
       </p:sp>
       <p:sp>
         <p:nvSpPr>
-          <p:cNvPr id="76" name="Text 7"/>
+          <p:cNvPr id="68" name="Text 7"/>
           <p:cNvSpPr/>
           <p:nvPr/>
         </p:nvSpPr>
@@ -14389,7 +11041,7 @@
       </p:sp>
       <p:sp>
         <p:nvSpPr>
-          <p:cNvPr id="77" name="Text 8"/>
+          <p:cNvPr id="69" name="Text 8"/>
           <p:cNvSpPr/>
           <p:nvPr/>
         </p:nvSpPr>
@@ -14466,7 +11118,7 @@
       </p:sp>
       <p:sp>
         <p:nvSpPr>
-          <p:cNvPr id="78" name="Shape 9"/>
+          <p:cNvPr id="70" name="Shape 9"/>
           <p:cNvSpPr/>
           <p:nvPr/>
         </p:nvSpPr>
@@ -14507,7 +11159,7 @@
       </p:sp>
       <p:sp>
         <p:nvSpPr>
-          <p:cNvPr id="79" name="Text 10"/>
+          <p:cNvPr id="71" name="Text 10"/>
           <p:cNvSpPr/>
           <p:nvPr/>
         </p:nvSpPr>
@@ -14564,7 +11216,7 @@
       </p:sp>
       <p:sp>
         <p:nvSpPr>
-          <p:cNvPr id="80" name="Text 11"/>
+          <p:cNvPr id="72" name="Text 11"/>
           <p:cNvSpPr/>
           <p:nvPr/>
         </p:nvSpPr>
@@ -14621,7 +11273,7 @@
       </p:sp>
       <p:sp>
         <p:nvSpPr>
-          <p:cNvPr id="81" name="Shape 12"/>
+          <p:cNvPr id="73" name="Shape 12"/>
           <p:cNvSpPr/>
           <p:nvPr/>
         </p:nvSpPr>
@@ -14662,7 +11314,7 @@
       </p:sp>
       <p:sp>
         <p:nvSpPr>
-          <p:cNvPr id="82" name="Text 13"/>
+          <p:cNvPr id="74" name="Text 13"/>
           <p:cNvSpPr/>
           <p:nvPr/>
         </p:nvSpPr>
@@ -14719,7 +11371,7 @@
       </p:sp>
       <p:sp>
         <p:nvSpPr>
-          <p:cNvPr id="83" name="Text 14"/>
+          <p:cNvPr id="75" name="Text 14"/>
           <p:cNvSpPr/>
           <p:nvPr/>
         </p:nvSpPr>
@@ -14763,7 +11415,7 @@
                 <a:latin typeface="Microsoft JhengHei"/>
                 <a:ea typeface="Microsoft JhengHei"/>
               </a:rPr>
-              <a:t>文件會議包：一鍵產出可交付的 </a:t>
+              <a:t>桌寵管理、</a:t>
             </a:r>
             <a:r>
               <a:rPr b="0" lang="en-US" sz="1900" spc="-1" strike="noStrike">
@@ -14773,153 +11425,8 @@
                 <a:latin typeface="Microsoft JhengHei"/>
                 <a:ea typeface="Microsoft JhengHei"/>
               </a:rPr>
-              <a:t>Markdown</a:t>
-            </a:r>
-            <a:endParaRPr b="0" lang="en-US" sz="1900" spc="-1" strike="noStrike">
-              <a:solidFill>
-                <a:srgbClr val="000000"/>
-              </a:solidFill>
-              <a:latin typeface="Arial"/>
-            </a:endParaRPr>
-          </a:p>
-        </p:txBody>
-      </p:sp>
-      <p:sp>
-        <p:nvSpPr>
-          <p:cNvPr id="84" name="Shape 15"/>
-          <p:cNvSpPr/>
-          <p:nvPr/>
-        </p:nvSpPr>
-        <p:spPr>
-          <a:xfrm>
-            <a:off x="868680" y="5056560"/>
-            <a:ext cx="420120" cy="420120"/>
-          </a:xfrm>
-          <a:prstGeom prst="ellipse">
-            <a:avLst/>
-          </a:prstGeom>
-          <a:solidFill>
-            <a:srgbClr val="5b4fe8"/>
-          </a:solidFill>
-          <a:ln w="0">
-            <a:noFill/>
-          </a:ln>
-        </p:spPr>
-        <p:style>
-          <a:lnRef idx="0"/>
-          <a:fillRef idx="0"/>
-          <a:effectRef idx="0"/>
-          <a:fontRef idx="minor"/>
-        </p:style>
-        <p:txBody>
-          <a:bodyPr lIns="90000" rIns="90000" tIns="45000" bIns="45000" anchor="t">
-            <a:noAutofit/>
-          </a:bodyPr>
-          <a:p>
-            <a:endParaRPr b="0" lang="en-US" sz="1800" spc="-1" strike="noStrike">
-              <a:solidFill>
-                <a:srgbClr val="ffffff"/>
-              </a:solidFill>
-              <a:latin typeface="Arial"/>
-            </a:endParaRPr>
-          </a:p>
-        </p:txBody>
-      </p:sp>
-      <p:sp>
-        <p:nvSpPr>
-          <p:cNvPr id="85" name="Text 16"/>
-          <p:cNvSpPr/>
-          <p:nvPr/>
-        </p:nvSpPr>
-        <p:spPr>
-          <a:xfrm>
-            <a:off x="868680" y="5056560"/>
-            <a:ext cx="420120" cy="420120"/>
-          </a:xfrm>
-          <a:prstGeom prst="rect">
-            <a:avLst/>
-          </a:prstGeom>
-          <a:noFill/>
-          <a:ln w="0">
-            <a:noFill/>
-          </a:ln>
-        </p:spPr>
-        <p:style>
-          <a:lnRef idx="0"/>
-          <a:fillRef idx="0"/>
-          <a:effectRef idx="0"/>
-          <a:fontRef idx="minor"/>
-        </p:style>
-        <p:txBody>
-          <a:bodyPr lIns="0" rIns="0" tIns="0" bIns="0" anchor="ctr">
-            <a:noAutofit/>
-          </a:bodyPr>
-          <a:p>
-            <a:pPr algn="ctr" defTabSz="914400">
-              <a:lnSpc>
-                <a:spcPct val="100000"/>
-              </a:lnSpc>
-              <a:tabLst>
-                <a:tab algn="l" pos="0"/>
-              </a:tabLst>
-            </a:pPr>
-            <a:r>
-              <a:rPr b="1" lang="en-US" sz="1700" spc="-1" strike="noStrike">
-                <a:solidFill>
-                  <a:srgbClr val="ffffff"/>
-                </a:solidFill>
-                <a:latin typeface="Microsoft JhengHei"/>
-                <a:ea typeface="Microsoft JhengHei"/>
-              </a:rPr>
-              <a:t>5</a:t>
-            </a:r>
-            <a:endParaRPr b="0" lang="en-US" sz="1700" spc="-1" strike="noStrike">
-              <a:solidFill>
-                <a:srgbClr val="000000"/>
-              </a:solidFill>
-              <a:latin typeface="Arial"/>
-            </a:endParaRPr>
-          </a:p>
-        </p:txBody>
-      </p:sp>
-      <p:sp>
-        <p:nvSpPr>
-          <p:cNvPr id="86" name="Text 17"/>
-          <p:cNvSpPr/>
-          <p:nvPr/>
-        </p:nvSpPr>
-        <p:spPr>
-          <a:xfrm>
-            <a:off x="1490400" y="5001840"/>
-            <a:ext cx="9920880" cy="548280"/>
-          </a:xfrm>
-          <a:prstGeom prst="rect">
-            <a:avLst/>
-          </a:prstGeom>
-          <a:noFill/>
-          <a:ln w="0">
-            <a:noFill/>
-          </a:ln>
-        </p:spPr>
-        <p:style>
-          <a:lnRef idx="0"/>
-          <a:fillRef idx="0"/>
-          <a:effectRef idx="0"/>
-          <a:fontRef idx="minor"/>
-        </p:style>
-        <p:txBody>
-          <a:bodyPr lIns="0" rIns="0" tIns="0" bIns="0" anchor="ctr">
-            <a:noAutofit/>
-          </a:bodyPr>
-          <a:p>
-            <a:pPr defTabSz="914400">
-              <a:lnSpc>
-                <a:spcPct val="100000"/>
-              </a:lnSpc>
-              <a:tabLst>
-                <a:tab algn="l" pos="0"/>
-              </a:tabLst>
-            </a:pPr>
+              <a:t>Skin</a:t>
+            </a:r>
             <a:r>
               <a:rPr b="0" lang="zh-CN" sz="1900" spc="-1" strike="noStrike">
                 <a:solidFill>
@@ -14928,27 +11435,7 @@
                 <a:latin typeface="Microsoft JhengHei"/>
                 <a:ea typeface="Microsoft JhengHei"/>
               </a:rPr>
-              <a:t>桌寵管理、</a:t>
-            </a:r>
-            <a:r>
-              <a:rPr b="0" lang="en-US" sz="1900" spc="-1" strike="noStrike">
-                <a:solidFill>
-                  <a:srgbClr val="1e1f35"/>
-                </a:solidFill>
-                <a:latin typeface="Microsoft JhengHei"/>
-                <a:ea typeface="Microsoft JhengHei"/>
-              </a:rPr>
-              <a:t>Skin</a:t>
-            </a:r>
-            <a:r>
-              <a:rPr b="0" lang="zh-CN" sz="1900" spc="-1" strike="noStrike">
-                <a:solidFill>
-                  <a:srgbClr val="1e1f35"/>
-                </a:solidFill>
-                <a:latin typeface="Microsoft JhengHei"/>
-                <a:ea typeface="Microsoft JhengHei"/>
-              </a:rPr>
-              <a:t>、排程與安全結束</a:t>
+              <a:t>與安全結束</a:t>
             </a:r>
             <a:endParaRPr b="0" lang="en-US" sz="1900" spc="-1" strike="noStrike">
               <a:solidFill>
@@ -14998,7 +11485,7 @@
       </p:grpSpPr>
       <p:sp>
         <p:nvSpPr>
-          <p:cNvPr id="87" name="Shape 0"/>
+          <p:cNvPr id="76" name="Shape 0"/>
           <p:cNvSpPr/>
           <p:nvPr/>
         </p:nvSpPr>
@@ -15039,7 +11526,7 @@
       </p:sp>
       <p:sp>
         <p:nvSpPr>
-          <p:cNvPr id="88" name="Shape 1"/>
+          <p:cNvPr id="77" name="Shape 1"/>
           <p:cNvSpPr/>
           <p:nvPr/>
         </p:nvSpPr>
@@ -15080,7 +11567,7 @@
       </p:sp>
       <p:sp>
         <p:nvSpPr>
-          <p:cNvPr id="89" name="Text 2"/>
+          <p:cNvPr id="78" name="Text 2"/>
           <p:cNvSpPr/>
           <p:nvPr/>
         </p:nvSpPr>
@@ -15137,7 +11624,7 @@
       </p:sp>
       <p:sp>
         <p:nvSpPr>
-          <p:cNvPr id="90" name="Text 3"/>
+          <p:cNvPr id="79" name="Text 3"/>
           <p:cNvSpPr/>
           <p:nvPr/>
         </p:nvSpPr>
@@ -15194,7 +11681,7 @@
       </p:sp>
       <p:sp>
         <p:nvSpPr>
-          <p:cNvPr id="91" name="Shape 4"/>
+          <p:cNvPr id="80" name="Shape 4"/>
           <p:cNvSpPr/>
           <p:nvPr/>
         </p:nvSpPr>
@@ -15235,7 +11722,7 @@
       </p:sp>
       <p:sp>
         <p:nvSpPr>
-          <p:cNvPr id="92" name="Text 5"/>
+          <p:cNvPr id="81" name="Text 5"/>
           <p:cNvSpPr/>
           <p:nvPr/>
         </p:nvSpPr>
@@ -15292,7 +11779,7 @@
       </p:sp>
       <p:sp>
         <p:nvSpPr>
-          <p:cNvPr id="93" name="Text 6"/>
+          <p:cNvPr id="82" name="Text 6"/>
           <p:cNvSpPr/>
           <p:nvPr/>
         </p:nvSpPr>
@@ -15349,7 +11836,7 @@
       </p:sp>
       <p:sp>
         <p:nvSpPr>
-          <p:cNvPr id="94" name="Shape 7"/>
+          <p:cNvPr id="83" name="Shape 7"/>
           <p:cNvSpPr/>
           <p:nvPr/>
         </p:nvSpPr>
@@ -15390,7 +11877,7 @@
       </p:sp>
       <p:sp>
         <p:nvSpPr>
-          <p:cNvPr id="95" name="Text 8"/>
+          <p:cNvPr id="84" name="Text 8"/>
           <p:cNvSpPr/>
           <p:nvPr/>
         </p:nvSpPr>
@@ -15447,7 +11934,7 @@
       </p:sp>
       <p:sp>
         <p:nvSpPr>
-          <p:cNvPr id="96" name="Text 9"/>
+          <p:cNvPr id="85" name="Text 9"/>
           <p:cNvSpPr/>
           <p:nvPr/>
         </p:nvSpPr>
@@ -15524,7 +12011,7 @@
       </p:sp>
       <p:sp>
         <p:nvSpPr>
-          <p:cNvPr id="97" name="Shape 10"/>
+          <p:cNvPr id="86" name="Shape 10"/>
           <p:cNvSpPr/>
           <p:nvPr/>
         </p:nvSpPr>
@@ -15565,7 +12052,7 @@
       </p:sp>
       <p:sp>
         <p:nvSpPr>
-          <p:cNvPr id="98" name="Text 11"/>
+          <p:cNvPr id="87" name="Text 11"/>
           <p:cNvSpPr/>
           <p:nvPr/>
         </p:nvSpPr>
@@ -15622,7 +12109,7 @@
       </p:sp>
       <p:sp>
         <p:nvSpPr>
-          <p:cNvPr id="99" name="Text 12"/>
+          <p:cNvPr id="88" name="Text 12"/>
           <p:cNvSpPr/>
           <p:nvPr/>
         </p:nvSpPr>
@@ -15679,7 +12166,7 @@
       </p:sp>
       <p:sp>
         <p:nvSpPr>
-          <p:cNvPr id="100" name="Shape 13"/>
+          <p:cNvPr id="89" name="Shape 13"/>
           <p:cNvSpPr/>
           <p:nvPr/>
         </p:nvSpPr>
@@ -15720,7 +12207,7 @@
       </p:sp>
       <p:sp>
         <p:nvSpPr>
-          <p:cNvPr id="101" name="Text 14"/>
+          <p:cNvPr id="90" name="Text 14"/>
           <p:cNvSpPr/>
           <p:nvPr/>
         </p:nvSpPr>
@@ -15814,7 +12301,7 @@
       </p:grpSpPr>
       <p:sp>
         <p:nvSpPr>
-          <p:cNvPr id="102" name="Shape 0"/>
+          <p:cNvPr id="91" name="Shape 0"/>
           <p:cNvSpPr/>
           <p:nvPr/>
         </p:nvSpPr>
@@ -15855,7 +12342,7 @@
       </p:sp>
       <p:sp>
         <p:nvSpPr>
-          <p:cNvPr id="103" name="Shape 1"/>
+          <p:cNvPr id="92" name="Shape 1"/>
           <p:cNvSpPr/>
           <p:nvPr/>
         </p:nvSpPr>
@@ -15896,7 +12383,7 @@
       </p:sp>
       <p:sp>
         <p:nvSpPr>
-          <p:cNvPr id="104" name="Text 2"/>
+          <p:cNvPr id="93" name="Text 2"/>
           <p:cNvSpPr/>
           <p:nvPr/>
         </p:nvSpPr>
@@ -15953,7 +12440,7 @@
       </p:sp>
       <p:sp>
         <p:nvSpPr>
-          <p:cNvPr id="105" name="Text 3"/>
+          <p:cNvPr id="94" name="Text 3"/>
           <p:cNvSpPr/>
           <p:nvPr/>
         </p:nvSpPr>
@@ -16010,7 +12497,7 @@
       </p:sp>
       <p:sp>
         <p:nvSpPr>
-          <p:cNvPr id="106" name="Shape 4"/>
+          <p:cNvPr id="95" name="Shape 4"/>
           <p:cNvSpPr/>
           <p:nvPr/>
         </p:nvSpPr>
@@ -16054,7 +12541,7 @@
       </p:sp>
       <p:sp>
         <p:nvSpPr>
-          <p:cNvPr id="107" name="Shape 5"/>
+          <p:cNvPr id="96" name="Shape 5"/>
           <p:cNvSpPr/>
           <p:nvPr/>
         </p:nvSpPr>
@@ -16095,7 +12582,7 @@
       </p:sp>
       <p:sp>
         <p:nvSpPr>
-          <p:cNvPr id="108" name="Text 6"/>
+          <p:cNvPr id="97" name="Text 6"/>
           <p:cNvSpPr/>
           <p:nvPr/>
         </p:nvSpPr>
@@ -16152,7 +12639,7 @@
       </p:sp>
       <p:sp>
         <p:nvSpPr>
-          <p:cNvPr id="109" name="Text 7"/>
+          <p:cNvPr id="98" name="Text 7"/>
           <p:cNvSpPr/>
           <p:nvPr/>
         </p:nvSpPr>
@@ -16267,7 +12754,7 @@
       </p:sp>
       <p:sp>
         <p:nvSpPr>
-          <p:cNvPr id="110" name="Shape 8"/>
+          <p:cNvPr id="99" name="Shape 8"/>
           <p:cNvSpPr/>
           <p:nvPr/>
         </p:nvSpPr>
@@ -16308,7 +12795,7 @@
       </p:sp>
       <p:sp>
         <p:nvSpPr>
-          <p:cNvPr id="111" name="Text 9"/>
+          <p:cNvPr id="100" name="Text 9"/>
           <p:cNvSpPr/>
           <p:nvPr/>
         </p:nvSpPr>
@@ -16422,7 +12909,7 @@
       </p:grpSpPr>
       <p:sp>
         <p:nvSpPr>
-          <p:cNvPr id="112" name="Shape 0"/>
+          <p:cNvPr id="101" name="Shape 0"/>
           <p:cNvSpPr/>
           <p:nvPr/>
         </p:nvSpPr>
@@ -16463,7 +12950,7 @@
       </p:sp>
       <p:sp>
         <p:nvSpPr>
-          <p:cNvPr id="113" name="Shape 1"/>
+          <p:cNvPr id="102" name="Shape 1"/>
           <p:cNvSpPr/>
           <p:nvPr/>
         </p:nvSpPr>
@@ -16504,7 +12991,7 @@
       </p:sp>
       <p:sp>
         <p:nvSpPr>
-          <p:cNvPr id="114" name="Text 2"/>
+          <p:cNvPr id="103" name="Text 2"/>
           <p:cNvSpPr/>
           <p:nvPr/>
         </p:nvSpPr>
@@ -16581,7 +13068,7 @@
       </p:sp>
       <p:sp>
         <p:nvSpPr>
-          <p:cNvPr id="115" name="Text 3"/>
+          <p:cNvPr id="104" name="Text 3"/>
           <p:cNvSpPr/>
           <p:nvPr/>
         </p:nvSpPr>
@@ -16638,7 +13125,7 @@
       </p:sp>
       <p:sp>
         <p:nvSpPr>
-          <p:cNvPr id="116" name="Shape 4"/>
+          <p:cNvPr id="105" name="Shape 4"/>
           <p:cNvSpPr/>
           <p:nvPr/>
         </p:nvSpPr>
@@ -16679,7 +13166,7 @@
       </p:sp>
       <p:sp>
         <p:nvSpPr>
-          <p:cNvPr id="117" name="Text 5"/>
+          <p:cNvPr id="106" name="Text 5"/>
           <p:cNvSpPr/>
           <p:nvPr/>
         </p:nvSpPr>
@@ -16736,7 +13223,7 @@
       </p:sp>
       <p:sp>
         <p:nvSpPr>
-          <p:cNvPr id="118" name="Text 6"/>
+          <p:cNvPr id="107" name="Text 6"/>
           <p:cNvSpPr/>
           <p:nvPr/>
         </p:nvSpPr>
@@ -16793,7 +13280,7 @@
       </p:sp>
       <p:sp>
         <p:nvSpPr>
-          <p:cNvPr id="119" name="Shape 7"/>
+          <p:cNvPr id="108" name="Shape 7"/>
           <p:cNvSpPr/>
           <p:nvPr/>
         </p:nvSpPr>
@@ -16834,7 +13321,7 @@
       </p:sp>
       <p:sp>
         <p:nvSpPr>
-          <p:cNvPr id="120" name="Text 8"/>
+          <p:cNvPr id="109" name="Text 8"/>
           <p:cNvSpPr/>
           <p:nvPr/>
         </p:nvSpPr>
@@ -16891,7 +13378,7 @@
       </p:sp>
       <p:sp>
         <p:nvSpPr>
-          <p:cNvPr id="121" name="Text 9"/>
+          <p:cNvPr id="110" name="Text 9"/>
           <p:cNvSpPr/>
           <p:nvPr/>
         </p:nvSpPr>
@@ -16968,7 +13455,7 @@
       </p:sp>
       <p:sp>
         <p:nvSpPr>
-          <p:cNvPr id="122" name="Shape 10"/>
+          <p:cNvPr id="111" name="Shape 10"/>
           <p:cNvSpPr/>
           <p:nvPr/>
         </p:nvSpPr>
@@ -17009,7 +13496,7 @@
       </p:sp>
       <p:sp>
         <p:nvSpPr>
-          <p:cNvPr id="123" name="Text 11"/>
+          <p:cNvPr id="112" name="Text 11"/>
           <p:cNvSpPr/>
           <p:nvPr/>
         </p:nvSpPr>
@@ -17066,7 +13553,7 @@
       </p:sp>
       <p:sp>
         <p:nvSpPr>
-          <p:cNvPr id="124" name="Text 12"/>
+          <p:cNvPr id="113" name="Text 12"/>
           <p:cNvSpPr/>
           <p:nvPr/>
         </p:nvSpPr>
@@ -17110,27 +13597,7 @@
                 <a:latin typeface="Microsoft JhengHei"/>
                 <a:ea typeface="Microsoft JhengHei"/>
               </a:rPr>
-              <a:t>多輪對話，或切換 </a:t>
-            </a:r>
-            <a:r>
-              <a:rPr b="0" lang="en-US" sz="1600" spc="-1" strike="noStrike">
-                <a:solidFill>
-                  <a:srgbClr val="1e1f35"/>
-                </a:solidFill>
-                <a:latin typeface="Microsoft JhengHei"/>
-                <a:ea typeface="Microsoft JhengHei"/>
-              </a:rPr>
-              <a:t>JSON</a:t>
-            </a:r>
-            <a:r>
-              <a:rPr b="0" lang="zh-CN" sz="1600" spc="-1" strike="noStrike">
-                <a:solidFill>
-                  <a:srgbClr val="1e1f35"/>
-                </a:solidFill>
-                <a:latin typeface="Microsoft JhengHei"/>
-                <a:ea typeface="Microsoft JhengHei"/>
-              </a:rPr>
-              <a:t>／翻譯工具。</a:t>
+              <a:t>多輪對話，或切換 翻譯工具。</a:t>
             </a:r>
             <a:endParaRPr b="0" lang="en-US" sz="1600" spc="-1" strike="noStrike">
               <a:solidFill>
@@ -17143,7 +13610,7 @@
       </p:sp>
       <p:sp>
         <p:nvSpPr>
-          <p:cNvPr id="125" name="Shape 13"/>
+          <p:cNvPr id="114" name="Shape 13"/>
           <p:cNvSpPr/>
           <p:nvPr/>
         </p:nvSpPr>
@@ -17187,7 +13654,7 @@
       </p:sp>
       <p:sp>
         <p:nvSpPr>
-          <p:cNvPr id="126" name="Shape 14"/>
+          <p:cNvPr id="115" name="Shape 14"/>
           <p:cNvSpPr/>
           <p:nvPr/>
         </p:nvSpPr>
@@ -17228,7 +13695,7 @@
       </p:sp>
       <p:sp>
         <p:nvSpPr>
-          <p:cNvPr id="127" name="Text 15"/>
+          <p:cNvPr id="116" name="Text 15"/>
           <p:cNvSpPr/>
           <p:nvPr/>
         </p:nvSpPr>
@@ -17285,7 +13752,7 @@
       </p:sp>
       <p:sp>
         <p:nvSpPr>
-          <p:cNvPr id="128" name="Text 16"/>
+          <p:cNvPr id="117" name="Text 16"/>
           <p:cNvSpPr/>
           <p:nvPr/>
         </p:nvSpPr>
@@ -17331,27 +13798,7 @@
                 <a:latin typeface="Microsoft JhengHei"/>
                 <a:ea typeface="Microsoft JhengHei"/>
               </a:rPr>
-              <a:t>側欄對話紀錄：回看或繼續之前的對話　　・　附件：加入文字或 </a:t>
-            </a:r>
-            <a:r>
-              <a:rPr b="0" lang="en-US" sz="1450" spc="-1" strike="noStrike">
-                <a:solidFill>
-                  <a:srgbClr val="1e1f35"/>
-                </a:solidFill>
-                <a:latin typeface="Microsoft JhengHei"/>
-                <a:ea typeface="Microsoft JhengHei"/>
-              </a:rPr>
-              <a:t>Excel </a:t>
-            </a:r>
-            <a:r>
-              <a:rPr b="0" lang="zh-CN" sz="1450" spc="-1" strike="noStrike">
-                <a:solidFill>
-                  <a:srgbClr val="1e1f35"/>
-                </a:solidFill>
-                <a:latin typeface="Microsoft JhengHei"/>
-                <a:ea typeface="Microsoft JhengHei"/>
-              </a:rPr>
-              <a:t>檔案</a:t>
+              <a:t>側欄對話紀錄：回看或繼續之前的對話</a:t>
             </a:r>
             <a:endParaRPr b="0" lang="en-US" sz="1450" spc="-1" strike="noStrike">
               <a:solidFill>
@@ -17442,7 +13889,7 @@
       </p:sp>
       <p:sp>
         <p:nvSpPr>
-          <p:cNvPr id="129" name="Shape 17"/>
+          <p:cNvPr id="118" name="Shape 17"/>
           <p:cNvSpPr/>
           <p:nvPr/>
         </p:nvSpPr>
@@ -17483,7 +13930,7 @@
       </p:sp>
       <p:sp>
         <p:nvSpPr>
-          <p:cNvPr id="130" name="Text 18"/>
+          <p:cNvPr id="119" name="Text 18"/>
           <p:cNvSpPr/>
           <p:nvPr/>
         </p:nvSpPr>
@@ -17577,7 +14024,7 @@
       </p:grpSpPr>
       <p:sp>
         <p:nvSpPr>
-          <p:cNvPr id="131" name="Shape 0"/>
+          <p:cNvPr id="120" name="Shape 0"/>
           <p:cNvSpPr/>
           <p:nvPr/>
         </p:nvSpPr>
@@ -17618,7 +14065,7 @@
       </p:sp>
       <p:sp>
         <p:nvSpPr>
-          <p:cNvPr id="132" name="Shape 1"/>
+          <p:cNvPr id="121" name="Shape 1"/>
           <p:cNvSpPr/>
           <p:nvPr/>
         </p:nvSpPr>
@@ -17659,7 +14106,7 @@
       </p:sp>
       <p:sp>
         <p:nvSpPr>
-          <p:cNvPr id="133" name="Text 2"/>
+          <p:cNvPr id="122" name="Text 2"/>
           <p:cNvSpPr/>
           <p:nvPr/>
         </p:nvSpPr>
@@ -17716,7 +14163,7 @@
       </p:sp>
       <p:sp>
         <p:nvSpPr>
-          <p:cNvPr id="134" name="Text 3"/>
+          <p:cNvPr id="123" name="Text 3"/>
           <p:cNvSpPr/>
           <p:nvPr/>
         </p:nvSpPr>
@@ -17773,7 +14220,7 @@
       </p:sp>
       <p:sp>
         <p:nvSpPr>
-          <p:cNvPr id="135" name="Shape 4"/>
+          <p:cNvPr id="124" name="Shape 4"/>
           <p:cNvSpPr/>
           <p:nvPr/>
         </p:nvSpPr>
@@ -17814,7 +14261,7 @@
       </p:sp>
       <p:sp>
         <p:nvSpPr>
-          <p:cNvPr id="136" name="Text 5"/>
+          <p:cNvPr id="125" name="Text 5"/>
           <p:cNvSpPr/>
           <p:nvPr/>
         </p:nvSpPr>
@@ -17871,7 +14318,7 @@
       </p:sp>
       <p:sp>
         <p:nvSpPr>
-          <p:cNvPr id="137" name="Text 6"/>
+          <p:cNvPr id="126" name="Text 6"/>
           <p:cNvSpPr/>
           <p:nvPr/>
         </p:nvSpPr>
@@ -17928,7 +14375,7 @@
       </p:sp>
       <p:sp>
         <p:nvSpPr>
-          <p:cNvPr id="138" name="Shape 7"/>
+          <p:cNvPr id="127" name="Shape 7"/>
           <p:cNvSpPr/>
           <p:nvPr/>
         </p:nvSpPr>
@@ -17969,7 +14416,7 @@
       </p:sp>
       <p:sp>
         <p:nvSpPr>
-          <p:cNvPr id="139" name="Text 8"/>
+          <p:cNvPr id="128" name="Text 8"/>
           <p:cNvSpPr/>
           <p:nvPr/>
         </p:nvSpPr>
@@ -18026,7 +14473,7 @@
       </p:sp>
       <p:sp>
         <p:nvSpPr>
-          <p:cNvPr id="140" name="Text 9"/>
+          <p:cNvPr id="129" name="Text 9"/>
           <p:cNvSpPr/>
           <p:nvPr/>
         </p:nvSpPr>
@@ -18163,7 +14610,7 @@
       </p:sp>
       <p:sp>
         <p:nvSpPr>
-          <p:cNvPr id="141" name="Shape 10"/>
+          <p:cNvPr id="130" name="Shape 10"/>
           <p:cNvSpPr/>
           <p:nvPr/>
         </p:nvSpPr>
@@ -18204,7 +14651,7 @@
       </p:sp>
       <p:sp>
         <p:nvSpPr>
-          <p:cNvPr id="142" name="Text 11"/>
+          <p:cNvPr id="131" name="Text 11"/>
           <p:cNvSpPr/>
           <p:nvPr/>
         </p:nvSpPr>
@@ -18261,7 +14708,7 @@
       </p:sp>
       <p:sp>
         <p:nvSpPr>
-          <p:cNvPr id="143" name="Text 12"/>
+          <p:cNvPr id="132" name="Text 12"/>
           <p:cNvSpPr/>
           <p:nvPr/>
         </p:nvSpPr>
@@ -18325,7 +14772,7 @@
                 <a:latin typeface="Microsoft JhengHei"/>
                 <a:ea typeface="Microsoft JhengHei"/>
               </a:rPr>
-              <a:t>、表格整理或比較文件。</a:t>
+              <a:t>、表格整理。</a:t>
             </a:r>
             <a:endParaRPr b="0" lang="en-US" sz="1600" spc="-1" strike="noStrike">
               <a:solidFill>
@@ -18338,7 +14785,7 @@
       </p:sp>
       <p:sp>
         <p:nvSpPr>
-          <p:cNvPr id="144" name="Shape 13"/>
+          <p:cNvPr id="133" name="Shape 13"/>
           <p:cNvSpPr/>
           <p:nvPr/>
         </p:nvSpPr>
@@ -18379,7 +14826,7 @@
       </p:sp>
       <p:sp>
         <p:nvSpPr>
-          <p:cNvPr id="145" name="Text 14"/>
+          <p:cNvPr id="134" name="Text 14"/>
           <p:cNvSpPr/>
           <p:nvPr/>
         </p:nvSpPr>
@@ -18436,7 +14883,7 @@
       </p:sp>
       <p:sp>
         <p:nvSpPr>
-          <p:cNvPr id="146" name="Text 15"/>
+          <p:cNvPr id="135" name="Text 15"/>
           <p:cNvSpPr/>
           <p:nvPr/>
         </p:nvSpPr>
@@ -18493,7 +14940,7 @@
       </p:sp>
       <p:sp>
         <p:nvSpPr>
-          <p:cNvPr id="147" name="Shape 16"/>
+          <p:cNvPr id="136" name="Shape 16"/>
           <p:cNvSpPr/>
           <p:nvPr/>
         </p:nvSpPr>
@@ -18534,7 +14981,7 @@
       </p:sp>
       <p:sp>
         <p:nvSpPr>
-          <p:cNvPr id="148" name="Text 17"/>
+          <p:cNvPr id="137" name="Text 17"/>
           <p:cNvSpPr/>
           <p:nvPr/>
         </p:nvSpPr>
@@ -18591,7 +15038,7 @@
       </p:sp>
       <p:sp>
         <p:nvSpPr>
-          <p:cNvPr id="149" name="Shape 18"/>
+          <p:cNvPr id="138" name="Shape 18"/>
           <p:cNvSpPr/>
           <p:nvPr/>
         </p:nvSpPr>
@@ -18632,7 +15079,7 @@
       </p:sp>
       <p:sp>
         <p:nvSpPr>
-          <p:cNvPr id="150" name="Text 19"/>
+          <p:cNvPr id="139" name="Text 19"/>
           <p:cNvSpPr/>
           <p:nvPr/>
         </p:nvSpPr>

--- a/使用者SOP_投影版.pptx
+++ b/使用者SOP_投影版.pptx
@@ -352,7 +352,7 @@
             <a:pPr indent="0" algn="r">
               <a:buNone/>
             </a:pPr>
-            <a:fld id="{FDE01776-F343-40CE-91D1-A9CC7C79493F}" type="slidenum">
+            <a:fld id="{25820069-2EF0-40FE-91EC-BA52A4582DBD}" type="slidenum">
               <a:rPr b="0" lang="en-US" sz="1400" spc="-1" strike="noStrike">
                 <a:solidFill>
                   <a:srgbClr val="000000"/>
@@ -395,7 +395,7 @@
       </p:grpSpPr>
       <p:sp>
         <p:nvSpPr>
-          <p:cNvPr id="205" name="PlaceHolder 1"/>
+          <p:cNvPr id="219" name="PlaceHolder 1"/>
           <p:cNvSpPr>
             <a:spLocks noGrp="1"/>
           </p:cNvSpPr>
@@ -418,7 +418,7 @@
       </p:sp>
       <p:sp>
         <p:nvSpPr>
-          <p:cNvPr id="206" name="PlaceHolder 2"/>
+          <p:cNvPr id="220" name="PlaceHolder 2"/>
           <p:cNvSpPr>
             <a:spLocks noGrp="1"/>
           </p:cNvSpPr>
@@ -458,7 +458,7 @@
       </p:sp>
       <p:sp>
         <p:nvSpPr>
-          <p:cNvPr id="207" name="PlaceHolder 3"/>
+          <p:cNvPr id="221" name="PlaceHolder 3"/>
           <p:cNvSpPr>
             <a:spLocks noGrp="1"/>
           </p:cNvSpPr>
@@ -505,7 +505,7 @@
               </a:lnSpc>
               <a:buNone/>
             </a:pPr>
-            <a:fld id="{C86B26A2-FE75-4769-B831-6417CCED379F}" type="slidenum">
+            <a:fld id="{099401C1-9485-4BA7-B50B-3458EC23FBA4}" type="slidenum">
               <a:rPr b="0" lang="en-US" sz="1200" spc="-1" strike="noStrike">
                 <a:solidFill>
                   <a:schemeClr val="dk1"/>
@@ -548,7 +548,7 @@
       </p:grpSpPr>
       <p:sp>
         <p:nvSpPr>
-          <p:cNvPr id="232" name="PlaceHolder 1"/>
+          <p:cNvPr id="246" name="PlaceHolder 1"/>
           <p:cNvSpPr>
             <a:spLocks noGrp="1"/>
           </p:cNvSpPr>
@@ -571,7 +571,7 @@
       </p:sp>
       <p:sp>
         <p:nvSpPr>
-          <p:cNvPr id="233" name="PlaceHolder 2"/>
+          <p:cNvPr id="247" name="PlaceHolder 2"/>
           <p:cNvSpPr>
             <a:spLocks noGrp="1"/>
           </p:cNvSpPr>
@@ -611,7 +611,7 @@
       </p:sp>
       <p:sp>
         <p:nvSpPr>
-          <p:cNvPr id="234" name="PlaceHolder 3"/>
+          <p:cNvPr id="248" name="PlaceHolder 3"/>
           <p:cNvSpPr>
             <a:spLocks noGrp="1"/>
           </p:cNvSpPr>
@@ -658,7 +658,7 @@
               </a:lnSpc>
               <a:buNone/>
             </a:pPr>
-            <a:fld id="{0F8CBE1A-E451-4BCA-A5E7-16511BC42D2B}" type="slidenum">
+            <a:fld id="{1FF7324C-9C30-42E0-95FB-6C01B19A58AA}" type="slidenum">
               <a:rPr b="0" lang="en-US" sz="1200" spc="-1" strike="noStrike">
                 <a:solidFill>
                   <a:schemeClr val="dk1"/>
@@ -701,7 +701,7 @@
       </p:grpSpPr>
       <p:sp>
         <p:nvSpPr>
-          <p:cNvPr id="235" name="PlaceHolder 1"/>
+          <p:cNvPr id="249" name="PlaceHolder 1"/>
           <p:cNvSpPr>
             <a:spLocks noGrp="1"/>
           </p:cNvSpPr>
@@ -724,7 +724,7 @@
       </p:sp>
       <p:sp>
         <p:nvSpPr>
-          <p:cNvPr id="236" name="PlaceHolder 2"/>
+          <p:cNvPr id="250" name="PlaceHolder 2"/>
           <p:cNvSpPr>
             <a:spLocks noGrp="1"/>
           </p:cNvSpPr>
@@ -764,7 +764,7 @@
       </p:sp>
       <p:sp>
         <p:nvSpPr>
-          <p:cNvPr id="237" name="PlaceHolder 3"/>
+          <p:cNvPr id="251" name="PlaceHolder 3"/>
           <p:cNvSpPr>
             <a:spLocks noGrp="1"/>
           </p:cNvSpPr>
@@ -811,7 +811,7 @@
               </a:lnSpc>
               <a:buNone/>
             </a:pPr>
-            <a:fld id="{DD60AAD0-773D-439F-9A01-9DA565550E39}" type="slidenum">
+            <a:fld id="{C471DD0F-9210-4CA3-9A90-E9230EBFFFF1}" type="slidenum">
               <a:rPr b="0" lang="en-US" sz="1200" spc="-1" strike="noStrike">
                 <a:solidFill>
                   <a:schemeClr val="dk1"/>
@@ -854,7 +854,7 @@
       </p:grpSpPr>
       <p:sp>
         <p:nvSpPr>
-          <p:cNvPr id="238" name="PlaceHolder 1"/>
+          <p:cNvPr id="252" name="PlaceHolder 1"/>
           <p:cNvSpPr>
             <a:spLocks noGrp="1"/>
           </p:cNvSpPr>
@@ -877,7 +877,7 @@
       </p:sp>
       <p:sp>
         <p:nvSpPr>
-          <p:cNvPr id="239" name="PlaceHolder 2"/>
+          <p:cNvPr id="253" name="PlaceHolder 2"/>
           <p:cNvSpPr>
             <a:spLocks noGrp="1"/>
           </p:cNvSpPr>
@@ -917,7 +917,7 @@
       </p:sp>
       <p:sp>
         <p:nvSpPr>
-          <p:cNvPr id="240" name="PlaceHolder 3"/>
+          <p:cNvPr id="254" name="PlaceHolder 3"/>
           <p:cNvSpPr>
             <a:spLocks noGrp="1"/>
           </p:cNvSpPr>
@@ -964,7 +964,7 @@
               </a:lnSpc>
               <a:buNone/>
             </a:pPr>
-            <a:fld id="{14C07ED1-47DB-4B1F-A833-97E9E211E11B}" type="slidenum">
+            <a:fld id="{E6918877-026E-4323-B31D-6E2D44FD2323}" type="slidenum">
               <a:rPr b="0" lang="en-US" sz="1200" spc="-1" strike="noStrike">
                 <a:solidFill>
                   <a:schemeClr val="dk1"/>
@@ -1007,7 +1007,7 @@
       </p:grpSpPr>
       <p:sp>
         <p:nvSpPr>
-          <p:cNvPr id="241" name="PlaceHolder 1"/>
+          <p:cNvPr id="255" name="PlaceHolder 1"/>
           <p:cNvSpPr>
             <a:spLocks noGrp="1"/>
           </p:cNvSpPr>
@@ -1030,7 +1030,7 @@
       </p:sp>
       <p:sp>
         <p:nvSpPr>
-          <p:cNvPr id="242" name="PlaceHolder 2"/>
+          <p:cNvPr id="256" name="PlaceHolder 2"/>
           <p:cNvSpPr>
             <a:spLocks noGrp="1"/>
           </p:cNvSpPr>
@@ -1070,7 +1070,7 @@
       </p:sp>
       <p:sp>
         <p:nvSpPr>
-          <p:cNvPr id="243" name="PlaceHolder 3"/>
+          <p:cNvPr id="257" name="PlaceHolder 3"/>
           <p:cNvSpPr>
             <a:spLocks noGrp="1"/>
           </p:cNvSpPr>
@@ -1117,7 +1117,7 @@
               </a:lnSpc>
               <a:buNone/>
             </a:pPr>
-            <a:fld id="{1DACD9C9-D9C0-4FCC-B825-8DE1E9781AE5}" type="slidenum">
+            <a:fld id="{A41AB6D1-B8D6-4C59-8601-740E944F54F0}" type="slidenum">
               <a:rPr b="0" lang="en-US" sz="1200" spc="-1" strike="noStrike">
                 <a:solidFill>
                   <a:schemeClr val="dk1"/>
@@ -1160,7 +1160,7 @@
       </p:grpSpPr>
       <p:sp>
         <p:nvSpPr>
-          <p:cNvPr id="244" name="PlaceHolder 1"/>
+          <p:cNvPr id="258" name="PlaceHolder 1"/>
           <p:cNvSpPr>
             <a:spLocks noGrp="1"/>
           </p:cNvSpPr>
@@ -1183,7 +1183,7 @@
       </p:sp>
       <p:sp>
         <p:nvSpPr>
-          <p:cNvPr id="245" name="PlaceHolder 2"/>
+          <p:cNvPr id="259" name="PlaceHolder 2"/>
           <p:cNvSpPr>
             <a:spLocks noGrp="1"/>
           </p:cNvSpPr>
@@ -1223,7 +1223,7 @@
       </p:sp>
       <p:sp>
         <p:nvSpPr>
-          <p:cNvPr id="246" name="PlaceHolder 3"/>
+          <p:cNvPr id="260" name="PlaceHolder 3"/>
           <p:cNvSpPr>
             <a:spLocks noGrp="1"/>
           </p:cNvSpPr>
@@ -1270,7 +1270,7 @@
               </a:lnSpc>
               <a:buNone/>
             </a:pPr>
-            <a:fld id="{99ADE383-73AD-4C1D-83C4-935BE5E12D28}" type="slidenum">
+            <a:fld id="{632D7E44-C3A8-480B-BEB4-3BD4EAF9D17E}" type="slidenum">
               <a:rPr b="0" lang="en-US" sz="1200" spc="-1" strike="noStrike">
                 <a:solidFill>
                   <a:schemeClr val="dk1"/>
@@ -1313,7 +1313,7 @@
       </p:grpSpPr>
       <p:sp>
         <p:nvSpPr>
-          <p:cNvPr id="247" name="PlaceHolder 1"/>
+          <p:cNvPr id="261" name="PlaceHolder 1"/>
           <p:cNvSpPr>
             <a:spLocks noGrp="1"/>
           </p:cNvSpPr>
@@ -1336,7 +1336,7 @@
       </p:sp>
       <p:sp>
         <p:nvSpPr>
-          <p:cNvPr id="248" name="PlaceHolder 2"/>
+          <p:cNvPr id="262" name="PlaceHolder 2"/>
           <p:cNvSpPr>
             <a:spLocks noGrp="1"/>
           </p:cNvSpPr>
@@ -1376,7 +1376,7 @@
       </p:sp>
       <p:sp>
         <p:nvSpPr>
-          <p:cNvPr id="249" name="PlaceHolder 3"/>
+          <p:cNvPr id="263" name="PlaceHolder 3"/>
           <p:cNvSpPr>
             <a:spLocks noGrp="1"/>
           </p:cNvSpPr>
@@ -1423,7 +1423,7 @@
               </a:lnSpc>
               <a:buNone/>
             </a:pPr>
-            <a:fld id="{A68DFA02-6EC1-4330-B78F-52B31B4E43E6}" type="slidenum">
+            <a:fld id="{51F31790-AF03-4DA0-A9B8-1E211142046D}" type="slidenum">
               <a:rPr b="0" lang="en-US" sz="1200" spc="-1" strike="noStrike">
                 <a:solidFill>
                   <a:schemeClr val="dk1"/>
@@ -1466,7 +1466,7 @@
       </p:grpSpPr>
       <p:sp>
         <p:nvSpPr>
-          <p:cNvPr id="208" name="PlaceHolder 1"/>
+          <p:cNvPr id="222" name="PlaceHolder 1"/>
           <p:cNvSpPr>
             <a:spLocks noGrp="1"/>
           </p:cNvSpPr>
@@ -1489,7 +1489,7 @@
       </p:sp>
       <p:sp>
         <p:nvSpPr>
-          <p:cNvPr id="209" name="PlaceHolder 2"/>
+          <p:cNvPr id="223" name="PlaceHolder 2"/>
           <p:cNvSpPr>
             <a:spLocks noGrp="1"/>
           </p:cNvSpPr>
@@ -1529,7 +1529,7 @@
       </p:sp>
       <p:sp>
         <p:nvSpPr>
-          <p:cNvPr id="210" name="PlaceHolder 3"/>
+          <p:cNvPr id="224" name="PlaceHolder 3"/>
           <p:cNvSpPr>
             <a:spLocks noGrp="1"/>
           </p:cNvSpPr>
@@ -1576,7 +1576,7 @@
               </a:lnSpc>
               <a:buNone/>
             </a:pPr>
-            <a:fld id="{841186E4-49AD-46D1-8864-AF0F93AEFDA9}" type="slidenum">
+            <a:fld id="{C87E6952-9FA3-4AA8-B99C-C1BBE110B489}" type="slidenum">
               <a:rPr b="0" lang="en-US" sz="1200" spc="-1" strike="noStrike">
                 <a:solidFill>
                   <a:schemeClr val="dk1"/>
@@ -1619,7 +1619,7 @@
       </p:grpSpPr>
       <p:sp>
         <p:nvSpPr>
-          <p:cNvPr id="211" name="PlaceHolder 1"/>
+          <p:cNvPr id="225" name="PlaceHolder 1"/>
           <p:cNvSpPr>
             <a:spLocks noGrp="1"/>
           </p:cNvSpPr>
@@ -1642,7 +1642,7 @@
       </p:sp>
       <p:sp>
         <p:nvSpPr>
-          <p:cNvPr id="212" name="PlaceHolder 2"/>
+          <p:cNvPr id="226" name="PlaceHolder 2"/>
           <p:cNvSpPr>
             <a:spLocks noGrp="1"/>
           </p:cNvSpPr>
@@ -1682,7 +1682,7 @@
       </p:sp>
       <p:sp>
         <p:nvSpPr>
-          <p:cNvPr id="213" name="PlaceHolder 3"/>
+          <p:cNvPr id="227" name="PlaceHolder 3"/>
           <p:cNvSpPr>
             <a:spLocks noGrp="1"/>
           </p:cNvSpPr>
@@ -1729,7 +1729,7 @@
               </a:lnSpc>
               <a:buNone/>
             </a:pPr>
-            <a:fld id="{0E1DAAF1-E01F-431A-B5FB-24CF6FD14DDB}" type="slidenum">
+            <a:fld id="{75981AE3-A2E5-42B9-A793-E48C2EB3C962}" type="slidenum">
               <a:rPr b="0" lang="en-US" sz="1200" spc="-1" strike="noStrike">
                 <a:solidFill>
                   <a:schemeClr val="dk1"/>
@@ -1772,7 +1772,7 @@
       </p:grpSpPr>
       <p:sp>
         <p:nvSpPr>
-          <p:cNvPr id="214" name="PlaceHolder 1"/>
+          <p:cNvPr id="228" name="PlaceHolder 1"/>
           <p:cNvSpPr>
             <a:spLocks noGrp="1"/>
           </p:cNvSpPr>
@@ -1795,7 +1795,7 @@
       </p:sp>
       <p:sp>
         <p:nvSpPr>
-          <p:cNvPr id="215" name="PlaceHolder 2"/>
+          <p:cNvPr id="229" name="PlaceHolder 2"/>
           <p:cNvSpPr>
             <a:spLocks noGrp="1"/>
           </p:cNvSpPr>
@@ -1835,7 +1835,7 @@
       </p:sp>
       <p:sp>
         <p:nvSpPr>
-          <p:cNvPr id="216" name="PlaceHolder 3"/>
+          <p:cNvPr id="230" name="PlaceHolder 3"/>
           <p:cNvSpPr>
             <a:spLocks noGrp="1"/>
           </p:cNvSpPr>
@@ -1882,7 +1882,7 @@
               </a:lnSpc>
               <a:buNone/>
             </a:pPr>
-            <a:fld id="{E133882E-3EEF-4CC8-8D61-19A0F66E3C5B}" type="slidenum">
+            <a:fld id="{9CF1B514-C086-4B5F-B29E-48878A23DADA}" type="slidenum">
               <a:rPr b="0" lang="en-US" sz="1200" spc="-1" strike="noStrike">
                 <a:solidFill>
                   <a:schemeClr val="dk1"/>
@@ -1925,7 +1925,7 @@
       </p:grpSpPr>
       <p:sp>
         <p:nvSpPr>
-          <p:cNvPr id="217" name="PlaceHolder 1"/>
+          <p:cNvPr id="231" name="PlaceHolder 1"/>
           <p:cNvSpPr>
             <a:spLocks noGrp="1"/>
           </p:cNvSpPr>
@@ -1948,7 +1948,7 @@
       </p:sp>
       <p:sp>
         <p:nvSpPr>
-          <p:cNvPr id="218" name="PlaceHolder 2"/>
+          <p:cNvPr id="232" name="PlaceHolder 2"/>
           <p:cNvSpPr>
             <a:spLocks noGrp="1"/>
           </p:cNvSpPr>
@@ -1988,7 +1988,7 @@
       </p:sp>
       <p:sp>
         <p:nvSpPr>
-          <p:cNvPr id="219" name="PlaceHolder 3"/>
+          <p:cNvPr id="233" name="PlaceHolder 3"/>
           <p:cNvSpPr>
             <a:spLocks noGrp="1"/>
           </p:cNvSpPr>
@@ -2035,7 +2035,7 @@
               </a:lnSpc>
               <a:buNone/>
             </a:pPr>
-            <a:fld id="{1259E2FC-B269-455F-A9C3-F6FBC635D99F}" type="slidenum">
+            <a:fld id="{EAE810A9-7A6D-40D1-86F1-E4F5258D5386}" type="slidenum">
               <a:rPr b="0" lang="en-US" sz="1200" spc="-1" strike="noStrike">
                 <a:solidFill>
                   <a:schemeClr val="dk1"/>
@@ -2078,7 +2078,7 @@
       </p:grpSpPr>
       <p:sp>
         <p:nvSpPr>
-          <p:cNvPr id="220" name="PlaceHolder 1"/>
+          <p:cNvPr id="234" name="PlaceHolder 1"/>
           <p:cNvSpPr>
             <a:spLocks noGrp="1"/>
           </p:cNvSpPr>
@@ -2101,7 +2101,7 @@
       </p:sp>
       <p:sp>
         <p:nvSpPr>
-          <p:cNvPr id="221" name="PlaceHolder 2"/>
+          <p:cNvPr id="235" name="PlaceHolder 2"/>
           <p:cNvSpPr>
             <a:spLocks noGrp="1"/>
           </p:cNvSpPr>
@@ -2141,7 +2141,7 @@
       </p:sp>
       <p:sp>
         <p:nvSpPr>
-          <p:cNvPr id="222" name="PlaceHolder 3"/>
+          <p:cNvPr id="236" name="PlaceHolder 3"/>
           <p:cNvSpPr>
             <a:spLocks noGrp="1"/>
           </p:cNvSpPr>
@@ -2188,7 +2188,7 @@
               </a:lnSpc>
               <a:buNone/>
             </a:pPr>
-            <a:fld id="{9F586E2F-D73C-428D-A8BD-C1D8EFE0D586}" type="slidenum">
+            <a:fld id="{5D767C35-B533-4569-AFC6-9452756C6C72}" type="slidenum">
               <a:rPr b="0" lang="en-US" sz="1200" spc="-1" strike="noStrike">
                 <a:solidFill>
                   <a:schemeClr val="dk1"/>
@@ -2231,7 +2231,7 @@
       </p:grpSpPr>
       <p:sp>
         <p:nvSpPr>
-          <p:cNvPr id="223" name="PlaceHolder 1"/>
+          <p:cNvPr id="237" name="PlaceHolder 1"/>
           <p:cNvSpPr>
             <a:spLocks noGrp="1"/>
           </p:cNvSpPr>
@@ -2254,7 +2254,7 @@
       </p:sp>
       <p:sp>
         <p:nvSpPr>
-          <p:cNvPr id="224" name="PlaceHolder 2"/>
+          <p:cNvPr id="238" name="PlaceHolder 2"/>
           <p:cNvSpPr>
             <a:spLocks noGrp="1"/>
           </p:cNvSpPr>
@@ -2294,7 +2294,7 @@
       </p:sp>
       <p:sp>
         <p:nvSpPr>
-          <p:cNvPr id="225" name="PlaceHolder 3"/>
+          <p:cNvPr id="239" name="PlaceHolder 3"/>
           <p:cNvSpPr>
             <a:spLocks noGrp="1"/>
           </p:cNvSpPr>
@@ -2341,7 +2341,7 @@
               </a:lnSpc>
               <a:buNone/>
             </a:pPr>
-            <a:fld id="{692DDA58-075A-4F79-A5AC-62840CFAADDA}" type="slidenum">
+            <a:fld id="{CF6C7FFB-E0E1-421C-85BA-12B95160D375}" type="slidenum">
               <a:rPr b="0" lang="en-US" sz="1200" spc="-1" strike="noStrike">
                 <a:solidFill>
                   <a:schemeClr val="dk1"/>
@@ -2384,7 +2384,7 @@
       </p:grpSpPr>
       <p:sp>
         <p:nvSpPr>
-          <p:cNvPr id="226" name="PlaceHolder 1"/>
+          <p:cNvPr id="240" name="PlaceHolder 1"/>
           <p:cNvSpPr>
             <a:spLocks noGrp="1"/>
           </p:cNvSpPr>
@@ -2407,7 +2407,7 @@
       </p:sp>
       <p:sp>
         <p:nvSpPr>
-          <p:cNvPr id="227" name="PlaceHolder 2"/>
+          <p:cNvPr id="241" name="PlaceHolder 2"/>
           <p:cNvSpPr>
             <a:spLocks noGrp="1"/>
           </p:cNvSpPr>
@@ -2447,7 +2447,7 @@
       </p:sp>
       <p:sp>
         <p:nvSpPr>
-          <p:cNvPr id="228" name="PlaceHolder 3"/>
+          <p:cNvPr id="242" name="PlaceHolder 3"/>
           <p:cNvSpPr>
             <a:spLocks noGrp="1"/>
           </p:cNvSpPr>
@@ -2494,7 +2494,7 @@
               </a:lnSpc>
               <a:buNone/>
             </a:pPr>
-            <a:fld id="{2C172F28-960B-4673-B5A3-BE19E37D2380}" type="slidenum">
+            <a:fld id="{4232FC22-CCB4-4D28-8864-12E2795E6FB4}" type="slidenum">
               <a:rPr b="0" lang="en-US" sz="1200" spc="-1" strike="noStrike">
                 <a:solidFill>
                   <a:schemeClr val="dk1"/>
@@ -2537,7 +2537,7 @@
       </p:grpSpPr>
       <p:sp>
         <p:nvSpPr>
-          <p:cNvPr id="229" name="PlaceHolder 1"/>
+          <p:cNvPr id="243" name="PlaceHolder 1"/>
           <p:cNvSpPr>
             <a:spLocks noGrp="1"/>
           </p:cNvSpPr>
@@ -2560,7 +2560,7 @@
       </p:sp>
       <p:sp>
         <p:nvSpPr>
-          <p:cNvPr id="230" name="PlaceHolder 2"/>
+          <p:cNvPr id="244" name="PlaceHolder 2"/>
           <p:cNvSpPr>
             <a:spLocks noGrp="1"/>
           </p:cNvSpPr>
@@ -2600,7 +2600,7 @@
       </p:sp>
       <p:sp>
         <p:nvSpPr>
-          <p:cNvPr id="231" name="PlaceHolder 3"/>
+          <p:cNvPr id="245" name="PlaceHolder 3"/>
           <p:cNvSpPr>
             <a:spLocks noGrp="1"/>
           </p:cNvSpPr>
@@ -2647,7 +2647,7 @@
               </a:lnSpc>
               <a:buNone/>
             </a:pPr>
-            <a:fld id="{5D71B4F1-62CD-48E6-88E6-2E1EEBEC10DF}" type="slidenum">
+            <a:fld id="{4419E0F4-7237-4401-92D4-A729B0EBCCE6}" type="slidenum">
               <a:rPr b="0" lang="en-US" sz="1200" spc="-1" strike="noStrike">
                 <a:solidFill>
                   <a:schemeClr val="dk1"/>
@@ -3115,7 +3115,7 @@
         <p:spPr>
           <a:xfrm>
             <a:off x="1005840" y="2194560"/>
-            <a:ext cx="9143640" cy="456840"/>
+            <a:ext cx="10515240" cy="456840"/>
           </a:xfrm>
           <a:prstGeom prst="rect">
             <a:avLst/>
@@ -3352,7 +3352,7 @@
         <p:spPr>
           <a:xfrm>
             <a:off x="1005840" y="5257800"/>
-            <a:ext cx="7314840" cy="365400"/>
+            <a:ext cx="10515240" cy="365400"/>
           </a:xfrm>
           <a:prstGeom prst="rect">
             <a:avLst/>
@@ -3439,7 +3439,7 @@
       </p:grpSpPr>
       <p:sp>
         <p:nvSpPr>
-          <p:cNvPr id="140" name="Shape 0"/>
+          <p:cNvPr id="154" name="Shape 0"/>
           <p:cNvSpPr/>
           <p:nvPr/>
         </p:nvSpPr>
@@ -3480,7 +3480,7 @@
       </p:sp>
       <p:sp>
         <p:nvSpPr>
-          <p:cNvPr id="141" name="Shape 1"/>
+          <p:cNvPr id="155" name="Shape 1"/>
           <p:cNvSpPr/>
           <p:nvPr/>
         </p:nvSpPr>
@@ -3521,7 +3521,7 @@
       </p:sp>
       <p:sp>
         <p:nvSpPr>
-          <p:cNvPr id="142" name="Text 2"/>
+          <p:cNvPr id="156" name="Text 2"/>
           <p:cNvSpPr/>
           <p:nvPr/>
         </p:nvSpPr>
@@ -3578,7 +3578,7 @@
       </p:sp>
       <p:sp>
         <p:nvSpPr>
-          <p:cNvPr id="143" name="Shape 3"/>
+          <p:cNvPr id="157" name="Shape 3"/>
           <p:cNvSpPr/>
           <p:nvPr/>
         </p:nvSpPr>
@@ -3622,7 +3622,7 @@
       </p:sp>
       <p:sp>
         <p:nvSpPr>
-          <p:cNvPr id="144" name="Shape 4"/>
+          <p:cNvPr id="158" name="Shape 4"/>
           <p:cNvSpPr/>
           <p:nvPr/>
         </p:nvSpPr>
@@ -3663,7 +3663,7 @@
       </p:sp>
       <p:sp>
         <p:nvSpPr>
-          <p:cNvPr id="145" name="Text 5"/>
+          <p:cNvPr id="159" name="Text 5"/>
           <p:cNvSpPr/>
           <p:nvPr/>
         </p:nvSpPr>
@@ -3720,7 +3720,7 @@
       </p:sp>
       <p:sp>
         <p:nvSpPr>
-          <p:cNvPr id="146" name="Text 6"/>
+          <p:cNvPr id="160" name="Text 6"/>
           <p:cNvSpPr/>
           <p:nvPr/>
         </p:nvSpPr>
@@ -3835,7 +3835,7 @@
       </p:sp>
       <p:sp>
         <p:nvSpPr>
-          <p:cNvPr id="147" name="Shape 7"/>
+          <p:cNvPr id="161" name="Shape 7"/>
           <p:cNvSpPr/>
           <p:nvPr/>
         </p:nvSpPr>
@@ -3879,7 +3879,7 @@
       </p:sp>
       <p:sp>
         <p:nvSpPr>
-          <p:cNvPr id="148" name="Shape 8"/>
+          <p:cNvPr id="162" name="Shape 8"/>
           <p:cNvSpPr/>
           <p:nvPr/>
         </p:nvSpPr>
@@ -3920,7 +3920,7 @@
       </p:sp>
       <p:sp>
         <p:nvSpPr>
-          <p:cNvPr id="149" name="Text 9"/>
+          <p:cNvPr id="163" name="Text 9"/>
           <p:cNvSpPr/>
           <p:nvPr/>
         </p:nvSpPr>
@@ -3977,7 +3977,7 @@
       </p:sp>
       <p:sp>
         <p:nvSpPr>
-          <p:cNvPr id="150" name="Text 10"/>
+          <p:cNvPr id="164" name="Text 10"/>
           <p:cNvSpPr/>
           <p:nvPr/>
         </p:nvSpPr>
@@ -4133,7 +4133,7 @@
       </p:grpSpPr>
       <p:sp>
         <p:nvSpPr>
-          <p:cNvPr id="151" name="Shape 0"/>
+          <p:cNvPr id="165" name="Shape 0"/>
           <p:cNvSpPr/>
           <p:nvPr/>
         </p:nvSpPr>
@@ -4174,7 +4174,7 @@
       </p:sp>
       <p:sp>
         <p:nvSpPr>
-          <p:cNvPr id="152" name="Shape 1"/>
+          <p:cNvPr id="166" name="Shape 1"/>
           <p:cNvSpPr/>
           <p:nvPr/>
         </p:nvSpPr>
@@ -4215,7 +4215,7 @@
       </p:sp>
       <p:sp>
         <p:nvSpPr>
-          <p:cNvPr id="153" name="Text 2"/>
+          <p:cNvPr id="167" name="Text 2"/>
           <p:cNvSpPr/>
           <p:nvPr/>
         </p:nvSpPr>
@@ -4282,7 +4282,7 @@
       </p:sp>
       <p:sp>
         <p:nvSpPr>
-          <p:cNvPr id="154" name="Text 3"/>
+          <p:cNvPr id="168" name="Text 3"/>
           <p:cNvSpPr/>
           <p:nvPr/>
         </p:nvSpPr>
@@ -4339,7 +4339,7 @@
       </p:sp>
       <p:sp>
         <p:nvSpPr>
-          <p:cNvPr id="155" name="Shape 4"/>
+          <p:cNvPr id="169" name="Shape 4"/>
           <p:cNvSpPr/>
           <p:nvPr/>
         </p:nvSpPr>
@@ -4380,7 +4380,7 @@
       </p:sp>
       <p:sp>
         <p:nvSpPr>
-          <p:cNvPr id="156" name="Text 5"/>
+          <p:cNvPr id="170" name="Text 5"/>
           <p:cNvSpPr/>
           <p:nvPr/>
         </p:nvSpPr>
@@ -4437,7 +4437,7 @@
       </p:sp>
       <p:sp>
         <p:nvSpPr>
-          <p:cNvPr id="157" name="Text 6"/>
+          <p:cNvPr id="171" name="Text 6"/>
           <p:cNvSpPr/>
           <p:nvPr/>
         </p:nvSpPr>
@@ -4494,7 +4494,7 @@
       </p:sp>
       <p:sp>
         <p:nvSpPr>
-          <p:cNvPr id="158" name="Shape 7"/>
+          <p:cNvPr id="172" name="Shape 7"/>
           <p:cNvSpPr/>
           <p:nvPr/>
         </p:nvSpPr>
@@ -4535,7 +4535,7 @@
       </p:sp>
       <p:sp>
         <p:nvSpPr>
-          <p:cNvPr id="159" name="Text 8"/>
+          <p:cNvPr id="173" name="Text 8"/>
           <p:cNvSpPr/>
           <p:nvPr/>
         </p:nvSpPr>
@@ -4592,7 +4592,7 @@
       </p:sp>
       <p:sp>
         <p:nvSpPr>
-          <p:cNvPr id="160" name="Text 9"/>
+          <p:cNvPr id="174" name="Text 9"/>
           <p:cNvSpPr/>
           <p:nvPr/>
         </p:nvSpPr>
@@ -4669,7 +4669,7 @@
       </p:sp>
       <p:sp>
         <p:nvSpPr>
-          <p:cNvPr id="161" name="Shape 10"/>
+          <p:cNvPr id="175" name="Shape 10"/>
           <p:cNvSpPr/>
           <p:nvPr/>
         </p:nvSpPr>
@@ -4710,7 +4710,7 @@
       </p:sp>
       <p:sp>
         <p:nvSpPr>
-          <p:cNvPr id="162" name="Text 11"/>
+          <p:cNvPr id="176" name="Text 11"/>
           <p:cNvSpPr/>
           <p:nvPr/>
         </p:nvSpPr>
@@ -4767,7 +4767,7 @@
       </p:sp>
       <p:sp>
         <p:nvSpPr>
-          <p:cNvPr id="163" name="Text 12"/>
+          <p:cNvPr id="177" name="Text 12"/>
           <p:cNvSpPr/>
           <p:nvPr/>
         </p:nvSpPr>
@@ -4884,7 +4884,7 @@
       </p:sp>
       <p:sp>
         <p:nvSpPr>
-          <p:cNvPr id="164" name="Shape 13"/>
+          <p:cNvPr id="178" name="Shape 13"/>
           <p:cNvSpPr/>
           <p:nvPr/>
         </p:nvSpPr>
@@ -4925,7 +4925,7 @@
       </p:sp>
       <p:sp>
         <p:nvSpPr>
-          <p:cNvPr id="165" name="Text 14"/>
+          <p:cNvPr id="179" name="Text 14"/>
           <p:cNvSpPr/>
           <p:nvPr/>
         </p:nvSpPr>
@@ -5019,7 +5019,7 @@
       </p:grpSpPr>
       <p:sp>
         <p:nvSpPr>
-          <p:cNvPr id="166" name="Shape 0"/>
+          <p:cNvPr id="180" name="Shape 0"/>
           <p:cNvSpPr/>
           <p:nvPr/>
         </p:nvSpPr>
@@ -5060,7 +5060,7 @@
       </p:sp>
       <p:sp>
         <p:nvSpPr>
-          <p:cNvPr id="167" name="Shape 1"/>
+          <p:cNvPr id="181" name="Shape 1"/>
           <p:cNvSpPr/>
           <p:nvPr/>
         </p:nvSpPr>
@@ -5101,7 +5101,7 @@
       </p:sp>
       <p:sp>
         <p:nvSpPr>
-          <p:cNvPr id="168" name="Text 2"/>
+          <p:cNvPr id="182" name="Text 2"/>
           <p:cNvSpPr/>
           <p:nvPr/>
         </p:nvSpPr>
@@ -5158,7 +5158,7 @@
       </p:sp>
       <p:sp>
         <p:nvSpPr>
-          <p:cNvPr id="169" name="Text 3"/>
+          <p:cNvPr id="183" name="Text 3"/>
           <p:cNvSpPr/>
           <p:nvPr/>
         </p:nvSpPr>
@@ -5245,7 +5245,7 @@
       </p:sp>
       <p:sp>
         <p:nvSpPr>
-          <p:cNvPr id="170" name="Shape 4"/>
+          <p:cNvPr id="184" name="Shape 4"/>
           <p:cNvSpPr/>
           <p:nvPr/>
         </p:nvSpPr>
@@ -5289,7 +5289,7 @@
       </p:sp>
       <p:sp>
         <p:nvSpPr>
-          <p:cNvPr id="171" name="Shape 5"/>
+          <p:cNvPr id="185" name="Shape 5"/>
           <p:cNvSpPr/>
           <p:nvPr/>
         </p:nvSpPr>
@@ -5330,7 +5330,7 @@
       </p:sp>
       <p:sp>
         <p:nvSpPr>
-          <p:cNvPr id="172" name="Text 6"/>
+          <p:cNvPr id="186" name="Text 6"/>
           <p:cNvSpPr/>
           <p:nvPr/>
         </p:nvSpPr>
@@ -5387,7 +5387,7 @@
       </p:sp>
       <p:sp>
         <p:nvSpPr>
-          <p:cNvPr id="173" name="Text 7"/>
+          <p:cNvPr id="187" name="Text 7"/>
           <p:cNvSpPr/>
           <p:nvPr/>
         </p:nvSpPr>
@@ -5494,7 +5494,7 @@
       </p:sp>
       <p:sp>
         <p:nvSpPr>
-          <p:cNvPr id="174" name="Shape 8"/>
+          <p:cNvPr id="188" name="Shape 8"/>
           <p:cNvSpPr/>
           <p:nvPr/>
         </p:nvSpPr>
@@ -5535,7 +5535,7 @@
       </p:sp>
       <p:sp>
         <p:nvSpPr>
-          <p:cNvPr id="175" name="Text 9"/>
+          <p:cNvPr id="189" name="Text 9"/>
           <p:cNvSpPr/>
           <p:nvPr/>
         </p:nvSpPr>
@@ -5629,7 +5629,7 @@
       </p:grpSpPr>
       <p:sp>
         <p:nvSpPr>
-          <p:cNvPr id="176" name="Shape 0"/>
+          <p:cNvPr id="190" name="Shape 0"/>
           <p:cNvSpPr/>
           <p:nvPr/>
         </p:nvSpPr>
@@ -5670,7 +5670,7 @@
       </p:sp>
       <p:sp>
         <p:nvSpPr>
-          <p:cNvPr id="177" name="Shape 1"/>
+          <p:cNvPr id="191" name="Shape 1"/>
           <p:cNvSpPr/>
           <p:nvPr/>
         </p:nvSpPr>
@@ -5711,7 +5711,7 @@
       </p:sp>
       <p:sp>
         <p:nvSpPr>
-          <p:cNvPr id="178" name="Text 2"/>
+          <p:cNvPr id="192" name="Text 2"/>
           <p:cNvSpPr/>
           <p:nvPr/>
         </p:nvSpPr>
@@ -5768,7 +5768,7 @@
       </p:sp>
       <p:sp>
         <p:nvSpPr>
-          <p:cNvPr id="179" name="Text 3"/>
+          <p:cNvPr id="193" name="Text 3"/>
           <p:cNvSpPr/>
           <p:nvPr/>
         </p:nvSpPr>
@@ -5825,7 +5825,7 @@
       </p:sp>
       <p:sp>
         <p:nvSpPr>
-          <p:cNvPr id="180" name="Shape 4"/>
+          <p:cNvPr id="194" name="Shape 4"/>
           <p:cNvSpPr/>
           <p:nvPr/>
         </p:nvSpPr>
@@ -5869,7 +5869,7 @@
       </p:sp>
       <p:sp>
         <p:nvSpPr>
-          <p:cNvPr id="181" name="Shape 5"/>
+          <p:cNvPr id="195" name="Shape 5"/>
           <p:cNvSpPr/>
           <p:nvPr/>
         </p:nvSpPr>
@@ -5910,7 +5910,7 @@
       </p:sp>
       <p:sp>
         <p:nvSpPr>
-          <p:cNvPr id="182" name="Text 6"/>
+          <p:cNvPr id="196" name="Text 6"/>
           <p:cNvSpPr/>
           <p:nvPr/>
         </p:nvSpPr>
@@ -5967,7 +5967,7 @@
       </p:sp>
       <p:sp>
         <p:nvSpPr>
-          <p:cNvPr id="183" name="Text 7"/>
+          <p:cNvPr id="197" name="Text 7"/>
           <p:cNvSpPr/>
           <p:nvPr/>
         </p:nvSpPr>
@@ -6091,7 +6091,7 @@
       </p:grpSpPr>
       <p:sp>
         <p:nvSpPr>
-          <p:cNvPr id="184" name="Shape 0"/>
+          <p:cNvPr id="198" name="Shape 0"/>
           <p:cNvSpPr/>
           <p:nvPr/>
         </p:nvSpPr>
@@ -6132,7 +6132,7 @@
       </p:sp>
       <p:sp>
         <p:nvSpPr>
-          <p:cNvPr id="185" name="Shape 1"/>
+          <p:cNvPr id="199" name="Shape 1"/>
           <p:cNvSpPr/>
           <p:nvPr/>
         </p:nvSpPr>
@@ -6173,7 +6173,7 @@
       </p:sp>
       <p:sp>
         <p:nvSpPr>
-          <p:cNvPr id="186" name="Text 2"/>
+          <p:cNvPr id="200" name="Text 2"/>
           <p:cNvSpPr/>
           <p:nvPr/>
         </p:nvSpPr>
@@ -6230,7 +6230,7 @@
       </p:sp>
       <p:sp>
         <p:nvSpPr>
-          <p:cNvPr id="187" name="Text 3"/>
+          <p:cNvPr id="201" name="Text 3"/>
           <p:cNvSpPr/>
           <p:nvPr/>
         </p:nvSpPr>
@@ -6287,7 +6287,7 @@
       </p:sp>
       <p:sp>
         <p:nvSpPr>
-          <p:cNvPr id="188" name="Shape 4"/>
+          <p:cNvPr id="202" name="Shape 4"/>
           <p:cNvSpPr/>
           <p:nvPr/>
         </p:nvSpPr>
@@ -6328,7 +6328,7 @@
       </p:sp>
       <p:sp>
         <p:nvSpPr>
-          <p:cNvPr id="189" name="Text 5"/>
+          <p:cNvPr id="203" name="Text 5"/>
           <p:cNvSpPr/>
           <p:nvPr/>
         </p:nvSpPr>
@@ -6385,7 +6385,7 @@
       </p:sp>
       <p:sp>
         <p:nvSpPr>
-          <p:cNvPr id="190" name="Text 6"/>
+          <p:cNvPr id="204" name="Text 6"/>
           <p:cNvSpPr/>
           <p:nvPr/>
         </p:nvSpPr>
@@ -6462,7 +6462,7 @@
       </p:sp>
       <p:sp>
         <p:nvSpPr>
-          <p:cNvPr id="191" name="Shape 7"/>
+          <p:cNvPr id="205" name="Shape 7"/>
           <p:cNvSpPr/>
           <p:nvPr/>
         </p:nvSpPr>
@@ -6503,7 +6503,7 @@
       </p:sp>
       <p:sp>
         <p:nvSpPr>
-          <p:cNvPr id="192" name="Text 8"/>
+          <p:cNvPr id="206" name="Text 8"/>
           <p:cNvSpPr/>
           <p:nvPr/>
         </p:nvSpPr>
@@ -6560,7 +6560,7 @@
       </p:sp>
       <p:sp>
         <p:nvSpPr>
-          <p:cNvPr id="193" name="Text 9"/>
+          <p:cNvPr id="207" name="Text 9"/>
           <p:cNvSpPr/>
           <p:nvPr/>
         </p:nvSpPr>
@@ -6617,7 +6617,7 @@
       </p:sp>
       <p:sp>
         <p:nvSpPr>
-          <p:cNvPr id="194" name="Shape 10"/>
+          <p:cNvPr id="208" name="Shape 10"/>
           <p:cNvSpPr/>
           <p:nvPr/>
         </p:nvSpPr>
@@ -6658,7 +6658,7 @@
       </p:sp>
       <p:sp>
         <p:nvSpPr>
-          <p:cNvPr id="195" name="Text 11"/>
+          <p:cNvPr id="209" name="Text 11"/>
           <p:cNvSpPr/>
           <p:nvPr/>
         </p:nvSpPr>
@@ -6715,7 +6715,7 @@
       </p:sp>
       <p:sp>
         <p:nvSpPr>
-          <p:cNvPr id="196" name="Text 12"/>
+          <p:cNvPr id="210" name="Text 12"/>
           <p:cNvSpPr/>
           <p:nvPr/>
         </p:nvSpPr>
@@ -6772,7 +6772,7 @@
       </p:sp>
       <p:sp>
         <p:nvSpPr>
-          <p:cNvPr id="197" name="Shape 13"/>
+          <p:cNvPr id="211" name="Shape 13"/>
           <p:cNvSpPr/>
           <p:nvPr/>
         </p:nvSpPr>
@@ -6816,7 +6816,7 @@
       </p:sp>
       <p:sp>
         <p:nvSpPr>
-          <p:cNvPr id="198" name="Shape 14"/>
+          <p:cNvPr id="212" name="Shape 14"/>
           <p:cNvSpPr/>
           <p:nvPr/>
         </p:nvSpPr>
@@ -6857,7 +6857,7 @@
       </p:sp>
       <p:sp>
         <p:nvSpPr>
-          <p:cNvPr id="199" name="Text 15"/>
+          <p:cNvPr id="213" name="Text 15"/>
           <p:cNvSpPr/>
           <p:nvPr/>
         </p:nvSpPr>
@@ -6914,7 +6914,7 @@
       </p:sp>
       <p:sp>
         <p:nvSpPr>
-          <p:cNvPr id="200" name="Text 16"/>
+          <p:cNvPr id="214" name="Text 16"/>
           <p:cNvSpPr/>
           <p:nvPr/>
         </p:nvSpPr>
@@ -7088,7 +7088,7 @@
       </p:grpSpPr>
       <p:sp>
         <p:nvSpPr>
-          <p:cNvPr id="201" name="Shape 0"/>
+          <p:cNvPr id="215" name="Shape 0"/>
           <p:cNvSpPr/>
           <p:nvPr/>
         </p:nvSpPr>
@@ -7129,7 +7129,7 @@
       </p:sp>
       <p:sp>
         <p:nvSpPr>
-          <p:cNvPr id="202" name="Text 1"/>
+          <p:cNvPr id="216" name="Text 1"/>
           <p:cNvSpPr/>
           <p:nvPr/>
         </p:nvSpPr>
@@ -7206,7 +7206,7 @@
       </p:sp>
       <p:sp>
         <p:nvSpPr>
-          <p:cNvPr id="203" name="Text 2"/>
+          <p:cNvPr id="217" name="Text 2"/>
           <p:cNvSpPr/>
           <p:nvPr/>
         </p:nvSpPr>
@@ -7263,7 +7263,7 @@
       </p:sp>
       <p:sp>
         <p:nvSpPr>
-          <p:cNvPr id="204" name="Text 3"/>
+          <p:cNvPr id="218" name="Text 3"/>
           <p:cNvSpPr/>
           <p:nvPr/>
         </p:nvSpPr>
@@ -8214,6 +8214,34 @@
                 <a:latin typeface="Microsoft JhengHei"/>
                 <a:ea typeface="Microsoft JhengHei"/>
               </a:rPr>
+              <a:t>頂端選單可切換公司核准的模型</a:t>
+            </a:r>
+            <a:endParaRPr b="0" lang="en-US" sz="1400" spc="-1" strike="noStrike">
+              <a:solidFill>
+                <a:srgbClr val="000000"/>
+              </a:solidFill>
+              <a:latin typeface="Arial"/>
+            </a:endParaRPr>
+          </a:p>
+          <a:p>
+            <a:pPr marL="343080" indent="-343080" defTabSz="914400">
+              <a:lnSpc>
+                <a:spcPct val="122000"/>
+              </a:lnSpc>
+              <a:buClr>
+                <a:srgbClr val="1e1f35"/>
+              </a:buClr>
+              <a:buFont typeface="Symbol" charset="2"/>
+              <a:buChar char=""/>
+            </a:pPr>
+            <a:r>
+              <a:rPr b="0" lang="zh-CN" sz="1400" spc="-1" strike="noStrike">
+                <a:solidFill>
+                  <a:srgbClr val="1e1f35"/>
+                </a:solidFill>
+                <a:latin typeface="Microsoft JhengHei"/>
+                <a:ea typeface="Microsoft JhengHei"/>
+              </a:rPr>
               <a:t>簡報大綱匯出 </a:t>
             </a:r>
             <a:r>
@@ -9886,7 +9914,7 @@
                 <a:latin typeface="Microsoft JhengHei"/>
                 <a:ea typeface="Microsoft JhengHei"/>
               </a:rPr>
-              <a:t>目前使用的模型</a:t>
+              <a:t>切換公司核准的模型</a:t>
             </a:r>
             <a:endParaRPr b="0" lang="en-US" sz="2800" spc="-1" strike="noStrike">
               <a:solidFill>
@@ -9943,7 +9971,7 @@
                 <a:latin typeface="Microsoft JhengHei"/>
                 <a:ea typeface="Microsoft JhengHei"/>
               </a:rPr>
-              <a:t>使用公司設定的內網模型，使用者不需選擇</a:t>
+              <a:t>在交談介面頂端切換，不必自行設定連線</a:t>
             </a:r>
             <a:endParaRPr b="0" lang="en-US" sz="1900" spc="-1" strike="noStrike">
               <a:solidFill>
@@ -9962,8 +9990,493 @@
         </p:nvSpPr>
         <p:spPr>
           <a:xfrm>
-            <a:off x="868680" y="1847160"/>
-            <a:ext cx="10606680" cy="2239920"/>
+            <a:off x="868680" y="1774080"/>
+            <a:ext cx="420120" cy="420120"/>
+          </a:xfrm>
+          <a:prstGeom prst="ellipse">
+            <a:avLst/>
+          </a:prstGeom>
+          <a:solidFill>
+            <a:srgbClr val="5b4fe8"/>
+          </a:solidFill>
+          <a:ln w="0">
+            <a:noFill/>
+          </a:ln>
+        </p:spPr>
+        <p:style>
+          <a:lnRef idx="0"/>
+          <a:fillRef idx="0"/>
+          <a:effectRef idx="0"/>
+          <a:fontRef idx="minor"/>
+        </p:style>
+        <p:txBody>
+          <a:bodyPr lIns="90000" rIns="90000" tIns="45000" bIns="45000" anchor="t">
+            <a:noAutofit/>
+          </a:bodyPr>
+          <a:p>
+            <a:endParaRPr b="0" lang="en-US" sz="1800" spc="-1" strike="noStrike">
+              <a:solidFill>
+                <a:srgbClr val="ffffff"/>
+              </a:solidFill>
+              <a:latin typeface="Arial"/>
+            </a:endParaRPr>
+          </a:p>
+        </p:txBody>
+      </p:sp>
+      <p:sp>
+        <p:nvSpPr>
+          <p:cNvPr id="52" name="Text 5"/>
+          <p:cNvSpPr/>
+          <p:nvPr/>
+        </p:nvSpPr>
+        <p:spPr>
+          <a:xfrm>
+            <a:off x="868680" y="1774080"/>
+            <a:ext cx="420120" cy="420120"/>
+          </a:xfrm>
+          <a:prstGeom prst="rect">
+            <a:avLst/>
+          </a:prstGeom>
+          <a:noFill/>
+          <a:ln w="0">
+            <a:noFill/>
+          </a:ln>
+        </p:spPr>
+        <p:style>
+          <a:lnRef idx="0"/>
+          <a:fillRef idx="0"/>
+          <a:effectRef idx="0"/>
+          <a:fontRef idx="minor"/>
+        </p:style>
+        <p:txBody>
+          <a:bodyPr lIns="0" rIns="0" tIns="0" bIns="0" anchor="ctr">
+            <a:noAutofit/>
+          </a:bodyPr>
+          <a:p>
+            <a:pPr algn="ctr" defTabSz="914400">
+              <a:lnSpc>
+                <a:spcPct val="100000"/>
+              </a:lnSpc>
+              <a:tabLst>
+                <a:tab algn="l" pos="0"/>
+              </a:tabLst>
+            </a:pPr>
+            <a:r>
+              <a:rPr b="1" lang="en-US" sz="1700" spc="-1" strike="noStrike">
+                <a:solidFill>
+                  <a:srgbClr val="ffffff"/>
+                </a:solidFill>
+                <a:latin typeface="Microsoft JhengHei"/>
+                <a:ea typeface="Microsoft JhengHei"/>
+              </a:rPr>
+              <a:t>1</a:t>
+            </a:r>
+            <a:endParaRPr b="0" lang="en-US" sz="1700" spc="-1" strike="noStrike">
+              <a:solidFill>
+                <a:srgbClr val="000000"/>
+              </a:solidFill>
+              <a:latin typeface="Arial"/>
+            </a:endParaRPr>
+          </a:p>
+        </p:txBody>
+      </p:sp>
+      <p:sp>
+        <p:nvSpPr>
+          <p:cNvPr id="53" name="Text 6"/>
+          <p:cNvSpPr/>
+          <p:nvPr/>
+        </p:nvSpPr>
+        <p:spPr>
+          <a:xfrm>
+            <a:off x="1490400" y="1719000"/>
+            <a:ext cx="9920880" cy="548280"/>
+          </a:xfrm>
+          <a:prstGeom prst="rect">
+            <a:avLst/>
+          </a:prstGeom>
+          <a:noFill/>
+          <a:ln w="0">
+            <a:noFill/>
+          </a:ln>
+        </p:spPr>
+        <p:style>
+          <a:lnRef idx="0"/>
+          <a:fillRef idx="0"/>
+          <a:effectRef idx="0"/>
+          <a:fontRef idx="minor"/>
+        </p:style>
+        <p:txBody>
+          <a:bodyPr lIns="0" rIns="0" tIns="0" bIns="0" anchor="ctr">
+            <a:noAutofit/>
+          </a:bodyPr>
+          <a:p>
+            <a:pPr defTabSz="914400">
+              <a:lnSpc>
+                <a:spcPct val="100000"/>
+              </a:lnSpc>
+              <a:tabLst>
+                <a:tab algn="l" pos="0"/>
+              </a:tabLst>
+            </a:pPr>
+            <a:r>
+              <a:rPr b="0" lang="zh-CN" sz="1500" spc="-1" strike="noStrike">
+                <a:solidFill>
+                  <a:srgbClr val="1e1f35"/>
+                </a:solidFill>
+                <a:latin typeface="Microsoft JhengHei"/>
+                <a:ea typeface="Microsoft JhengHei"/>
+              </a:rPr>
+              <a:t>右鍵點貓咪，選「交談（</a:t>
+            </a:r>
+            <a:r>
+              <a:rPr b="0" lang="en-US" sz="1500" spc="-1" strike="noStrike">
+                <a:solidFill>
+                  <a:srgbClr val="1e1f35"/>
+                </a:solidFill>
+                <a:latin typeface="Microsoft JhengHei"/>
+                <a:ea typeface="Microsoft JhengHei"/>
+              </a:rPr>
+              <a:t>LLM </a:t>
+            </a:r>
+            <a:r>
+              <a:rPr b="0" lang="zh-CN" sz="1500" spc="-1" strike="noStrike">
+                <a:solidFill>
+                  <a:srgbClr val="1e1f35"/>
+                </a:solidFill>
+                <a:latin typeface="Microsoft JhengHei"/>
+                <a:ea typeface="Microsoft JhengHei"/>
+              </a:rPr>
+              <a:t>介面）…」。</a:t>
+            </a:r>
+            <a:endParaRPr b="0" lang="en-US" sz="1500" spc="-1" strike="noStrike">
+              <a:solidFill>
+                <a:srgbClr val="000000"/>
+              </a:solidFill>
+              <a:latin typeface="Arial"/>
+            </a:endParaRPr>
+          </a:p>
+        </p:txBody>
+      </p:sp>
+      <p:sp>
+        <p:nvSpPr>
+          <p:cNvPr id="54" name="Shape 7"/>
+          <p:cNvSpPr/>
+          <p:nvPr/>
+        </p:nvSpPr>
+        <p:spPr>
+          <a:xfrm>
+            <a:off x="868680" y="2340720"/>
+            <a:ext cx="420120" cy="420120"/>
+          </a:xfrm>
+          <a:prstGeom prst="ellipse">
+            <a:avLst/>
+          </a:prstGeom>
+          <a:solidFill>
+            <a:srgbClr val="5b4fe8"/>
+          </a:solidFill>
+          <a:ln w="0">
+            <a:noFill/>
+          </a:ln>
+        </p:spPr>
+        <p:style>
+          <a:lnRef idx="0"/>
+          <a:fillRef idx="0"/>
+          <a:effectRef idx="0"/>
+          <a:fontRef idx="minor"/>
+        </p:style>
+        <p:txBody>
+          <a:bodyPr lIns="90000" rIns="90000" tIns="45000" bIns="45000" anchor="t">
+            <a:noAutofit/>
+          </a:bodyPr>
+          <a:p>
+            <a:endParaRPr b="0" lang="en-US" sz="1800" spc="-1" strike="noStrike">
+              <a:solidFill>
+                <a:srgbClr val="ffffff"/>
+              </a:solidFill>
+              <a:latin typeface="Arial"/>
+            </a:endParaRPr>
+          </a:p>
+        </p:txBody>
+      </p:sp>
+      <p:sp>
+        <p:nvSpPr>
+          <p:cNvPr id="55" name="Text 8"/>
+          <p:cNvSpPr/>
+          <p:nvPr/>
+        </p:nvSpPr>
+        <p:spPr>
+          <a:xfrm>
+            <a:off x="868680" y="2340720"/>
+            <a:ext cx="420120" cy="420120"/>
+          </a:xfrm>
+          <a:prstGeom prst="rect">
+            <a:avLst/>
+          </a:prstGeom>
+          <a:noFill/>
+          <a:ln w="0">
+            <a:noFill/>
+          </a:ln>
+        </p:spPr>
+        <p:style>
+          <a:lnRef idx="0"/>
+          <a:fillRef idx="0"/>
+          <a:effectRef idx="0"/>
+          <a:fontRef idx="minor"/>
+        </p:style>
+        <p:txBody>
+          <a:bodyPr lIns="0" rIns="0" tIns="0" bIns="0" anchor="ctr">
+            <a:noAutofit/>
+          </a:bodyPr>
+          <a:p>
+            <a:pPr algn="ctr" defTabSz="914400">
+              <a:lnSpc>
+                <a:spcPct val="100000"/>
+              </a:lnSpc>
+              <a:tabLst>
+                <a:tab algn="l" pos="0"/>
+              </a:tabLst>
+            </a:pPr>
+            <a:r>
+              <a:rPr b="1" lang="en-US" sz="1700" spc="-1" strike="noStrike">
+                <a:solidFill>
+                  <a:srgbClr val="ffffff"/>
+                </a:solidFill>
+                <a:latin typeface="Microsoft JhengHei"/>
+                <a:ea typeface="Microsoft JhengHei"/>
+              </a:rPr>
+              <a:t>2</a:t>
+            </a:r>
+            <a:endParaRPr b="0" lang="en-US" sz="1700" spc="-1" strike="noStrike">
+              <a:solidFill>
+                <a:srgbClr val="000000"/>
+              </a:solidFill>
+              <a:latin typeface="Arial"/>
+            </a:endParaRPr>
+          </a:p>
+        </p:txBody>
+      </p:sp>
+      <p:sp>
+        <p:nvSpPr>
+          <p:cNvPr id="56" name="Text 9"/>
+          <p:cNvSpPr/>
+          <p:nvPr/>
+        </p:nvSpPr>
+        <p:spPr>
+          <a:xfrm>
+            <a:off x="1490400" y="2286000"/>
+            <a:ext cx="9920880" cy="548280"/>
+          </a:xfrm>
+          <a:prstGeom prst="rect">
+            <a:avLst/>
+          </a:prstGeom>
+          <a:noFill/>
+          <a:ln w="0">
+            <a:noFill/>
+          </a:ln>
+        </p:spPr>
+        <p:style>
+          <a:lnRef idx="0"/>
+          <a:fillRef idx="0"/>
+          <a:effectRef idx="0"/>
+          <a:fontRef idx="minor"/>
+        </p:style>
+        <p:txBody>
+          <a:bodyPr lIns="0" rIns="0" tIns="0" bIns="0" anchor="ctr">
+            <a:noAutofit/>
+          </a:bodyPr>
+          <a:p>
+            <a:pPr defTabSz="914400">
+              <a:lnSpc>
+                <a:spcPct val="100000"/>
+              </a:lnSpc>
+              <a:tabLst>
+                <a:tab algn="l" pos="0"/>
+              </a:tabLst>
+            </a:pPr>
+            <a:r>
+              <a:rPr b="0" lang="zh-CN" sz="1500" spc="-1" strike="noStrike">
+                <a:solidFill>
+                  <a:srgbClr val="1e1f35"/>
+                </a:solidFill>
+                <a:latin typeface="Microsoft JhengHei"/>
+                <a:ea typeface="Microsoft JhengHei"/>
+              </a:rPr>
+              <a:t>在視窗頂端的模型選單挑選要用的模型。</a:t>
+            </a:r>
+            <a:endParaRPr b="0" lang="en-US" sz="1500" spc="-1" strike="noStrike">
+              <a:solidFill>
+                <a:srgbClr val="000000"/>
+              </a:solidFill>
+              <a:latin typeface="Arial"/>
+            </a:endParaRPr>
+          </a:p>
+        </p:txBody>
+      </p:sp>
+      <p:sp>
+        <p:nvSpPr>
+          <p:cNvPr id="57" name="Shape 10"/>
+          <p:cNvSpPr/>
+          <p:nvPr/>
+        </p:nvSpPr>
+        <p:spPr>
+          <a:xfrm>
+            <a:off x="868680" y="2907720"/>
+            <a:ext cx="420120" cy="420120"/>
+          </a:xfrm>
+          <a:prstGeom prst="ellipse">
+            <a:avLst/>
+          </a:prstGeom>
+          <a:solidFill>
+            <a:srgbClr val="5b4fe8"/>
+          </a:solidFill>
+          <a:ln w="0">
+            <a:noFill/>
+          </a:ln>
+        </p:spPr>
+        <p:style>
+          <a:lnRef idx="0"/>
+          <a:fillRef idx="0"/>
+          <a:effectRef idx="0"/>
+          <a:fontRef idx="minor"/>
+        </p:style>
+        <p:txBody>
+          <a:bodyPr lIns="90000" rIns="90000" tIns="45000" bIns="45000" anchor="t">
+            <a:noAutofit/>
+          </a:bodyPr>
+          <a:p>
+            <a:endParaRPr b="0" lang="en-US" sz="1800" spc="-1" strike="noStrike">
+              <a:solidFill>
+                <a:srgbClr val="ffffff"/>
+              </a:solidFill>
+              <a:latin typeface="Arial"/>
+            </a:endParaRPr>
+          </a:p>
+        </p:txBody>
+      </p:sp>
+      <p:sp>
+        <p:nvSpPr>
+          <p:cNvPr id="58" name="Text 11"/>
+          <p:cNvSpPr/>
+          <p:nvPr/>
+        </p:nvSpPr>
+        <p:spPr>
+          <a:xfrm>
+            <a:off x="868680" y="2907720"/>
+            <a:ext cx="420120" cy="420120"/>
+          </a:xfrm>
+          <a:prstGeom prst="rect">
+            <a:avLst/>
+          </a:prstGeom>
+          <a:noFill/>
+          <a:ln w="0">
+            <a:noFill/>
+          </a:ln>
+        </p:spPr>
+        <p:style>
+          <a:lnRef idx="0"/>
+          <a:fillRef idx="0"/>
+          <a:effectRef idx="0"/>
+          <a:fontRef idx="minor"/>
+        </p:style>
+        <p:txBody>
+          <a:bodyPr lIns="0" rIns="0" tIns="0" bIns="0" anchor="ctr">
+            <a:noAutofit/>
+          </a:bodyPr>
+          <a:p>
+            <a:pPr algn="ctr" defTabSz="914400">
+              <a:lnSpc>
+                <a:spcPct val="100000"/>
+              </a:lnSpc>
+              <a:tabLst>
+                <a:tab algn="l" pos="0"/>
+              </a:tabLst>
+            </a:pPr>
+            <a:r>
+              <a:rPr b="1" lang="en-US" sz="1700" spc="-1" strike="noStrike">
+                <a:solidFill>
+                  <a:srgbClr val="ffffff"/>
+                </a:solidFill>
+                <a:latin typeface="Microsoft JhengHei"/>
+                <a:ea typeface="Microsoft JhengHei"/>
+              </a:rPr>
+              <a:t>3</a:t>
+            </a:r>
+            <a:endParaRPr b="0" lang="en-US" sz="1700" spc="-1" strike="noStrike">
+              <a:solidFill>
+                <a:srgbClr val="000000"/>
+              </a:solidFill>
+              <a:latin typeface="Arial"/>
+            </a:endParaRPr>
+          </a:p>
+        </p:txBody>
+      </p:sp>
+      <p:sp>
+        <p:nvSpPr>
+          <p:cNvPr id="59" name="Text 12"/>
+          <p:cNvSpPr/>
+          <p:nvPr/>
+        </p:nvSpPr>
+        <p:spPr>
+          <a:xfrm>
+            <a:off x="1490400" y="2853000"/>
+            <a:ext cx="9920880" cy="548280"/>
+          </a:xfrm>
+          <a:prstGeom prst="rect">
+            <a:avLst/>
+          </a:prstGeom>
+          <a:noFill/>
+          <a:ln w="0">
+            <a:noFill/>
+          </a:ln>
+        </p:spPr>
+        <p:style>
+          <a:lnRef idx="0"/>
+          <a:fillRef idx="0"/>
+          <a:effectRef idx="0"/>
+          <a:fontRef idx="minor"/>
+        </p:style>
+        <p:txBody>
+          <a:bodyPr lIns="0" rIns="0" tIns="0" bIns="0" anchor="ctr">
+            <a:noAutofit/>
+          </a:bodyPr>
+          <a:p>
+            <a:pPr defTabSz="914400">
+              <a:lnSpc>
+                <a:spcPct val="100000"/>
+              </a:lnSpc>
+              <a:tabLst>
+                <a:tab algn="l" pos="0"/>
+              </a:tabLst>
+            </a:pPr>
+            <a:r>
+              <a:rPr b="0" lang="zh-CN" sz="1500" spc="-1" strike="noStrike">
+                <a:solidFill>
+                  <a:srgbClr val="1e1f35"/>
+                </a:solidFill>
+                <a:latin typeface="Microsoft JhengHei"/>
+                <a:ea typeface="Microsoft JhengHei"/>
+              </a:rPr>
+              <a:t>選好即刻生效，並會記住到下次開啟。</a:t>
+            </a:r>
+            <a:endParaRPr b="0" lang="en-US" sz="1500" spc="-1" strike="noStrike">
+              <a:solidFill>
+                <a:srgbClr val="000000"/>
+              </a:solidFill>
+              <a:latin typeface="Arial"/>
+            </a:endParaRPr>
+          </a:p>
+        </p:txBody>
+      </p:sp>
+      <p:sp>
+        <p:nvSpPr>
+          <p:cNvPr id="60" name="Shape 13"/>
+          <p:cNvSpPr/>
+          <p:nvPr/>
+        </p:nvSpPr>
+        <p:spPr>
+          <a:xfrm>
+            <a:off x="868680" y="3630240"/>
+            <a:ext cx="5120280" cy="1782720"/>
           </a:xfrm>
           <a:prstGeom prst="rect">
             <a:avLst/>
@@ -10000,14 +10513,14 @@
       </p:sp>
       <p:sp>
         <p:nvSpPr>
-          <p:cNvPr id="52" name="Shape 5"/>
-          <p:cNvSpPr/>
-          <p:nvPr/>
-        </p:nvSpPr>
-        <p:spPr>
-          <a:xfrm>
-            <a:off x="868680" y="1847160"/>
-            <a:ext cx="68400" cy="2239920"/>
+          <p:cNvPr id="61" name="Shape 14"/>
+          <p:cNvSpPr/>
+          <p:nvPr/>
+        </p:nvSpPr>
+        <p:spPr>
+          <a:xfrm>
+            <a:off x="868680" y="3630240"/>
+            <a:ext cx="68400" cy="1782720"/>
           </a:xfrm>
           <a:prstGeom prst="rect">
             <a:avLst/>
@@ -10041,14 +10554,14 @@
       </p:sp>
       <p:sp>
         <p:nvSpPr>
-          <p:cNvPr id="53" name="Text 6"/>
-          <p:cNvSpPr/>
-          <p:nvPr/>
-        </p:nvSpPr>
-        <p:spPr>
-          <a:xfrm>
-            <a:off x="1124640" y="1993320"/>
-            <a:ext cx="10149480" cy="365400"/>
+          <p:cNvPr id="62" name="Text 15"/>
+          <p:cNvSpPr/>
+          <p:nvPr/>
+        </p:nvSpPr>
+        <p:spPr>
+          <a:xfrm>
+            <a:off x="1124640" y="3776400"/>
+            <a:ext cx="4663080" cy="365400"/>
           </a:xfrm>
           <a:prstGeom prst="rect">
             <a:avLst/>
@@ -10078,6 +10591,16 @@
               </a:tabLst>
             </a:pPr>
             <a:r>
+              <a:rPr b="1" lang="en-US" sz="1800" spc="-1" strike="noStrike">
+                <a:solidFill>
+                  <a:srgbClr val="5b4fe8"/>
+                </a:solidFill>
+                <a:latin typeface="Microsoft JhengHei"/>
+                <a:ea typeface="Microsoft JhengHei"/>
+              </a:rPr>
+              <a:t>Qwen</a:t>
+            </a:r>
+            <a:r>
               <a:rPr b="1" lang="zh-CN" sz="1800" spc="-1" strike="noStrike">
                 <a:solidFill>
                   <a:srgbClr val="5b4fe8"/>
@@ -10085,7 +10608,7 @@
                 <a:latin typeface="Microsoft JhengHei"/>
                 <a:ea typeface="Microsoft JhengHei"/>
               </a:rPr>
-              <a:t>使用者不必做的事</a:t>
+              <a:t>（預設）</a:t>
             </a:r>
             <a:endParaRPr b="0" lang="en-US" sz="1800" spc="-1" strike="noStrike">
               <a:solidFill>
@@ -10098,14 +10621,14 @@
       </p:sp>
       <p:sp>
         <p:nvSpPr>
-          <p:cNvPr id="54" name="Text 7"/>
-          <p:cNvSpPr/>
-          <p:nvPr/>
-        </p:nvSpPr>
-        <p:spPr>
-          <a:xfrm>
-            <a:off x="1124640" y="2414160"/>
-            <a:ext cx="10149480" cy="1526760"/>
+          <p:cNvPr id="63" name="Text 16"/>
+          <p:cNvSpPr/>
+          <p:nvPr/>
+        </p:nvSpPr>
+        <p:spPr>
+          <a:xfrm>
+            <a:off x="1124640" y="4197240"/>
+            <a:ext cx="4663080" cy="1069560"/>
           </a:xfrm>
           <a:prstGeom prst="rect">
             <a:avLst/>
@@ -10137,36 +10660,16 @@
               <a:buChar char=""/>
             </a:pPr>
             <a:r>
-              <a:rPr b="0" lang="zh-CN" sz="1550" spc="-1" strike="noStrike">
+              <a:rPr b="0" lang="en-US" sz="1400" spc="-1" strike="noStrike">
                 <a:solidFill>
                   <a:srgbClr val="1e1f35"/>
                 </a:solidFill>
                 <a:latin typeface="Microsoft JhengHei"/>
                 <a:ea typeface="Microsoft JhengHei"/>
               </a:rPr>
-              <a:t>不需要外網帳號、</a:t>
-            </a:r>
-            <a:r>
-              <a:rPr b="0" lang="en-US" sz="1550" spc="-1" strike="noStrike">
-                <a:solidFill>
-                  <a:srgbClr val="1e1f35"/>
-                </a:solidFill>
-                <a:latin typeface="Microsoft JhengHei"/>
-                <a:ea typeface="Microsoft JhengHei"/>
-              </a:rPr>
-              <a:t>API Key</a:t>
-            </a:r>
-            <a:r>
-              <a:rPr b="0" lang="zh-CN" sz="1550" spc="-1" strike="noStrike">
-                <a:solidFill>
-                  <a:srgbClr val="1e1f35"/>
-                </a:solidFill>
-                <a:latin typeface="Microsoft JhengHei"/>
-                <a:ea typeface="Microsoft JhengHei"/>
-              </a:rPr>
-              <a:t>，也不需要自行挑選模型</a:t>
-            </a:r>
-            <a:endParaRPr b="0" lang="en-US" sz="1550" spc="-1" strike="noStrike">
+              <a:t>Qwen/Qwen3.6-35B-A3B-FP8-nothink</a:t>
+            </a:r>
+            <a:endParaRPr b="0" lang="en-US" sz="1400" spc="-1" strike="noStrike">
               <a:solidFill>
                 <a:srgbClr val="000000"/>
               </a:solidFill>
@@ -10185,16 +10688,16 @@
               <a:buChar char=""/>
             </a:pPr>
             <a:r>
-              <a:rPr b="0" lang="zh-CN" sz="1550" spc="-1" strike="noStrike">
+              <a:rPr b="0" lang="zh-CN" sz="1400" spc="-1" strike="noStrike">
                 <a:solidFill>
                   <a:srgbClr val="1e1f35"/>
                 </a:solidFill>
                 <a:latin typeface="Microsoft JhengHei"/>
                 <a:ea typeface="Microsoft JhengHei"/>
               </a:rPr>
-              <a:t>聊天、文件問答與翻譯都使用公司統一的預設模型</a:t>
-            </a:r>
-            <a:endParaRPr b="0" lang="en-US" sz="1550" spc="-1" strike="noStrike">
+              <a:t>要簡報大綱時直接產出分頁內容</a:t>
+            </a:r>
+            <a:endParaRPr b="0" lang="en-US" sz="1400" spc="-1" strike="noStrike">
               <a:solidFill>
                 <a:srgbClr val="000000"/>
               </a:solidFill>
@@ -10213,34 +10716,54 @@
               <a:buChar char=""/>
             </a:pPr>
             <a:r>
-              <a:rPr b="0" lang="zh-CN" sz="1550" spc="-1" strike="noStrike">
+              <a:rPr b="0" lang="zh-CN" sz="1400" spc="-1" strike="noStrike">
                 <a:solidFill>
                   <a:srgbClr val="1e1f35"/>
                 </a:solidFill>
                 <a:latin typeface="Microsoft JhengHei"/>
                 <a:ea typeface="Microsoft JhengHei"/>
               </a:rPr>
-              <a:t>模型以直接、快速產出回答為主</a:t>
-            </a:r>
-            <a:endParaRPr b="0" lang="en-US" sz="1550" spc="-1" strike="noStrike">
-              <a:solidFill>
-                <a:srgbClr val="000000"/>
-              </a:solidFill>
-              <a:latin typeface="Arial"/>
-            </a:endParaRPr>
-          </a:p>
-        </p:txBody>
-      </p:sp>
-      <p:sp>
-        <p:nvSpPr>
-          <p:cNvPr id="55" name="Shape 8"/>
-          <p:cNvSpPr/>
-          <p:nvPr/>
-        </p:nvSpPr>
-        <p:spPr>
-          <a:xfrm>
-            <a:off x="868680" y="4270320"/>
-            <a:ext cx="10606680" cy="1874160"/>
+              <a:t>隨即出現 </a:t>
+            </a:r>
+            <a:r>
+              <a:rPr b="0" lang="en-US" sz="1400" spc="-1" strike="noStrike">
+                <a:solidFill>
+                  <a:srgbClr val="1e1f35"/>
+                </a:solidFill>
+                <a:latin typeface="Microsoft JhengHei"/>
+                <a:ea typeface="Microsoft JhengHei"/>
+              </a:rPr>
+              <a:t>PPT </a:t>
+            </a:r>
+            <a:r>
+              <a:rPr b="0" lang="zh-CN" sz="1400" spc="-1" strike="noStrike">
+                <a:solidFill>
+                  <a:srgbClr val="1e1f35"/>
+                </a:solidFill>
+                <a:latin typeface="Microsoft JhengHei"/>
+                <a:ea typeface="Microsoft JhengHei"/>
+              </a:rPr>
+              <a:t>按鈕可一鍵轉檔</a:t>
+            </a:r>
+            <a:endParaRPr b="0" lang="en-US" sz="1400" spc="-1" strike="noStrike">
+              <a:solidFill>
+                <a:srgbClr val="000000"/>
+              </a:solidFill>
+              <a:latin typeface="Arial"/>
+            </a:endParaRPr>
+          </a:p>
+        </p:txBody>
+      </p:sp>
+      <p:sp>
+        <p:nvSpPr>
+          <p:cNvPr id="64" name="Shape 17"/>
+          <p:cNvSpPr/>
+          <p:nvPr/>
+        </p:nvSpPr>
+        <p:spPr>
+          <a:xfrm>
+            <a:off x="6263640" y="3630240"/>
+            <a:ext cx="5120280" cy="1782720"/>
           </a:xfrm>
           <a:prstGeom prst="rect">
             <a:avLst/>
@@ -10277,14 +10800,14 @@
       </p:sp>
       <p:sp>
         <p:nvSpPr>
-          <p:cNvPr id="56" name="Shape 9"/>
-          <p:cNvSpPr/>
-          <p:nvPr/>
-        </p:nvSpPr>
-        <p:spPr>
-          <a:xfrm>
-            <a:off x="868680" y="4270320"/>
-            <a:ext cx="68400" cy="1874160"/>
+          <p:cNvPr id="65" name="Shape 18"/>
+          <p:cNvSpPr/>
+          <p:nvPr/>
+        </p:nvSpPr>
+        <p:spPr>
+          <a:xfrm>
+            <a:off x="6263640" y="3630240"/>
+            <a:ext cx="68400" cy="1782720"/>
           </a:xfrm>
           <a:prstGeom prst="rect">
             <a:avLst/>
@@ -10318,14 +10841,14 @@
       </p:sp>
       <p:sp>
         <p:nvSpPr>
-          <p:cNvPr id="57" name="Text 10"/>
-          <p:cNvSpPr/>
-          <p:nvPr/>
-        </p:nvSpPr>
-        <p:spPr>
-          <a:xfrm>
-            <a:off x="1124640" y="4416480"/>
-            <a:ext cx="10149480" cy="365400"/>
+          <p:cNvPr id="66" name="Text 19"/>
+          <p:cNvSpPr/>
+          <p:nvPr/>
+        </p:nvSpPr>
+        <p:spPr>
+          <a:xfrm>
+            <a:off x="6519600" y="3776400"/>
+            <a:ext cx="4663080" cy="365400"/>
           </a:xfrm>
           <a:prstGeom prst="rect">
             <a:avLst/>
@@ -10355,14 +10878,14 @@
               </a:tabLst>
             </a:pPr>
             <a:r>
-              <a:rPr b="1" lang="zh-CN" sz="1800" spc="-1" strike="noStrike">
+              <a:rPr b="1" lang="en-US" sz="1800" spc="-1" strike="noStrike">
                 <a:solidFill>
                   <a:srgbClr val="5b4fe8"/>
                 </a:solidFill>
                 <a:latin typeface="Microsoft JhengHei"/>
                 <a:ea typeface="Microsoft JhengHei"/>
               </a:rPr>
-              <a:t>哪些功能不呼叫模型</a:t>
+              <a:t>gemma-4-31B-it</a:t>
             </a:r>
             <a:endParaRPr b="0" lang="en-US" sz="1800" spc="-1" strike="noStrike">
               <a:solidFill>
@@ -10375,14 +10898,14 @@
       </p:sp>
       <p:sp>
         <p:nvSpPr>
-          <p:cNvPr id="58" name="Text 11"/>
-          <p:cNvSpPr/>
-          <p:nvPr/>
-        </p:nvSpPr>
-        <p:spPr>
-          <a:xfrm>
-            <a:off x="1124640" y="4837320"/>
-            <a:ext cx="10149480" cy="1161000"/>
+          <p:cNvPr id="67" name="Text 20"/>
+          <p:cNvSpPr/>
+          <p:nvPr/>
+        </p:nvSpPr>
+        <p:spPr>
+          <a:xfrm>
+            <a:off x="6519600" y="4197240"/>
+            <a:ext cx="4663080" cy="1069560"/>
           </a:xfrm>
           <a:prstGeom prst="rect">
             <a:avLst/>
@@ -10414,93 +10937,149 @@
               <a:buChar char=""/>
             </a:pPr>
             <a:r>
-              <a:rPr b="0" lang="en-US" sz="1550" spc="-1" strike="noStrike">
+              <a:rPr b="0" lang="zh-CN" sz="1400" spc="-1" strike="noStrike">
                 <a:solidFill>
                   <a:srgbClr val="1e1f35"/>
                 </a:solidFill>
                 <a:latin typeface="Microsoft JhengHei"/>
                 <a:ea typeface="Microsoft JhengHei"/>
               </a:rPr>
-              <a:t>Claude</a:t>
-            </a:r>
-            <a:r>
-              <a:rPr b="0" lang="zh-CN" sz="1550" spc="-1" strike="noStrike">
+              <a:t>傾向先回覆規劃方法與建議工具</a:t>
+            </a:r>
+            <a:endParaRPr b="0" lang="en-US" sz="1400" spc="-1" strike="noStrike">
+              <a:solidFill>
+                <a:srgbClr val="000000"/>
+              </a:solidFill>
+              <a:latin typeface="Arial"/>
+            </a:endParaRPr>
+          </a:p>
+          <a:p>
+            <a:pPr marL="343080" indent="-343080" defTabSz="914400">
+              <a:lnSpc>
+                <a:spcPct val="122000"/>
+              </a:lnSpc>
+              <a:buClr>
+                <a:srgbClr val="1e1f35"/>
+              </a:buClr>
+              <a:buFont typeface="Symbol" charset="2"/>
+              <a:buChar char=""/>
+            </a:pPr>
+            <a:r>
+              <a:rPr b="0" lang="zh-CN" sz="1400" spc="-1" strike="noStrike">
                 <a:solidFill>
                   <a:srgbClr val="1e1f35"/>
                 </a:solidFill>
                 <a:latin typeface="Microsoft JhengHei"/>
                 <a:ea typeface="Microsoft JhengHei"/>
               </a:rPr>
-              <a:t>／</a:t>
-            </a:r>
-            <a:r>
-              <a:rPr b="0" lang="en-US" sz="1550" spc="-1" strike="noStrike">
+              <a:t>（故事線、</a:t>
+            </a:r>
+            <a:r>
+              <a:rPr b="0" lang="en-US" sz="1400" spc="-1" strike="noStrike">
                 <a:solidFill>
                   <a:srgbClr val="1e1f35"/>
                 </a:solidFill>
                 <a:latin typeface="Microsoft JhengHei"/>
                 <a:ea typeface="Microsoft JhengHei"/>
               </a:rPr>
-              <a:t>Codex </a:t>
-            </a:r>
-            <a:r>
-              <a:rPr b="0" lang="zh-CN" sz="1550" spc="-1" strike="noStrike">
+              <a:t>Mermaid</a:t>
+            </a:r>
+            <a:r>
+              <a:rPr b="0" lang="zh-CN" sz="1400" spc="-1" strike="noStrike">
                 <a:solidFill>
                   <a:srgbClr val="1e1f35"/>
                 </a:solidFill>
                 <a:latin typeface="Microsoft JhengHei"/>
                 <a:ea typeface="Microsoft JhengHei"/>
               </a:rPr>
-              <a:t>用量僅是可選顯示，聊天不會呼叫 </a:t>
-            </a:r>
-            <a:r>
-              <a:rPr b="0" lang="en-US" sz="1550" spc="-1" strike="noStrike">
+              <a:t>、</a:t>
+            </a:r>
+            <a:r>
+              <a:rPr b="0" lang="en-US" sz="1400" spc="-1" strike="noStrike">
                 <a:solidFill>
                   <a:srgbClr val="1e1f35"/>
                 </a:solidFill>
                 <a:latin typeface="Microsoft JhengHei"/>
                 <a:ea typeface="Microsoft JhengHei"/>
               </a:rPr>
-              <a:t>Claude </a:t>
-            </a:r>
-            <a:r>
-              <a:rPr b="0" lang="zh-CN" sz="1550" spc="-1" strike="noStrike">
+              <a:t>VBA </a:t>
+            </a:r>
+            <a:r>
+              <a:rPr b="0" lang="zh-CN" sz="1400" spc="-1" strike="noStrike">
                 <a:solidFill>
                   <a:srgbClr val="1e1f35"/>
                 </a:solidFill>
                 <a:latin typeface="Microsoft JhengHei"/>
                 <a:ea typeface="Microsoft JhengHei"/>
               </a:rPr>
-              <a:t>或 </a:t>
-            </a:r>
-            <a:r>
-              <a:rPr b="0" lang="en-US" sz="1550" spc="-1" strike="noStrike">
+              <a:t>腳本）</a:t>
+            </a:r>
+            <a:endParaRPr b="0" lang="en-US" sz="1400" spc="-1" strike="noStrike">
+              <a:solidFill>
+                <a:srgbClr val="000000"/>
+              </a:solidFill>
+              <a:latin typeface="Arial"/>
+            </a:endParaRPr>
+          </a:p>
+          <a:p>
+            <a:pPr marL="343080" indent="-343080" defTabSz="914400">
+              <a:lnSpc>
+                <a:spcPct val="122000"/>
+              </a:lnSpc>
+              <a:buClr>
+                <a:srgbClr val="1e1f35"/>
+              </a:buClr>
+              <a:buFont typeface="Symbol" charset="2"/>
+              <a:buChar char=""/>
+            </a:pPr>
+            <a:r>
+              <a:rPr b="0" lang="zh-CN" sz="1400" spc="-1" strike="noStrike">
                 <a:solidFill>
                   <a:srgbClr val="1e1f35"/>
                 </a:solidFill>
                 <a:latin typeface="Microsoft JhengHei"/>
                 <a:ea typeface="Microsoft JhengHei"/>
               </a:rPr>
-              <a:t>Codex</a:t>
-            </a:r>
-            <a:endParaRPr b="0" lang="en-US" sz="1550" spc="-1" strike="noStrike">
-              <a:solidFill>
-                <a:srgbClr val="000000"/>
-              </a:solidFill>
-              <a:latin typeface="Arial"/>
-            </a:endParaRPr>
-          </a:p>
-        </p:txBody>
-      </p:sp>
-      <p:sp>
-        <p:nvSpPr>
-          <p:cNvPr id="59" name="Shape 12"/>
-          <p:cNvSpPr/>
-          <p:nvPr/>
-        </p:nvSpPr>
-        <p:spPr>
-          <a:xfrm>
-            <a:off x="868680" y="6172200"/>
+              <a:t>不直接產出分頁，不會出現 </a:t>
+            </a:r>
+            <a:r>
+              <a:rPr b="0" lang="en-US" sz="1400" spc="-1" strike="noStrike">
+                <a:solidFill>
+                  <a:srgbClr val="1e1f35"/>
+                </a:solidFill>
+                <a:latin typeface="Microsoft JhengHei"/>
+                <a:ea typeface="Microsoft JhengHei"/>
+              </a:rPr>
+              <a:t>PPT </a:t>
+            </a:r>
+            <a:r>
+              <a:rPr b="0" lang="zh-CN" sz="1400" spc="-1" strike="noStrike">
+                <a:solidFill>
+                  <a:srgbClr val="1e1f35"/>
+                </a:solidFill>
+                <a:latin typeface="Microsoft JhengHei"/>
+                <a:ea typeface="Microsoft JhengHei"/>
+              </a:rPr>
+              <a:t>按鈕</a:t>
+            </a:r>
+            <a:endParaRPr b="0" lang="en-US" sz="1400" spc="-1" strike="noStrike">
+              <a:solidFill>
+                <a:srgbClr val="000000"/>
+              </a:solidFill>
+              <a:latin typeface="Arial"/>
+            </a:endParaRPr>
+          </a:p>
+        </p:txBody>
+      </p:sp>
+      <p:sp>
+        <p:nvSpPr>
+          <p:cNvPr id="68" name="Shape 21"/>
+          <p:cNvSpPr/>
+          <p:nvPr/>
+        </p:nvSpPr>
+        <p:spPr>
+          <a:xfrm>
+            <a:off x="868680" y="5532120"/>
             <a:ext cx="10634040" cy="502560"/>
           </a:xfrm>
           <a:prstGeom prst="rect">
@@ -10535,13 +11114,13 @@
       </p:sp>
       <p:sp>
         <p:nvSpPr>
-          <p:cNvPr id="60" name="Text 13"/>
-          <p:cNvSpPr/>
-          <p:nvPr/>
-        </p:nvSpPr>
-        <p:spPr>
-          <a:xfrm>
-            <a:off x="1051560" y="6172200"/>
+          <p:cNvPr id="69" name="Text 22"/>
+          <p:cNvSpPr/>
+          <p:nvPr/>
+        </p:nvSpPr>
+        <p:spPr>
+          <a:xfrm>
+            <a:off x="1051560" y="5532120"/>
             <a:ext cx="10268280" cy="502560"/>
           </a:xfrm>
           <a:prstGeom prst="rect">
@@ -10579,7 +11158,7 @@
                 <a:latin typeface="Microsoft JhengHei"/>
                 <a:ea typeface="Microsoft JhengHei"/>
               </a:rPr>
-              <a:t>本簡報不列出內網網址、模型名稱、</a:t>
+              <a:t>連線端點自動跟著模型切換；只能在公司核准清單內選擇，不需外網帳號或 </a:t>
             </a:r>
             <a:r>
               <a:rPr b="0" lang="en-US" sz="1350" spc="-1" strike="noStrike">
@@ -10589,7 +11168,7 @@
                 <a:latin typeface="Microsoft JhengHei"/>
                 <a:ea typeface="Microsoft JhengHei"/>
               </a:rPr>
-              <a:t>API Key </a:t>
+              <a:t>API Key</a:t>
             </a:r>
             <a:r>
               <a:rPr b="0" lang="zh-CN" sz="1350" spc="-1" strike="noStrike">
@@ -10599,7 +11178,145 @@
                 <a:latin typeface="Microsoft JhengHei"/>
                 <a:ea typeface="Microsoft JhengHei"/>
               </a:rPr>
-              <a:t>或其他連線憑證。</a:t>
+              <a:t>。</a:t>
+            </a:r>
+            <a:endParaRPr b="0" lang="en-US" sz="1350" spc="-1" strike="noStrike">
+              <a:solidFill>
+                <a:srgbClr val="000000"/>
+              </a:solidFill>
+              <a:latin typeface="Arial"/>
+            </a:endParaRPr>
+          </a:p>
+        </p:txBody>
+      </p:sp>
+      <p:sp>
+        <p:nvSpPr>
+          <p:cNvPr id="70" name="Shape 23"/>
+          <p:cNvSpPr/>
+          <p:nvPr/>
+        </p:nvSpPr>
+        <p:spPr>
+          <a:xfrm>
+            <a:off x="868680" y="6126480"/>
+            <a:ext cx="10634040" cy="502560"/>
+          </a:xfrm>
+          <a:prstGeom prst="rect">
+            <a:avLst/>
+          </a:prstGeom>
+          <a:solidFill>
+            <a:srgbClr val="eef0fa"/>
+          </a:solidFill>
+          <a:ln w="0">
+            <a:noFill/>
+          </a:ln>
+        </p:spPr>
+        <p:style>
+          <a:lnRef idx="0"/>
+          <a:fillRef idx="0"/>
+          <a:effectRef idx="0"/>
+          <a:fontRef idx="minor"/>
+        </p:style>
+        <p:txBody>
+          <a:bodyPr lIns="90000" rIns="90000" tIns="45000" bIns="45000" anchor="t">
+            <a:noAutofit/>
+          </a:bodyPr>
+          <a:p>
+            <a:endParaRPr b="0" lang="en-US" sz="1800" spc="-1" strike="noStrike">
+              <a:solidFill>
+                <a:srgbClr val="000000"/>
+              </a:solidFill>
+              <a:latin typeface="Arial"/>
+            </a:endParaRPr>
+          </a:p>
+        </p:txBody>
+      </p:sp>
+      <p:sp>
+        <p:nvSpPr>
+          <p:cNvPr id="71" name="Text 24"/>
+          <p:cNvSpPr/>
+          <p:nvPr/>
+        </p:nvSpPr>
+        <p:spPr>
+          <a:xfrm>
+            <a:off x="1051560" y="6126480"/>
+            <a:ext cx="10268280" cy="502560"/>
+          </a:xfrm>
+          <a:prstGeom prst="rect">
+            <a:avLst/>
+          </a:prstGeom>
+          <a:noFill/>
+          <a:ln w="0">
+            <a:noFill/>
+          </a:ln>
+        </p:spPr>
+        <p:style>
+          <a:lnRef idx="0"/>
+          <a:fillRef idx="0"/>
+          <a:effectRef idx="0"/>
+          <a:fontRef idx="minor"/>
+        </p:style>
+        <p:txBody>
+          <a:bodyPr lIns="0" rIns="0" tIns="0" bIns="0" anchor="ctr">
+            <a:noAutofit/>
+          </a:bodyPr>
+          <a:p>
+            <a:pPr defTabSz="914400">
+              <a:lnSpc>
+                <a:spcPct val="100000"/>
+              </a:lnSpc>
+              <a:tabLst>
+                <a:tab algn="l" pos="0"/>
+              </a:tabLst>
+            </a:pPr>
+            <a:r>
+              <a:rPr b="0" lang="zh-CN" sz="1350" spc="-1" strike="noStrike">
+                <a:solidFill>
+                  <a:srgbClr val="6b6e85"/>
+                </a:solidFill>
+                <a:latin typeface="Microsoft JhengHei"/>
+                <a:ea typeface="Microsoft JhengHei"/>
+              </a:rPr>
+              <a:t>要一鍵轉出簡報請使用 </a:t>
+            </a:r>
+            <a:r>
+              <a:rPr b="0" lang="en-US" sz="1350" spc="-1" strike="noStrike">
+                <a:solidFill>
+                  <a:srgbClr val="6b6e85"/>
+                </a:solidFill>
+                <a:latin typeface="Microsoft JhengHei"/>
+                <a:ea typeface="Microsoft JhengHei"/>
+              </a:rPr>
+              <a:t>Qwen</a:t>
+            </a:r>
+            <a:r>
+              <a:rPr b="0" lang="zh-CN" sz="1350" spc="-1" strike="noStrike">
+                <a:solidFill>
+                  <a:srgbClr val="6b6e85"/>
+                </a:solidFill>
+                <a:latin typeface="Microsoft JhengHei"/>
+                <a:ea typeface="Microsoft JhengHei"/>
+              </a:rPr>
+              <a:t>（</a:t>
+            </a:r>
+            <a:r>
+              <a:rPr b="0" lang="en-US" sz="1350" spc="-1" strike="noStrike">
+                <a:solidFill>
+                  <a:srgbClr val="6b6e85"/>
+                </a:solidFill>
+                <a:latin typeface="Microsoft JhengHei"/>
+                <a:ea typeface="Microsoft JhengHei"/>
+              </a:rPr>
+              <a:t>2026-07-24 </a:t>
+            </a:r>
+            <a:r>
+              <a:rPr b="0" lang="zh-CN" sz="1350" spc="-1" strike="noStrike">
+                <a:solidFill>
+                  <a:srgbClr val="6b6e85"/>
+                </a:solidFill>
+                <a:latin typeface="Microsoft JhengHei"/>
+                <a:ea typeface="Microsoft JhengHei"/>
+              </a:rPr>
+              <a:t>實測；模型行為可能隨版本改變）。</a:t>
             </a:r>
             <a:endParaRPr b="0" lang="en-US" sz="1350" spc="-1" strike="noStrike">
               <a:solidFill>
@@ -10649,7 +11366,7 @@
       </p:grpSpPr>
       <p:sp>
         <p:nvSpPr>
-          <p:cNvPr id="61" name="Shape 0"/>
+          <p:cNvPr id="72" name="Shape 0"/>
           <p:cNvSpPr/>
           <p:nvPr/>
         </p:nvSpPr>
@@ -10690,7 +11407,7 @@
       </p:sp>
       <p:sp>
         <p:nvSpPr>
-          <p:cNvPr id="62" name="Shape 1"/>
+          <p:cNvPr id="73" name="Shape 1"/>
           <p:cNvSpPr/>
           <p:nvPr/>
         </p:nvSpPr>
@@ -10731,7 +11448,7 @@
       </p:sp>
       <p:sp>
         <p:nvSpPr>
-          <p:cNvPr id="63" name="Text 2"/>
+          <p:cNvPr id="74" name="Text 2"/>
           <p:cNvSpPr/>
           <p:nvPr/>
         </p:nvSpPr>
@@ -10788,7 +11505,7 @@
       </p:sp>
       <p:sp>
         <p:nvSpPr>
-          <p:cNvPr id="64" name="Shape 3"/>
+          <p:cNvPr id="75" name="Shape 3"/>
           <p:cNvSpPr/>
           <p:nvPr/>
         </p:nvSpPr>
@@ -10829,7 +11546,7 @@
       </p:sp>
       <p:sp>
         <p:nvSpPr>
-          <p:cNvPr id="65" name="Text 4"/>
+          <p:cNvPr id="76" name="Text 4"/>
           <p:cNvSpPr/>
           <p:nvPr/>
         </p:nvSpPr>
@@ -10886,7 +11603,7 @@
       </p:sp>
       <p:sp>
         <p:nvSpPr>
-          <p:cNvPr id="66" name="Text 5"/>
+          <p:cNvPr id="77" name="Text 5"/>
           <p:cNvSpPr/>
           <p:nvPr/>
         </p:nvSpPr>
@@ -10943,7 +11660,7 @@
       </p:sp>
       <p:sp>
         <p:nvSpPr>
-          <p:cNvPr id="67" name="Shape 6"/>
+          <p:cNvPr id="78" name="Shape 6"/>
           <p:cNvSpPr/>
           <p:nvPr/>
         </p:nvSpPr>
@@ -10984,7 +11701,7 @@
       </p:sp>
       <p:sp>
         <p:nvSpPr>
-          <p:cNvPr id="68" name="Text 7"/>
+          <p:cNvPr id="79" name="Text 7"/>
           <p:cNvSpPr/>
           <p:nvPr/>
         </p:nvSpPr>
@@ -11041,7 +11758,7 @@
       </p:sp>
       <p:sp>
         <p:nvSpPr>
-          <p:cNvPr id="69" name="Text 8"/>
+          <p:cNvPr id="80" name="Text 8"/>
           <p:cNvSpPr/>
           <p:nvPr/>
         </p:nvSpPr>
@@ -11118,7 +11835,7 @@
       </p:sp>
       <p:sp>
         <p:nvSpPr>
-          <p:cNvPr id="70" name="Shape 9"/>
+          <p:cNvPr id="81" name="Shape 9"/>
           <p:cNvSpPr/>
           <p:nvPr/>
         </p:nvSpPr>
@@ -11159,7 +11876,7 @@
       </p:sp>
       <p:sp>
         <p:nvSpPr>
-          <p:cNvPr id="71" name="Text 10"/>
+          <p:cNvPr id="82" name="Text 10"/>
           <p:cNvSpPr/>
           <p:nvPr/>
         </p:nvSpPr>
@@ -11216,7 +11933,7 @@
       </p:sp>
       <p:sp>
         <p:nvSpPr>
-          <p:cNvPr id="72" name="Text 11"/>
+          <p:cNvPr id="83" name="Text 11"/>
           <p:cNvSpPr/>
           <p:nvPr/>
         </p:nvSpPr>
@@ -11260,7 +11977,7 @@
                 <a:latin typeface="Microsoft JhengHei"/>
                 <a:ea typeface="Microsoft JhengHei"/>
               </a:rPr>
-              <a:t>分析文件、文件問答與來源引用</a:t>
+              <a:t>切換公司核准的模型</a:t>
             </a:r>
             <a:endParaRPr b="0" lang="en-US" sz="1900" spc="-1" strike="noStrike">
               <a:solidFill>
@@ -11273,7 +11990,7 @@
       </p:sp>
       <p:sp>
         <p:nvSpPr>
-          <p:cNvPr id="73" name="Shape 12"/>
+          <p:cNvPr id="84" name="Shape 12"/>
           <p:cNvSpPr/>
           <p:nvPr/>
         </p:nvSpPr>
@@ -11314,7 +12031,7 @@
       </p:sp>
       <p:sp>
         <p:nvSpPr>
-          <p:cNvPr id="74" name="Text 13"/>
+          <p:cNvPr id="85" name="Text 13"/>
           <p:cNvSpPr/>
           <p:nvPr/>
         </p:nvSpPr>
@@ -11371,13 +12088,168 @@
       </p:sp>
       <p:sp>
         <p:nvSpPr>
-          <p:cNvPr id="75" name="Text 14"/>
+          <p:cNvPr id="86" name="Text 14"/>
           <p:cNvSpPr/>
           <p:nvPr/>
         </p:nvSpPr>
         <p:spPr>
           <a:xfrm>
             <a:off x="1490400" y="4160520"/>
+            <a:ext cx="9920880" cy="548280"/>
+          </a:xfrm>
+          <a:prstGeom prst="rect">
+            <a:avLst/>
+          </a:prstGeom>
+          <a:noFill/>
+          <a:ln w="0">
+            <a:noFill/>
+          </a:ln>
+        </p:spPr>
+        <p:style>
+          <a:lnRef idx="0"/>
+          <a:fillRef idx="0"/>
+          <a:effectRef idx="0"/>
+          <a:fontRef idx="minor"/>
+        </p:style>
+        <p:txBody>
+          <a:bodyPr lIns="0" rIns="0" tIns="0" bIns="0" anchor="ctr">
+            <a:noAutofit/>
+          </a:bodyPr>
+          <a:p>
+            <a:pPr defTabSz="914400">
+              <a:lnSpc>
+                <a:spcPct val="100000"/>
+              </a:lnSpc>
+              <a:tabLst>
+                <a:tab algn="l" pos="0"/>
+              </a:tabLst>
+            </a:pPr>
+            <a:r>
+              <a:rPr b="0" lang="zh-CN" sz="1900" spc="-1" strike="noStrike">
+                <a:solidFill>
+                  <a:srgbClr val="1e1f35"/>
+                </a:solidFill>
+                <a:latin typeface="Microsoft JhengHei"/>
+                <a:ea typeface="Microsoft JhengHei"/>
+              </a:rPr>
+              <a:t>分析文件、文件問答與來源引用</a:t>
+            </a:r>
+            <a:endParaRPr b="0" lang="en-US" sz="1900" spc="-1" strike="noStrike">
+              <a:solidFill>
+                <a:srgbClr val="000000"/>
+              </a:solidFill>
+              <a:latin typeface="Arial"/>
+            </a:endParaRPr>
+          </a:p>
+        </p:txBody>
+      </p:sp>
+      <p:sp>
+        <p:nvSpPr>
+          <p:cNvPr id="87" name="Shape 15"/>
+          <p:cNvSpPr/>
+          <p:nvPr/>
+        </p:nvSpPr>
+        <p:spPr>
+          <a:xfrm>
+            <a:off x="868680" y="5056560"/>
+            <a:ext cx="420120" cy="420120"/>
+          </a:xfrm>
+          <a:prstGeom prst="ellipse">
+            <a:avLst/>
+          </a:prstGeom>
+          <a:solidFill>
+            <a:srgbClr val="5b4fe8"/>
+          </a:solidFill>
+          <a:ln w="0">
+            <a:noFill/>
+          </a:ln>
+        </p:spPr>
+        <p:style>
+          <a:lnRef idx="0"/>
+          <a:fillRef idx="0"/>
+          <a:effectRef idx="0"/>
+          <a:fontRef idx="minor"/>
+        </p:style>
+        <p:txBody>
+          <a:bodyPr lIns="90000" rIns="90000" tIns="45000" bIns="45000" anchor="t">
+            <a:noAutofit/>
+          </a:bodyPr>
+          <a:p>
+            <a:endParaRPr b="0" lang="en-US" sz="1800" spc="-1" strike="noStrike">
+              <a:solidFill>
+                <a:srgbClr val="ffffff"/>
+              </a:solidFill>
+              <a:latin typeface="Arial"/>
+            </a:endParaRPr>
+          </a:p>
+        </p:txBody>
+      </p:sp>
+      <p:sp>
+        <p:nvSpPr>
+          <p:cNvPr id="88" name="Text 16"/>
+          <p:cNvSpPr/>
+          <p:nvPr/>
+        </p:nvSpPr>
+        <p:spPr>
+          <a:xfrm>
+            <a:off x="868680" y="5056560"/>
+            <a:ext cx="420120" cy="420120"/>
+          </a:xfrm>
+          <a:prstGeom prst="rect">
+            <a:avLst/>
+          </a:prstGeom>
+          <a:noFill/>
+          <a:ln w="0">
+            <a:noFill/>
+          </a:ln>
+        </p:spPr>
+        <p:style>
+          <a:lnRef idx="0"/>
+          <a:fillRef idx="0"/>
+          <a:effectRef idx="0"/>
+          <a:fontRef idx="minor"/>
+        </p:style>
+        <p:txBody>
+          <a:bodyPr lIns="0" rIns="0" tIns="0" bIns="0" anchor="ctr">
+            <a:noAutofit/>
+          </a:bodyPr>
+          <a:p>
+            <a:pPr algn="ctr" defTabSz="914400">
+              <a:lnSpc>
+                <a:spcPct val="100000"/>
+              </a:lnSpc>
+              <a:tabLst>
+                <a:tab algn="l" pos="0"/>
+              </a:tabLst>
+            </a:pPr>
+            <a:r>
+              <a:rPr b="1" lang="en-US" sz="1700" spc="-1" strike="noStrike">
+                <a:solidFill>
+                  <a:srgbClr val="ffffff"/>
+                </a:solidFill>
+                <a:latin typeface="Microsoft JhengHei"/>
+                <a:ea typeface="Microsoft JhengHei"/>
+              </a:rPr>
+              <a:t>5</a:t>
+            </a:r>
+            <a:endParaRPr b="0" lang="en-US" sz="1700" spc="-1" strike="noStrike">
+              <a:solidFill>
+                <a:srgbClr val="000000"/>
+              </a:solidFill>
+              <a:latin typeface="Arial"/>
+            </a:endParaRPr>
+          </a:p>
+        </p:txBody>
+      </p:sp>
+      <p:sp>
+        <p:nvSpPr>
+          <p:cNvPr id="89" name="Text 17"/>
+          <p:cNvSpPr/>
+          <p:nvPr/>
+        </p:nvSpPr>
+        <p:spPr>
+          <a:xfrm>
+            <a:off x="1490400" y="5001840"/>
             <a:ext cx="9920880" cy="548280"/>
           </a:xfrm>
           <a:prstGeom prst="rect">
@@ -11485,7 +12357,7 @@
       </p:grpSpPr>
       <p:sp>
         <p:nvSpPr>
-          <p:cNvPr id="76" name="Shape 0"/>
+          <p:cNvPr id="90" name="Shape 0"/>
           <p:cNvSpPr/>
           <p:nvPr/>
         </p:nvSpPr>
@@ -11526,7 +12398,7 @@
       </p:sp>
       <p:sp>
         <p:nvSpPr>
-          <p:cNvPr id="77" name="Shape 1"/>
+          <p:cNvPr id="91" name="Shape 1"/>
           <p:cNvSpPr/>
           <p:nvPr/>
         </p:nvSpPr>
@@ -11567,7 +12439,7 @@
       </p:sp>
       <p:sp>
         <p:nvSpPr>
-          <p:cNvPr id="78" name="Text 2"/>
+          <p:cNvPr id="92" name="Text 2"/>
           <p:cNvSpPr/>
           <p:nvPr/>
         </p:nvSpPr>
@@ -11624,7 +12496,7 @@
       </p:sp>
       <p:sp>
         <p:nvSpPr>
-          <p:cNvPr id="79" name="Text 3"/>
+          <p:cNvPr id="93" name="Text 3"/>
           <p:cNvSpPr/>
           <p:nvPr/>
         </p:nvSpPr>
@@ -11681,7 +12553,7 @@
       </p:sp>
       <p:sp>
         <p:nvSpPr>
-          <p:cNvPr id="80" name="Shape 4"/>
+          <p:cNvPr id="94" name="Shape 4"/>
           <p:cNvSpPr/>
           <p:nvPr/>
         </p:nvSpPr>
@@ -11722,7 +12594,7 @@
       </p:sp>
       <p:sp>
         <p:nvSpPr>
-          <p:cNvPr id="81" name="Text 5"/>
+          <p:cNvPr id="95" name="Text 5"/>
           <p:cNvSpPr/>
           <p:nvPr/>
         </p:nvSpPr>
@@ -11779,7 +12651,7 @@
       </p:sp>
       <p:sp>
         <p:nvSpPr>
-          <p:cNvPr id="82" name="Text 6"/>
+          <p:cNvPr id="96" name="Text 6"/>
           <p:cNvSpPr/>
           <p:nvPr/>
         </p:nvSpPr>
@@ -11836,7 +12708,7 @@
       </p:sp>
       <p:sp>
         <p:nvSpPr>
-          <p:cNvPr id="83" name="Shape 7"/>
+          <p:cNvPr id="97" name="Shape 7"/>
           <p:cNvSpPr/>
           <p:nvPr/>
         </p:nvSpPr>
@@ -11877,7 +12749,7 @@
       </p:sp>
       <p:sp>
         <p:nvSpPr>
-          <p:cNvPr id="84" name="Text 8"/>
+          <p:cNvPr id="98" name="Text 8"/>
           <p:cNvSpPr/>
           <p:nvPr/>
         </p:nvSpPr>
@@ -11934,7 +12806,7 @@
       </p:sp>
       <p:sp>
         <p:nvSpPr>
-          <p:cNvPr id="85" name="Text 9"/>
+          <p:cNvPr id="99" name="Text 9"/>
           <p:cNvSpPr/>
           <p:nvPr/>
         </p:nvSpPr>
@@ -12011,7 +12883,7 @@
       </p:sp>
       <p:sp>
         <p:nvSpPr>
-          <p:cNvPr id="86" name="Shape 10"/>
+          <p:cNvPr id="100" name="Shape 10"/>
           <p:cNvSpPr/>
           <p:nvPr/>
         </p:nvSpPr>
@@ -12052,7 +12924,7 @@
       </p:sp>
       <p:sp>
         <p:nvSpPr>
-          <p:cNvPr id="87" name="Text 11"/>
+          <p:cNvPr id="101" name="Text 11"/>
           <p:cNvSpPr/>
           <p:nvPr/>
         </p:nvSpPr>
@@ -12109,7 +12981,7 @@
       </p:sp>
       <p:sp>
         <p:nvSpPr>
-          <p:cNvPr id="88" name="Text 12"/>
+          <p:cNvPr id="102" name="Text 12"/>
           <p:cNvSpPr/>
           <p:nvPr/>
         </p:nvSpPr>
@@ -12166,7 +13038,7 @@
       </p:sp>
       <p:sp>
         <p:nvSpPr>
-          <p:cNvPr id="89" name="Shape 13"/>
+          <p:cNvPr id="103" name="Shape 13"/>
           <p:cNvSpPr/>
           <p:nvPr/>
         </p:nvSpPr>
@@ -12207,7 +13079,7 @@
       </p:sp>
       <p:sp>
         <p:nvSpPr>
-          <p:cNvPr id="90" name="Text 14"/>
+          <p:cNvPr id="104" name="Text 14"/>
           <p:cNvSpPr/>
           <p:nvPr/>
         </p:nvSpPr>
@@ -12301,7 +13173,7 @@
       </p:grpSpPr>
       <p:sp>
         <p:nvSpPr>
-          <p:cNvPr id="91" name="Shape 0"/>
+          <p:cNvPr id="105" name="Shape 0"/>
           <p:cNvSpPr/>
           <p:nvPr/>
         </p:nvSpPr>
@@ -12342,7 +13214,7 @@
       </p:sp>
       <p:sp>
         <p:nvSpPr>
-          <p:cNvPr id="92" name="Shape 1"/>
+          <p:cNvPr id="106" name="Shape 1"/>
           <p:cNvSpPr/>
           <p:nvPr/>
         </p:nvSpPr>
@@ -12383,7 +13255,7 @@
       </p:sp>
       <p:sp>
         <p:nvSpPr>
-          <p:cNvPr id="93" name="Text 2"/>
+          <p:cNvPr id="107" name="Text 2"/>
           <p:cNvSpPr/>
           <p:nvPr/>
         </p:nvSpPr>
@@ -12440,7 +13312,7 @@
       </p:sp>
       <p:sp>
         <p:nvSpPr>
-          <p:cNvPr id="94" name="Text 3"/>
+          <p:cNvPr id="108" name="Text 3"/>
           <p:cNvSpPr/>
           <p:nvPr/>
         </p:nvSpPr>
@@ -12497,7 +13369,7 @@
       </p:sp>
       <p:sp>
         <p:nvSpPr>
-          <p:cNvPr id="95" name="Shape 4"/>
+          <p:cNvPr id="109" name="Shape 4"/>
           <p:cNvSpPr/>
           <p:nvPr/>
         </p:nvSpPr>
@@ -12541,7 +13413,7 @@
       </p:sp>
       <p:sp>
         <p:nvSpPr>
-          <p:cNvPr id="96" name="Shape 5"/>
+          <p:cNvPr id="110" name="Shape 5"/>
           <p:cNvSpPr/>
           <p:nvPr/>
         </p:nvSpPr>
@@ -12582,7 +13454,7 @@
       </p:sp>
       <p:sp>
         <p:nvSpPr>
-          <p:cNvPr id="97" name="Text 6"/>
+          <p:cNvPr id="111" name="Text 6"/>
           <p:cNvSpPr/>
           <p:nvPr/>
         </p:nvSpPr>
@@ -12639,7 +13511,7 @@
       </p:sp>
       <p:sp>
         <p:nvSpPr>
-          <p:cNvPr id="98" name="Text 7"/>
+          <p:cNvPr id="112" name="Text 7"/>
           <p:cNvSpPr/>
           <p:nvPr/>
         </p:nvSpPr>
@@ -12754,7 +13626,7 @@
       </p:sp>
       <p:sp>
         <p:nvSpPr>
-          <p:cNvPr id="99" name="Shape 8"/>
+          <p:cNvPr id="113" name="Shape 8"/>
           <p:cNvSpPr/>
           <p:nvPr/>
         </p:nvSpPr>
@@ -12795,7 +13667,7 @@
       </p:sp>
       <p:sp>
         <p:nvSpPr>
-          <p:cNvPr id="100" name="Text 9"/>
+          <p:cNvPr id="114" name="Text 9"/>
           <p:cNvSpPr/>
           <p:nvPr/>
         </p:nvSpPr>
@@ -12909,7 +13781,7 @@
       </p:grpSpPr>
       <p:sp>
         <p:nvSpPr>
-          <p:cNvPr id="101" name="Shape 0"/>
+          <p:cNvPr id="115" name="Shape 0"/>
           <p:cNvSpPr/>
           <p:nvPr/>
         </p:nvSpPr>
@@ -12950,7 +13822,7 @@
       </p:sp>
       <p:sp>
         <p:nvSpPr>
-          <p:cNvPr id="102" name="Shape 1"/>
+          <p:cNvPr id="116" name="Shape 1"/>
           <p:cNvSpPr/>
           <p:nvPr/>
         </p:nvSpPr>
@@ -12991,7 +13863,7 @@
       </p:sp>
       <p:sp>
         <p:nvSpPr>
-          <p:cNvPr id="103" name="Text 2"/>
+          <p:cNvPr id="117" name="Text 2"/>
           <p:cNvSpPr/>
           <p:nvPr/>
         </p:nvSpPr>
@@ -13068,7 +13940,7 @@
       </p:sp>
       <p:sp>
         <p:nvSpPr>
-          <p:cNvPr id="104" name="Text 3"/>
+          <p:cNvPr id="118" name="Text 3"/>
           <p:cNvSpPr/>
           <p:nvPr/>
         </p:nvSpPr>
@@ -13125,7 +13997,7 @@
       </p:sp>
       <p:sp>
         <p:nvSpPr>
-          <p:cNvPr id="105" name="Shape 4"/>
+          <p:cNvPr id="119" name="Shape 4"/>
           <p:cNvSpPr/>
           <p:nvPr/>
         </p:nvSpPr>
@@ -13166,7 +14038,7 @@
       </p:sp>
       <p:sp>
         <p:nvSpPr>
-          <p:cNvPr id="106" name="Text 5"/>
+          <p:cNvPr id="120" name="Text 5"/>
           <p:cNvSpPr/>
           <p:nvPr/>
         </p:nvSpPr>
@@ -13223,7 +14095,7 @@
       </p:sp>
       <p:sp>
         <p:nvSpPr>
-          <p:cNvPr id="107" name="Text 6"/>
+          <p:cNvPr id="121" name="Text 6"/>
           <p:cNvSpPr/>
           <p:nvPr/>
         </p:nvSpPr>
@@ -13280,7 +14152,7 @@
       </p:sp>
       <p:sp>
         <p:nvSpPr>
-          <p:cNvPr id="108" name="Shape 7"/>
+          <p:cNvPr id="122" name="Shape 7"/>
           <p:cNvSpPr/>
           <p:nvPr/>
         </p:nvSpPr>
@@ -13321,7 +14193,7 @@
       </p:sp>
       <p:sp>
         <p:nvSpPr>
-          <p:cNvPr id="109" name="Text 8"/>
+          <p:cNvPr id="123" name="Text 8"/>
           <p:cNvSpPr/>
           <p:nvPr/>
         </p:nvSpPr>
@@ -13378,7 +14250,7 @@
       </p:sp>
       <p:sp>
         <p:nvSpPr>
-          <p:cNvPr id="110" name="Text 9"/>
+          <p:cNvPr id="124" name="Text 9"/>
           <p:cNvSpPr/>
           <p:nvPr/>
         </p:nvSpPr>
@@ -13455,7 +14327,7 @@
       </p:sp>
       <p:sp>
         <p:nvSpPr>
-          <p:cNvPr id="111" name="Shape 10"/>
+          <p:cNvPr id="125" name="Shape 10"/>
           <p:cNvSpPr/>
           <p:nvPr/>
         </p:nvSpPr>
@@ -13496,7 +14368,7 @@
       </p:sp>
       <p:sp>
         <p:nvSpPr>
-          <p:cNvPr id="112" name="Text 11"/>
+          <p:cNvPr id="126" name="Text 11"/>
           <p:cNvSpPr/>
           <p:nvPr/>
         </p:nvSpPr>
@@ -13553,7 +14425,7 @@
       </p:sp>
       <p:sp>
         <p:nvSpPr>
-          <p:cNvPr id="113" name="Text 12"/>
+          <p:cNvPr id="127" name="Text 12"/>
           <p:cNvSpPr/>
           <p:nvPr/>
         </p:nvSpPr>
@@ -13610,7 +14482,7 @@
       </p:sp>
       <p:sp>
         <p:nvSpPr>
-          <p:cNvPr id="114" name="Shape 13"/>
+          <p:cNvPr id="128" name="Shape 13"/>
           <p:cNvSpPr/>
           <p:nvPr/>
         </p:nvSpPr>
@@ -13654,7 +14526,7 @@
       </p:sp>
       <p:sp>
         <p:nvSpPr>
-          <p:cNvPr id="115" name="Shape 14"/>
+          <p:cNvPr id="129" name="Shape 14"/>
           <p:cNvSpPr/>
           <p:nvPr/>
         </p:nvSpPr>
@@ -13695,7 +14567,7 @@
       </p:sp>
       <p:sp>
         <p:nvSpPr>
-          <p:cNvPr id="116" name="Text 15"/>
+          <p:cNvPr id="130" name="Text 15"/>
           <p:cNvSpPr/>
           <p:nvPr/>
         </p:nvSpPr>
@@ -13752,7 +14624,7 @@
       </p:sp>
       <p:sp>
         <p:nvSpPr>
-          <p:cNvPr id="117" name="Text 16"/>
+          <p:cNvPr id="131" name="Text 16"/>
           <p:cNvSpPr/>
           <p:nvPr/>
         </p:nvSpPr>
@@ -13889,7 +14761,7 @@
       </p:sp>
       <p:sp>
         <p:nvSpPr>
-          <p:cNvPr id="118" name="Shape 17"/>
+          <p:cNvPr id="132" name="Shape 17"/>
           <p:cNvSpPr/>
           <p:nvPr/>
         </p:nvSpPr>
@@ -13930,7 +14802,7 @@
       </p:sp>
       <p:sp>
         <p:nvSpPr>
-          <p:cNvPr id="119" name="Text 18"/>
+          <p:cNvPr id="133" name="Text 18"/>
           <p:cNvSpPr/>
           <p:nvPr/>
         </p:nvSpPr>
@@ -14024,7 +14896,7 @@
       </p:grpSpPr>
       <p:sp>
         <p:nvSpPr>
-          <p:cNvPr id="120" name="Shape 0"/>
+          <p:cNvPr id="134" name="Shape 0"/>
           <p:cNvSpPr/>
           <p:nvPr/>
         </p:nvSpPr>
@@ -14065,7 +14937,7 @@
       </p:sp>
       <p:sp>
         <p:nvSpPr>
-          <p:cNvPr id="121" name="Shape 1"/>
+          <p:cNvPr id="135" name="Shape 1"/>
           <p:cNvSpPr/>
           <p:nvPr/>
         </p:nvSpPr>
@@ -14106,7 +14978,7 @@
       </p:sp>
       <p:sp>
         <p:nvSpPr>
-          <p:cNvPr id="122" name="Text 2"/>
+          <p:cNvPr id="136" name="Text 2"/>
           <p:cNvSpPr/>
           <p:nvPr/>
         </p:nvSpPr>
@@ -14163,7 +15035,7 @@
       </p:sp>
       <p:sp>
         <p:nvSpPr>
-          <p:cNvPr id="123" name="Text 3"/>
+          <p:cNvPr id="137" name="Text 3"/>
           <p:cNvSpPr/>
           <p:nvPr/>
         </p:nvSpPr>
@@ -14220,7 +15092,7 @@
       </p:sp>
       <p:sp>
         <p:nvSpPr>
-          <p:cNvPr id="124" name="Shape 4"/>
+          <p:cNvPr id="138" name="Shape 4"/>
           <p:cNvSpPr/>
           <p:nvPr/>
         </p:nvSpPr>
@@ -14261,7 +15133,7 @@
       </p:sp>
       <p:sp>
         <p:nvSpPr>
-          <p:cNvPr id="125" name="Text 5"/>
+          <p:cNvPr id="139" name="Text 5"/>
           <p:cNvSpPr/>
           <p:nvPr/>
         </p:nvSpPr>
@@ -14318,7 +15190,7 @@
       </p:sp>
       <p:sp>
         <p:nvSpPr>
-          <p:cNvPr id="126" name="Text 6"/>
+          <p:cNvPr id="140" name="Text 6"/>
           <p:cNvSpPr/>
           <p:nvPr/>
         </p:nvSpPr>
@@ -14375,7 +15247,7 @@
       </p:sp>
       <p:sp>
         <p:nvSpPr>
-          <p:cNvPr id="127" name="Shape 7"/>
+          <p:cNvPr id="141" name="Shape 7"/>
           <p:cNvSpPr/>
           <p:nvPr/>
         </p:nvSpPr>
@@ -14416,7 +15288,7 @@
       </p:sp>
       <p:sp>
         <p:nvSpPr>
-          <p:cNvPr id="128" name="Text 8"/>
+          <p:cNvPr id="142" name="Text 8"/>
           <p:cNvSpPr/>
           <p:nvPr/>
         </p:nvSpPr>
@@ -14473,7 +15345,7 @@
       </p:sp>
       <p:sp>
         <p:nvSpPr>
-          <p:cNvPr id="129" name="Text 9"/>
+          <p:cNvPr id="143" name="Text 9"/>
           <p:cNvSpPr/>
           <p:nvPr/>
         </p:nvSpPr>
@@ -14610,7 +15482,7 @@
       </p:sp>
       <p:sp>
         <p:nvSpPr>
-          <p:cNvPr id="130" name="Shape 10"/>
+          <p:cNvPr id="144" name="Shape 10"/>
           <p:cNvSpPr/>
           <p:nvPr/>
         </p:nvSpPr>
@@ -14651,7 +15523,7 @@
       </p:sp>
       <p:sp>
         <p:nvSpPr>
-          <p:cNvPr id="131" name="Text 11"/>
+          <p:cNvPr id="145" name="Text 11"/>
           <p:cNvSpPr/>
           <p:nvPr/>
         </p:nvSpPr>
@@ -14708,7 +15580,7 @@
       </p:sp>
       <p:sp>
         <p:nvSpPr>
-          <p:cNvPr id="132" name="Text 12"/>
+          <p:cNvPr id="146" name="Text 12"/>
           <p:cNvSpPr/>
           <p:nvPr/>
         </p:nvSpPr>
@@ -14785,7 +15657,7 @@
       </p:sp>
       <p:sp>
         <p:nvSpPr>
-          <p:cNvPr id="133" name="Shape 13"/>
+          <p:cNvPr id="147" name="Shape 13"/>
           <p:cNvSpPr/>
           <p:nvPr/>
         </p:nvSpPr>
@@ -14826,7 +15698,7 @@
       </p:sp>
       <p:sp>
         <p:nvSpPr>
-          <p:cNvPr id="134" name="Text 14"/>
+          <p:cNvPr id="148" name="Text 14"/>
           <p:cNvSpPr/>
           <p:nvPr/>
         </p:nvSpPr>
@@ -14883,7 +15755,7 @@
       </p:sp>
       <p:sp>
         <p:nvSpPr>
-          <p:cNvPr id="135" name="Text 15"/>
+          <p:cNvPr id="149" name="Text 15"/>
           <p:cNvSpPr/>
           <p:nvPr/>
         </p:nvSpPr>
@@ -14940,7 +15812,7 @@
       </p:sp>
       <p:sp>
         <p:nvSpPr>
-          <p:cNvPr id="136" name="Shape 16"/>
+          <p:cNvPr id="150" name="Shape 16"/>
           <p:cNvSpPr/>
           <p:nvPr/>
         </p:nvSpPr>
@@ -14981,7 +15853,7 @@
       </p:sp>
       <p:sp>
         <p:nvSpPr>
-          <p:cNvPr id="137" name="Text 17"/>
+          <p:cNvPr id="151" name="Text 17"/>
           <p:cNvSpPr/>
           <p:nvPr/>
         </p:nvSpPr>
@@ -15038,7 +15910,7 @@
       </p:sp>
       <p:sp>
         <p:nvSpPr>
-          <p:cNvPr id="138" name="Shape 18"/>
+          <p:cNvPr id="152" name="Shape 18"/>
           <p:cNvSpPr/>
           <p:nvPr/>
         </p:nvSpPr>
@@ -15079,7 +15951,7 @@
       </p:sp>
       <p:sp>
         <p:nvSpPr>
-          <p:cNvPr id="139" name="Text 19"/>
+          <p:cNvPr id="153" name="Text 19"/>
           <p:cNvSpPr/>
           <p:nvPr/>
         </p:nvSpPr>
